--- a/嵌入式学习资料/STM32/大三下课堂课件/第三章 STM32最小系统.pptx
+++ b/嵌入式学习资料/STM32/大三下课堂课件/第三章 STM32最小系统.pptx
@@ -6,28 +6,27 @@
     <p:sldMasterId id="2147483662" r:id="rId2"/>
   </p:sldMasterIdLst>
   <p:notesMasterIdLst>
-    <p:notesMasterId r:id="rId22"/>
+    <p:notesMasterId r:id="rId21"/>
   </p:notesMasterIdLst>
   <p:sldIdLst>
     <p:sldId id="256" r:id="rId3"/>
     <p:sldId id="400" r:id="rId4"/>
     <p:sldId id="432" r:id="rId5"/>
     <p:sldId id="401" r:id="rId6"/>
-    <p:sldId id="433" r:id="rId7"/>
-    <p:sldId id="434" r:id="rId8"/>
-    <p:sldId id="435" r:id="rId9"/>
-    <p:sldId id="437" r:id="rId10"/>
-    <p:sldId id="402" r:id="rId11"/>
-    <p:sldId id="436" r:id="rId12"/>
-    <p:sldId id="405" r:id="rId13"/>
-    <p:sldId id="406" r:id="rId14"/>
-    <p:sldId id="407" r:id="rId15"/>
-    <p:sldId id="415" r:id="rId16"/>
-    <p:sldId id="431" r:id="rId17"/>
-    <p:sldId id="408" r:id="rId18"/>
-    <p:sldId id="409" r:id="rId19"/>
-    <p:sldId id="410" r:id="rId20"/>
-    <p:sldId id="411" r:id="rId21"/>
+    <p:sldId id="434" r:id="rId7"/>
+    <p:sldId id="435" r:id="rId8"/>
+    <p:sldId id="437" r:id="rId9"/>
+    <p:sldId id="402" r:id="rId10"/>
+    <p:sldId id="436" r:id="rId11"/>
+    <p:sldId id="405" r:id="rId12"/>
+    <p:sldId id="406" r:id="rId13"/>
+    <p:sldId id="407" r:id="rId14"/>
+    <p:sldId id="415" r:id="rId15"/>
+    <p:sldId id="431" r:id="rId16"/>
+    <p:sldId id="408" r:id="rId17"/>
+    <p:sldId id="409" r:id="rId18"/>
+    <p:sldId id="410" r:id="rId19"/>
+    <p:sldId id="411" r:id="rId20"/>
   </p:sldIdLst>
   <p:sldSz cx="12192000" cy="6858000"/>
   <p:notesSz cx="7104063" cy="10234613"/>
@@ -128,7 +127,7 @@
   </p:defaultTextStyle>
   <p:extLst>
     <p:ext uri="{EFAFB233-063F-42B5-8137-9DF3F51BA10A}">
-      <p15:sldGuideLst xmlns="" xmlns:p15="http://schemas.microsoft.com/office/powerpoint/2012/main">
+      <p15:sldGuideLst xmlns:p15="http://schemas.microsoft.com/office/powerpoint/2012/main">
         <p15:guide id="1" orient="horz" pos="2107">
           <p15:clr>
             <a:srgbClr val="A4A3A4"/>
@@ -234,7 +233,7 @@
             <a:fld id="{6887AC20-8C1D-44D7-B35A-E6F76E68648C}" type="datetimeFigureOut">
               <a:rPr lang="zh-CN" altLang="en-US" smtClean="0"/>
               <a:pPr/>
-              <a:t>2020/10/18</a:t>
+              <a:t>2026/5/27</a:t>
             </a:fld>
             <a:endParaRPr lang="zh-CN" altLang="en-US"/>
           </a:p>
@@ -540,7 +539,7 @@
             <a:fld id="{82F288E0-7875-42C4-84C8-98DBBD3BF4D2}" type="datetimeFigureOut">
               <a:rPr lang="zh-CN" altLang="en-US" smtClean="0"/>
               <a:pPr/>
-              <a:t>2020/10/18</a:t>
+              <a:t>2026/5/27</a:t>
             </a:fld>
             <a:endParaRPr lang="zh-CN" altLang="en-US"/>
           </a:p>
@@ -676,7 +675,7 @@
             <a:fld id="{82F288E0-7875-42C4-84C8-98DBBD3BF4D2}" type="datetimeFigureOut">
               <a:rPr lang="zh-CN" altLang="en-US" smtClean="0"/>
               <a:pPr/>
-              <a:t>2020/10/18</a:t>
+              <a:t>2026/5/27</a:t>
             </a:fld>
             <a:endParaRPr lang="zh-CN" altLang="en-US"/>
           </a:p>
@@ -925,7 +924,7 @@
             <a:fld id="{82F288E0-7875-42C4-84C8-98DBBD3BF4D2}" type="datetimeFigureOut">
               <a:rPr lang="zh-CN" altLang="en-US" smtClean="0"/>
               <a:pPr/>
-              <a:t>2020/10/18</a:t>
+              <a:t>2026/5/27</a:t>
             </a:fld>
             <a:endParaRPr lang="zh-CN" altLang="en-US"/>
           </a:p>
@@ -1100,7 +1099,7 @@
             <a:fld id="{82F288E0-7875-42C4-84C8-98DBBD3BF4D2}" type="datetimeFigureOut">
               <a:rPr lang="zh-CN" altLang="en-US" smtClean="0"/>
               <a:pPr/>
-              <a:t>2020/10/18</a:t>
+              <a:t>2026/5/27</a:t>
             </a:fld>
             <a:endParaRPr lang="zh-CN" altLang="en-US"/>
           </a:p>
@@ -1248,7 +1247,7 @@
             <a:fld id="{82F288E0-7875-42C4-84C8-98DBBD3BF4D2}" type="datetimeFigureOut">
               <a:rPr lang="zh-CN" altLang="en-US" smtClean="0"/>
               <a:pPr/>
-              <a:t>2020/10/18</a:t>
+              <a:t>2026/5/27</a:t>
             </a:fld>
             <a:endParaRPr lang="zh-CN" altLang="en-US"/>
           </a:p>
@@ -1348,7 +1347,7 @@
             <a:fld id="{0E6A473D-8055-43E1-A01D-B0413067B7D8}" type="datetimeFigureOut">
               <a:rPr lang="zh-CN" altLang="en-US" smtClean="0"/>
               <a:pPr/>
-              <a:t>2020/10/18</a:t>
+              <a:t>2026/5/27</a:t>
             </a:fld>
             <a:endParaRPr lang="zh-CN" altLang="en-US"/>
           </a:p>
@@ -2580,7 +2579,7 @@
           <a:blip r:embed="rId2" cstate="print">
             <a:extLst>
               <a:ext uri="{28A0092B-C50C-407E-A947-70E740481C1C}">
-                <a14:useLocalDpi xmlns="" xmlns:a14="http://schemas.microsoft.com/office/drawing/2010/main" val="0"/>
+                <a14:useLocalDpi xmlns:a14="http://schemas.microsoft.com/office/drawing/2010/main" val="0"/>
               </a:ext>
             </a:extLst>
           </a:blip>
@@ -2771,7 +2770,7 @@
             <a:blip r:embed="rId3">
               <a:extLst>
                 <a:ext uri="{28A0092B-C50C-407E-A947-70E740481C1C}">
-                  <a14:useLocalDpi xmlns="" xmlns:a14="http://schemas.microsoft.com/office/drawing/2010/main" val="0"/>
+                  <a14:useLocalDpi xmlns:a14="http://schemas.microsoft.com/office/drawing/2010/main" val="0"/>
                 </a:ext>
               </a:extLst>
             </a:blip>
@@ -3174,7 +3173,7 @@
             <a:fld id="{DB75B134-9E54-4233-9AD4-A661A84126CB}" type="datetimeFigureOut">
               <a:rPr lang="zh-CN" altLang="en-US" smtClean="0"/>
               <a:pPr/>
-              <a:t>2020/10/18</a:t>
+              <a:t>2026/5/27</a:t>
             </a:fld>
             <a:endParaRPr lang="zh-CN" altLang="en-US"/>
           </a:p>
@@ -3274,7 +3273,7 @@
             <a:fld id="{82F288E0-7875-42C4-84C8-98DBBD3BF4D2}" type="datetimeFigureOut">
               <a:rPr lang="zh-CN" altLang="en-US" smtClean="0"/>
               <a:pPr/>
-              <a:t>2020/10/18</a:t>
+              <a:t>2026/5/27</a:t>
             </a:fld>
             <a:endParaRPr lang="zh-CN" altLang="en-US"/>
           </a:p>
@@ -3614,7 +3613,7 @@
             <a:fld id="{82F288E0-7875-42C4-84C8-98DBBD3BF4D2}" type="datetimeFigureOut">
               <a:rPr lang="zh-CN" altLang="en-US" smtClean="0"/>
               <a:pPr/>
-              <a:t>2020/10/18</a:t>
+              <a:t>2026/5/27</a:t>
             </a:fld>
             <a:endParaRPr lang="zh-CN" altLang="en-US"/>
           </a:p>
@@ -3801,7 +3800,7 @@
             <a:fld id="{82F288E0-7875-42C4-84C8-98DBBD3BF4D2}" type="datetimeFigureOut">
               <a:rPr lang="zh-CN" altLang="en-US" smtClean="0"/>
               <a:pPr/>
-              <a:t>2020/10/18</a:t>
+              <a:t>2026/5/27</a:t>
             </a:fld>
             <a:endParaRPr lang="zh-CN" altLang="en-US"/>
           </a:p>
@@ -3966,7 +3965,7 @@
             <a:fld id="{82F288E0-7875-42C4-84C8-98DBBD3BF4D2}" type="datetimeFigureOut">
               <a:rPr lang="zh-CN" altLang="en-US" smtClean="0"/>
               <a:pPr/>
-              <a:t>2020/10/18</a:t>
+              <a:t>2026/5/27</a:t>
             </a:fld>
             <a:endParaRPr lang="zh-CN" altLang="en-US"/>
           </a:p>
@@ -4208,7 +4207,7 @@
             <a:fld id="{82F288E0-7875-42C4-84C8-98DBBD3BF4D2}" type="datetimeFigureOut">
               <a:rPr lang="zh-CN" altLang="en-US" smtClean="0"/>
               <a:pPr/>
-              <a:t>2020/10/18</a:t>
+              <a:t>2026/5/27</a:t>
             </a:fld>
             <a:endParaRPr lang="zh-CN" altLang="en-US"/>
           </a:p>
@@ -4434,7 +4433,7 @@
             <a:fld id="{82F288E0-7875-42C4-84C8-98DBBD3BF4D2}" type="datetimeFigureOut">
               <a:rPr lang="zh-CN" altLang="en-US" smtClean="0"/>
               <a:pPr/>
-              <a:t>2020/10/18</a:t>
+              <a:t>2026/5/27</a:t>
             </a:fld>
             <a:endParaRPr lang="zh-CN" altLang="en-US"/>
           </a:p>
@@ -4795,7 +4794,7 @@
             <a:fld id="{82F288E0-7875-42C4-84C8-98DBBD3BF4D2}" type="datetimeFigureOut">
               <a:rPr lang="zh-CN" altLang="en-US" smtClean="0"/>
               <a:pPr/>
-              <a:t>2020/10/18</a:t>
+              <a:t>2026/5/27</a:t>
             </a:fld>
             <a:endParaRPr lang="zh-CN" altLang="en-US"/>
           </a:p>
@@ -4909,7 +4908,7 @@
             <a:fld id="{82F288E0-7875-42C4-84C8-98DBBD3BF4D2}" type="datetimeFigureOut">
               <a:rPr lang="zh-CN" altLang="en-US" smtClean="0"/>
               <a:pPr/>
-              <a:t>2020/10/18</a:t>
+              <a:t>2026/5/27</a:t>
             </a:fld>
             <a:endParaRPr lang="zh-CN" altLang="en-US"/>
           </a:p>
@@ -5117,7 +5116,7 @@
             <a:fld id="{82F288E0-7875-42C4-84C8-98DBBD3BF4D2}" type="datetimeFigureOut">
               <a:rPr lang="zh-CN" altLang="en-US" smtClean="0"/>
               <a:pPr/>
-              <a:t>2020/10/18</a:t>
+              <a:t>2026/5/27</a:t>
             </a:fld>
             <a:endParaRPr lang="zh-CN" altLang="en-US"/>
           </a:p>
@@ -5656,7 +5655,7 @@
             <a:fld id="{0E6A473D-8055-43E1-A01D-B0413067B7D8}" type="datetimeFigureOut">
               <a:rPr lang="zh-CN" altLang="en-US" smtClean="0"/>
               <a:pPr/>
-              <a:t>2020/10/18</a:t>
+              <a:t>2026/5/27</a:t>
             </a:fld>
             <a:endParaRPr lang="zh-CN" altLang="en-US"/>
           </a:p>
@@ -6113,49 +6112,36 @@
               <a:defRPr/>
             </a:pPr>
             <a:r>
-              <a:rPr lang="zh-CN" altLang="en-US" sz="6000" dirty="0" smtClean="0">
+              <a:rPr lang="zh-CN" altLang="en-US" sz="6000" dirty="0">
                 <a:solidFill>
                   <a:schemeClr val="tx1"/>
                 </a:solidFill>
               </a:rPr>
               <a:t>第三章</a:t>
             </a:r>
-            <a:r>
-              <a:rPr lang="en-US" altLang="zh-CN" sz="6000" dirty="0" smtClean="0">
+            <a:br>
+              <a:rPr lang="en-US" altLang="zh-CN" sz="6000" dirty="0">
                 <a:solidFill>
                   <a:schemeClr val="tx1"/>
                 </a:solidFill>
               </a:rPr>
-              <a:t/>
-            </a:r>
-            <a:br>
-              <a:rPr lang="en-US" altLang="zh-CN" sz="6000" dirty="0" smtClean="0">
+            </a:br>
+            <a:r>
+              <a:rPr lang="en-US" altLang="zh-CN" sz="6000" dirty="0">
                 <a:solidFill>
                   <a:schemeClr val="tx1"/>
                 </a:solidFill>
               </a:rPr>
-            </a:br>
-            <a:r>
-              <a:rPr lang="en-US" altLang="zh-CN" sz="6000" dirty="0" smtClean="0">
+              <a:t>STM32</a:t>
+            </a:r>
+            <a:r>
+              <a:rPr lang="zh-CN" altLang="en-US" sz="6000" dirty="0">
                 <a:solidFill>
                   <a:schemeClr val="tx1"/>
                 </a:solidFill>
               </a:rPr>
-              <a:t>STM32</a:t>
-            </a:r>
-            <a:r>
-              <a:rPr lang="zh-CN" altLang="en-US" sz="6000" dirty="0" smtClean="0">
-                <a:solidFill>
-                  <a:schemeClr val="tx1"/>
-                </a:solidFill>
-              </a:rPr>
               <a:t>最小系统</a:t>
             </a:r>
-            <a:endParaRPr lang="zh-CN" altLang="en-US" sz="6000" dirty="0">
-              <a:solidFill>
-                <a:schemeClr val="tx1"/>
-              </a:solidFill>
-            </a:endParaRPr>
           </a:p>
         </p:txBody>
       </p:sp>
@@ -6195,7 +6181,7 @@
           <a:blip r:embed="rId3" cstate="print">
             <a:extLst>
               <a:ext uri="{BEBA8EAE-BF5A-486C-A8C5-ECC9F3942E4B}">
-                <a14:imgProps xmlns="" xmlns:a14="http://schemas.microsoft.com/office/drawing/2010/main">
+                <a14:imgProps xmlns:a14="http://schemas.microsoft.com/office/drawing/2010/main">
                   <a14:imgLayer r:embed="rId4">
                     <a14:imgEffect>
                       <a14:saturation sat="173000"/>
@@ -6204,7 +6190,7 @@
                 </a14:imgProps>
               </a:ext>
               <a:ext uri="{28A0092B-C50C-407E-A947-70E740481C1C}">
-                <a14:useLocalDpi xmlns="" xmlns:a14="http://schemas.microsoft.com/office/drawing/2010/main" val="0"/>
+                <a14:useLocalDpi xmlns:a14="http://schemas.microsoft.com/office/drawing/2010/main" val="0"/>
               </a:ext>
             </a:extLst>
           </a:blip>
@@ -6223,7 +6209,7 @@
           <a:noFill/>
           <a:extLst>
             <a:ext uri="{909E8E84-426E-40DD-AFC4-6F175D3DCCD1}">
-              <a14:hiddenFill xmlns="" xmlns:a14="http://schemas.microsoft.com/office/drawing/2010/main">
+              <a14:hiddenFill xmlns:a14="http://schemas.microsoft.com/office/drawing/2010/main">
                 <a:solidFill>
                   <a:srgbClr val="FFFFFF"/>
                 </a:solidFill>
@@ -6446,245 +6432,6 @@
       </p:grpSpPr>
       <p:sp>
         <p:nvSpPr>
-          <p:cNvPr id="147457" name="Rectangle 1"/>
-          <p:cNvSpPr>
-            <a:spLocks noChangeArrowheads="1"/>
-          </p:cNvSpPr>
-          <p:nvPr/>
-        </p:nvSpPr>
-        <p:spPr bwMode="auto">
-          <a:xfrm>
-            <a:off x="485190" y="599565"/>
-            <a:ext cx="10636900" cy="5670606"/>
-          </a:xfrm>
-          <a:prstGeom prst="rect">
-            <a:avLst/>
-          </a:prstGeom>
-          <a:noFill/>
-          <a:ln w="9525">
-            <a:noFill/>
-            <a:miter lim="800000"/>
-            <a:headEnd/>
-            <a:tailEnd/>
-          </a:ln>
-          <a:effectLst/>
-        </p:spPr>
-        <p:txBody>
-          <a:bodyPr vert="horz" wrap="square" lIns="91440" tIns="45720" rIns="91440" bIns="45720" numCol="1" anchor="ctr" anchorCtr="0" compatLnSpc="1">
-            <a:prstTxWarp prst="textNoShape">
-              <a:avLst/>
-            </a:prstTxWarp>
-            <a:spAutoFit/>
-          </a:bodyPr>
-          <a:lstStyle/>
-          <a:p>
-            <a:pPr>
-              <a:lnSpc>
-                <a:spcPct val="150000"/>
-              </a:lnSpc>
-            </a:pPr>
-            <a:r>
-              <a:rPr lang="en-US" altLang="zh-CN" sz="2000" dirty="0" smtClean="0"/>
-              <a:t>STM32</a:t>
-            </a:r>
-            <a:r>
-              <a:rPr lang="zh-CN" altLang="en-US" sz="2000" dirty="0" smtClean="0"/>
-              <a:t>时钟系统主要的目的就是</a:t>
-            </a:r>
-            <a:r>
-              <a:rPr lang="zh-CN" altLang="en-US" sz="2000" b="1" dirty="0" smtClean="0">
-                <a:solidFill>
-                  <a:srgbClr val="FF0000"/>
-                </a:solidFill>
-              </a:rPr>
-              <a:t>给相对独立的外设模块提供时钟</a:t>
-            </a:r>
-            <a:r>
-              <a:rPr lang="zh-CN" altLang="en-US" sz="2000" dirty="0" smtClean="0"/>
-              <a:t>，也是为了</a:t>
-            </a:r>
-            <a:r>
-              <a:rPr lang="zh-CN" altLang="en-US" sz="2000" b="1" dirty="0" smtClean="0"/>
-              <a:t>降低整个芯片的耗能</a:t>
-            </a:r>
-            <a:r>
-              <a:rPr lang="zh-CN" altLang="en-US" sz="2000" dirty="0" smtClean="0"/>
-              <a:t>。</a:t>
-            </a:r>
-          </a:p>
-          <a:p>
-            <a:pPr>
-              <a:lnSpc>
-                <a:spcPct val="150000"/>
-              </a:lnSpc>
-            </a:pPr>
-            <a:r>
-              <a:rPr lang="zh-CN" altLang="en-US" sz="2000" dirty="0" smtClean="0"/>
-              <a:t>系统时钟，是处理器运行时间基准（每一条机器指令一个时钟周期）</a:t>
-            </a:r>
-          </a:p>
-          <a:p>
-            <a:pPr>
-              <a:lnSpc>
-                <a:spcPct val="150000"/>
-              </a:lnSpc>
-            </a:pPr>
-            <a:r>
-              <a:rPr lang="zh-CN" altLang="en-US" sz="2000" b="1" dirty="0" smtClean="0"/>
-              <a:t>时钟是单片机运行的基础，时钟信号推动单片机内各个部分执行相应的指令。</a:t>
-            </a:r>
-            <a:endParaRPr lang="zh-CN" altLang="en-US" sz="2000" dirty="0" smtClean="0"/>
-          </a:p>
-          <a:p>
-            <a:pPr>
-              <a:lnSpc>
-                <a:spcPct val="150000"/>
-              </a:lnSpc>
-            </a:pPr>
-            <a:r>
-              <a:rPr lang="zh-CN" altLang="en-US" sz="2000" b="1" dirty="0" smtClean="0"/>
-              <a:t>一个单片机内提供多个不同的系统时钟，可以适应更多的应用场合。</a:t>
-            </a:r>
-            <a:endParaRPr lang="zh-CN" altLang="en-US" sz="2000" dirty="0" smtClean="0"/>
-          </a:p>
-          <a:p>
-            <a:pPr>
-              <a:lnSpc>
-                <a:spcPct val="150000"/>
-              </a:lnSpc>
-            </a:pPr>
-            <a:r>
-              <a:rPr lang="zh-CN" altLang="en-US" sz="2000" b="1" dirty="0" smtClean="0"/>
-              <a:t>不同的功能模块会有不同的时钟上限，因此提供不同的时钟，也能在一个单片机内放置更多的功能模块。</a:t>
-            </a:r>
-            <a:br>
-              <a:rPr lang="zh-CN" altLang="en-US" sz="2000" b="1" dirty="0" smtClean="0"/>
-            </a:br>
-            <a:r>
-              <a:rPr lang="zh-CN" altLang="en-US" sz="2000" b="1" dirty="0" smtClean="0"/>
-              <a:t>对不同模块的时钟增加开启和关闭功能，可以降低单片机的功耗</a:t>
-            </a:r>
-            <a:endParaRPr lang="zh-CN" altLang="en-US" sz="2000" dirty="0" smtClean="0"/>
-          </a:p>
-          <a:p>
-            <a:pPr>
-              <a:lnSpc>
-                <a:spcPct val="150000"/>
-              </a:lnSpc>
-            </a:pPr>
-            <a:r>
-              <a:rPr lang="en-US" altLang="zh-CN" sz="2000" dirty="0" smtClean="0"/>
-              <a:t>STM32</a:t>
-            </a:r>
-            <a:r>
-              <a:rPr lang="zh-CN" altLang="en-US" sz="2000" dirty="0" smtClean="0"/>
-              <a:t>为了低功耗，</a:t>
-            </a:r>
-            <a:r>
-              <a:rPr lang="zh-CN" altLang="en-US" sz="2000" b="1" dirty="0" smtClean="0">
-                <a:solidFill>
-                  <a:srgbClr val="FF0000"/>
-                </a:solidFill>
-              </a:rPr>
-              <a:t>他将所有的外设时钟都设置为</a:t>
-            </a:r>
-            <a:r>
-              <a:rPr lang="en-US" altLang="zh-CN" sz="2000" b="1" dirty="0" smtClean="0">
-                <a:solidFill>
-                  <a:srgbClr val="FF0000"/>
-                </a:solidFill>
-              </a:rPr>
-              <a:t>disable(</a:t>
-            </a:r>
-            <a:r>
-              <a:rPr lang="zh-CN" altLang="en-US" sz="2000" b="1" dirty="0" smtClean="0">
-                <a:solidFill>
-                  <a:srgbClr val="FF0000"/>
-                </a:solidFill>
-              </a:rPr>
-              <a:t>不使能</a:t>
-            </a:r>
-            <a:r>
-              <a:rPr lang="en-US" altLang="zh-CN" sz="2000" b="1" dirty="0" smtClean="0">
-                <a:solidFill>
-                  <a:srgbClr val="FF0000"/>
-                </a:solidFill>
-              </a:rPr>
-              <a:t>)</a:t>
-            </a:r>
-            <a:r>
-              <a:rPr lang="zh-CN" altLang="en-US" sz="2000" dirty="0" smtClean="0"/>
-              <a:t>，用到什么外设，只要打开对应外设的时钟就可以， 其他的没用到的可以还是</a:t>
-            </a:r>
-            <a:r>
-              <a:rPr lang="en-US" altLang="zh-CN" sz="2000" dirty="0" smtClean="0"/>
-              <a:t>disable(</a:t>
-            </a:r>
-            <a:r>
-              <a:rPr lang="zh-CN" altLang="en-US" sz="2000" dirty="0" smtClean="0"/>
-              <a:t>不使能</a:t>
-            </a:r>
-            <a:r>
-              <a:rPr lang="en-US" altLang="zh-CN" sz="2000" dirty="0" smtClean="0"/>
-              <a:t>)</a:t>
-            </a:r>
-            <a:r>
-              <a:rPr lang="zh-CN" altLang="en-US" sz="2000" dirty="0" smtClean="0"/>
-              <a:t>，这样耗能就会减少。  这就是为什么</a:t>
-            </a:r>
-            <a:r>
-              <a:rPr lang="zh-CN" altLang="en-US" sz="2000" b="1" dirty="0" smtClean="0"/>
-              <a:t>不管你配置什么功能都需要先打开对应的时钟</a:t>
-            </a:r>
-            <a:r>
-              <a:rPr lang="zh-CN" altLang="en-US" sz="2000" dirty="0" smtClean="0"/>
-              <a:t>的原因</a:t>
-            </a:r>
-          </a:p>
-          <a:p>
-            <a:pPr>
-              <a:lnSpc>
-                <a:spcPct val="150000"/>
-              </a:lnSpc>
-            </a:pPr>
-            <a:endParaRPr lang="zh-CN" altLang="en-US" sz="2000" dirty="0"/>
-          </a:p>
-        </p:txBody>
-      </p:sp>
-    </p:spTree>
-  </p:cSld>
-  <p:clrMapOvr>
-    <a:masterClrMapping/>
-  </p:clrMapOvr>
-  <p:timing>
-    <p:tnLst>
-      <p:par>
-        <p:cTn id="1" dur="indefinite" restart="never" nodeType="tmRoot"/>
-      </p:par>
-    </p:tnLst>
-  </p:timing>
-</p:sld>
-</file>
-
-<file path=ppt/slides/slide11.xml><?xml version="1.0" encoding="utf-8"?>
-<p:sld xmlns:a="http://schemas.openxmlformats.org/drawingml/2006/main" xmlns:r="http://schemas.openxmlformats.org/officeDocument/2006/relationships" xmlns:p="http://schemas.openxmlformats.org/presentationml/2006/main">
-  <p:cSld>
-    <p:spTree>
-      <p:nvGrpSpPr>
-        <p:cNvPr id="1" name=""/>
-        <p:cNvGrpSpPr/>
-        <p:nvPr/>
-      </p:nvGrpSpPr>
-      <p:grpSpPr>
-        <a:xfrm>
-          <a:off x="0" y="0"/>
-          <a:ext cx="0" cy="0"/>
-          <a:chOff x="0" y="0"/>
-          <a:chExt cx="0" cy="0"/>
-        </a:xfrm>
-      </p:grpSpPr>
-      <p:sp>
-        <p:nvSpPr>
           <p:cNvPr id="4" name="矩形 3"/>
           <p:cNvSpPr/>
           <p:nvPr/>
@@ -6710,7 +6457,7 @@
               </a:lnSpc>
             </a:pPr>
             <a:r>
-              <a:rPr lang="en-US" altLang="zh-CN" sz="2000" b="1" dirty="0" smtClean="0">
+              <a:rPr lang="en-US" altLang="zh-CN" sz="2000" b="1" dirty="0">
                 <a:solidFill>
                   <a:srgbClr val="FF0000"/>
                 </a:solidFill>
@@ -6718,7 +6465,7 @@
               <a:t>STM32 </a:t>
             </a:r>
             <a:r>
-              <a:rPr lang="zh-CN" altLang="en-US" sz="2000" b="1" dirty="0" smtClean="0">
+              <a:rPr lang="zh-CN" altLang="en-US" sz="2000" b="1" dirty="0">
                 <a:solidFill>
                   <a:srgbClr val="FF0000"/>
                 </a:solidFill>
@@ -6726,7 +6473,7 @@
               <a:t>有</a:t>
             </a:r>
             <a:r>
-              <a:rPr lang="en-US" altLang="zh-CN" sz="2000" b="1" dirty="0" smtClean="0">
+              <a:rPr lang="en-US" altLang="zh-CN" sz="2000" b="1" dirty="0">
                 <a:solidFill>
                   <a:srgbClr val="FF0000"/>
                 </a:solidFill>
@@ -6734,7 +6481,7 @@
               <a:t>4</a:t>
             </a:r>
             <a:r>
-              <a:rPr lang="zh-CN" altLang="en-US" sz="2000" b="1" dirty="0" smtClean="0">
+              <a:rPr lang="zh-CN" altLang="en-US" sz="2000" b="1" dirty="0">
                 <a:solidFill>
                   <a:srgbClr val="FF0000"/>
                 </a:solidFill>
@@ -6742,7 +6489,7 @@
               <a:t>个独立时钟源</a:t>
             </a:r>
             <a:r>
-              <a:rPr lang="en-US" altLang="zh-CN" sz="2000" b="1" dirty="0" smtClean="0">
+              <a:rPr lang="en-US" altLang="zh-CN" sz="2000" b="1" dirty="0">
                 <a:solidFill>
                   <a:srgbClr val="FF0000"/>
                 </a:solidFill>
@@ -6750,7 +6497,7 @@
               <a:t>:HSI</a:t>
             </a:r>
             <a:r>
-              <a:rPr lang="zh-CN" altLang="en-US" sz="2000" b="1" dirty="0" smtClean="0">
+              <a:rPr lang="zh-CN" altLang="en-US" sz="2000" b="1" dirty="0">
                 <a:solidFill>
                   <a:srgbClr val="FF0000"/>
                 </a:solidFill>
@@ -6758,7 +6505,7 @@
               <a:t>、</a:t>
             </a:r>
             <a:r>
-              <a:rPr lang="en-US" altLang="zh-CN" sz="2000" b="1" dirty="0" smtClean="0">
+              <a:rPr lang="en-US" altLang="zh-CN" sz="2000" b="1" dirty="0">
                 <a:solidFill>
                   <a:srgbClr val="FF0000"/>
                 </a:solidFill>
@@ -6766,7 +6513,7 @@
               <a:t>HSE</a:t>
             </a:r>
             <a:r>
-              <a:rPr lang="zh-CN" altLang="en-US" sz="2000" b="1" dirty="0" smtClean="0">
+              <a:rPr lang="zh-CN" altLang="en-US" sz="2000" b="1" dirty="0">
                 <a:solidFill>
                   <a:srgbClr val="FF0000"/>
                 </a:solidFill>
@@ -6774,7 +6521,7 @@
               <a:t>、</a:t>
             </a:r>
             <a:r>
-              <a:rPr lang="en-US" altLang="zh-CN" sz="2000" b="1" dirty="0" smtClean="0">
+              <a:rPr lang="en-US" altLang="zh-CN" sz="2000" b="1" dirty="0">
                 <a:solidFill>
                   <a:srgbClr val="FF0000"/>
                 </a:solidFill>
@@ -6782,7 +6529,7 @@
               <a:t>LSI</a:t>
             </a:r>
             <a:r>
-              <a:rPr lang="zh-CN" altLang="en-US" sz="2000" b="1" dirty="0" smtClean="0">
+              <a:rPr lang="zh-CN" altLang="en-US" sz="2000" b="1" dirty="0">
                 <a:solidFill>
                   <a:srgbClr val="FF0000"/>
                 </a:solidFill>
@@ -6790,7 +6537,7 @@
               <a:t>、</a:t>
             </a:r>
             <a:r>
-              <a:rPr lang="en-US" altLang="zh-CN" sz="2000" b="1" dirty="0" smtClean="0">
+              <a:rPr lang="en-US" altLang="zh-CN" sz="2000" b="1" dirty="0">
                 <a:solidFill>
                   <a:srgbClr val="FF0000"/>
                 </a:solidFill>
@@ -6798,134 +6545,130 @@
               <a:t>LSE</a:t>
             </a:r>
             <a:r>
-              <a:rPr lang="zh-CN" altLang="en-US" sz="2000" b="1" dirty="0" smtClean="0">
+              <a:rPr lang="zh-CN" altLang="en-US" sz="2000" b="1" dirty="0">
                 <a:solidFill>
                   <a:srgbClr val="FF0000"/>
                 </a:solidFill>
               </a:rPr>
               <a:t>。</a:t>
             </a:r>
-            <a:r>
-              <a:rPr lang="zh-CN" altLang="en-US" sz="2000" dirty="0" smtClean="0"/>
-              <a:t/>
-            </a:r>
             <a:br>
-              <a:rPr lang="zh-CN" altLang="en-US" sz="2000" dirty="0" smtClean="0"/>
+              <a:rPr lang="zh-CN" altLang="en-US" sz="2000" dirty="0"/>
             </a:br>
             <a:r>
-              <a:rPr lang="zh-CN" altLang="en-US" sz="2000" dirty="0" smtClean="0"/>
+              <a:rPr lang="zh-CN" altLang="en-US" sz="2000" dirty="0"/>
               <a:t>①、</a:t>
             </a:r>
             <a:r>
-              <a:rPr lang="en-US" altLang="zh-CN" sz="2000" dirty="0" smtClean="0"/>
+              <a:rPr lang="en-US" altLang="zh-CN" sz="2000" dirty="0"/>
               <a:t>HSI</a:t>
             </a:r>
             <a:r>
-              <a:rPr lang="zh-CN" altLang="en-US" sz="2000" dirty="0" smtClean="0"/>
+              <a:rPr lang="zh-CN" altLang="en-US" sz="2000" dirty="0"/>
               <a:t>是高速内部时钟，</a:t>
             </a:r>
             <a:r>
-              <a:rPr lang="en-US" altLang="zh-CN" sz="2000" dirty="0" smtClean="0"/>
+              <a:rPr lang="en-US" altLang="zh-CN" sz="2000" dirty="0"/>
               <a:t>RC</a:t>
             </a:r>
             <a:r>
-              <a:rPr lang="zh-CN" altLang="en-US" sz="2000" dirty="0" smtClean="0"/>
+              <a:rPr lang="zh-CN" altLang="en-US" sz="2000" dirty="0"/>
               <a:t>振荡器，频率为</a:t>
             </a:r>
             <a:r>
-              <a:rPr lang="en-US" altLang="zh-CN" sz="2000" dirty="0" smtClean="0"/>
+              <a:rPr lang="en-US" altLang="zh-CN" sz="2000" dirty="0"/>
               <a:t>8MHz</a:t>
             </a:r>
             <a:r>
-              <a:rPr lang="zh-CN" altLang="en-US" sz="2000" dirty="0" smtClean="0"/>
+              <a:rPr lang="zh-CN" altLang="en-US" sz="2000" dirty="0"/>
               <a:t>，精度不高。</a:t>
             </a:r>
             <a:br>
-              <a:rPr lang="zh-CN" altLang="en-US" sz="2000" dirty="0" smtClean="0"/>
+              <a:rPr lang="zh-CN" altLang="en-US" sz="2000" dirty="0"/>
             </a:br>
             <a:r>
-              <a:rPr lang="zh-CN" altLang="en-US" sz="2000" dirty="0" smtClean="0"/>
+              <a:rPr lang="zh-CN" altLang="en-US" sz="2000" dirty="0"/>
               <a:t>②、</a:t>
             </a:r>
             <a:r>
-              <a:rPr lang="en-US" altLang="zh-CN" sz="2000" dirty="0" smtClean="0"/>
+              <a:rPr lang="en-US" altLang="zh-CN" sz="2000" dirty="0"/>
               <a:t>HSE</a:t>
             </a:r>
             <a:r>
-              <a:rPr lang="zh-CN" altLang="en-US" sz="2000" dirty="0" smtClean="0"/>
+              <a:rPr lang="zh-CN" altLang="en-US" sz="2000" dirty="0"/>
               <a:t>是高速外部时钟，可接石英</a:t>
             </a:r>
             <a:r>
-              <a:rPr lang="en-US" altLang="zh-CN" sz="2000" dirty="0" smtClean="0"/>
+              <a:rPr lang="en-US" altLang="zh-CN" sz="2000" dirty="0"/>
               <a:t>/</a:t>
             </a:r>
             <a:r>
-              <a:rPr lang="zh-CN" altLang="en-US" sz="2000" dirty="0" smtClean="0"/>
+              <a:rPr lang="zh-CN" altLang="en-US" sz="2000" dirty="0"/>
               <a:t>陶瓷谐振器，或者接外部时钟源，频率范围为</a:t>
             </a:r>
             <a:r>
-              <a:rPr lang="en-US" altLang="zh-CN" sz="2000" b="1" dirty="0" smtClean="0"/>
+              <a:rPr lang="en-US" altLang="zh-CN" sz="2000" b="1" dirty="0"/>
               <a:t>4MHz~16MHz</a:t>
             </a:r>
             <a:r>
-              <a:rPr lang="zh-CN" altLang="en-US" sz="2000" dirty="0" smtClean="0"/>
+              <a:rPr lang="zh-CN" altLang="en-US" sz="2000" dirty="0"/>
               <a:t>。</a:t>
             </a:r>
             <a:br>
-              <a:rPr lang="zh-CN" altLang="en-US" sz="2000" dirty="0" smtClean="0"/>
+              <a:rPr lang="zh-CN" altLang="en-US" sz="2000" dirty="0"/>
             </a:br>
             <a:r>
-              <a:rPr lang="zh-CN" altLang="en-US" sz="2000" dirty="0" smtClean="0"/>
+              <a:rPr lang="zh-CN" altLang="en-US" sz="2000" dirty="0"/>
               <a:t>③、</a:t>
             </a:r>
             <a:r>
-              <a:rPr lang="en-US" altLang="zh-CN" sz="2000" dirty="0" smtClean="0"/>
+              <a:rPr lang="en-US" altLang="zh-CN" sz="2000" dirty="0"/>
               <a:t>LSI</a:t>
             </a:r>
             <a:r>
-              <a:rPr lang="zh-CN" altLang="en-US" sz="2000" dirty="0" smtClean="0"/>
+              <a:rPr lang="zh-CN" altLang="en-US" sz="2000" dirty="0"/>
               <a:t>是低速内部时钟，</a:t>
             </a:r>
             <a:r>
-              <a:rPr lang="en-US" altLang="zh-CN" sz="2000" dirty="0" smtClean="0"/>
+              <a:rPr lang="en-US" altLang="zh-CN" sz="2000" dirty="0"/>
               <a:t>RC</a:t>
             </a:r>
             <a:r>
-              <a:rPr lang="zh-CN" altLang="en-US" sz="2000" dirty="0" smtClean="0"/>
+              <a:rPr lang="zh-CN" altLang="en-US" sz="2000" dirty="0"/>
               <a:t>振荡器，频率为</a:t>
             </a:r>
             <a:r>
-              <a:rPr lang="en-US" altLang="zh-CN" sz="2000" dirty="0" smtClean="0"/>
+              <a:rPr lang="en-US" altLang="zh-CN" sz="2000" dirty="0"/>
               <a:t>40kHz</a:t>
             </a:r>
             <a:r>
-              <a:rPr lang="zh-CN" altLang="en-US" sz="2000" dirty="0" smtClean="0"/>
+              <a:rPr lang="zh-CN" altLang="en-US" sz="2000" dirty="0"/>
               <a:t>，提供低功耗时钟。　 </a:t>
             </a:r>
             <a:br>
-              <a:rPr lang="zh-CN" altLang="en-US" sz="2000" dirty="0" smtClean="0"/>
+              <a:rPr lang="zh-CN" altLang="en-US" sz="2000" dirty="0"/>
             </a:br>
             <a:r>
-              <a:rPr lang="zh-CN" altLang="en-US" sz="2000" dirty="0" smtClean="0"/>
+              <a:rPr lang="zh-CN" altLang="en-US" sz="2000" dirty="0"/>
               <a:t>④、</a:t>
             </a:r>
             <a:r>
-              <a:rPr lang="en-US" altLang="zh-CN" sz="2000" dirty="0" smtClean="0"/>
+              <a:rPr lang="en-US" altLang="zh-CN" sz="2000" dirty="0"/>
               <a:t>LSE</a:t>
             </a:r>
             <a:r>
-              <a:rPr lang="zh-CN" altLang="en-US" sz="2000" dirty="0" smtClean="0"/>
+              <a:rPr lang="zh-CN" altLang="en-US" sz="2000" dirty="0"/>
               <a:t>是低速外部时钟，接频率为</a:t>
             </a:r>
             <a:r>
-              <a:rPr lang="en-US" altLang="zh-CN" sz="2000" dirty="0" smtClean="0"/>
+              <a:rPr lang="en-US" altLang="zh-CN" sz="2000" dirty="0"/>
               <a:t>32.768kHz</a:t>
             </a:r>
             <a:r>
-              <a:rPr lang="zh-CN" altLang="en-US" sz="2000" dirty="0" smtClean="0"/>
+              <a:rPr lang="zh-CN" altLang="en-US" sz="2000" dirty="0"/>
               <a:t>的石英晶体。</a:t>
             </a:r>
-            <a:endParaRPr lang="en-US" altLang="zh-CN" sz="2000" dirty="0" smtClean="0"/>
+            <a:endParaRPr lang="en-US" altLang="zh-CN" sz="2000" dirty="0"/>
           </a:p>
           <a:p>
             <a:pPr>
@@ -6934,50 +6677,50 @@
               </a:lnSpc>
             </a:pPr>
             <a:r>
-              <a:rPr lang="zh-CN" altLang="en-US" sz="2000" b="1" dirty="0" smtClean="0"/>
+              <a:rPr lang="zh-CN" altLang="en-US" sz="2000" b="1" dirty="0"/>
               <a:t>其中</a:t>
             </a:r>
             <a:r>
-              <a:rPr lang="en-US" altLang="zh-CN" sz="2000" b="1" dirty="0" smtClean="0"/>
+              <a:rPr lang="en-US" altLang="zh-CN" sz="2000" b="1" dirty="0"/>
               <a:t>LSI</a:t>
             </a:r>
             <a:r>
-              <a:rPr lang="zh-CN" altLang="en-US" sz="2000" b="1" dirty="0" smtClean="0"/>
+              <a:rPr lang="zh-CN" altLang="en-US" sz="2000" b="1" dirty="0"/>
               <a:t>是作为</a:t>
             </a:r>
             <a:r>
-              <a:rPr lang="en-US" altLang="zh-CN" sz="2000" b="1" dirty="0" smtClean="0"/>
+              <a:rPr lang="en-US" altLang="zh-CN" sz="2000" b="1" dirty="0"/>
               <a:t>IWDGCLK(</a:t>
             </a:r>
             <a:r>
-              <a:rPr lang="zh-CN" altLang="en-US" sz="2000" b="1" dirty="0" smtClean="0"/>
+              <a:rPr lang="zh-CN" altLang="en-US" sz="2000" b="1" dirty="0"/>
               <a:t>独立看门狗</a:t>
             </a:r>
             <a:r>
-              <a:rPr lang="en-US" altLang="zh-CN" sz="2000" b="1" dirty="0" smtClean="0"/>
+              <a:rPr lang="en-US" altLang="zh-CN" sz="2000" b="1" dirty="0"/>
               <a:t>)</a:t>
             </a:r>
             <a:r>
-              <a:rPr lang="zh-CN" altLang="en-US" sz="2000" b="1" dirty="0" smtClean="0"/>
+              <a:rPr lang="zh-CN" altLang="en-US" sz="2000" b="1" dirty="0"/>
               <a:t>时钟源和</a:t>
             </a:r>
             <a:r>
-              <a:rPr lang="en-US" altLang="zh-CN" sz="2000" b="1" dirty="0" smtClean="0"/>
+              <a:rPr lang="en-US" altLang="zh-CN" sz="2000" b="1" dirty="0"/>
               <a:t>RTC</a:t>
             </a:r>
             <a:r>
-              <a:rPr lang="zh-CN" altLang="en-US" sz="2000" b="1" dirty="0" smtClean="0"/>
+              <a:rPr lang="zh-CN" altLang="en-US" sz="2000" b="1" dirty="0"/>
               <a:t>时钟源</a:t>
             </a:r>
             <a:r>
-              <a:rPr lang="zh-CN" altLang="en-US" sz="2000" dirty="0" smtClean="0"/>
+              <a:rPr lang="zh-CN" altLang="en-US" sz="2000" dirty="0"/>
               <a:t> </a:t>
             </a:r>
             <a:r>
-              <a:rPr lang="zh-CN" altLang="en-US" sz="2000" b="1" dirty="0" smtClean="0"/>
+              <a:rPr lang="zh-CN" altLang="en-US" sz="2000" b="1" dirty="0"/>
               <a:t>而独立使用</a:t>
             </a:r>
-            <a:endParaRPr lang="en-US" altLang="zh-CN" sz="2000" b="1" dirty="0" smtClean="0"/>
+            <a:endParaRPr lang="en-US" altLang="zh-CN" sz="2000" b="1" dirty="0"/>
           </a:p>
           <a:p>
             <a:pPr>
@@ -6986,11 +6729,11 @@
               </a:lnSpc>
             </a:pPr>
             <a:r>
-              <a:rPr lang="zh-CN" altLang="en-US" sz="2000" b="1" dirty="0" smtClean="0"/>
+              <a:rPr lang="zh-CN" altLang="en-US" sz="2000" b="1" dirty="0"/>
               <a:t>而</a:t>
             </a:r>
             <a:r>
-              <a:rPr lang="en-US" altLang="zh-CN" sz="2000" b="1" dirty="0" smtClean="0">
+              <a:rPr lang="en-US" altLang="zh-CN" sz="2000" b="1" dirty="0">
                 <a:solidFill>
                   <a:srgbClr val="FF0000"/>
                 </a:solidFill>
@@ -6998,7 +6741,7 @@
               <a:t>HSI</a:t>
             </a:r>
             <a:r>
-              <a:rPr lang="zh-CN" altLang="en-US" sz="2000" b="1" dirty="0" smtClean="0">
+              <a:rPr lang="zh-CN" altLang="en-US" sz="2000" b="1" dirty="0">
                 <a:solidFill>
                   <a:srgbClr val="FF0000"/>
                 </a:solidFill>
@@ -7006,7 +6749,7 @@
               <a:t>高速内部时钟、</a:t>
             </a:r>
             <a:r>
-              <a:rPr lang="en-US" altLang="zh-CN" sz="2000" b="1" dirty="0" smtClean="0">
+              <a:rPr lang="en-US" altLang="zh-CN" sz="2000" b="1" dirty="0">
                 <a:solidFill>
                   <a:srgbClr val="FF0000"/>
                 </a:solidFill>
@@ -7014,7 +6757,7 @@
               <a:t>HSE</a:t>
             </a:r>
             <a:r>
-              <a:rPr lang="zh-CN" altLang="en-US" sz="2000" b="1" dirty="0" smtClean="0">
+              <a:rPr lang="zh-CN" altLang="en-US" sz="2000" b="1" dirty="0">
                 <a:solidFill>
                   <a:srgbClr val="FF0000"/>
                 </a:solidFill>
@@ -7022,7 +6765,7 @@
               <a:t>高速外部时钟、</a:t>
             </a:r>
             <a:r>
-              <a:rPr lang="en-US" altLang="zh-CN" sz="2000" b="1" dirty="0" smtClean="0">
+              <a:rPr lang="en-US" altLang="zh-CN" sz="2000" b="1" dirty="0">
                 <a:solidFill>
                   <a:srgbClr val="FF0000"/>
                 </a:solidFill>
@@ -7030,14 +6773,14 @@
               <a:t>PLL</a:t>
             </a:r>
             <a:r>
-              <a:rPr lang="zh-CN" altLang="en-US" sz="2000" b="1" dirty="0" smtClean="0">
+              <a:rPr lang="zh-CN" altLang="en-US" sz="2000" b="1" dirty="0">
                 <a:solidFill>
                   <a:srgbClr val="FF0000"/>
                 </a:solidFill>
               </a:rPr>
               <a:t>锁相环时钟这三个经过分频或者倍频作为系统时钟来使用</a:t>
             </a:r>
-            <a:endParaRPr lang="en-US" altLang="zh-CN" sz="2000" b="1" dirty="0" smtClean="0">
+            <a:endParaRPr lang="en-US" altLang="zh-CN" sz="2000" b="1" dirty="0">
               <a:solidFill>
                 <a:srgbClr val="FF0000"/>
               </a:solidFill>
@@ -7050,55 +6793,55 @@
               </a:lnSpc>
             </a:pPr>
             <a:r>
-              <a:rPr lang="en-US" altLang="zh-CN" sz="2000" dirty="0" smtClean="0"/>
+              <a:rPr lang="en-US" altLang="zh-CN" sz="2000" dirty="0"/>
               <a:t>PLL</a:t>
             </a:r>
             <a:r>
-              <a:rPr lang="zh-CN" altLang="en-US" sz="2000" dirty="0" smtClean="0"/>
+              <a:rPr lang="zh-CN" altLang="en-US" sz="2000" dirty="0"/>
               <a:t>为锁相环倍频输出，其时钟输入源可选择为</a:t>
             </a:r>
             <a:r>
-              <a:rPr lang="en-US" altLang="zh-CN" sz="2000" b="1" dirty="0" smtClean="0"/>
+              <a:rPr lang="en-US" altLang="zh-CN" sz="2000" b="1" dirty="0"/>
               <a:t>HSI/2</a:t>
             </a:r>
             <a:r>
-              <a:rPr lang="zh-CN" altLang="en-US" sz="2000" b="1" dirty="0" smtClean="0"/>
+              <a:rPr lang="zh-CN" altLang="en-US" sz="2000" b="1" dirty="0"/>
               <a:t>、</a:t>
             </a:r>
             <a:r>
-              <a:rPr lang="en-US" altLang="zh-CN" sz="2000" b="1" dirty="0" smtClean="0"/>
+              <a:rPr lang="en-US" altLang="zh-CN" sz="2000" b="1" dirty="0"/>
               <a:t>HSE</a:t>
             </a:r>
             <a:r>
-              <a:rPr lang="zh-CN" altLang="en-US" sz="2000" b="1" dirty="0" smtClean="0"/>
+              <a:rPr lang="zh-CN" altLang="en-US" sz="2000" b="1" dirty="0"/>
               <a:t>或者</a:t>
             </a:r>
             <a:r>
-              <a:rPr lang="en-US" altLang="zh-CN" sz="2000" b="1" dirty="0" smtClean="0"/>
+              <a:rPr lang="en-US" altLang="zh-CN" sz="2000" b="1" dirty="0"/>
               <a:t>HSE/2</a:t>
             </a:r>
             <a:r>
-              <a:rPr lang="zh-CN" altLang="en-US" sz="2000" dirty="0" smtClean="0"/>
+              <a:rPr lang="zh-CN" altLang="en-US" sz="2000" dirty="0"/>
               <a:t>。倍频可选择为</a:t>
             </a:r>
             <a:r>
-              <a:rPr lang="en-US" altLang="zh-CN" sz="2000" b="1" dirty="0" smtClean="0"/>
+              <a:rPr lang="en-US" altLang="zh-CN" sz="2000" b="1" dirty="0"/>
               <a:t>2~16</a:t>
             </a:r>
             <a:r>
-              <a:rPr lang="zh-CN" altLang="en-US" sz="2000" dirty="0" smtClean="0"/>
+              <a:rPr lang="zh-CN" altLang="en-US" sz="2000" dirty="0"/>
               <a:t>倍，但是其输出频率最大不得超过</a:t>
             </a:r>
             <a:r>
-              <a:rPr lang="en-US" altLang="zh-CN" sz="2000" dirty="0" smtClean="0"/>
+              <a:rPr lang="en-US" altLang="zh-CN" sz="2000" dirty="0"/>
               <a:t>72MHz</a:t>
             </a:r>
             <a:r>
-              <a:rPr lang="zh-CN" altLang="en-US" sz="2000" dirty="0" smtClean="0"/>
+              <a:rPr lang="zh-CN" altLang="en-US" sz="2000" dirty="0"/>
               <a:t>。  </a:t>
             </a:r>
             <a:r>
-              <a:rPr lang="zh-CN" altLang="en-US" sz="2000" b="1" dirty="0" smtClean="0"/>
+              <a:rPr lang="zh-CN" altLang="en-US" sz="2000" b="1" dirty="0"/>
               <a:t>通过倍频之后作为系统时钟的时钟源</a:t>
             </a:r>
             <a:endParaRPr lang="zh-CN" altLang="en-US" sz="2000" dirty="0"/>
@@ -7110,17 +6853,10 @@
   <p:clrMapOvr>
     <a:masterClrMapping/>
   </p:clrMapOvr>
-  <p:timing>
-    <p:tnLst>
-      <p:par>
-        <p:cTn id="1" dur="indefinite" restart="never" nodeType="tmRoot"/>
-      </p:par>
-    </p:tnLst>
-  </p:timing>
 </p:sld>
 </file>
 
-<file path=ppt/slides/slide12.xml><?xml version="1.0" encoding="utf-8"?>
+<file path=ppt/slides/slide11.xml><?xml version="1.0" encoding="utf-8"?>
 <p:sld xmlns:a="http://schemas.openxmlformats.org/drawingml/2006/main" xmlns:r="http://schemas.openxmlformats.org/officeDocument/2006/relationships" xmlns:p="http://schemas.openxmlformats.org/presentationml/2006/main">
   <p:cSld>
     <p:spTree>
@@ -7164,7 +6900,7 @@
               </a:lnSpc>
             </a:pPr>
             <a:r>
-              <a:rPr lang="zh-CN" altLang="en-US" sz="2400" b="1" dirty="0" smtClean="0">
+              <a:rPr lang="zh-CN" altLang="en-US" sz="2400" b="1" dirty="0">
                 <a:solidFill>
                   <a:srgbClr val="FF0000"/>
                 </a:solidFill>
@@ -7172,114 +6908,114 @@
               <a:t>例：</a:t>
             </a:r>
             <a:r>
-              <a:rPr lang="en-US" altLang="zh-CN" sz="2400" dirty="0" err="1" smtClean="0"/>
+              <a:rPr lang="en-US" altLang="zh-CN" sz="2400" dirty="0" err="1"/>
               <a:t>Keil</a:t>
             </a:r>
             <a:r>
-              <a:rPr lang="zh-CN" altLang="en-US" sz="2400" dirty="0" smtClean="0"/>
+              <a:rPr lang="zh-CN" altLang="en-US" sz="2400" dirty="0"/>
               <a:t>编写程序是默认的时钟为</a:t>
             </a:r>
             <a:r>
-              <a:rPr lang="en-US" altLang="zh-CN" sz="2400" dirty="0" smtClean="0"/>
+              <a:rPr lang="en-US" altLang="zh-CN" sz="2400" dirty="0"/>
               <a:t>72Mhz</a:t>
             </a:r>
             <a:r>
-              <a:rPr lang="zh-CN" altLang="en-US" sz="2400" dirty="0" smtClean="0"/>
+              <a:rPr lang="zh-CN" altLang="en-US" sz="2400" dirty="0"/>
               <a:t>，其实是这么来的：外部晶振</a:t>
             </a:r>
             <a:r>
-              <a:rPr lang="en-US" altLang="zh-CN" sz="2400" dirty="0" smtClean="0"/>
+              <a:rPr lang="en-US" altLang="zh-CN" sz="2400" dirty="0"/>
               <a:t>(</a:t>
             </a:r>
             <a:r>
-              <a:rPr lang="en-US" altLang="zh-CN" sz="2400" b="1" dirty="0" smtClean="0"/>
+              <a:rPr lang="en-US" altLang="zh-CN" sz="2400" b="1" dirty="0"/>
               <a:t>HSE</a:t>
             </a:r>
             <a:r>
-              <a:rPr lang="en-US" altLang="zh-CN" sz="2400" dirty="0" smtClean="0"/>
+              <a:rPr lang="en-US" altLang="zh-CN" sz="2400" dirty="0"/>
               <a:t>)</a:t>
             </a:r>
             <a:r>
-              <a:rPr lang="zh-CN" altLang="en-US" sz="2400" dirty="0" smtClean="0"/>
+              <a:rPr lang="zh-CN" altLang="en-US" sz="2400" dirty="0"/>
               <a:t>提供的</a:t>
             </a:r>
             <a:r>
-              <a:rPr lang="en-US" altLang="zh-CN" sz="2400" dirty="0" smtClean="0"/>
+              <a:rPr lang="en-US" altLang="zh-CN" sz="2400" dirty="0"/>
               <a:t>8MHz</a:t>
             </a:r>
             <a:r>
-              <a:rPr lang="zh-CN" altLang="en-US" sz="2400" dirty="0" smtClean="0"/>
+              <a:rPr lang="zh-CN" altLang="en-US" sz="2400" dirty="0"/>
               <a:t>（与电路板上的晶振的相关）通过</a:t>
             </a:r>
             <a:r>
-              <a:rPr lang="en-US" altLang="zh-CN" sz="2400" b="1" dirty="0" smtClean="0"/>
+              <a:rPr lang="en-US" altLang="zh-CN" sz="2400" b="1" dirty="0"/>
               <a:t>PLLXTPRE</a:t>
             </a:r>
             <a:r>
-              <a:rPr lang="zh-CN" altLang="en-US" sz="2400" b="1" dirty="0" smtClean="0"/>
+              <a:rPr lang="zh-CN" altLang="en-US" sz="2400" b="1" dirty="0"/>
               <a:t>分频器</a:t>
             </a:r>
             <a:r>
-              <a:rPr lang="zh-CN" altLang="en-US" sz="2400" dirty="0" smtClean="0"/>
+              <a:rPr lang="zh-CN" altLang="en-US" sz="2400" dirty="0"/>
               <a:t>后，进入</a:t>
             </a:r>
             <a:r>
-              <a:rPr lang="en-US" altLang="zh-CN" sz="2400" b="1" dirty="0" smtClean="0"/>
+              <a:rPr lang="en-US" altLang="zh-CN" sz="2400" b="1" dirty="0"/>
               <a:t>PLLSRC</a:t>
             </a:r>
             <a:r>
-              <a:rPr lang="zh-CN" altLang="en-US" sz="2400" b="1" dirty="0" smtClean="0"/>
+              <a:rPr lang="zh-CN" altLang="en-US" sz="2400" b="1" dirty="0"/>
               <a:t>选择开关</a:t>
             </a:r>
             <a:r>
-              <a:rPr lang="zh-CN" altLang="en-US" sz="2400" dirty="0" smtClean="0"/>
+              <a:rPr lang="zh-CN" altLang="en-US" sz="2400" dirty="0"/>
               <a:t>，进而通过</a:t>
             </a:r>
             <a:r>
-              <a:rPr lang="en-US" altLang="zh-CN" sz="2400" b="1" dirty="0" smtClean="0"/>
+              <a:rPr lang="en-US" altLang="zh-CN" sz="2400" b="1" dirty="0"/>
               <a:t>PLLMUL</a:t>
             </a:r>
             <a:r>
-              <a:rPr lang="zh-CN" altLang="en-US" sz="2400" b="1" dirty="0" smtClean="0"/>
+              <a:rPr lang="zh-CN" altLang="en-US" sz="2400" b="1" dirty="0"/>
               <a:t>锁相环</a:t>
             </a:r>
             <a:r>
-              <a:rPr lang="zh-CN" altLang="en-US" sz="2400" dirty="0" smtClean="0"/>
+              <a:rPr lang="zh-CN" altLang="en-US" sz="2400" dirty="0"/>
               <a:t>进行倍频（</a:t>
             </a:r>
             <a:r>
-              <a:rPr lang="en-US" altLang="zh-CN" sz="2400" dirty="0" smtClean="0"/>
+              <a:rPr lang="en-US" altLang="zh-CN" sz="2400" dirty="0"/>
               <a:t>x9</a:t>
             </a:r>
             <a:r>
-              <a:rPr lang="zh-CN" altLang="en-US" sz="2400" dirty="0" smtClean="0"/>
+              <a:rPr lang="zh-CN" altLang="en-US" sz="2400" dirty="0"/>
               <a:t>）后，为系统提供</a:t>
             </a:r>
             <a:r>
-              <a:rPr lang="en-US" altLang="zh-CN" sz="2400" dirty="0" smtClean="0"/>
+              <a:rPr lang="en-US" altLang="zh-CN" sz="2400" dirty="0"/>
               <a:t>72MHz</a:t>
             </a:r>
             <a:r>
-              <a:rPr lang="zh-CN" altLang="en-US" sz="2400" dirty="0" smtClean="0"/>
+              <a:rPr lang="zh-CN" altLang="en-US" sz="2400" dirty="0"/>
               <a:t>的系统时钟（</a:t>
             </a:r>
             <a:r>
-              <a:rPr lang="en-US" altLang="zh-CN" sz="2400" dirty="0" smtClean="0"/>
+              <a:rPr lang="en-US" altLang="zh-CN" sz="2400" dirty="0"/>
               <a:t>SYSCLK</a:t>
             </a:r>
             <a:r>
-              <a:rPr lang="zh-CN" altLang="en-US" sz="2400" dirty="0" smtClean="0"/>
+              <a:rPr lang="zh-CN" altLang="en-US" sz="2400" dirty="0"/>
               <a:t>）。之后是</a:t>
             </a:r>
             <a:r>
-              <a:rPr lang="en-US" altLang="zh-CN" sz="2400" dirty="0" smtClean="0"/>
+              <a:rPr lang="en-US" altLang="zh-CN" sz="2400" dirty="0"/>
               <a:t>AHB</a:t>
             </a:r>
             <a:r>
-              <a:rPr lang="zh-CN" altLang="en-US" sz="2400" dirty="0" smtClean="0"/>
+              <a:rPr lang="zh-CN" altLang="en-US" sz="2400" dirty="0"/>
               <a:t>预分频器对时钟信号进行分频，然后为低速外设提供时钟。</a:t>
             </a:r>
-            <a:endParaRPr lang="en-US" altLang="zh-CN" sz="2400" dirty="0" smtClean="0"/>
+            <a:endParaRPr lang="en-US" altLang="zh-CN" sz="2400" dirty="0"/>
           </a:p>
           <a:p>
             <a:pPr>
@@ -7288,79 +7024,79 @@
               </a:lnSpc>
             </a:pPr>
             <a:r>
-              <a:rPr lang="zh-CN" altLang="en-US" sz="2400" dirty="0" smtClean="0"/>
+              <a:rPr lang="zh-CN" altLang="en-US" sz="2400" dirty="0"/>
               <a:t>或者</a:t>
             </a:r>
             <a:r>
-              <a:rPr lang="zh-CN" altLang="en-US" sz="2400" b="1" dirty="0" smtClean="0"/>
+              <a:rPr lang="zh-CN" altLang="en-US" sz="2400" b="1" dirty="0"/>
               <a:t>内部</a:t>
             </a:r>
             <a:r>
-              <a:rPr lang="en-US" altLang="zh-CN" sz="2400" b="1" dirty="0" smtClean="0"/>
+              <a:rPr lang="en-US" altLang="zh-CN" sz="2400" b="1" dirty="0"/>
               <a:t>RC</a:t>
             </a:r>
             <a:r>
-              <a:rPr lang="zh-CN" altLang="en-US" sz="2400" b="1" dirty="0" smtClean="0"/>
+              <a:rPr lang="zh-CN" altLang="en-US" sz="2400" b="1" dirty="0"/>
               <a:t>振荡器</a:t>
             </a:r>
             <a:r>
-              <a:rPr lang="en-US" altLang="zh-CN" sz="2400" b="1" dirty="0" smtClean="0"/>
+              <a:rPr lang="en-US" altLang="zh-CN" sz="2400" b="1" dirty="0"/>
               <a:t>(HSI) </a:t>
             </a:r>
             <a:r>
-              <a:rPr lang="zh-CN" altLang="en-US" sz="2400" b="1" dirty="0" smtClean="0"/>
+              <a:rPr lang="zh-CN" altLang="en-US" sz="2400" b="1" dirty="0"/>
               <a:t>为</a:t>
             </a:r>
             <a:r>
-              <a:rPr lang="en-US" altLang="zh-CN" sz="2400" dirty="0" smtClean="0"/>
+              <a:rPr lang="en-US" altLang="zh-CN" sz="2400" dirty="0"/>
               <a:t>8MHz  /2 </a:t>
             </a:r>
             <a:r>
-              <a:rPr lang="zh-CN" altLang="en-US" sz="2400" dirty="0" smtClean="0"/>
+              <a:rPr lang="zh-CN" altLang="en-US" sz="2400" dirty="0"/>
               <a:t>为</a:t>
             </a:r>
             <a:r>
-              <a:rPr lang="en-US" altLang="zh-CN" sz="2400" dirty="0" smtClean="0"/>
+              <a:rPr lang="en-US" altLang="zh-CN" sz="2400" dirty="0"/>
               <a:t>4MHz </a:t>
             </a:r>
             <a:r>
-              <a:rPr lang="zh-CN" altLang="en-US" sz="2400" dirty="0" smtClean="0"/>
+              <a:rPr lang="zh-CN" altLang="en-US" sz="2400" dirty="0"/>
               <a:t>进入</a:t>
             </a:r>
             <a:r>
-              <a:rPr lang="en-US" altLang="zh-CN" sz="2400" b="1" dirty="0" smtClean="0"/>
+              <a:rPr lang="en-US" altLang="zh-CN" sz="2400" b="1" dirty="0"/>
               <a:t>PLLSRC</a:t>
             </a:r>
             <a:r>
-              <a:rPr lang="zh-CN" altLang="en-US" sz="2400" b="1" dirty="0" smtClean="0"/>
+              <a:rPr lang="zh-CN" altLang="en-US" sz="2400" b="1" dirty="0"/>
               <a:t>选择开关</a:t>
             </a:r>
             <a:r>
-              <a:rPr lang="zh-CN" altLang="en-US" sz="2400" dirty="0" smtClean="0"/>
+              <a:rPr lang="zh-CN" altLang="en-US" sz="2400" dirty="0"/>
               <a:t>，通过</a:t>
             </a:r>
             <a:r>
-              <a:rPr lang="en-US" altLang="zh-CN" sz="2400" b="1" dirty="0" smtClean="0"/>
+              <a:rPr lang="en-US" altLang="zh-CN" sz="2400" b="1" dirty="0"/>
               <a:t>PLLMUL</a:t>
             </a:r>
             <a:r>
-              <a:rPr lang="zh-CN" altLang="en-US" sz="2400" b="1" dirty="0" smtClean="0"/>
+              <a:rPr lang="zh-CN" altLang="en-US" sz="2400" b="1" dirty="0"/>
               <a:t>锁相环</a:t>
             </a:r>
             <a:r>
-              <a:rPr lang="zh-CN" altLang="en-US" sz="2400" dirty="0" smtClean="0"/>
+              <a:rPr lang="zh-CN" altLang="en-US" sz="2400" dirty="0"/>
               <a:t>进行倍频（</a:t>
             </a:r>
             <a:r>
-              <a:rPr lang="en-US" altLang="zh-CN" sz="2400" dirty="0" smtClean="0"/>
+              <a:rPr lang="en-US" altLang="zh-CN" sz="2400" dirty="0"/>
               <a:t>x18</a:t>
             </a:r>
             <a:r>
-              <a:rPr lang="zh-CN" altLang="en-US" sz="2400" dirty="0" smtClean="0"/>
+              <a:rPr lang="zh-CN" altLang="en-US" sz="2400" dirty="0"/>
               <a:t>）后 为</a:t>
             </a:r>
             <a:r>
-              <a:rPr lang="en-US" altLang="zh-CN" sz="2400" dirty="0" smtClean="0"/>
+              <a:rPr lang="en-US" altLang="zh-CN" sz="2400" dirty="0"/>
               <a:t>72MHz</a:t>
             </a:r>
             <a:endParaRPr lang="zh-CN" altLang="en-US" sz="2400" dirty="0"/>
@@ -7375,7 +7111,7 @@
 </p:sld>
 </file>
 
-<file path=ppt/slides/slide13.xml><?xml version="1.0" encoding="utf-8"?>
+<file path=ppt/slides/slide12.xml><?xml version="1.0" encoding="utf-8"?>
 <p:sld xmlns:a="http://schemas.openxmlformats.org/drawingml/2006/main" xmlns:r="http://schemas.openxmlformats.org/officeDocument/2006/relationships" xmlns:p="http://schemas.openxmlformats.org/presentationml/2006/main">
   <p:cSld>
     <p:spTree>
@@ -7487,7 +7223,7 @@
               </a:lnSpc>
             </a:pPr>
             <a:r>
-              <a:rPr lang="zh-CN" altLang="en-US" sz="3200" b="1" dirty="0" smtClean="0">
+              <a:rPr lang="zh-CN" altLang="en-US" sz="3200" b="1" dirty="0">
                 <a:solidFill>
                   <a:srgbClr val="7030A0"/>
                 </a:solidFill>
@@ -7495,7 +7231,7 @@
               <a:t>系统时钟</a:t>
             </a:r>
             <a:r>
-              <a:rPr lang="en-US" sz="3200" b="1" dirty="0" smtClean="0">
+              <a:rPr lang="en-US" sz="3200" b="1" dirty="0">
                 <a:solidFill>
                   <a:srgbClr val="7030A0"/>
                 </a:solidFill>
@@ -7510,10 +7246,10 @@
               </a:lnSpc>
             </a:pPr>
             <a:r>
-              <a:rPr lang="zh-CN" altLang="en-US" sz="2400" dirty="0" smtClean="0"/>
+              <a:rPr lang="zh-CN" altLang="en-US" sz="2400" dirty="0"/>
               <a:t>大部分外设时钟都是用的高速时钟。系统内核和外设时钟的时钟只有一个源，</a:t>
             </a:r>
-            <a:endParaRPr lang="en-US" altLang="zh-CN" sz="2400" dirty="0" smtClean="0"/>
+            <a:endParaRPr lang="en-US" altLang="zh-CN" sz="2400" dirty="0"/>
           </a:p>
           <a:p>
             <a:pPr>
@@ -7522,26 +7258,26 @@
               </a:lnSpc>
             </a:pPr>
             <a:r>
-              <a:rPr lang="zh-CN" altLang="en-US" sz="2400" dirty="0" smtClean="0"/>
+              <a:rPr lang="zh-CN" altLang="en-US" sz="2400" dirty="0"/>
               <a:t>那就是</a:t>
             </a:r>
             <a:r>
-              <a:rPr lang="en-US" altLang="zh-CN" sz="2400" dirty="0" smtClean="0"/>
+              <a:rPr lang="en-US" altLang="zh-CN" sz="2400" dirty="0"/>
               <a:t>SYSCLK</a:t>
             </a:r>
             <a:r>
-              <a:rPr lang="zh-CN" altLang="en-US" sz="2400" dirty="0" smtClean="0"/>
+              <a:rPr lang="zh-CN" altLang="en-US" sz="2400" dirty="0"/>
               <a:t>， 即常说的系统时钟，系统时钟</a:t>
             </a:r>
             <a:r>
-              <a:rPr lang="en-US" altLang="zh-CN" sz="2400" dirty="0" smtClean="0"/>
+              <a:rPr lang="en-US" altLang="zh-CN" sz="2400" dirty="0"/>
               <a:t>SYSCLK</a:t>
             </a:r>
             <a:r>
-              <a:rPr lang="zh-CN" altLang="en-US" sz="2400" dirty="0" smtClean="0"/>
+              <a:rPr lang="zh-CN" altLang="en-US" sz="2400" dirty="0"/>
               <a:t>可来源于三个时钟</a:t>
             </a:r>
-            <a:endParaRPr lang="en-US" altLang="zh-CN" sz="2400" dirty="0" smtClean="0"/>
+            <a:endParaRPr lang="en-US" altLang="zh-CN" sz="2400" dirty="0"/>
           </a:p>
           <a:p>
             <a:pPr>
@@ -7550,71 +7286,71 @@
               </a:lnSpc>
             </a:pPr>
             <a:r>
-              <a:rPr lang="zh-CN" altLang="en-US" sz="2400" dirty="0" smtClean="0"/>
+              <a:rPr lang="zh-CN" altLang="en-US" sz="2400" dirty="0"/>
               <a:t>源，由一个选择器</a:t>
             </a:r>
             <a:r>
-              <a:rPr lang="en-US" altLang="zh-CN" sz="2400" dirty="0" smtClean="0"/>
+              <a:rPr lang="en-US" altLang="zh-CN" sz="2400" dirty="0"/>
               <a:t>SW</a:t>
             </a:r>
             <a:r>
-              <a:rPr lang="zh-CN" altLang="en-US" sz="2400" dirty="0" smtClean="0"/>
+              <a:rPr lang="zh-CN" altLang="en-US" sz="2400" dirty="0"/>
               <a:t>来做选择：</a:t>
             </a:r>
             <a:br>
-              <a:rPr lang="zh-CN" altLang="en-US" sz="2400" dirty="0" smtClean="0"/>
+              <a:rPr lang="zh-CN" altLang="en-US" sz="2400" dirty="0"/>
             </a:br>
             <a:r>
-              <a:rPr lang="zh-CN" altLang="en-US" sz="2400" dirty="0" smtClean="0"/>
+              <a:rPr lang="zh-CN" altLang="en-US" sz="2400" dirty="0"/>
               <a:t>①、</a:t>
             </a:r>
             <a:r>
-              <a:rPr lang="en-US" altLang="zh-CN" sz="2400" dirty="0" smtClean="0"/>
+              <a:rPr lang="en-US" altLang="zh-CN" sz="2400" dirty="0"/>
               <a:t>HSI</a:t>
             </a:r>
             <a:r>
-              <a:rPr lang="zh-CN" altLang="en-US" sz="2400" dirty="0" smtClean="0"/>
+              <a:rPr lang="zh-CN" altLang="en-US" sz="2400" dirty="0"/>
               <a:t>振荡器时钟</a:t>
             </a:r>
             <a:br>
-              <a:rPr lang="zh-CN" altLang="en-US" sz="2400" dirty="0" smtClean="0"/>
+              <a:rPr lang="zh-CN" altLang="en-US" sz="2400" dirty="0"/>
             </a:br>
             <a:r>
-              <a:rPr lang="zh-CN" altLang="en-US" sz="2400" dirty="0" smtClean="0"/>
+              <a:rPr lang="zh-CN" altLang="en-US" sz="2400" dirty="0"/>
               <a:t>②、</a:t>
             </a:r>
             <a:r>
-              <a:rPr lang="en-US" altLang="zh-CN" sz="2400" dirty="0" smtClean="0"/>
+              <a:rPr lang="en-US" altLang="zh-CN" sz="2400" dirty="0"/>
               <a:t>HSE</a:t>
             </a:r>
             <a:r>
-              <a:rPr lang="zh-CN" altLang="en-US" sz="2400" dirty="0" smtClean="0"/>
+              <a:rPr lang="zh-CN" altLang="en-US" sz="2400" dirty="0"/>
               <a:t>振荡器时钟</a:t>
             </a:r>
             <a:br>
-              <a:rPr lang="zh-CN" altLang="en-US" sz="2400" dirty="0" smtClean="0"/>
+              <a:rPr lang="zh-CN" altLang="en-US" sz="2400" dirty="0"/>
             </a:br>
             <a:r>
-              <a:rPr lang="zh-CN" altLang="en-US" sz="2400" dirty="0" smtClean="0"/>
+              <a:rPr lang="zh-CN" altLang="en-US" sz="2400" dirty="0"/>
               <a:t>③、</a:t>
             </a:r>
             <a:r>
-              <a:rPr lang="en-US" altLang="zh-CN" sz="2400" dirty="0" smtClean="0"/>
+              <a:rPr lang="en-US" altLang="zh-CN" sz="2400" dirty="0"/>
               <a:t>PLL</a:t>
             </a:r>
             <a:r>
-              <a:rPr lang="zh-CN" altLang="en-US" sz="2400" dirty="0" smtClean="0"/>
+              <a:rPr lang="zh-CN" altLang="en-US" sz="2400" dirty="0"/>
               <a:t>时钟</a:t>
             </a:r>
             <a:br>
-              <a:rPr lang="zh-CN" altLang="en-US" sz="2400" dirty="0" smtClean="0"/>
+              <a:rPr lang="zh-CN" altLang="en-US" sz="2400" dirty="0"/>
             </a:br>
             <a:r>
-              <a:rPr lang="zh-CN" altLang="en-US" sz="2400" dirty="0" smtClean="0"/>
+              <a:rPr lang="zh-CN" altLang="en-US" sz="2400" dirty="0"/>
               <a:t>最大为</a:t>
             </a:r>
             <a:r>
-              <a:rPr lang="en-US" altLang="zh-CN" sz="2400" dirty="0" smtClean="0"/>
+              <a:rPr lang="en-US" altLang="zh-CN" sz="2400" dirty="0"/>
               <a:t>72Mhz</a:t>
             </a:r>
             <a:endParaRPr lang="en-US" sz="2400" b="1" dirty="0"/>
@@ -7662,7 +7398,7 @@
 </p:sld>
 </file>
 
-<file path=ppt/slides/slide14.xml><?xml version="1.0" encoding="utf-8"?>
+<file path=ppt/slides/slide13.xml><?xml version="1.0" encoding="utf-8"?>
 <p:sld xmlns:a="http://schemas.openxmlformats.org/drawingml/2006/main" xmlns:r="http://schemas.openxmlformats.org/officeDocument/2006/relationships" xmlns:p="http://schemas.openxmlformats.org/presentationml/2006/main">
   <p:cSld>
     <p:spTree>
@@ -7706,7 +7442,7 @@
               </a:lnSpc>
             </a:pPr>
             <a:r>
-              <a:rPr lang="en-US" b="1" dirty="0" smtClean="0">
+              <a:rPr lang="en-US" b="1" dirty="0">
                 <a:solidFill>
                   <a:srgbClr val="7030A0"/>
                 </a:solidFill>
@@ -7714,14 +7450,14 @@
               <a:t>USB</a:t>
             </a:r>
             <a:r>
-              <a:rPr lang="zh-CN" altLang="en-US" b="1" dirty="0" smtClean="0">
+              <a:rPr lang="zh-CN" altLang="en-US" b="1" dirty="0">
                 <a:solidFill>
                   <a:srgbClr val="7030A0"/>
                 </a:solidFill>
               </a:rPr>
               <a:t>时钟</a:t>
             </a:r>
-            <a:endParaRPr lang="en-US" altLang="zh-CN" b="1" dirty="0" smtClean="0">
+            <a:endParaRPr lang="en-US" altLang="zh-CN" b="1" dirty="0">
               <a:solidFill>
                 <a:srgbClr val="7030A0"/>
               </a:solidFill>
@@ -7734,79 +7470,79 @@
               </a:lnSpc>
             </a:pPr>
             <a:r>
-              <a:rPr lang="en-US" altLang="zh-CN" dirty="0" smtClean="0"/>
+              <a:rPr lang="en-US" altLang="zh-CN" dirty="0"/>
               <a:t>      STM32</a:t>
             </a:r>
             <a:r>
-              <a:rPr lang="zh-CN" altLang="en-US" dirty="0" smtClean="0"/>
+              <a:rPr lang="zh-CN" altLang="en-US" dirty="0"/>
               <a:t>中有一个全速功能的</a:t>
             </a:r>
             <a:r>
-              <a:rPr lang="en-US" altLang="zh-CN" dirty="0" smtClean="0"/>
+              <a:rPr lang="en-US" altLang="zh-CN" dirty="0"/>
               <a:t>USB</a:t>
             </a:r>
             <a:r>
-              <a:rPr lang="zh-CN" altLang="en-US" dirty="0" smtClean="0"/>
+              <a:rPr lang="zh-CN" altLang="en-US" dirty="0"/>
               <a:t>模块，其串行接口引擎需要一个频率为</a:t>
             </a:r>
             <a:r>
-              <a:rPr lang="en-US" altLang="zh-CN" dirty="0" smtClean="0"/>
+              <a:rPr lang="en-US" altLang="zh-CN" dirty="0"/>
               <a:t>48MHz</a:t>
             </a:r>
             <a:r>
-              <a:rPr lang="zh-CN" altLang="en-US" dirty="0" smtClean="0"/>
+              <a:rPr lang="zh-CN" altLang="en-US" dirty="0"/>
               <a:t>的时钟源。该时钟源只能从</a:t>
             </a:r>
             <a:r>
-              <a:rPr lang="en-US" altLang="zh-CN" dirty="0" smtClean="0"/>
+              <a:rPr lang="en-US" altLang="zh-CN" dirty="0"/>
               <a:t>PLL</a:t>
             </a:r>
             <a:r>
-              <a:rPr lang="zh-CN" altLang="en-US" dirty="0" smtClean="0"/>
+              <a:rPr lang="zh-CN" altLang="en-US" dirty="0"/>
               <a:t>输出端获取（唯一的），，可以选择为</a:t>
             </a:r>
             <a:r>
-              <a:rPr lang="en-US" altLang="zh-CN" dirty="0" smtClean="0"/>
+              <a:rPr lang="en-US" altLang="zh-CN" dirty="0"/>
               <a:t>1.5</a:t>
             </a:r>
             <a:r>
-              <a:rPr lang="zh-CN" altLang="en-US" dirty="0" smtClean="0"/>
+              <a:rPr lang="zh-CN" altLang="en-US" dirty="0"/>
               <a:t>分频或者</a:t>
             </a:r>
             <a:r>
-              <a:rPr lang="en-US" altLang="zh-CN" dirty="0" smtClean="0"/>
+              <a:rPr lang="en-US" altLang="zh-CN" dirty="0"/>
               <a:t>1</a:t>
             </a:r>
             <a:r>
-              <a:rPr lang="zh-CN" altLang="en-US" dirty="0" smtClean="0"/>
+              <a:rPr lang="zh-CN" altLang="en-US" dirty="0"/>
               <a:t>分频，也就是，当需要使用</a:t>
             </a:r>
             <a:r>
-              <a:rPr lang="en-US" altLang="zh-CN" dirty="0" smtClean="0"/>
+              <a:rPr lang="en-US" altLang="zh-CN" dirty="0"/>
               <a:t>USB</a:t>
             </a:r>
             <a:r>
-              <a:rPr lang="zh-CN" altLang="en-US" dirty="0" smtClean="0"/>
+              <a:rPr lang="zh-CN" altLang="en-US" dirty="0"/>
               <a:t>模块时，</a:t>
             </a:r>
             <a:r>
-              <a:rPr lang="en-US" altLang="zh-CN" dirty="0" smtClean="0"/>
+              <a:rPr lang="en-US" altLang="zh-CN" dirty="0"/>
               <a:t>PLL</a:t>
             </a:r>
             <a:r>
-              <a:rPr lang="zh-CN" altLang="en-US" dirty="0" smtClean="0"/>
+              <a:rPr lang="zh-CN" altLang="en-US" dirty="0"/>
               <a:t>必须使能，并且时钟频率配置为</a:t>
             </a:r>
             <a:r>
-              <a:rPr lang="en-US" altLang="zh-CN" dirty="0" smtClean="0"/>
+              <a:rPr lang="en-US" altLang="zh-CN" dirty="0"/>
               <a:t>48MHz</a:t>
             </a:r>
             <a:r>
-              <a:rPr lang="zh-CN" altLang="en-US" dirty="0" smtClean="0"/>
+              <a:rPr lang="zh-CN" altLang="en-US" dirty="0"/>
               <a:t>或</a:t>
             </a:r>
             <a:r>
-              <a:rPr lang="en-US" altLang="zh-CN" dirty="0" smtClean="0"/>
+              <a:rPr lang="en-US" altLang="zh-CN" dirty="0"/>
               <a:t>72MHz</a:t>
             </a:r>
           </a:p>
@@ -7817,14 +7553,14 @@
               </a:lnSpc>
             </a:pPr>
             <a:r>
-              <a:rPr lang="zh-CN" altLang="en-US" b="1" dirty="0" smtClean="0">
+              <a:rPr lang="zh-CN" altLang="en-US" b="1" dirty="0">
                 <a:solidFill>
                   <a:srgbClr val="7030A0"/>
                 </a:solidFill>
               </a:rPr>
               <a:t>时钟信号输出</a:t>
             </a:r>
-            <a:endParaRPr lang="en-US" altLang="zh-CN" b="1" dirty="0" smtClean="0">
+            <a:endParaRPr lang="en-US" altLang="zh-CN" b="1" dirty="0">
               <a:solidFill>
                 <a:srgbClr val="7030A0"/>
               </a:solidFill>
@@ -7837,63 +7573,63 @@
               </a:lnSpc>
             </a:pPr>
             <a:r>
-              <a:rPr lang="zh-CN" altLang="en-US" dirty="0" smtClean="0"/>
+              <a:rPr lang="zh-CN" altLang="en-US" dirty="0"/>
               <a:t>另外，</a:t>
             </a:r>
             <a:r>
-              <a:rPr lang="en-US" altLang="zh-CN" dirty="0" smtClean="0"/>
+              <a:rPr lang="en-US" altLang="zh-CN" dirty="0"/>
               <a:t>STM32</a:t>
             </a:r>
             <a:r>
-              <a:rPr lang="zh-CN" altLang="en-US" dirty="0" smtClean="0"/>
+              <a:rPr lang="zh-CN" altLang="en-US" dirty="0"/>
               <a:t>还可以选择一个时钟信号输出到</a:t>
             </a:r>
             <a:r>
-              <a:rPr lang="en-US" altLang="zh-CN" dirty="0" smtClean="0"/>
+              <a:rPr lang="en-US" altLang="zh-CN" dirty="0"/>
               <a:t>MCO</a:t>
             </a:r>
             <a:r>
-              <a:rPr lang="zh-CN" altLang="en-US" dirty="0" smtClean="0"/>
+              <a:rPr lang="zh-CN" altLang="en-US" dirty="0"/>
               <a:t>脚</a:t>
             </a:r>
             <a:r>
-              <a:rPr lang="en-US" altLang="zh-CN" dirty="0" smtClean="0"/>
+              <a:rPr lang="en-US" altLang="zh-CN" dirty="0"/>
               <a:t>(PA8)</a:t>
             </a:r>
             <a:r>
-              <a:rPr lang="zh-CN" altLang="en-US" dirty="0" smtClean="0"/>
+              <a:rPr lang="zh-CN" altLang="en-US" dirty="0"/>
               <a:t>上，可以选择为</a:t>
             </a:r>
             <a:r>
-              <a:rPr lang="en-US" altLang="zh-CN" dirty="0" smtClean="0"/>
+              <a:rPr lang="en-US" altLang="zh-CN" dirty="0"/>
               <a:t>PLL</a:t>
             </a:r>
             <a:r>
-              <a:rPr lang="zh-CN" altLang="en-US" dirty="0" smtClean="0"/>
+              <a:rPr lang="zh-CN" altLang="en-US" dirty="0"/>
               <a:t>输出的</a:t>
             </a:r>
             <a:r>
-              <a:rPr lang="en-US" altLang="zh-CN" dirty="0" smtClean="0"/>
+              <a:rPr lang="en-US" altLang="zh-CN" dirty="0"/>
               <a:t>2</a:t>
             </a:r>
             <a:r>
-              <a:rPr lang="zh-CN" altLang="en-US" dirty="0" smtClean="0"/>
+              <a:rPr lang="zh-CN" altLang="en-US" dirty="0"/>
               <a:t>分频、</a:t>
             </a:r>
             <a:r>
-              <a:rPr lang="en-US" altLang="zh-CN" dirty="0" smtClean="0"/>
+              <a:rPr lang="en-US" altLang="zh-CN" dirty="0"/>
               <a:t>HSI</a:t>
             </a:r>
             <a:r>
-              <a:rPr lang="zh-CN" altLang="en-US" dirty="0" smtClean="0"/>
+              <a:rPr lang="zh-CN" altLang="en-US" dirty="0"/>
               <a:t>、</a:t>
             </a:r>
             <a:r>
-              <a:rPr lang="en-US" altLang="zh-CN" dirty="0" smtClean="0"/>
+              <a:rPr lang="en-US" altLang="zh-CN" dirty="0"/>
               <a:t>HSE</a:t>
             </a:r>
             <a:r>
-              <a:rPr lang="zh-CN" altLang="en-US" dirty="0" smtClean="0"/>
+              <a:rPr lang="zh-CN" altLang="en-US" dirty="0"/>
               <a:t>、或者系统时钟。</a:t>
             </a:r>
             <a:endParaRPr lang="zh-CN" altLang="en-US" b="1" dirty="0"/>
@@ -7974,7 +7710,7 @@
 </p:sld>
 </file>
 
-<file path=ppt/slides/slide15.xml><?xml version="1.0" encoding="utf-8"?>
+<file path=ppt/slides/slide14.xml><?xml version="1.0" encoding="utf-8"?>
 <p:sld xmlns:a="http://schemas.openxmlformats.org/drawingml/2006/main" xmlns:r="http://schemas.openxmlformats.org/officeDocument/2006/relationships" xmlns:p="http://schemas.openxmlformats.org/presentationml/2006/main">
   <p:cSld>
     <p:spTree>
@@ -8037,7 +7773,7 @@
               </a:spcAft>
             </a:pPr>
             <a:r>
-              <a:rPr lang="zh-CN" altLang="en-US" sz="2000" b="1" dirty="0" smtClean="0">
+              <a:rPr lang="zh-CN" altLang="en-US" sz="2000" b="1" dirty="0">
                 <a:solidFill>
                   <a:srgbClr val="7030A0"/>
                 </a:solidFill>
@@ -8045,7 +7781,7 @@
               <a:t>系统时钟</a:t>
             </a:r>
             <a:r>
-              <a:rPr lang="en-US" altLang="zh-CN" sz="2000" b="1" dirty="0" smtClean="0">
+              <a:rPr lang="en-US" altLang="zh-CN" sz="2000" b="1" dirty="0">
                 <a:solidFill>
                   <a:srgbClr val="7030A0"/>
                 </a:solidFill>
@@ -8053,14 +7789,14 @@
               <a:t>SYSCLK</a:t>
             </a:r>
             <a:r>
-              <a:rPr lang="zh-CN" altLang="en-US" sz="2000" b="1" dirty="0" smtClean="0">
+              <a:rPr lang="zh-CN" altLang="en-US" sz="2000" b="1" dirty="0">
                 <a:solidFill>
                   <a:srgbClr val="7030A0"/>
                 </a:solidFill>
               </a:rPr>
               <a:t>分配</a:t>
             </a:r>
-            <a:endParaRPr lang="en-US" altLang="zh-CN" sz="2000" b="1" dirty="0" smtClean="0">
+            <a:endParaRPr lang="en-US" altLang="zh-CN" sz="2000" b="1" dirty="0">
               <a:solidFill>
                 <a:srgbClr val="7030A0"/>
               </a:solidFill>
@@ -8079,26 +7815,26 @@
               </a:spcAft>
             </a:pPr>
             <a:r>
-              <a:rPr lang="zh-CN" altLang="en-US" sz="2000" dirty="0" smtClean="0"/>
+              <a:rPr lang="zh-CN" altLang="en-US" sz="2000" dirty="0"/>
               <a:t>系统时钟</a:t>
             </a:r>
             <a:r>
-              <a:rPr lang="en-US" altLang="zh-CN" sz="2000" dirty="0" smtClean="0"/>
+              <a:rPr lang="en-US" altLang="zh-CN" sz="2000" dirty="0"/>
               <a:t>SYSCLK</a:t>
             </a:r>
             <a:r>
-              <a:rPr lang="zh-CN" altLang="en-US" sz="2000" dirty="0" smtClean="0"/>
+              <a:rPr lang="zh-CN" altLang="en-US" sz="2000" dirty="0"/>
               <a:t>，它是供</a:t>
             </a:r>
             <a:r>
-              <a:rPr lang="en-US" altLang="zh-CN" sz="2000" dirty="0" smtClean="0"/>
+              <a:rPr lang="en-US" altLang="zh-CN" sz="2000" dirty="0"/>
               <a:t>STM32</a:t>
             </a:r>
             <a:r>
-              <a:rPr lang="zh-CN" altLang="en-US" sz="2000" dirty="0" smtClean="0"/>
+              <a:rPr lang="zh-CN" altLang="en-US" sz="2000" dirty="0"/>
               <a:t>中绝大部分部件工作的</a:t>
             </a:r>
-            <a:endParaRPr lang="en-US" altLang="zh-CN" sz="2000" dirty="0" smtClean="0"/>
+            <a:endParaRPr lang="en-US" altLang="zh-CN" sz="2000" dirty="0"/>
           </a:p>
           <a:p>
             <a:pPr lvl="0" indent="261938" fontAlgn="base">
@@ -8113,34 +7849,34 @@
               </a:spcAft>
             </a:pPr>
             <a:r>
-              <a:rPr lang="zh-CN" altLang="en-US" sz="2000" dirty="0" smtClean="0"/>
+              <a:rPr lang="zh-CN" altLang="en-US" sz="2000" dirty="0"/>
               <a:t>时钟源。系统时钟最大频率为</a:t>
             </a:r>
             <a:r>
-              <a:rPr lang="en-US" altLang="zh-CN" sz="2000" dirty="0" smtClean="0"/>
+              <a:rPr lang="en-US" altLang="zh-CN" sz="2000" dirty="0"/>
               <a:t>72MHz</a:t>
             </a:r>
             <a:r>
-              <a:rPr lang="zh-CN" altLang="en-US" sz="2000" dirty="0" smtClean="0"/>
+              <a:rPr lang="zh-CN" altLang="en-US" sz="2000" dirty="0"/>
               <a:t>，供给</a:t>
             </a:r>
             <a:r>
-              <a:rPr lang="en-US" altLang="zh-CN" sz="2000" dirty="0" smtClean="0"/>
+              <a:rPr lang="en-US" altLang="zh-CN" sz="2000" dirty="0"/>
               <a:t>I</a:t>
             </a:r>
             <a:r>
-              <a:rPr lang="en-US" altLang="zh-CN" sz="2000" baseline="30000" dirty="0" smtClean="0"/>
+              <a:rPr lang="en-US" altLang="zh-CN" sz="2000" baseline="30000" dirty="0"/>
               <a:t>2</a:t>
             </a:r>
             <a:r>
-              <a:rPr lang="en-US" altLang="zh-CN" sz="2000" dirty="0" smtClean="0"/>
+              <a:rPr lang="en-US" altLang="zh-CN" sz="2000" dirty="0"/>
               <a:t>S</a:t>
             </a:r>
             <a:r>
-              <a:rPr lang="zh-CN" altLang="en-US" sz="2000" dirty="0" smtClean="0"/>
+              <a:rPr lang="zh-CN" altLang="en-US" sz="2000" dirty="0"/>
               <a:t>音频总线</a:t>
             </a:r>
-            <a:endParaRPr lang="en-US" altLang="zh-CN" sz="2000" dirty="0" smtClean="0"/>
+            <a:endParaRPr lang="en-US" altLang="zh-CN" sz="2000" dirty="0"/>
           </a:p>
           <a:p>
             <a:pPr lvl="0" indent="261938" fontAlgn="base">
@@ -8155,26 +7891,26 @@
               </a:spcAft>
             </a:pPr>
             <a:r>
-              <a:rPr lang="zh-CN" altLang="en-US" sz="2000" dirty="0" smtClean="0"/>
+              <a:rPr lang="zh-CN" altLang="en-US" sz="2000" dirty="0"/>
               <a:t>和</a:t>
             </a:r>
             <a:r>
-              <a:rPr lang="en-US" altLang="zh-CN" sz="2000" dirty="0" smtClean="0"/>
+              <a:rPr lang="en-US" altLang="zh-CN" sz="2000" dirty="0"/>
               <a:t>AHB</a:t>
             </a:r>
             <a:r>
-              <a:rPr lang="zh-CN" altLang="en-US" sz="2000" dirty="0" smtClean="0"/>
+              <a:rPr lang="zh-CN" altLang="en-US" sz="2000" dirty="0"/>
               <a:t>总线时钟。它通过</a:t>
             </a:r>
             <a:r>
-              <a:rPr lang="en-US" altLang="zh-CN" sz="2000" dirty="0" smtClean="0"/>
+              <a:rPr lang="en-US" altLang="zh-CN" sz="2000" dirty="0"/>
               <a:t>AHB</a:t>
             </a:r>
             <a:r>
-              <a:rPr lang="zh-CN" altLang="en-US" sz="2000" dirty="0" smtClean="0"/>
+              <a:rPr lang="zh-CN" altLang="en-US" sz="2000" dirty="0"/>
               <a:t>分频器分频后送给各模块使</a:t>
             </a:r>
-            <a:endParaRPr lang="en-US" altLang="zh-CN" sz="2000" dirty="0" smtClean="0"/>
+            <a:endParaRPr lang="en-US" altLang="zh-CN" sz="2000" dirty="0"/>
           </a:p>
           <a:p>
             <a:pPr lvl="0" indent="261938" fontAlgn="base">
@@ -8189,74 +7925,74 @@
               </a:spcAft>
             </a:pPr>
             <a:r>
-              <a:rPr lang="zh-CN" altLang="en-US" sz="2000" dirty="0" smtClean="0"/>
+              <a:rPr lang="zh-CN" altLang="en-US" sz="2000" dirty="0"/>
               <a:t>用，</a:t>
             </a:r>
             <a:r>
-              <a:rPr lang="en-US" altLang="zh-CN" sz="2000" dirty="0" smtClean="0"/>
+              <a:rPr lang="en-US" altLang="zh-CN" sz="2000" dirty="0"/>
               <a:t>AHB</a:t>
             </a:r>
             <a:r>
-              <a:rPr lang="zh-CN" altLang="en-US" sz="2000" dirty="0" smtClean="0"/>
+              <a:rPr lang="zh-CN" altLang="en-US" sz="2000" dirty="0"/>
               <a:t>分频器可选择</a:t>
             </a:r>
             <a:r>
-              <a:rPr lang="en-US" altLang="zh-CN" sz="2000" dirty="0" smtClean="0"/>
+              <a:rPr lang="en-US" altLang="zh-CN" sz="2000" dirty="0"/>
               <a:t>1</a:t>
             </a:r>
             <a:r>
-              <a:rPr lang="zh-CN" altLang="en-US" sz="2000" dirty="0" smtClean="0"/>
+              <a:rPr lang="zh-CN" altLang="en-US" sz="2000" dirty="0"/>
               <a:t>、</a:t>
             </a:r>
             <a:r>
-              <a:rPr lang="en-US" altLang="zh-CN" sz="2000" dirty="0" smtClean="0"/>
+              <a:rPr lang="en-US" altLang="zh-CN" sz="2000" dirty="0"/>
               <a:t>2</a:t>
             </a:r>
             <a:r>
-              <a:rPr lang="zh-CN" altLang="en-US" sz="2000" dirty="0" smtClean="0"/>
+              <a:rPr lang="zh-CN" altLang="en-US" sz="2000" dirty="0"/>
               <a:t>、</a:t>
             </a:r>
             <a:r>
-              <a:rPr lang="en-US" altLang="zh-CN" sz="2000" dirty="0" smtClean="0"/>
+              <a:rPr lang="en-US" altLang="zh-CN" sz="2000" dirty="0"/>
               <a:t>4</a:t>
             </a:r>
             <a:r>
-              <a:rPr lang="zh-CN" altLang="en-US" sz="2000" dirty="0" smtClean="0"/>
+              <a:rPr lang="zh-CN" altLang="en-US" sz="2000" dirty="0"/>
               <a:t>、</a:t>
             </a:r>
             <a:r>
-              <a:rPr lang="en-US" altLang="zh-CN" sz="2000" dirty="0" smtClean="0"/>
+              <a:rPr lang="en-US" altLang="zh-CN" sz="2000" dirty="0"/>
               <a:t>8</a:t>
             </a:r>
             <a:r>
-              <a:rPr lang="zh-CN" altLang="en-US" sz="2000" dirty="0" smtClean="0"/>
+              <a:rPr lang="zh-CN" altLang="en-US" sz="2000" dirty="0"/>
               <a:t>、</a:t>
             </a:r>
             <a:r>
-              <a:rPr lang="en-US" altLang="zh-CN" sz="2000" dirty="0" smtClean="0"/>
+              <a:rPr lang="en-US" altLang="zh-CN" sz="2000" dirty="0"/>
               <a:t>16</a:t>
             </a:r>
             <a:r>
-              <a:rPr lang="zh-CN" altLang="en-US" sz="2000" dirty="0" smtClean="0"/>
+              <a:rPr lang="zh-CN" altLang="en-US" sz="2000" dirty="0"/>
               <a:t>、</a:t>
             </a:r>
             <a:r>
-              <a:rPr lang="en-US" altLang="zh-CN" sz="2000" dirty="0" smtClean="0"/>
+              <a:rPr lang="en-US" altLang="zh-CN" sz="2000" dirty="0"/>
               <a:t>64</a:t>
             </a:r>
             <a:r>
-              <a:rPr lang="zh-CN" altLang="en-US" sz="2000" dirty="0" smtClean="0"/>
+              <a:rPr lang="zh-CN" altLang="en-US" sz="2000" dirty="0"/>
               <a:t>、</a:t>
             </a:r>
             <a:r>
-              <a:rPr lang="en-US" altLang="zh-CN" sz="2000" dirty="0" smtClean="0"/>
+              <a:rPr lang="en-US" altLang="zh-CN" sz="2000" dirty="0"/>
               <a:t>128</a:t>
             </a:r>
             <a:r>
-              <a:rPr lang="zh-CN" altLang="en-US" sz="2000" dirty="0" smtClean="0"/>
+              <a:rPr lang="zh-CN" altLang="en-US" sz="2000" dirty="0"/>
               <a:t>、</a:t>
             </a:r>
-            <a:endParaRPr lang="en-US" altLang="zh-CN" sz="2000" dirty="0" smtClean="0"/>
+            <a:endParaRPr lang="en-US" altLang="zh-CN" sz="2000" dirty="0"/>
           </a:p>
           <a:p>
             <a:pPr lvl="0" indent="261938" fontAlgn="base">
@@ -8271,38 +8007,38 @@
               </a:spcAft>
             </a:pPr>
             <a:r>
-              <a:rPr lang="en-US" altLang="zh-CN" sz="2000" dirty="0" smtClean="0"/>
+              <a:rPr lang="en-US" altLang="zh-CN" sz="2000" dirty="0"/>
               <a:t>256</a:t>
             </a:r>
             <a:r>
-              <a:rPr lang="zh-CN" altLang="en-US" sz="2000" dirty="0" smtClean="0"/>
+              <a:rPr lang="zh-CN" altLang="en-US" sz="2000" dirty="0"/>
               <a:t>、</a:t>
             </a:r>
             <a:r>
-              <a:rPr lang="en-US" altLang="zh-CN" sz="2000" dirty="0" smtClean="0"/>
+              <a:rPr lang="en-US" altLang="zh-CN" sz="2000" dirty="0"/>
               <a:t>512</a:t>
             </a:r>
             <a:r>
-              <a:rPr lang="zh-CN" altLang="en-US" sz="2000" dirty="0" smtClean="0"/>
+              <a:rPr lang="zh-CN" altLang="en-US" sz="2000" dirty="0"/>
               <a:t>分频。其中</a:t>
             </a:r>
             <a:r>
-              <a:rPr lang="en-US" altLang="zh-CN" sz="2000" dirty="0" smtClean="0"/>
+              <a:rPr lang="en-US" altLang="zh-CN" sz="2000" dirty="0"/>
               <a:t>AHB</a:t>
             </a:r>
             <a:r>
-              <a:rPr lang="zh-CN" altLang="en-US" sz="2000" dirty="0" smtClean="0"/>
+              <a:rPr lang="zh-CN" altLang="en-US" sz="2000" dirty="0"/>
               <a:t>分频器输出的时钟送给</a:t>
             </a:r>
             <a:r>
-              <a:rPr lang="en-US" altLang="zh-CN" sz="2000" dirty="0" smtClean="0"/>
+              <a:rPr lang="en-US" altLang="zh-CN" sz="2000" dirty="0"/>
               <a:t>8</a:t>
             </a:r>
             <a:r>
-              <a:rPr lang="zh-CN" altLang="en-US" sz="2000" dirty="0" smtClean="0"/>
+              <a:rPr lang="zh-CN" altLang="en-US" sz="2000" dirty="0"/>
               <a:t>大模</a:t>
             </a:r>
-            <a:endParaRPr lang="en-US" altLang="zh-CN" sz="2000" dirty="0" smtClean="0"/>
+            <a:endParaRPr lang="en-US" altLang="zh-CN" sz="2000" dirty="0"/>
           </a:p>
           <a:p>
             <a:pPr lvl="0" indent="261938" fontAlgn="base">
@@ -8317,10 +8053,10 @@
               </a:spcAft>
             </a:pPr>
             <a:r>
-              <a:rPr lang="zh-CN" altLang="en-US" sz="2000" dirty="0" smtClean="0"/>
+              <a:rPr lang="zh-CN" altLang="en-US" sz="2000" dirty="0"/>
               <a:t>块使用：</a:t>
             </a:r>
-            <a:endParaRPr lang="en-US" altLang="zh-CN" sz="2000" dirty="0" smtClean="0"/>
+            <a:endParaRPr lang="en-US" altLang="zh-CN" sz="2000" dirty="0"/>
           </a:p>
           <a:p>
             <a:pPr>
@@ -8329,31 +8065,31 @@
               </a:lnSpc>
             </a:pPr>
             <a:r>
-              <a:rPr lang="zh-CN" altLang="en-US" sz="2000" dirty="0" smtClean="0"/>
+              <a:rPr lang="zh-CN" altLang="en-US" sz="2000" dirty="0"/>
               <a:t>①、送给</a:t>
             </a:r>
             <a:r>
-              <a:rPr lang="en-US" altLang="zh-CN" sz="2000" dirty="0" smtClean="0"/>
+              <a:rPr lang="en-US" altLang="zh-CN" sz="2000" dirty="0"/>
               <a:t>AHB</a:t>
             </a:r>
             <a:r>
-              <a:rPr lang="zh-CN" altLang="en-US" sz="2000" dirty="0" smtClean="0"/>
+              <a:rPr lang="zh-CN" altLang="en-US" sz="2000" dirty="0"/>
               <a:t>总线、内核、内存和</a:t>
             </a:r>
             <a:r>
-              <a:rPr lang="en-US" altLang="zh-CN" sz="2000" dirty="0" smtClean="0"/>
+              <a:rPr lang="en-US" altLang="zh-CN" sz="2000" dirty="0"/>
               <a:t>DMA</a:t>
             </a:r>
             <a:r>
-              <a:rPr lang="zh-CN" altLang="en-US" sz="2000" dirty="0" smtClean="0"/>
+              <a:rPr lang="zh-CN" altLang="en-US" sz="2000" dirty="0"/>
               <a:t>使用的</a:t>
             </a:r>
             <a:r>
-              <a:rPr lang="en-US" altLang="zh-CN" sz="2000" dirty="0" smtClean="0"/>
+              <a:rPr lang="en-US" altLang="zh-CN" sz="2000" dirty="0"/>
               <a:t>HCLK</a:t>
             </a:r>
             <a:r>
-              <a:rPr lang="zh-CN" altLang="en-US" sz="2000" dirty="0" smtClean="0"/>
+              <a:rPr lang="zh-CN" altLang="en-US" sz="2000" dirty="0"/>
               <a:t>时钟。</a:t>
             </a:r>
           </a:p>
@@ -8364,23 +8100,23 @@
               </a:lnSpc>
             </a:pPr>
             <a:r>
-              <a:rPr lang="zh-CN" altLang="en-US" sz="2000" dirty="0" smtClean="0"/>
+              <a:rPr lang="zh-CN" altLang="en-US" sz="2000" dirty="0"/>
               <a:t>②、通过</a:t>
             </a:r>
             <a:r>
-              <a:rPr lang="en-US" altLang="zh-CN" sz="2000" dirty="0" smtClean="0"/>
+              <a:rPr lang="en-US" altLang="zh-CN" sz="2000" dirty="0"/>
               <a:t>8</a:t>
             </a:r>
             <a:r>
-              <a:rPr lang="zh-CN" altLang="en-US" sz="2000" dirty="0" smtClean="0"/>
+              <a:rPr lang="zh-CN" altLang="en-US" sz="2000" dirty="0"/>
               <a:t>分频后送给</a:t>
             </a:r>
             <a:r>
-              <a:rPr lang="en-US" altLang="zh-CN" sz="2000" dirty="0" smtClean="0"/>
+              <a:rPr lang="en-US" altLang="zh-CN" sz="2000" dirty="0"/>
               <a:t>Cortex</a:t>
             </a:r>
             <a:r>
-              <a:rPr lang="zh-CN" altLang="en-US" sz="2000" dirty="0" smtClean="0"/>
+              <a:rPr lang="zh-CN" altLang="en-US" sz="2000" dirty="0"/>
               <a:t>的系统定时器时钟。</a:t>
             </a:r>
           </a:p>
@@ -8391,26 +8127,26 @@
               </a:lnSpc>
             </a:pPr>
             <a:r>
-              <a:rPr lang="zh-CN" altLang="en-US" sz="2000" dirty="0" smtClean="0"/>
+              <a:rPr lang="zh-CN" altLang="en-US" sz="2000" dirty="0"/>
               <a:t>③、直接送给</a:t>
             </a:r>
             <a:r>
-              <a:rPr lang="en-US" altLang="zh-CN" sz="2000" dirty="0" smtClean="0"/>
+              <a:rPr lang="en-US" altLang="zh-CN" sz="2000" dirty="0"/>
               <a:t>Cortex</a:t>
             </a:r>
             <a:r>
-              <a:rPr lang="zh-CN" altLang="en-US" sz="2000" dirty="0" smtClean="0"/>
+              <a:rPr lang="zh-CN" altLang="en-US" sz="2000" dirty="0"/>
               <a:t>的空闲运行时钟</a:t>
             </a:r>
             <a:r>
-              <a:rPr lang="en-US" altLang="zh-CN" sz="2000" dirty="0" smtClean="0"/>
+              <a:rPr lang="en-US" altLang="zh-CN" sz="2000" dirty="0"/>
               <a:t>FCLK</a:t>
             </a:r>
             <a:r>
-              <a:rPr lang="zh-CN" altLang="en-US" sz="2000" dirty="0" smtClean="0"/>
+              <a:rPr lang="zh-CN" altLang="en-US" sz="2000" dirty="0"/>
               <a:t>。</a:t>
             </a:r>
-            <a:endParaRPr lang="en-US" altLang="zh-CN" sz="2000" dirty="0" smtClean="0"/>
+            <a:endParaRPr lang="en-US" altLang="zh-CN" sz="2000" dirty="0"/>
           </a:p>
           <a:p>
             <a:pPr>
@@ -8419,26 +8155,26 @@
               </a:lnSpc>
             </a:pPr>
             <a:r>
-              <a:rPr lang="zh-CN" altLang="en-US" sz="2000" dirty="0" smtClean="0"/>
+              <a:rPr lang="zh-CN" altLang="en-US" sz="2000" dirty="0"/>
               <a:t>④、送给</a:t>
             </a:r>
             <a:r>
-              <a:rPr lang="en-US" altLang="zh-CN" sz="2000" dirty="0" smtClean="0"/>
+              <a:rPr lang="en-US" altLang="zh-CN" sz="2000" dirty="0"/>
               <a:t>SDIO</a:t>
             </a:r>
             <a:r>
-              <a:rPr lang="zh-CN" altLang="en-US" sz="2000" dirty="0" smtClean="0"/>
+              <a:rPr lang="zh-CN" altLang="en-US" sz="2000" dirty="0"/>
               <a:t>使用的</a:t>
             </a:r>
             <a:r>
-              <a:rPr lang="en-US" altLang="zh-CN" sz="2000" dirty="0" smtClean="0"/>
+              <a:rPr lang="en-US" altLang="zh-CN" sz="2000" dirty="0"/>
               <a:t>SDIOCLK</a:t>
             </a:r>
             <a:r>
-              <a:rPr lang="zh-CN" altLang="en-US" sz="2000" dirty="0" smtClean="0"/>
+              <a:rPr lang="zh-CN" altLang="en-US" sz="2000" dirty="0"/>
               <a:t>时钟</a:t>
             </a:r>
-            <a:endParaRPr lang="en-US" altLang="zh-CN" sz="2000" dirty="0" smtClean="0"/>
+            <a:endParaRPr lang="en-US" altLang="zh-CN" sz="2000" dirty="0"/>
           </a:p>
           <a:p>
             <a:pPr>
@@ -8447,26 +8183,26 @@
               </a:lnSpc>
             </a:pPr>
             <a:r>
-              <a:rPr lang="zh-CN" altLang="en-US" sz="2000" dirty="0" smtClean="0"/>
+              <a:rPr lang="zh-CN" altLang="en-US" sz="2000" dirty="0"/>
               <a:t>⑤、送给</a:t>
             </a:r>
             <a:r>
-              <a:rPr lang="en-US" altLang="zh-CN" sz="2000" dirty="0" smtClean="0"/>
+              <a:rPr lang="en-US" altLang="zh-CN" sz="2000" dirty="0"/>
               <a:t>FSMC</a:t>
             </a:r>
             <a:r>
-              <a:rPr lang="zh-CN" altLang="en-US" sz="2000" dirty="0" smtClean="0"/>
+              <a:rPr lang="zh-CN" altLang="en-US" sz="2000" dirty="0"/>
               <a:t>使用的</a:t>
             </a:r>
             <a:r>
-              <a:rPr lang="en-US" altLang="zh-CN" sz="2000" dirty="0" smtClean="0"/>
+              <a:rPr lang="en-US" altLang="zh-CN" sz="2000" dirty="0"/>
               <a:t>FSMC</a:t>
             </a:r>
             <a:r>
-              <a:rPr lang="zh-CN" altLang="en-US" sz="2000" dirty="0" smtClean="0"/>
+              <a:rPr lang="zh-CN" altLang="en-US" sz="2000" dirty="0"/>
               <a:t>时钟</a:t>
             </a:r>
-            <a:endParaRPr lang="en-US" altLang="zh-CN" sz="2000" dirty="0" smtClean="0"/>
+            <a:endParaRPr lang="en-US" altLang="zh-CN" sz="2000" dirty="0"/>
           </a:p>
           <a:p>
             <a:pPr>
@@ -8475,34 +8211,34 @@
               </a:lnSpc>
             </a:pPr>
             <a:r>
-              <a:rPr lang="en-US" altLang="zh-CN" sz="2000" dirty="0" smtClean="0"/>
+              <a:rPr lang="en-US" altLang="zh-CN" sz="2000" dirty="0"/>
               <a:t>⑥ </a:t>
             </a:r>
             <a:r>
-              <a:rPr lang="zh-CN" altLang="en-US" sz="2000" dirty="0" smtClean="0"/>
+              <a:rPr lang="zh-CN" altLang="en-US" sz="2000" dirty="0"/>
               <a:t>、</a:t>
             </a:r>
             <a:r>
-              <a:rPr lang="en-US" altLang="zh-CN" sz="2000" dirty="0" smtClean="0"/>
+              <a:rPr lang="en-US" altLang="zh-CN" sz="2000" dirty="0"/>
               <a:t>2</a:t>
             </a:r>
             <a:r>
-              <a:rPr lang="zh-CN" altLang="en-US" sz="2000" dirty="0" smtClean="0"/>
+              <a:rPr lang="zh-CN" altLang="en-US" sz="2000" dirty="0"/>
               <a:t>分频后送给</a:t>
             </a:r>
             <a:r>
-              <a:rPr lang="en-US" altLang="zh-CN" sz="2000" dirty="0" smtClean="0"/>
+              <a:rPr lang="en-US" altLang="zh-CN" sz="2000" dirty="0"/>
               <a:t>SDIO AHB</a:t>
             </a:r>
             <a:r>
-              <a:rPr lang="zh-CN" altLang="en-US" sz="2000" dirty="0" smtClean="0"/>
+              <a:rPr lang="zh-CN" altLang="en-US" sz="2000" dirty="0"/>
               <a:t>接口使用</a:t>
             </a:r>
             <a:r>
-              <a:rPr lang="en-US" altLang="zh-CN" sz="2000" dirty="0" smtClean="0"/>
+              <a:rPr lang="en-US" altLang="zh-CN" sz="2000" dirty="0"/>
               <a:t>(HCLK/2)</a:t>
             </a:r>
-            <a:endParaRPr lang="zh-CN" altLang="en-US" sz="2000" dirty="0" smtClean="0"/>
+            <a:endParaRPr lang="zh-CN" altLang="en-US" sz="2000" dirty="0"/>
           </a:p>
           <a:p>
             <a:pPr lvl="0" indent="261938" fontAlgn="base">
@@ -8516,7 +8252,7 @@
                 <a:spcPct val="0"/>
               </a:spcAft>
             </a:pPr>
-            <a:endParaRPr kumimoji="0" lang="zh-CN" altLang="en-US" sz="2000" b="0" i="0" u="none" strike="noStrike" cap="none" normalizeH="0" baseline="0" dirty="0" smtClean="0">
+            <a:endParaRPr kumimoji="0" lang="zh-CN" altLang="en-US" sz="2000" b="0" i="0" u="none" strike="noStrike" cap="none" normalizeH="0" baseline="0" dirty="0">
               <a:ln>
                 <a:noFill/>
               </a:ln>
@@ -8572,7 +8308,7 @@
 </p:sld>
 </file>
 
-<file path=ppt/slides/slide16.xml><?xml version="1.0" encoding="utf-8"?>
+<file path=ppt/slides/slide15.xml><?xml version="1.0" encoding="utf-8"?>
 <p:sld xmlns:a="http://schemas.openxmlformats.org/drawingml/2006/main" xmlns:r="http://schemas.openxmlformats.org/officeDocument/2006/relationships" xmlns:p="http://schemas.openxmlformats.org/presentationml/2006/main">
   <p:cSld>
     <p:spTree>
@@ -8616,163 +8352,163 @@
               </a:lnSpc>
             </a:pPr>
             <a:r>
-              <a:rPr lang="zh-CN" altLang="en-US" dirty="0" smtClean="0"/>
+              <a:rPr lang="zh-CN" altLang="en-US" dirty="0"/>
               <a:t>⑦ 、</a:t>
             </a:r>
             <a:r>
-              <a:rPr lang="en-US" altLang="zh-CN" b="1" dirty="0" smtClean="0"/>
+              <a:rPr lang="en-US" altLang="zh-CN" b="1" dirty="0"/>
               <a:t>APB1</a:t>
             </a:r>
             <a:r>
-              <a:rPr lang="zh-CN" altLang="en-US" b="1" dirty="0" smtClean="0"/>
+              <a:rPr lang="zh-CN" altLang="en-US" b="1" dirty="0"/>
               <a:t>外设：</a:t>
             </a:r>
             <a:r>
-              <a:rPr lang="zh-CN" altLang="en-US" dirty="0" smtClean="0"/>
+              <a:rPr lang="zh-CN" altLang="en-US" dirty="0"/>
               <a:t>送给</a:t>
             </a:r>
             <a:r>
-              <a:rPr lang="en-US" altLang="zh-CN" dirty="0" smtClean="0"/>
+              <a:rPr lang="en-US" altLang="zh-CN" dirty="0"/>
               <a:t>APB1</a:t>
             </a:r>
             <a:r>
-              <a:rPr lang="zh-CN" altLang="en-US" dirty="0" smtClean="0"/>
+              <a:rPr lang="zh-CN" altLang="en-US" dirty="0"/>
               <a:t>分频器。</a:t>
             </a:r>
             <a:r>
-              <a:rPr lang="en-US" altLang="zh-CN" dirty="0" smtClean="0"/>
+              <a:rPr lang="en-US" altLang="zh-CN" dirty="0"/>
               <a:t>APB1</a:t>
             </a:r>
             <a:r>
-              <a:rPr lang="zh-CN" altLang="en-US" dirty="0" smtClean="0"/>
+              <a:rPr lang="zh-CN" altLang="en-US" dirty="0"/>
               <a:t>分频器可选择</a:t>
             </a:r>
             <a:r>
-              <a:rPr lang="en-US" altLang="zh-CN" dirty="0" smtClean="0"/>
+              <a:rPr lang="en-US" altLang="zh-CN" dirty="0"/>
               <a:t>1</a:t>
             </a:r>
             <a:r>
-              <a:rPr lang="zh-CN" altLang="en-US" dirty="0" smtClean="0"/>
+              <a:rPr lang="zh-CN" altLang="en-US" dirty="0"/>
               <a:t>、</a:t>
             </a:r>
             <a:r>
-              <a:rPr lang="en-US" altLang="zh-CN" dirty="0" smtClean="0"/>
+              <a:rPr lang="en-US" altLang="zh-CN" dirty="0"/>
               <a:t>2</a:t>
             </a:r>
             <a:r>
-              <a:rPr lang="zh-CN" altLang="en-US" dirty="0" smtClean="0"/>
+              <a:rPr lang="zh-CN" altLang="en-US" dirty="0"/>
               <a:t>、</a:t>
             </a:r>
             <a:r>
-              <a:rPr lang="en-US" altLang="zh-CN" dirty="0" smtClean="0"/>
+              <a:rPr lang="en-US" altLang="zh-CN" dirty="0"/>
               <a:t>4</a:t>
             </a:r>
             <a:r>
-              <a:rPr lang="zh-CN" altLang="en-US" dirty="0" smtClean="0"/>
+              <a:rPr lang="zh-CN" altLang="en-US" dirty="0"/>
               <a:t>、</a:t>
             </a:r>
             <a:r>
-              <a:rPr lang="en-US" altLang="zh-CN" dirty="0" smtClean="0"/>
+              <a:rPr lang="en-US" altLang="zh-CN" dirty="0"/>
               <a:t>8</a:t>
             </a:r>
             <a:r>
-              <a:rPr lang="zh-CN" altLang="en-US" dirty="0" smtClean="0"/>
+              <a:rPr lang="zh-CN" altLang="en-US" dirty="0"/>
               <a:t>、</a:t>
             </a:r>
             <a:r>
-              <a:rPr lang="en-US" altLang="zh-CN" dirty="0" smtClean="0"/>
+              <a:rPr lang="en-US" altLang="zh-CN" dirty="0"/>
               <a:t>16</a:t>
             </a:r>
             <a:r>
-              <a:rPr lang="zh-CN" altLang="en-US" dirty="0" smtClean="0"/>
+              <a:rPr lang="zh-CN" altLang="en-US" dirty="0"/>
               <a:t>分频，其输出一路供</a:t>
             </a:r>
             <a:r>
-              <a:rPr lang="en-US" altLang="zh-CN" dirty="0" smtClean="0"/>
+              <a:rPr lang="en-US" altLang="zh-CN" dirty="0"/>
               <a:t>APB1</a:t>
             </a:r>
             <a:r>
-              <a:rPr lang="zh-CN" altLang="en-US" dirty="0" smtClean="0"/>
+              <a:rPr lang="zh-CN" altLang="en-US" dirty="0"/>
               <a:t>外设使用</a:t>
             </a:r>
             <a:r>
-              <a:rPr lang="en-US" altLang="zh-CN" dirty="0" smtClean="0"/>
+              <a:rPr lang="en-US" altLang="zh-CN" dirty="0"/>
               <a:t>(PCLK1</a:t>
             </a:r>
             <a:r>
-              <a:rPr lang="zh-CN" altLang="en-US" dirty="0" smtClean="0"/>
+              <a:rPr lang="zh-CN" altLang="en-US" dirty="0"/>
               <a:t>，最大频率</a:t>
             </a:r>
             <a:r>
-              <a:rPr lang="en-US" altLang="zh-CN" dirty="0" smtClean="0"/>
+              <a:rPr lang="en-US" altLang="zh-CN" dirty="0"/>
               <a:t>36MHz)</a:t>
             </a:r>
             <a:r>
-              <a:rPr lang="zh-CN" altLang="en-US" dirty="0" smtClean="0"/>
+              <a:rPr lang="zh-CN" altLang="en-US" dirty="0"/>
               <a:t>，另一路送给定时器</a:t>
             </a:r>
             <a:r>
-              <a:rPr lang="en-US" altLang="zh-CN" dirty="0" smtClean="0"/>
+              <a:rPr lang="en-US" altLang="zh-CN" dirty="0"/>
               <a:t>(Timer)2</a:t>
             </a:r>
             <a:r>
-              <a:rPr lang="zh-CN" altLang="en-US" dirty="0" smtClean="0"/>
+              <a:rPr lang="zh-CN" altLang="en-US" dirty="0"/>
               <a:t>、</a:t>
             </a:r>
             <a:r>
-              <a:rPr lang="en-US" altLang="zh-CN" dirty="0" smtClean="0"/>
+              <a:rPr lang="en-US" altLang="zh-CN" dirty="0"/>
               <a:t>3</a:t>
             </a:r>
             <a:r>
-              <a:rPr lang="zh-CN" altLang="en-US" dirty="0" smtClean="0"/>
+              <a:rPr lang="zh-CN" altLang="en-US" dirty="0"/>
               <a:t>、</a:t>
             </a:r>
             <a:r>
-              <a:rPr lang="en-US" altLang="zh-CN" dirty="0" smtClean="0"/>
+              <a:rPr lang="en-US" altLang="zh-CN" dirty="0"/>
               <a:t>4</a:t>
             </a:r>
             <a:r>
-              <a:rPr lang="zh-CN" altLang="en-US" dirty="0" smtClean="0"/>
+              <a:rPr lang="zh-CN" altLang="en-US" dirty="0"/>
               <a:t>倍频器使用。该倍频器可选择</a:t>
             </a:r>
             <a:r>
-              <a:rPr lang="en-US" altLang="zh-CN" dirty="0" smtClean="0"/>
+              <a:rPr lang="en-US" altLang="zh-CN" dirty="0"/>
               <a:t>1</a:t>
             </a:r>
             <a:r>
-              <a:rPr lang="zh-CN" altLang="en-US" dirty="0" smtClean="0"/>
+              <a:rPr lang="zh-CN" altLang="en-US" dirty="0"/>
               <a:t>或者</a:t>
             </a:r>
             <a:r>
-              <a:rPr lang="en-US" altLang="zh-CN" dirty="0" smtClean="0"/>
+              <a:rPr lang="en-US" altLang="zh-CN" dirty="0"/>
               <a:t>2</a:t>
             </a:r>
             <a:r>
-              <a:rPr lang="zh-CN" altLang="en-US" dirty="0" smtClean="0"/>
+              <a:rPr lang="zh-CN" altLang="en-US" dirty="0"/>
               <a:t>倍频，时钟输出供定时器</a:t>
             </a:r>
             <a:r>
-              <a:rPr lang="en-US" altLang="zh-CN" dirty="0" smtClean="0"/>
+              <a:rPr lang="en-US" altLang="zh-CN" dirty="0"/>
               <a:t>2</a:t>
             </a:r>
             <a:r>
-              <a:rPr lang="zh-CN" altLang="en-US" dirty="0" smtClean="0"/>
+              <a:rPr lang="zh-CN" altLang="en-US" dirty="0"/>
               <a:t>、</a:t>
             </a:r>
             <a:r>
-              <a:rPr lang="en-US" altLang="zh-CN" dirty="0" smtClean="0"/>
+              <a:rPr lang="en-US" altLang="zh-CN" dirty="0"/>
               <a:t>3</a:t>
             </a:r>
             <a:r>
-              <a:rPr lang="zh-CN" altLang="en-US" dirty="0" smtClean="0"/>
+              <a:rPr lang="zh-CN" altLang="en-US" dirty="0"/>
               <a:t>、</a:t>
             </a:r>
             <a:r>
-              <a:rPr lang="en-US" altLang="zh-CN" dirty="0" smtClean="0"/>
+              <a:rPr lang="en-US" altLang="zh-CN" dirty="0"/>
               <a:t>4</a:t>
             </a:r>
             <a:r>
-              <a:rPr lang="zh-CN" altLang="en-US" dirty="0" smtClean="0"/>
+              <a:rPr lang="zh-CN" altLang="en-US" dirty="0"/>
               <a:t>使用。</a:t>
             </a:r>
           </a:p>
@@ -8783,198 +8519,198 @@
               </a:lnSpc>
             </a:pPr>
             <a:r>
-              <a:rPr lang="zh-CN" altLang="en-US" dirty="0" smtClean="0"/>
+              <a:rPr lang="zh-CN" altLang="en-US" dirty="0"/>
               <a:t>⑧ 、</a:t>
             </a:r>
             <a:r>
-              <a:rPr lang="en-US" altLang="zh-CN" b="1" dirty="0" smtClean="0"/>
+              <a:rPr lang="en-US" altLang="zh-CN" b="1" dirty="0"/>
               <a:t>APB2</a:t>
             </a:r>
             <a:r>
-              <a:rPr lang="zh-CN" altLang="en-US" b="1" dirty="0" smtClean="0"/>
+              <a:rPr lang="zh-CN" altLang="en-US" b="1" dirty="0"/>
               <a:t>外设：</a:t>
             </a:r>
             <a:r>
-              <a:rPr lang="zh-CN" altLang="en-US" dirty="0" smtClean="0"/>
+              <a:rPr lang="zh-CN" altLang="en-US" dirty="0"/>
               <a:t>送给</a:t>
             </a:r>
             <a:r>
-              <a:rPr lang="en-US" altLang="zh-CN" dirty="0" smtClean="0"/>
+              <a:rPr lang="en-US" altLang="zh-CN" dirty="0"/>
               <a:t>APB2</a:t>
             </a:r>
             <a:r>
-              <a:rPr lang="zh-CN" altLang="en-US" dirty="0" smtClean="0"/>
+              <a:rPr lang="zh-CN" altLang="en-US" dirty="0"/>
               <a:t>分频器。</a:t>
             </a:r>
             <a:r>
-              <a:rPr lang="en-US" altLang="zh-CN" dirty="0" smtClean="0"/>
+              <a:rPr lang="en-US" altLang="zh-CN" dirty="0"/>
               <a:t>APB2</a:t>
             </a:r>
             <a:r>
-              <a:rPr lang="zh-CN" altLang="en-US" dirty="0" smtClean="0"/>
+              <a:rPr lang="zh-CN" altLang="en-US" dirty="0"/>
               <a:t>分频器可选择</a:t>
             </a:r>
             <a:r>
-              <a:rPr lang="en-US" altLang="zh-CN" dirty="0" smtClean="0"/>
+              <a:rPr lang="en-US" altLang="zh-CN" dirty="0"/>
               <a:t>1</a:t>
             </a:r>
             <a:r>
-              <a:rPr lang="zh-CN" altLang="en-US" dirty="0" smtClean="0"/>
+              <a:rPr lang="zh-CN" altLang="en-US" dirty="0"/>
               <a:t>、</a:t>
             </a:r>
             <a:r>
-              <a:rPr lang="en-US" altLang="zh-CN" dirty="0" smtClean="0"/>
+              <a:rPr lang="en-US" altLang="zh-CN" dirty="0"/>
               <a:t>2</a:t>
             </a:r>
             <a:r>
-              <a:rPr lang="zh-CN" altLang="en-US" dirty="0" smtClean="0"/>
+              <a:rPr lang="zh-CN" altLang="en-US" dirty="0"/>
               <a:t>、</a:t>
             </a:r>
             <a:r>
-              <a:rPr lang="en-US" altLang="zh-CN" dirty="0" smtClean="0"/>
+              <a:rPr lang="en-US" altLang="zh-CN" dirty="0"/>
               <a:t>4</a:t>
             </a:r>
             <a:r>
-              <a:rPr lang="zh-CN" altLang="en-US" dirty="0" smtClean="0"/>
+              <a:rPr lang="zh-CN" altLang="en-US" dirty="0"/>
               <a:t>、</a:t>
             </a:r>
             <a:r>
-              <a:rPr lang="en-US" altLang="zh-CN" dirty="0" smtClean="0"/>
+              <a:rPr lang="en-US" altLang="zh-CN" dirty="0"/>
               <a:t>8</a:t>
             </a:r>
             <a:r>
-              <a:rPr lang="zh-CN" altLang="en-US" dirty="0" smtClean="0"/>
+              <a:rPr lang="zh-CN" altLang="en-US" dirty="0"/>
               <a:t>、</a:t>
             </a:r>
             <a:r>
-              <a:rPr lang="en-US" altLang="zh-CN" dirty="0" smtClean="0"/>
+              <a:rPr lang="en-US" altLang="zh-CN" dirty="0"/>
               <a:t>16</a:t>
             </a:r>
             <a:r>
-              <a:rPr lang="zh-CN" altLang="en-US" dirty="0" smtClean="0"/>
+              <a:rPr lang="zh-CN" altLang="en-US" dirty="0"/>
               <a:t>分频，其输出一路供</a:t>
             </a:r>
             <a:r>
-              <a:rPr lang="en-US" altLang="zh-CN" dirty="0" smtClean="0"/>
+              <a:rPr lang="en-US" altLang="zh-CN" dirty="0"/>
               <a:t>APB2</a:t>
             </a:r>
             <a:r>
-              <a:rPr lang="zh-CN" altLang="en-US" dirty="0" smtClean="0"/>
+              <a:rPr lang="zh-CN" altLang="en-US" dirty="0"/>
               <a:t>外设使用</a:t>
             </a:r>
             <a:r>
-              <a:rPr lang="en-US" altLang="zh-CN" dirty="0" smtClean="0"/>
+              <a:rPr lang="en-US" altLang="zh-CN" dirty="0"/>
               <a:t>(PCLK2</a:t>
             </a:r>
             <a:r>
-              <a:rPr lang="zh-CN" altLang="en-US" dirty="0" smtClean="0"/>
+              <a:rPr lang="zh-CN" altLang="en-US" dirty="0"/>
               <a:t>，最大频率</a:t>
             </a:r>
             <a:r>
-              <a:rPr lang="en-US" altLang="zh-CN" dirty="0" smtClean="0"/>
+              <a:rPr lang="en-US" altLang="zh-CN" dirty="0"/>
               <a:t>72MHz)</a:t>
             </a:r>
             <a:r>
-              <a:rPr lang="zh-CN" altLang="en-US" dirty="0" smtClean="0"/>
+              <a:rPr lang="zh-CN" altLang="en-US" dirty="0"/>
               <a:t>，另一路送给定时器</a:t>
             </a:r>
             <a:r>
-              <a:rPr lang="en-US" altLang="zh-CN" dirty="0" smtClean="0"/>
+              <a:rPr lang="en-US" altLang="zh-CN" dirty="0"/>
               <a:t>(Timer)1</a:t>
             </a:r>
             <a:r>
-              <a:rPr lang="zh-CN" altLang="en-US" dirty="0" smtClean="0"/>
+              <a:rPr lang="zh-CN" altLang="en-US" dirty="0"/>
               <a:t>倍频器使用。该倍频器可选择</a:t>
             </a:r>
             <a:r>
-              <a:rPr lang="en-US" altLang="zh-CN" dirty="0" smtClean="0"/>
+              <a:rPr lang="en-US" altLang="zh-CN" dirty="0"/>
               <a:t>1</a:t>
             </a:r>
             <a:r>
-              <a:rPr lang="zh-CN" altLang="en-US" dirty="0" smtClean="0"/>
+              <a:rPr lang="zh-CN" altLang="en-US" dirty="0"/>
               <a:t>或者</a:t>
             </a:r>
             <a:r>
-              <a:rPr lang="en-US" altLang="zh-CN" dirty="0" smtClean="0"/>
+              <a:rPr lang="en-US" altLang="zh-CN" dirty="0"/>
               <a:t>2</a:t>
             </a:r>
             <a:r>
-              <a:rPr lang="zh-CN" altLang="en-US" dirty="0" smtClean="0"/>
+              <a:rPr lang="zh-CN" altLang="en-US" dirty="0"/>
               <a:t>倍频，时钟输出供定时器</a:t>
             </a:r>
             <a:r>
-              <a:rPr lang="en-US" altLang="zh-CN" dirty="0" smtClean="0"/>
+              <a:rPr lang="en-US" altLang="zh-CN" dirty="0"/>
               <a:t>1</a:t>
             </a:r>
             <a:r>
-              <a:rPr lang="zh-CN" altLang="en-US" dirty="0" smtClean="0"/>
+              <a:rPr lang="zh-CN" altLang="en-US" dirty="0"/>
               <a:t>使用。另外，</a:t>
             </a:r>
             <a:r>
-              <a:rPr lang="en-US" altLang="zh-CN" dirty="0" smtClean="0"/>
+              <a:rPr lang="en-US" altLang="zh-CN" dirty="0"/>
               <a:t>APB2</a:t>
             </a:r>
             <a:r>
-              <a:rPr lang="zh-CN" altLang="en-US" dirty="0" smtClean="0"/>
+              <a:rPr lang="zh-CN" altLang="en-US" dirty="0"/>
               <a:t>分频器还有一路输出供</a:t>
             </a:r>
             <a:r>
-              <a:rPr lang="en-US" altLang="zh-CN" dirty="0" smtClean="0"/>
+              <a:rPr lang="en-US" altLang="zh-CN" dirty="0"/>
               <a:t>ADC</a:t>
             </a:r>
             <a:r>
-              <a:rPr lang="zh-CN" altLang="en-US" dirty="0" smtClean="0"/>
+              <a:rPr lang="zh-CN" altLang="en-US" dirty="0"/>
               <a:t>分频器使用，分频后送给</a:t>
             </a:r>
             <a:r>
-              <a:rPr lang="en-US" altLang="zh-CN" dirty="0" smtClean="0"/>
+              <a:rPr lang="en-US" altLang="zh-CN" dirty="0"/>
               <a:t>ADC</a:t>
             </a:r>
             <a:r>
-              <a:rPr lang="zh-CN" altLang="en-US" dirty="0" smtClean="0"/>
+              <a:rPr lang="zh-CN" altLang="en-US" dirty="0"/>
               <a:t>模块使用。</a:t>
             </a:r>
             <a:r>
-              <a:rPr lang="en-US" altLang="zh-CN" dirty="0" smtClean="0"/>
+              <a:rPr lang="en-US" altLang="zh-CN" dirty="0"/>
               <a:t>ADC</a:t>
             </a:r>
             <a:r>
-              <a:rPr lang="zh-CN" altLang="en-US" dirty="0" smtClean="0"/>
+              <a:rPr lang="zh-CN" altLang="en-US" dirty="0"/>
               <a:t>分频器可选择为</a:t>
             </a:r>
             <a:r>
-              <a:rPr lang="en-US" altLang="zh-CN" dirty="0" smtClean="0"/>
+              <a:rPr lang="en-US" altLang="zh-CN" dirty="0"/>
               <a:t>2</a:t>
             </a:r>
             <a:r>
-              <a:rPr lang="zh-CN" altLang="en-US" dirty="0" smtClean="0"/>
+              <a:rPr lang="zh-CN" altLang="en-US" dirty="0"/>
               <a:t>、</a:t>
             </a:r>
             <a:r>
-              <a:rPr lang="en-US" altLang="zh-CN" dirty="0" smtClean="0"/>
+              <a:rPr lang="en-US" altLang="zh-CN" dirty="0"/>
               <a:t>4</a:t>
             </a:r>
             <a:r>
-              <a:rPr lang="zh-CN" altLang="en-US" dirty="0" smtClean="0"/>
+              <a:rPr lang="zh-CN" altLang="en-US" dirty="0"/>
               <a:t>、</a:t>
             </a:r>
             <a:r>
-              <a:rPr lang="en-US" altLang="zh-CN" dirty="0" smtClean="0"/>
+              <a:rPr lang="en-US" altLang="zh-CN" dirty="0"/>
               <a:t>6</a:t>
             </a:r>
             <a:r>
-              <a:rPr lang="zh-CN" altLang="en-US" dirty="0" smtClean="0"/>
+              <a:rPr lang="zh-CN" altLang="en-US" dirty="0"/>
               <a:t>、</a:t>
             </a:r>
             <a:r>
-              <a:rPr lang="en-US" altLang="zh-CN" dirty="0" smtClean="0"/>
+              <a:rPr lang="en-US" altLang="zh-CN" dirty="0"/>
               <a:t>8</a:t>
             </a:r>
             <a:r>
-              <a:rPr lang="zh-CN" altLang="en-US" dirty="0" smtClean="0"/>
+              <a:rPr lang="zh-CN" altLang="en-US" dirty="0"/>
               <a:t>分频。</a:t>
             </a:r>
-            <a:endParaRPr lang="en-US" altLang="zh-CN" dirty="0" smtClean="0"/>
+            <a:endParaRPr lang="en-US" altLang="zh-CN" dirty="0"/>
           </a:p>
           <a:p>
             <a:pPr>
@@ -8983,158 +8719,158 @@
               </a:lnSpc>
             </a:pPr>
             <a:r>
-              <a:rPr lang="zh-CN" altLang="en-US" b="1" dirty="0" smtClean="0"/>
+              <a:rPr lang="zh-CN" altLang="en-US" b="1" dirty="0"/>
               <a:t>连接在</a:t>
             </a:r>
             <a:r>
-              <a:rPr lang="en-US" altLang="zh-CN" b="1" dirty="0" smtClean="0"/>
+              <a:rPr lang="en-US" altLang="zh-CN" b="1" dirty="0"/>
               <a:t>APB1(</a:t>
             </a:r>
             <a:r>
-              <a:rPr lang="zh-CN" altLang="en-US" b="1" dirty="0" smtClean="0"/>
+              <a:rPr lang="zh-CN" altLang="en-US" b="1" dirty="0"/>
               <a:t>低速外设</a:t>
             </a:r>
             <a:r>
-              <a:rPr lang="en-US" altLang="zh-CN" b="1" dirty="0" smtClean="0"/>
+              <a:rPr lang="en-US" altLang="zh-CN" b="1" dirty="0"/>
               <a:t>)</a:t>
             </a:r>
             <a:r>
-              <a:rPr lang="zh-CN" altLang="en-US" b="1" dirty="0" smtClean="0"/>
+              <a:rPr lang="zh-CN" altLang="en-US" b="1" dirty="0"/>
               <a:t>上的设备有</a:t>
             </a:r>
             <a:r>
-              <a:rPr lang="zh-CN" altLang="en-US" dirty="0" smtClean="0"/>
+              <a:rPr lang="zh-CN" altLang="en-US" dirty="0"/>
               <a:t>：电源接口、备份接口、</a:t>
             </a:r>
             <a:r>
-              <a:rPr lang="en-US" altLang="zh-CN" dirty="0" smtClean="0"/>
+              <a:rPr lang="en-US" altLang="zh-CN" dirty="0"/>
               <a:t>CAN</a:t>
             </a:r>
             <a:r>
-              <a:rPr lang="zh-CN" altLang="en-US" dirty="0" smtClean="0"/>
+              <a:rPr lang="zh-CN" altLang="en-US" dirty="0"/>
               <a:t>、</a:t>
             </a:r>
             <a:r>
-              <a:rPr lang="en-US" altLang="zh-CN" dirty="0" smtClean="0"/>
+              <a:rPr lang="en-US" altLang="zh-CN" dirty="0"/>
               <a:t>USB</a:t>
             </a:r>
             <a:r>
-              <a:rPr lang="zh-CN" altLang="en-US" dirty="0" smtClean="0"/>
+              <a:rPr lang="zh-CN" altLang="en-US" dirty="0"/>
               <a:t>、</a:t>
             </a:r>
             <a:r>
-              <a:rPr lang="en-US" altLang="zh-CN" dirty="0" smtClean="0"/>
+              <a:rPr lang="en-US" altLang="zh-CN" dirty="0"/>
               <a:t>I2C1</a:t>
             </a:r>
             <a:r>
-              <a:rPr lang="zh-CN" altLang="en-US" dirty="0" smtClean="0"/>
+              <a:rPr lang="zh-CN" altLang="en-US" dirty="0"/>
               <a:t>、</a:t>
             </a:r>
             <a:r>
-              <a:rPr lang="en-US" altLang="zh-CN" dirty="0" smtClean="0"/>
+              <a:rPr lang="en-US" altLang="zh-CN" dirty="0"/>
               <a:t>I2C2</a:t>
             </a:r>
             <a:r>
-              <a:rPr lang="zh-CN" altLang="en-US" dirty="0" smtClean="0"/>
+              <a:rPr lang="zh-CN" altLang="en-US" dirty="0"/>
               <a:t>、</a:t>
             </a:r>
             <a:r>
-              <a:rPr lang="en-US" altLang="zh-CN" dirty="0" smtClean="0"/>
+              <a:rPr lang="en-US" altLang="zh-CN" dirty="0"/>
               <a:t>UART2</a:t>
             </a:r>
             <a:r>
-              <a:rPr lang="zh-CN" altLang="en-US" dirty="0" smtClean="0"/>
+              <a:rPr lang="zh-CN" altLang="en-US" dirty="0"/>
               <a:t>、</a:t>
             </a:r>
             <a:r>
-              <a:rPr lang="en-US" altLang="zh-CN" dirty="0" smtClean="0"/>
+              <a:rPr lang="en-US" altLang="zh-CN" dirty="0"/>
               <a:t>UART3</a:t>
             </a:r>
             <a:r>
-              <a:rPr lang="zh-CN" altLang="en-US" dirty="0" smtClean="0"/>
+              <a:rPr lang="zh-CN" altLang="en-US" dirty="0"/>
               <a:t>、</a:t>
             </a:r>
             <a:r>
-              <a:rPr lang="en-US" altLang="zh-CN" dirty="0" smtClean="0"/>
+              <a:rPr lang="en-US" altLang="zh-CN" dirty="0"/>
               <a:t>SPI2</a:t>
             </a:r>
             <a:r>
-              <a:rPr lang="zh-CN" altLang="en-US" dirty="0" smtClean="0"/>
+              <a:rPr lang="zh-CN" altLang="en-US" dirty="0"/>
               <a:t>、窗口看门狗、</a:t>
             </a:r>
             <a:r>
-              <a:rPr lang="en-US" altLang="zh-CN" dirty="0" smtClean="0"/>
+              <a:rPr lang="en-US" altLang="zh-CN" dirty="0"/>
               <a:t>Timer2</a:t>
             </a:r>
             <a:r>
-              <a:rPr lang="zh-CN" altLang="en-US" dirty="0" smtClean="0"/>
+              <a:rPr lang="zh-CN" altLang="en-US" dirty="0"/>
               <a:t>、</a:t>
             </a:r>
             <a:r>
-              <a:rPr lang="en-US" altLang="zh-CN" dirty="0" smtClean="0"/>
+              <a:rPr lang="en-US" altLang="zh-CN" dirty="0"/>
               <a:t>Timer3</a:t>
             </a:r>
             <a:r>
-              <a:rPr lang="zh-CN" altLang="en-US" dirty="0" smtClean="0"/>
+              <a:rPr lang="zh-CN" altLang="en-US" dirty="0"/>
               <a:t>、</a:t>
             </a:r>
             <a:r>
-              <a:rPr lang="en-US" altLang="zh-CN" dirty="0" smtClean="0"/>
+              <a:rPr lang="en-US" altLang="zh-CN" dirty="0"/>
               <a:t>Timer4</a:t>
             </a:r>
             <a:r>
-              <a:rPr lang="zh-CN" altLang="en-US" dirty="0" smtClean="0"/>
+              <a:rPr lang="zh-CN" altLang="en-US" dirty="0"/>
               <a:t>。注意</a:t>
             </a:r>
             <a:r>
-              <a:rPr lang="en-US" altLang="zh-CN" dirty="0" smtClean="0"/>
+              <a:rPr lang="en-US" altLang="zh-CN" dirty="0"/>
               <a:t>USB</a:t>
             </a:r>
             <a:r>
-              <a:rPr lang="zh-CN" altLang="en-US" dirty="0" smtClean="0"/>
+              <a:rPr lang="zh-CN" altLang="en-US" dirty="0"/>
               <a:t>模块虽然需要一个单独的</a:t>
             </a:r>
             <a:r>
-              <a:rPr lang="en-US" altLang="zh-CN" dirty="0" smtClean="0"/>
+              <a:rPr lang="en-US" altLang="zh-CN" dirty="0"/>
               <a:t>48MHz</a:t>
             </a:r>
             <a:r>
-              <a:rPr lang="zh-CN" altLang="en-US" dirty="0" smtClean="0"/>
+              <a:rPr lang="zh-CN" altLang="en-US" dirty="0"/>
               <a:t>时钟信号，但它不是供</a:t>
             </a:r>
             <a:r>
-              <a:rPr lang="en-US" altLang="zh-CN" dirty="0" smtClean="0"/>
+              <a:rPr lang="en-US" altLang="zh-CN" dirty="0"/>
               <a:t>USB</a:t>
             </a:r>
             <a:r>
-              <a:rPr lang="zh-CN" altLang="en-US" dirty="0" smtClean="0"/>
+              <a:rPr lang="zh-CN" altLang="en-US" dirty="0"/>
               <a:t>模块工作的时钟，而只是提供给串行接口引擎</a:t>
             </a:r>
             <a:r>
-              <a:rPr lang="en-US" altLang="zh-CN" dirty="0" smtClean="0"/>
+              <a:rPr lang="en-US" altLang="zh-CN" dirty="0"/>
               <a:t>(SIE)</a:t>
             </a:r>
             <a:r>
-              <a:rPr lang="zh-CN" altLang="en-US" dirty="0" smtClean="0"/>
+              <a:rPr lang="zh-CN" altLang="en-US" dirty="0"/>
               <a:t>使用的时钟。</a:t>
             </a:r>
             <a:r>
-              <a:rPr lang="en-US" altLang="zh-CN" dirty="0" smtClean="0"/>
+              <a:rPr lang="en-US" altLang="zh-CN" dirty="0"/>
               <a:t>USB</a:t>
             </a:r>
             <a:r>
-              <a:rPr lang="zh-CN" altLang="en-US" dirty="0" smtClean="0"/>
+              <a:rPr lang="zh-CN" altLang="en-US" dirty="0"/>
               <a:t>模块工作的时钟应该是由</a:t>
             </a:r>
             <a:r>
-              <a:rPr lang="en-US" altLang="zh-CN" dirty="0" smtClean="0"/>
+              <a:rPr lang="en-US" altLang="zh-CN" dirty="0"/>
               <a:t>APB1</a:t>
             </a:r>
             <a:r>
-              <a:rPr lang="zh-CN" altLang="en-US" dirty="0" smtClean="0"/>
+              <a:rPr lang="zh-CN" altLang="en-US" dirty="0"/>
               <a:t>提供的。</a:t>
             </a:r>
-            <a:endParaRPr lang="en-US" altLang="zh-CN" dirty="0" smtClean="0"/>
+            <a:endParaRPr lang="en-US" altLang="zh-CN" dirty="0"/>
           </a:p>
           <a:p>
             <a:pPr>
@@ -9143,66 +8879,66 @@
               </a:lnSpc>
             </a:pPr>
             <a:r>
-              <a:rPr lang="zh-CN" altLang="en-US" b="1" dirty="0" smtClean="0"/>
+              <a:rPr lang="zh-CN" altLang="en-US" b="1" dirty="0"/>
               <a:t>连接在</a:t>
             </a:r>
             <a:r>
-              <a:rPr lang="en-US" b="1" dirty="0" smtClean="0"/>
+              <a:rPr lang="en-US" b="1" dirty="0"/>
               <a:t>APB2(</a:t>
             </a:r>
             <a:r>
-              <a:rPr lang="zh-CN" altLang="en-US" b="1" dirty="0" smtClean="0"/>
+              <a:rPr lang="zh-CN" altLang="en-US" b="1" dirty="0"/>
               <a:t>高速外设</a:t>
             </a:r>
             <a:r>
-              <a:rPr lang="en-US" altLang="zh-CN" b="1" dirty="0" smtClean="0"/>
+              <a:rPr lang="en-US" altLang="zh-CN" b="1" dirty="0"/>
               <a:t>)</a:t>
             </a:r>
             <a:r>
-              <a:rPr lang="zh-CN" altLang="en-US" b="1" dirty="0" smtClean="0"/>
+              <a:rPr lang="zh-CN" altLang="en-US" b="1" dirty="0"/>
               <a:t>上的设备有</a:t>
             </a:r>
             <a:r>
-              <a:rPr lang="zh-CN" altLang="en-US" dirty="0" smtClean="0"/>
+              <a:rPr lang="zh-CN" altLang="en-US" dirty="0"/>
               <a:t>：</a:t>
             </a:r>
             <a:r>
-              <a:rPr lang="en-US" dirty="0" smtClean="0"/>
+              <a:rPr lang="en-US" dirty="0"/>
               <a:t>UART1、SPI1、Timer1、ADC1、ADC2、</a:t>
             </a:r>
             <a:r>
-              <a:rPr lang="zh-CN" altLang="en-US" dirty="0" smtClean="0"/>
+              <a:rPr lang="zh-CN" altLang="en-US" dirty="0"/>
               <a:t>所有普通</a:t>
             </a:r>
             <a:r>
-              <a:rPr lang="en-US" dirty="0" smtClean="0"/>
+              <a:rPr lang="en-US" dirty="0"/>
               <a:t>IO</a:t>
             </a:r>
             <a:r>
-              <a:rPr lang="zh-CN" altLang="en-US" dirty="0" smtClean="0"/>
+              <a:rPr lang="zh-CN" altLang="en-US" dirty="0"/>
               <a:t>口</a:t>
             </a:r>
             <a:r>
-              <a:rPr lang="en-US" altLang="zh-CN" dirty="0" smtClean="0"/>
+              <a:rPr lang="en-US" altLang="zh-CN" dirty="0"/>
               <a:t>(</a:t>
             </a:r>
             <a:r>
-              <a:rPr lang="en-US" dirty="0" smtClean="0"/>
+              <a:rPr lang="en-US" dirty="0"/>
               <a:t>PA~PE)、</a:t>
             </a:r>
             <a:r>
-              <a:rPr lang="zh-CN" altLang="en-US" dirty="0" smtClean="0"/>
+              <a:rPr lang="zh-CN" altLang="en-US" dirty="0"/>
               <a:t>第二功能</a:t>
             </a:r>
             <a:r>
-              <a:rPr lang="en-US" dirty="0" smtClean="0"/>
+              <a:rPr lang="en-US" dirty="0"/>
               <a:t>IO</a:t>
             </a:r>
             <a:r>
-              <a:rPr lang="zh-CN" altLang="en-US" dirty="0" smtClean="0"/>
+              <a:rPr lang="zh-CN" altLang="en-US" dirty="0"/>
               <a:t>口。</a:t>
             </a:r>
-            <a:endParaRPr lang="en-US" altLang="zh-CN" dirty="0" smtClean="0"/>
+            <a:endParaRPr lang="en-US" altLang="zh-CN" dirty="0"/>
           </a:p>
           <a:p>
             <a:pPr>
@@ -9211,34 +8947,33 @@
               </a:lnSpc>
             </a:pPr>
             <a:r>
-              <a:rPr lang="zh-CN" altLang="en-US" dirty="0" smtClean="0"/>
+              <a:rPr lang="zh-CN" altLang="en-US" dirty="0"/>
               <a:t>在以上的时钟输出中，有很多是带使能控制的，例如</a:t>
             </a:r>
             <a:r>
-              <a:rPr lang="en-US" altLang="zh-CN" dirty="0" smtClean="0"/>
+              <a:rPr lang="en-US" altLang="zh-CN" dirty="0"/>
               <a:t>AHB</a:t>
             </a:r>
             <a:r>
-              <a:rPr lang="zh-CN" altLang="en-US" dirty="0" smtClean="0"/>
+              <a:rPr lang="zh-CN" altLang="en-US" dirty="0"/>
               <a:t>总线时钟、内核时钟、各种</a:t>
             </a:r>
             <a:r>
-              <a:rPr lang="en-US" altLang="zh-CN" dirty="0" smtClean="0"/>
+              <a:rPr lang="en-US" altLang="zh-CN" dirty="0"/>
               <a:t>APB1</a:t>
             </a:r>
             <a:r>
-              <a:rPr lang="zh-CN" altLang="en-US" dirty="0" smtClean="0"/>
+              <a:rPr lang="zh-CN" altLang="en-US" dirty="0"/>
               <a:t>外设、</a:t>
             </a:r>
             <a:r>
-              <a:rPr lang="en-US" altLang="zh-CN" dirty="0" smtClean="0"/>
+              <a:rPr lang="en-US" altLang="zh-CN" dirty="0"/>
               <a:t>APB2</a:t>
             </a:r>
             <a:r>
-              <a:rPr lang="zh-CN" altLang="en-US" dirty="0" smtClean="0"/>
+              <a:rPr lang="zh-CN" altLang="en-US" dirty="0"/>
               <a:t>外设等等。当需要使用某模块时，记得一定要先使能对应的时钟。</a:t>
             </a:r>
-            <a:endParaRPr lang="zh-CN" altLang="en-US" dirty="0"/>
           </a:p>
         </p:txBody>
       </p:sp>
@@ -9250,7 +8985,7 @@
 </p:sld>
 </file>
 
-<file path=ppt/slides/slide17.xml><?xml version="1.0" encoding="utf-8"?>
+<file path=ppt/slides/slide16.xml><?xml version="1.0" encoding="utf-8"?>
 <p:sld xmlns:a="http://schemas.openxmlformats.org/drawingml/2006/main" xmlns:r="http://schemas.openxmlformats.org/officeDocument/2006/relationships" xmlns:p="http://schemas.openxmlformats.org/presentationml/2006/main">
   <p:cSld>
     <p:spTree>
@@ -9294,19 +9029,19 @@
               </a:lnSpc>
             </a:pPr>
             <a:r>
-              <a:rPr lang="en-US" dirty="0" err="1" smtClean="0"/>
+              <a:rPr lang="en-US" dirty="0" err="1"/>
               <a:t>typedef</a:t>
             </a:r>
             <a:r>
-              <a:rPr lang="en-US" dirty="0" smtClean="0"/>
+              <a:rPr lang="en-US" dirty="0"/>
               <a:t> </a:t>
             </a:r>
             <a:r>
-              <a:rPr lang="en-US" dirty="0" err="1" smtClean="0"/>
+              <a:rPr lang="en-US" dirty="0" err="1"/>
               <a:t>struct</a:t>
             </a:r>
             <a:r>
-              <a:rPr lang="en-US" dirty="0" smtClean="0"/>
+              <a:rPr lang="en-US" dirty="0"/>
               <a:t> </a:t>
             </a:r>
           </a:p>
@@ -9317,7 +9052,7 @@
               </a:lnSpc>
             </a:pPr>
             <a:r>
-              <a:rPr lang="en-US" dirty="0" smtClean="0"/>
+              <a:rPr lang="en-US" dirty="0"/>
               <a:t>{ </a:t>
             </a:r>
           </a:p>
@@ -9328,11 +9063,11 @@
               </a:lnSpc>
             </a:pPr>
             <a:r>
-              <a:rPr lang="en-US" dirty="0" smtClean="0"/>
+              <a:rPr lang="en-US" dirty="0"/>
               <a:t>vu32 CR; //</a:t>
             </a:r>
             <a:r>
-              <a:rPr lang="en-US" dirty="0" smtClean="0">
+              <a:rPr lang="en-US" dirty="0">
                 <a:solidFill>
                   <a:srgbClr val="FF0000"/>
                 </a:solidFill>
@@ -9340,7 +9075,7 @@
               <a:t>HSI,HSE,CSS,PLL</a:t>
             </a:r>
             <a:r>
-              <a:rPr lang="zh-CN" altLang="en-US" dirty="0" smtClean="0">
+              <a:rPr lang="zh-CN" altLang="en-US" dirty="0">
                 <a:solidFill>
                   <a:srgbClr val="FF0000"/>
                 </a:solidFill>
@@ -9355,11 +9090,11 @@
               </a:lnSpc>
             </a:pPr>
             <a:r>
-              <a:rPr lang="en-US" dirty="0" smtClean="0"/>
+              <a:rPr lang="en-US" dirty="0"/>
               <a:t>vu32 CFGR; //</a:t>
             </a:r>
             <a:r>
-              <a:rPr lang="en-US" dirty="0" smtClean="0">
+              <a:rPr lang="en-US" dirty="0">
                 <a:solidFill>
                   <a:srgbClr val="FF0000"/>
                 </a:solidFill>
@@ -9367,22 +9102,14 @@
               <a:t>PLL</a:t>
             </a:r>
             <a:r>
-              <a:rPr lang="zh-CN" altLang="en-US" dirty="0" smtClean="0">
+              <a:rPr lang="zh-CN" altLang="en-US" dirty="0">
                 <a:solidFill>
                   <a:srgbClr val="FF0000"/>
                 </a:solidFill>
               </a:rPr>
-              <a:t>等的时钟源选择以及分频</a:t>
-            </a:r>
-            <a:r>
-              <a:rPr lang="zh-CN" altLang="en-US" dirty="0" smtClean="0">
-                <a:solidFill>
-                  <a:srgbClr val="FF0000"/>
-                </a:solidFill>
-              </a:rPr>
-              <a:t>系</a:t>
-            </a:r>
-            <a:endParaRPr lang="en-US" altLang="zh-CN" dirty="0" smtClean="0">
+              <a:t>等的时钟源选择以及分频系</a:t>
+            </a:r>
+            <a:endParaRPr lang="en-US" altLang="zh-CN" dirty="0">
               <a:solidFill>
                 <a:srgbClr val="FF0000"/>
               </a:solidFill>
@@ -9395,36 +9122,20 @@
               </a:lnSpc>
             </a:pPr>
             <a:r>
-              <a:rPr lang="en-US" altLang="zh-CN" dirty="0" smtClean="0">
+              <a:rPr lang="en-US" altLang="zh-CN" dirty="0">
                 <a:solidFill>
                   <a:srgbClr val="FF0000"/>
                 </a:solidFill>
               </a:rPr>
-              <a:t> </a:t>
-            </a:r>
-            <a:r>
-              <a:rPr lang="en-US" altLang="zh-CN" dirty="0" smtClean="0">
+              <a:t>                     </a:t>
+            </a:r>
+            <a:r>
+              <a:rPr lang="zh-CN" altLang="en-US" dirty="0">
                 <a:solidFill>
                   <a:srgbClr val="FF0000"/>
                 </a:solidFill>
               </a:rPr>
-              <a:t>                    </a:t>
-            </a:r>
-            <a:r>
-              <a:rPr lang="zh-CN" altLang="en-US" dirty="0" smtClean="0">
-                <a:solidFill>
-                  <a:srgbClr val="FF0000"/>
-                </a:solidFill>
-              </a:rPr>
-              <a:t>数</a:t>
-            </a:r>
-            <a:r>
-              <a:rPr lang="zh-CN" altLang="en-US" dirty="0" smtClean="0">
-                <a:solidFill>
-                  <a:srgbClr val="FF0000"/>
-                </a:solidFill>
-              </a:rPr>
-              <a:t>设定 </a:t>
+              <a:t>数设定 </a:t>
             </a:r>
           </a:p>
           <a:p>
@@ -9434,11 +9145,11 @@
               </a:lnSpc>
             </a:pPr>
             <a:r>
-              <a:rPr lang="en-US" dirty="0" smtClean="0"/>
+              <a:rPr lang="en-US" dirty="0"/>
               <a:t>vu32 CIR; // </a:t>
             </a:r>
             <a:r>
-              <a:rPr lang="zh-CN" altLang="en-US" dirty="0" smtClean="0">
+              <a:rPr lang="zh-CN" altLang="en-US" dirty="0">
                 <a:solidFill>
                   <a:srgbClr val="FF0000"/>
                 </a:solidFill>
@@ -9446,7 +9157,7 @@
               <a:t>清除</a:t>
             </a:r>
             <a:r>
-              <a:rPr lang="en-US" altLang="zh-CN" dirty="0" smtClean="0">
+              <a:rPr lang="en-US" altLang="zh-CN" dirty="0">
                 <a:solidFill>
                   <a:srgbClr val="FF0000"/>
                 </a:solidFill>
@@ -9454,7 +9165,7 @@
               <a:t>/</a:t>
             </a:r>
             <a:r>
-              <a:rPr lang="zh-CN" altLang="en-US" dirty="0" smtClean="0">
+              <a:rPr lang="zh-CN" altLang="en-US" dirty="0">
                 <a:solidFill>
                   <a:srgbClr val="FF0000"/>
                 </a:solidFill>
@@ -9469,11 +9180,11 @@
               </a:lnSpc>
             </a:pPr>
             <a:r>
-              <a:rPr lang="en-US" dirty="0" smtClean="0"/>
+              <a:rPr lang="en-US" dirty="0"/>
               <a:t>vu32 APB2RSTR; //</a:t>
             </a:r>
             <a:r>
-              <a:rPr lang="en-US" dirty="0" smtClean="0">
+              <a:rPr lang="en-US" dirty="0">
                 <a:solidFill>
                   <a:srgbClr val="FF0000"/>
                 </a:solidFill>
@@ -9481,7 +9192,7 @@
               <a:t>APB2</a:t>
             </a:r>
             <a:r>
-              <a:rPr lang="zh-CN" altLang="en-US" dirty="0" smtClean="0">
+              <a:rPr lang="zh-CN" altLang="en-US" dirty="0">
                 <a:solidFill>
                   <a:srgbClr val="FF0000"/>
                 </a:solidFill>
@@ -9496,11 +9207,11 @@
               </a:lnSpc>
             </a:pPr>
             <a:r>
-              <a:rPr lang="en-US" dirty="0" smtClean="0"/>
+              <a:rPr lang="en-US" dirty="0"/>
               <a:t>vu32 APB1RSTR; //</a:t>
             </a:r>
             <a:r>
-              <a:rPr lang="en-US" dirty="0" smtClean="0">
+              <a:rPr lang="en-US" dirty="0">
                 <a:solidFill>
                   <a:srgbClr val="FF0000"/>
                 </a:solidFill>
@@ -9508,7 +9219,7 @@
               <a:t>APB1</a:t>
             </a:r>
             <a:r>
-              <a:rPr lang="zh-CN" altLang="en-US" dirty="0" smtClean="0">
+              <a:rPr lang="zh-CN" altLang="en-US" dirty="0">
                 <a:solidFill>
                   <a:srgbClr val="FF0000"/>
                 </a:solidFill>
@@ -9523,11 +9234,11 @@
               </a:lnSpc>
             </a:pPr>
             <a:r>
-              <a:rPr lang="en-US" dirty="0" smtClean="0"/>
+              <a:rPr lang="en-US" dirty="0"/>
               <a:t>vu32 AHBENR; //</a:t>
             </a:r>
             <a:r>
-              <a:rPr lang="en-US" dirty="0" smtClean="0">
+              <a:rPr lang="en-US" dirty="0">
                 <a:solidFill>
                   <a:srgbClr val="FF0000"/>
                 </a:solidFill>
@@ -9535,7 +9246,7 @@
               <a:t>DMA，SDIO</a:t>
             </a:r>
             <a:r>
-              <a:rPr lang="zh-CN" altLang="en-US" dirty="0" smtClean="0">
+              <a:rPr lang="zh-CN" altLang="en-US" dirty="0">
                 <a:solidFill>
                   <a:srgbClr val="FF0000"/>
                 </a:solidFill>
@@ -9550,11 +9261,11 @@
               </a:lnSpc>
             </a:pPr>
             <a:r>
-              <a:rPr lang="en-US" dirty="0" smtClean="0"/>
+              <a:rPr lang="en-US" dirty="0"/>
               <a:t>vu32 APB2ENR; //</a:t>
             </a:r>
             <a:r>
-              <a:rPr lang="en-US" dirty="0" smtClean="0">
+              <a:rPr lang="en-US" dirty="0">
                 <a:solidFill>
                   <a:srgbClr val="FF0000"/>
                 </a:solidFill>
@@ -9562,7 +9273,7 @@
               <a:t>APB2</a:t>
             </a:r>
             <a:r>
-              <a:rPr lang="zh-CN" altLang="en-US" dirty="0" smtClean="0">
+              <a:rPr lang="zh-CN" altLang="en-US" dirty="0">
                 <a:solidFill>
                   <a:srgbClr val="FF0000"/>
                 </a:solidFill>
@@ -9577,11 +9288,11 @@
               </a:lnSpc>
             </a:pPr>
             <a:r>
-              <a:rPr lang="en-US" dirty="0" smtClean="0"/>
+              <a:rPr lang="en-US" dirty="0"/>
               <a:t>vu32 APB1ENR; //</a:t>
             </a:r>
             <a:r>
-              <a:rPr lang="en-US" dirty="0" smtClean="0">
+              <a:rPr lang="en-US" dirty="0">
                 <a:solidFill>
                   <a:srgbClr val="FF0000"/>
                 </a:solidFill>
@@ -9589,7 +9300,7 @@
               <a:t>APB1</a:t>
             </a:r>
             <a:r>
-              <a:rPr lang="zh-CN" altLang="en-US" dirty="0" smtClean="0">
+              <a:rPr lang="zh-CN" altLang="en-US" dirty="0">
                 <a:solidFill>
                   <a:srgbClr val="FF0000"/>
                 </a:solidFill>
@@ -9604,11 +9315,11 @@
               </a:lnSpc>
             </a:pPr>
             <a:r>
-              <a:rPr lang="en-US" dirty="0" smtClean="0"/>
+              <a:rPr lang="en-US" dirty="0"/>
               <a:t>vu32 BDCR; //</a:t>
             </a:r>
             <a:r>
-              <a:rPr lang="zh-CN" altLang="en-US" dirty="0" smtClean="0">
+              <a:rPr lang="zh-CN" altLang="en-US" dirty="0">
                 <a:solidFill>
                   <a:srgbClr val="FF0000"/>
                 </a:solidFill>
@@ -9623,15 +9334,15 @@
               </a:lnSpc>
             </a:pPr>
             <a:r>
-              <a:rPr lang="en-US" dirty="0" smtClean="0"/>
+              <a:rPr lang="en-US" dirty="0"/>
               <a:t>vu32 CSR; } </a:t>
             </a:r>
             <a:r>
-              <a:rPr lang="en-US" dirty="0" err="1" smtClean="0"/>
+              <a:rPr lang="en-US" dirty="0" err="1"/>
               <a:t>RCC_TypeDef</a:t>
             </a:r>
             <a:r>
-              <a:rPr lang="en-US" dirty="0" smtClean="0"/>
+              <a:rPr lang="en-US" dirty="0"/>
               <a:t>; </a:t>
             </a:r>
           </a:p>
@@ -9641,7 +9352,7 @@
                 <a:spcPct val="150000"/>
               </a:lnSpc>
             </a:pPr>
-            <a:endParaRPr lang="en-US" dirty="0" smtClean="0"/>
+            <a:endParaRPr lang="en-US" dirty="0"/>
           </a:p>
         </p:txBody>
       </p:sp>
@@ -9673,10 +9384,10 @@
               </a:lnSpc>
             </a:pPr>
             <a:r>
-              <a:rPr lang="en-US" dirty="0" smtClean="0"/>
+              <a:rPr lang="en-US" dirty="0"/>
               <a:t>#define PHRIPH_BASE   ((u32)0x40000000)</a:t>
             </a:r>
-            <a:endParaRPr lang="zh-CN" altLang="en-US" dirty="0" smtClean="0"/>
+            <a:endParaRPr lang="zh-CN" altLang="en-US" dirty="0"/>
           </a:p>
           <a:p>
             <a:pPr>
@@ -9685,10 +9396,10 @@
               </a:lnSpc>
             </a:pPr>
             <a:r>
-              <a:rPr lang="en-US" dirty="0" smtClean="0"/>
+              <a:rPr lang="en-US" dirty="0"/>
               <a:t>…</a:t>
             </a:r>
-            <a:endParaRPr lang="zh-CN" altLang="en-US" dirty="0" smtClean="0"/>
+            <a:endParaRPr lang="zh-CN" altLang="en-US" dirty="0"/>
           </a:p>
           <a:p>
             <a:pPr>
@@ -9697,10 +9408,10 @@
               </a:lnSpc>
             </a:pPr>
             <a:r>
-              <a:rPr lang="en-US" dirty="0" smtClean="0"/>
+              <a:rPr lang="en-US" dirty="0"/>
               <a:t>#define AHBPHRIPH_BASE   (PHRIPH_BASE+0x20000)</a:t>
             </a:r>
-            <a:endParaRPr lang="zh-CN" altLang="en-US" dirty="0" smtClean="0"/>
+            <a:endParaRPr lang="zh-CN" altLang="en-US" dirty="0"/>
           </a:p>
           <a:p>
             <a:pPr>
@@ -9709,10 +9420,10 @@
               </a:lnSpc>
             </a:pPr>
             <a:r>
-              <a:rPr lang="en-US" dirty="0" smtClean="0"/>
+              <a:rPr lang="en-US" dirty="0"/>
               <a:t>…</a:t>
             </a:r>
-            <a:endParaRPr lang="zh-CN" altLang="en-US" dirty="0" smtClean="0"/>
+            <a:endParaRPr lang="zh-CN" altLang="en-US" dirty="0"/>
           </a:p>
           <a:p>
             <a:pPr>
@@ -9721,10 +9432,10 @@
               </a:lnSpc>
             </a:pPr>
             <a:r>
-              <a:rPr lang="en-US" dirty="0" smtClean="0"/>
+              <a:rPr lang="en-US" dirty="0"/>
               <a:t>#define RCC_BASE    (AHBPHRIPH_BASE+0x1000)</a:t>
             </a:r>
-            <a:endParaRPr lang="zh-CN" altLang="en-US" dirty="0" smtClean="0"/>
+            <a:endParaRPr lang="zh-CN" altLang="en-US" dirty="0"/>
           </a:p>
           <a:p>
             <a:pPr>
@@ -9733,10 +9444,10 @@
               </a:lnSpc>
             </a:pPr>
             <a:r>
-              <a:rPr lang="en-US" dirty="0" smtClean="0"/>
+              <a:rPr lang="en-US" dirty="0"/>
               <a:t>…</a:t>
             </a:r>
-            <a:endParaRPr lang="zh-CN" altLang="en-US" dirty="0" smtClean="0"/>
+            <a:endParaRPr lang="zh-CN" altLang="en-US" dirty="0"/>
           </a:p>
           <a:p>
             <a:pPr>
@@ -9745,18 +9456,18 @@
               </a:lnSpc>
             </a:pPr>
             <a:r>
-              <a:rPr lang="en-US" dirty="0" smtClean="0"/>
+              <a:rPr lang="en-US" dirty="0"/>
               <a:t>#</a:t>
             </a:r>
             <a:r>
-              <a:rPr lang="en-US" dirty="0" err="1" smtClean="0"/>
+              <a:rPr lang="en-US" dirty="0" err="1"/>
               <a:t>ifdef</a:t>
             </a:r>
             <a:r>
-              <a:rPr lang="en-US" dirty="0" smtClean="0"/>
+              <a:rPr lang="en-US" dirty="0"/>
               <a:t> _RCC</a:t>
             </a:r>
-            <a:endParaRPr lang="zh-CN" altLang="en-US" dirty="0" smtClean="0"/>
+            <a:endParaRPr lang="zh-CN" altLang="en-US" dirty="0"/>
           </a:p>
           <a:p>
             <a:pPr>
@@ -9765,26 +9476,18 @@
               </a:lnSpc>
             </a:pPr>
             <a:r>
-              <a:rPr lang="en-US" dirty="0" smtClean="0"/>
-              <a:t>  #define </a:t>
-            </a:r>
-            <a:r>
-              <a:rPr lang="en-US" dirty="0" smtClean="0"/>
-              <a:t>RCC   </a:t>
-            </a:r>
-            <a:r>
-              <a:rPr lang="en-US" dirty="0" smtClean="0"/>
-              <a:t>((</a:t>
-            </a:r>
-            <a:r>
-              <a:rPr lang="en-US" dirty="0" err="1" smtClean="0"/>
+              <a:rPr lang="en-US" dirty="0"/>
+              <a:t>  #define RCC   ((</a:t>
+            </a:r>
+            <a:r>
+              <a:rPr lang="en-US" dirty="0" err="1"/>
               <a:t>RCC_TypeDef</a:t>
             </a:r>
             <a:r>
-              <a:rPr lang="en-US" dirty="0" smtClean="0"/>
+              <a:rPr lang="en-US" dirty="0"/>
               <a:t> *) RCC_BASE))</a:t>
             </a:r>
-            <a:endParaRPr lang="zh-CN" altLang="en-US" dirty="0" smtClean="0"/>
+            <a:endParaRPr lang="zh-CN" altLang="en-US" dirty="0"/>
           </a:p>
           <a:p>
             <a:pPr>
@@ -9793,18 +9496,18 @@
               </a:lnSpc>
             </a:pPr>
             <a:r>
-              <a:rPr lang="en-US" dirty="0" smtClean="0"/>
+              <a:rPr lang="en-US" dirty="0"/>
               <a:t>#</a:t>
             </a:r>
             <a:r>
-              <a:rPr lang="en-US" dirty="0" err="1" smtClean="0"/>
+              <a:rPr lang="en-US" dirty="0" err="1"/>
               <a:t>endif</a:t>
             </a:r>
             <a:r>
-              <a:rPr lang="en-US" dirty="0" smtClean="0"/>
+              <a:rPr lang="en-US" dirty="0"/>
               <a:t> /*_RCC*/</a:t>
             </a:r>
-            <a:endParaRPr lang="zh-CN" altLang="en-US" dirty="0" smtClean="0"/>
+            <a:endParaRPr lang="zh-CN" altLang="en-US" dirty="0"/>
           </a:p>
           <a:p>
             <a:pPr>
@@ -9844,7 +9547,7 @@
               </a:lnSpc>
             </a:pPr>
             <a:r>
-              <a:rPr lang="zh-CN" altLang="en-US" dirty="0" smtClean="0">
+              <a:rPr lang="zh-CN" altLang="en-US" dirty="0">
                 <a:solidFill>
                   <a:srgbClr val="FF0000"/>
                 </a:solidFill>
@@ -9852,7 +9555,7 @@
               <a:t>从宏定义看出，对于程序中所有的</a:t>
             </a:r>
             <a:r>
-              <a:rPr lang="en-US" altLang="zh-CN" dirty="0" smtClean="0">
+              <a:rPr lang="en-US" altLang="zh-CN" dirty="0">
                 <a:solidFill>
                   <a:srgbClr val="FF0000"/>
                 </a:solidFill>
@@ -9860,7 +9563,7 @@
               <a:t>RCC</a:t>
             </a:r>
             <a:r>
-              <a:rPr lang="zh-CN" altLang="en-US" dirty="0" smtClean="0">
+              <a:rPr lang="zh-CN" altLang="en-US" dirty="0">
                 <a:solidFill>
                   <a:srgbClr val="FF0000"/>
                 </a:solidFill>
@@ -9868,7 +9571,7 @@
               <a:t>，编译器预处理程序将它替换成</a:t>
             </a:r>
             <a:r>
-              <a:rPr lang="en-US" dirty="0" smtClean="0">
+              <a:rPr lang="en-US" dirty="0">
                 <a:solidFill>
                   <a:srgbClr val="FF0000"/>
                 </a:solidFill>
@@ -9876,7 +9579,7 @@
               <a:t>RCC   ((</a:t>
             </a:r>
             <a:r>
-              <a:rPr lang="en-US" dirty="0" err="1" smtClean="0">
+              <a:rPr lang="en-US" dirty="0" err="1">
                 <a:solidFill>
                   <a:srgbClr val="FF0000"/>
                 </a:solidFill>
@@ -9884,82 +9587,53 @@
               <a:t>RCC_TypeDef</a:t>
             </a:r>
             <a:r>
-              <a:rPr lang="en-US" dirty="0" smtClean="0">
+              <a:rPr lang="en-US" dirty="0">
                 <a:solidFill>
                   <a:srgbClr val="FF0000"/>
                 </a:solidFill>
               </a:rPr>
-              <a:t> *) </a:t>
-            </a:r>
-            <a:r>
-              <a:rPr lang="en-US" dirty="0" smtClean="0">
+              <a:t> *) 0x40021000), 0x40021000</a:t>
+            </a:r>
+            <a:r>
+              <a:rPr lang="zh-CN" altLang="en-US" dirty="0">
                 <a:solidFill>
                   <a:srgbClr val="FF0000"/>
                 </a:solidFill>
               </a:rPr>
-              <a:t>0x40021000),</a:t>
-            </a:r>
-            <a:r>
-              <a:rPr lang="en-US" dirty="0" smtClean="0">
+              <a:t>是</a:t>
+            </a:r>
+            <a:r>
+              <a:rPr lang="en-US" altLang="zh-CN" dirty="0">
                 <a:solidFill>
                   <a:srgbClr val="FF0000"/>
                 </a:solidFill>
               </a:rPr>
-              <a:t> </a:t>
-            </a:r>
-            <a:r>
-              <a:rPr lang="en-US" dirty="0" smtClean="0">
+              <a:t>RCC</a:t>
+            </a:r>
+            <a:r>
+              <a:rPr lang="zh-CN" altLang="en-US" dirty="0">
                 <a:solidFill>
                   <a:srgbClr val="FF0000"/>
                 </a:solidFill>
               </a:rPr>
-              <a:t>0x40021000</a:t>
-            </a:r>
-            <a:r>
-              <a:rPr lang="zh-CN" altLang="en-US" dirty="0" smtClean="0">
+              <a:t>寄存器的存储映射首地址，首地址加上表</a:t>
+            </a:r>
+            <a:r>
+              <a:rPr lang="en-US" altLang="zh-CN" dirty="0">
                 <a:solidFill>
                   <a:srgbClr val="FF0000"/>
                 </a:solidFill>
               </a:rPr>
-              <a:t>是</a:t>
-            </a:r>
-            <a:r>
-              <a:rPr lang="en-US" altLang="zh-CN" dirty="0" smtClean="0">
+              <a:t>3-2</a:t>
+            </a:r>
+            <a:r>
+              <a:rPr lang="zh-CN" altLang="en-US" dirty="0">
                 <a:solidFill>
                   <a:srgbClr val="FF0000"/>
                 </a:solidFill>
               </a:rPr>
-              <a:t>RCC</a:t>
-            </a:r>
-            <a:r>
-              <a:rPr lang="zh-CN" altLang="en-US" dirty="0" smtClean="0">
-                <a:solidFill>
-                  <a:srgbClr val="FF0000"/>
-                </a:solidFill>
-              </a:rPr>
-              <a:t>寄存器的存储映射首地址，首地址加上表</a:t>
-            </a:r>
-            <a:r>
-              <a:rPr lang="en-US" altLang="zh-CN" dirty="0" smtClean="0">
-                <a:solidFill>
-                  <a:srgbClr val="FF0000"/>
-                </a:solidFill>
-              </a:rPr>
-              <a:t>3-2</a:t>
-            </a:r>
-            <a:r>
-              <a:rPr lang="zh-CN" altLang="en-US" dirty="0" smtClean="0">
-                <a:solidFill>
-                  <a:srgbClr val="FF0000"/>
-                </a:solidFill>
-              </a:rPr>
               <a:t>中各寄存器偏移就是寄存器在存储器中的地址。</a:t>
             </a:r>
-            <a:endParaRPr lang="zh-CN" altLang="en-US" dirty="0">
-              <a:solidFill>
-                <a:srgbClr val="FF0000"/>
-              </a:solidFill>
-            </a:endParaRPr>
           </a:p>
         </p:txBody>
       </p:sp>
@@ -9990,7 +9664,7 @@
               </a:lnSpc>
             </a:pPr>
             <a:r>
-              <a:rPr lang="en-US" altLang="zh-CN" sz="2000" b="1" dirty="0" smtClean="0">
+              <a:rPr lang="en-US" altLang="zh-CN" sz="2000" b="1" dirty="0">
                 <a:solidFill>
                   <a:srgbClr val="7030A0"/>
                 </a:solidFill>
@@ -9998,14 +9672,14 @@
               <a:t>RCC</a:t>
             </a:r>
             <a:r>
-              <a:rPr lang="zh-CN" altLang="en-US" sz="2000" b="1" dirty="0" smtClean="0">
+              <a:rPr lang="zh-CN" altLang="en-US" sz="2000" b="1" dirty="0">
                 <a:solidFill>
                   <a:srgbClr val="7030A0"/>
                 </a:solidFill>
               </a:rPr>
               <a:t>寄存器</a:t>
             </a:r>
-            <a:endParaRPr lang="en-US" altLang="zh-CN" sz="2000" b="1" dirty="0" smtClean="0">
+            <a:endParaRPr lang="en-US" altLang="zh-CN" sz="2000" b="1" dirty="0">
               <a:solidFill>
                 <a:srgbClr val="7030A0"/>
               </a:solidFill>
@@ -10018,18 +9692,17 @@
               </a:lnSpc>
             </a:pPr>
             <a:r>
-              <a:rPr lang="zh-CN" altLang="en-US" b="1" dirty="0" smtClean="0"/>
+              <a:rPr lang="zh-CN" altLang="en-US" b="1" dirty="0"/>
               <a:t>        时钟配置与</a:t>
             </a:r>
             <a:r>
-              <a:rPr lang="en-US" altLang="zh-CN" b="1" dirty="0" smtClean="0"/>
+              <a:rPr lang="en-US" altLang="zh-CN" b="1" dirty="0"/>
               <a:t>RCC</a:t>
             </a:r>
             <a:r>
-              <a:rPr lang="zh-CN" altLang="en-US" b="1" dirty="0" smtClean="0"/>
+              <a:rPr lang="zh-CN" altLang="en-US" b="1" dirty="0"/>
               <a:t>寄存器密切相关，它能管理处理器内部和外部的外设时钟。</a:t>
             </a:r>
-            <a:endParaRPr lang="zh-CN" altLang="en-US" b="1" dirty="0"/>
           </a:p>
         </p:txBody>
       </p:sp>
@@ -10041,7 +9714,7 @@
 </p:sld>
 </file>
 
-<file path=ppt/slides/slide18.xml><?xml version="1.0" encoding="utf-8"?>
+<file path=ppt/slides/slide17.xml><?xml version="1.0" encoding="utf-8"?>
 <p:sld xmlns:a="http://schemas.openxmlformats.org/drawingml/2006/main" xmlns:r="http://schemas.openxmlformats.org/officeDocument/2006/relationships" xmlns:p="http://schemas.openxmlformats.org/presentationml/2006/main">
   <p:cSld>
     <p:spTree>
@@ -10086,50 +9759,45 @@
               </a:lnSpc>
             </a:pPr>
             <a:r>
-              <a:rPr lang="zh-CN" altLang="en-US" dirty="0" smtClean="0"/>
+              <a:rPr lang="zh-CN" altLang="en-US" dirty="0"/>
               <a:t>      在</a:t>
             </a:r>
             <a:r>
-              <a:rPr lang="en-US" dirty="0" smtClean="0"/>
+              <a:rPr lang="en-US" dirty="0"/>
               <a:t>stm32</a:t>
             </a:r>
             <a:r>
-              <a:rPr lang="zh-CN" altLang="en-US" dirty="0" smtClean="0"/>
+              <a:rPr lang="zh-CN" altLang="en-US" dirty="0"/>
               <a:t>固件库</a:t>
             </a:r>
             <a:r>
-              <a:rPr lang="en-US" dirty="0" smtClean="0"/>
+              <a:rPr lang="en-US" dirty="0"/>
               <a:t>3.0</a:t>
             </a:r>
             <a:r>
-              <a:rPr lang="zh-CN" altLang="en-US" dirty="0" smtClean="0"/>
+              <a:rPr lang="zh-CN" altLang="en-US" dirty="0"/>
               <a:t>中对时钟频率的选择进行了大大的简化，原先的一大堆操作都在后台进行。系统给出的函数为</a:t>
             </a:r>
             <a:r>
-              <a:rPr lang="en-US" dirty="0" err="1" smtClean="0"/>
+              <a:rPr lang="en-US" dirty="0" err="1"/>
               <a:t>SystemInit</a:t>
             </a:r>
             <a:r>
-              <a:rPr lang="en-US" dirty="0" smtClean="0"/>
+              <a:rPr lang="en-US" dirty="0"/>
               <a:t>()</a:t>
             </a:r>
             <a:r>
-              <a:rPr lang="zh-CN" altLang="en-US" dirty="0" smtClean="0"/>
+              <a:rPr lang="zh-CN" altLang="en-US" dirty="0"/>
               <a:t>。但在调用前还需要进行一些宏定义的设置，具体的设置在</a:t>
             </a:r>
             <a:r>
-              <a:rPr lang="en-US" dirty="0" smtClean="0"/>
+              <a:rPr lang="en-US" dirty="0"/>
               <a:t>system_stm32f10x.c</a:t>
             </a:r>
             <a:r>
-              <a:rPr lang="zh-CN" altLang="en-US" dirty="0" smtClean="0"/>
-              <a:t>文件中</a:t>
-            </a:r>
-            <a:r>
-              <a:rPr lang="zh-CN" altLang="en-US" dirty="0" smtClean="0"/>
-              <a:t>。</a:t>
-            </a:r>
-            <a:endParaRPr lang="zh-CN" altLang="en-US" dirty="0" smtClean="0"/>
+              <a:rPr lang="zh-CN" altLang="en-US" dirty="0"/>
+              <a:t>文件中。</a:t>
+            </a:r>
           </a:p>
           <a:p>
             <a:pPr>
@@ -10143,18 +9811,14 @@
               <a:buChar char="u"/>
             </a:pPr>
             <a:r>
-              <a:rPr lang="en-US" dirty="0" smtClean="0"/>
-              <a:t> </a:t>
-            </a:r>
-            <a:r>
-              <a:rPr lang="en-US" dirty="0" smtClean="0"/>
-              <a:t>system_stm32f10x.c </a:t>
-            </a:r>
-            <a:r>
-              <a:rPr lang="zh-CN" altLang="en-US" dirty="0" smtClean="0"/>
+              <a:rPr lang="en-US" dirty="0"/>
+              <a:t> system_stm32f10x.c </a:t>
+            </a:r>
+            <a:r>
+              <a:rPr lang="zh-CN" altLang="en-US" dirty="0"/>
               <a:t>中，有这样一个宏定义：</a:t>
             </a:r>
-            <a:endParaRPr lang="en-US" altLang="zh-CN" dirty="0" smtClean="0"/>
+            <a:endParaRPr lang="en-US" altLang="zh-CN" dirty="0"/>
           </a:p>
           <a:p>
             <a:pPr>
@@ -10163,16 +9827,8 @@
               </a:lnSpc>
             </a:pPr>
             <a:r>
-              <a:rPr lang="en-US" dirty="0" smtClean="0"/>
-              <a:t>//#</a:t>
-            </a:r>
-            <a:r>
-              <a:rPr lang="en-US" dirty="0" smtClean="0"/>
-              <a:t>define SYSCLK_FREQ_24MHz </a:t>
-            </a:r>
-            <a:r>
-              <a:rPr lang="en-US" dirty="0" smtClean="0"/>
-              <a:t>24000000</a:t>
+              <a:rPr lang="en-US" dirty="0"/>
+              <a:t>//#define SYSCLK_FREQ_24MHz 24000000</a:t>
             </a:r>
           </a:p>
           <a:p>
@@ -10182,18 +9838,9 @@
               </a:lnSpc>
             </a:pPr>
             <a:r>
-              <a:rPr lang="en-US" dirty="0" smtClean="0"/>
-              <a:t>//#</a:t>
-            </a:r>
-            <a:r>
-              <a:rPr lang="en-US" dirty="0" smtClean="0"/>
-              <a:t>define </a:t>
-            </a:r>
-            <a:r>
-              <a:rPr lang="en-US" dirty="0" smtClean="0"/>
-              <a:t>SYSCLK_FREQ_36MHz 36000000</a:t>
-            </a:r>
-            <a:endParaRPr lang="en-US" dirty="0" smtClean="0"/>
+              <a:rPr lang="en-US" dirty="0"/>
+              <a:t>//#define SYSCLK_FREQ_36MHz 36000000</a:t>
+            </a:r>
           </a:p>
           <a:p>
             <a:pPr>
@@ -10202,18 +9849,9 @@
               </a:lnSpc>
             </a:pPr>
             <a:r>
-              <a:rPr lang="en-US" dirty="0" smtClean="0"/>
-              <a:t>//#</a:t>
-            </a:r>
-            <a:r>
-              <a:rPr lang="en-US" dirty="0" smtClean="0"/>
-              <a:t>define </a:t>
-            </a:r>
-            <a:r>
-              <a:rPr lang="en-US" dirty="0" smtClean="0"/>
-              <a:t>SYSCLK_FREQ_48MHz 48000000</a:t>
-            </a:r>
-            <a:endParaRPr lang="en-US" dirty="0" smtClean="0"/>
+              <a:rPr lang="en-US" dirty="0"/>
+              <a:t>//#define SYSCLK_FREQ_48MHz 48000000</a:t>
+            </a:r>
           </a:p>
           <a:p>
             <a:pPr>
@@ -10222,18 +9860,9 @@
               </a:lnSpc>
             </a:pPr>
             <a:r>
-              <a:rPr lang="en-US" dirty="0" smtClean="0"/>
-              <a:t>//#</a:t>
-            </a:r>
-            <a:r>
-              <a:rPr lang="en-US" dirty="0" smtClean="0"/>
-              <a:t>define </a:t>
-            </a:r>
-            <a:r>
-              <a:rPr lang="en-US" dirty="0" smtClean="0"/>
-              <a:t>SYSCLK_FREQ_56MHz 56000000</a:t>
-            </a:r>
-            <a:endParaRPr lang="en-US" dirty="0" smtClean="0"/>
+              <a:rPr lang="en-US" dirty="0"/>
+              <a:t>//#define SYSCLK_FREQ_56MHz 56000000</a:t>
+            </a:r>
           </a:p>
           <a:p>
             <a:pPr>
@@ -10242,26 +9871,18 @@
               </a:lnSpc>
             </a:pPr>
             <a:r>
-              <a:rPr lang="en-US" b="1" dirty="0" smtClean="0">
+              <a:rPr lang="en-US" b="1" dirty="0">
                 <a:solidFill>
                   <a:srgbClr val="C00000"/>
                 </a:solidFill>
               </a:rPr>
-              <a:t>#</a:t>
-            </a:r>
-            <a:r>
-              <a:rPr lang="en-US" b="1" dirty="0" smtClean="0">
-                <a:solidFill>
-                  <a:srgbClr val="C00000"/>
-                </a:solidFill>
-              </a:rPr>
-              <a:t>define SYSCLK_FREQ_72MHz 72000000</a:t>
-            </a:r>
-            <a:r>
-              <a:rPr lang="en-US" dirty="0" smtClean="0"/>
+              <a:t>#define SYSCLK_FREQ_72MHz 72000000</a:t>
+            </a:r>
+            <a:r>
+              <a:rPr lang="en-US" dirty="0"/>
               <a:t> </a:t>
             </a:r>
-            <a:endParaRPr lang="zh-CN" altLang="en-US" dirty="0" smtClean="0"/>
+            <a:endParaRPr lang="zh-CN" altLang="en-US" dirty="0"/>
           </a:p>
           <a:p>
             <a:pPr>
@@ -10275,70 +9896,69 @@
               <a:buChar char="u"/>
             </a:pPr>
             <a:r>
-              <a:rPr lang="zh-CN" altLang="en-US" dirty="0" smtClean="0"/>
+              <a:rPr lang="zh-CN" altLang="en-US" dirty="0"/>
               <a:t>以下代码定义微处理器频率为</a:t>
             </a:r>
             <a:r>
-              <a:rPr lang="en-US" altLang="zh-CN" dirty="0" smtClean="0"/>
+              <a:rPr lang="en-US" altLang="zh-CN" dirty="0"/>
               <a:t>72MHz</a:t>
             </a:r>
             <a:r>
-              <a:rPr lang="zh-CN" altLang="en-US" dirty="0" smtClean="0"/>
+              <a:rPr lang="zh-CN" altLang="en-US" dirty="0"/>
               <a:t>时各系统的速度，</a:t>
             </a:r>
             <a:r>
-              <a:rPr lang="en-US" altLang="zh-CN" dirty="0" smtClean="0"/>
+              <a:rPr lang="en-US" altLang="zh-CN" dirty="0"/>
               <a:t>.</a:t>
             </a:r>
             <a:r>
-              <a:rPr lang="zh-CN" altLang="en-US" dirty="0" smtClean="0"/>
+              <a:rPr lang="zh-CN" altLang="en-US" dirty="0"/>
               <a:t>他们分别是</a:t>
             </a:r>
             <a:r>
-              <a:rPr lang="en-US" altLang="zh-CN" dirty="0" smtClean="0"/>
+              <a:rPr lang="en-US" altLang="zh-CN" dirty="0"/>
               <a:t>:</a:t>
             </a:r>
             <a:r>
-              <a:rPr lang="zh-CN" altLang="en-US" dirty="0" smtClean="0"/>
+              <a:rPr lang="zh-CN" altLang="en-US" dirty="0"/>
               <a:t>硬件频率</a:t>
             </a:r>
             <a:r>
-              <a:rPr lang="en-US" altLang="zh-CN" dirty="0" smtClean="0"/>
+              <a:rPr lang="en-US" altLang="zh-CN" dirty="0"/>
               <a:t>,</a:t>
             </a:r>
             <a:r>
-              <a:rPr lang="zh-CN" altLang="en-US" dirty="0" smtClean="0"/>
+              <a:rPr lang="zh-CN" altLang="en-US" dirty="0"/>
               <a:t>系统时钟</a:t>
             </a:r>
             <a:r>
-              <a:rPr lang="en-US" altLang="zh-CN" dirty="0" smtClean="0"/>
+              <a:rPr lang="en-US" altLang="zh-CN" dirty="0"/>
               <a:t>,AHB</a:t>
             </a:r>
             <a:r>
-              <a:rPr lang="zh-CN" altLang="en-US" dirty="0" smtClean="0"/>
+              <a:rPr lang="zh-CN" altLang="en-US" dirty="0"/>
               <a:t>总线频率</a:t>
             </a:r>
             <a:r>
-              <a:rPr lang="en-US" altLang="zh-CN" dirty="0" smtClean="0"/>
+              <a:rPr lang="en-US" altLang="zh-CN" dirty="0"/>
               <a:t>,APB1</a:t>
             </a:r>
             <a:r>
-              <a:rPr lang="zh-CN" altLang="en-US" dirty="0" smtClean="0"/>
+              <a:rPr lang="zh-CN" altLang="en-US" dirty="0"/>
               <a:t>总线频率</a:t>
             </a:r>
             <a:r>
-              <a:rPr lang="en-US" altLang="zh-CN" dirty="0" smtClean="0"/>
+              <a:rPr lang="en-US" altLang="zh-CN" dirty="0"/>
               <a:t>,APB2</a:t>
             </a:r>
             <a:r>
-              <a:rPr lang="zh-CN" altLang="en-US" dirty="0" smtClean="0"/>
+              <a:rPr lang="zh-CN" altLang="en-US" dirty="0"/>
               <a:t>总线频率</a:t>
             </a:r>
             <a:r>
-              <a:rPr lang="en-US" altLang="zh-CN" dirty="0" smtClean="0"/>
+              <a:rPr lang="en-US" altLang="zh-CN" dirty="0"/>
               <a:t>.</a:t>
             </a:r>
-            <a:endParaRPr lang="en-US" altLang="zh-CN" dirty="0" smtClean="0"/>
           </a:p>
           <a:p>
             <a:pPr>
@@ -10347,15 +9967,15 @@
               </a:lnSpc>
             </a:pPr>
             <a:r>
-              <a:rPr lang="en-US" dirty="0" smtClean="0"/>
+              <a:rPr lang="en-US" dirty="0"/>
               <a:t>const uint32_t </a:t>
             </a:r>
             <a:r>
-              <a:rPr lang="en-US" dirty="0" err="1" smtClean="0"/>
+              <a:rPr lang="en-US" dirty="0" err="1"/>
               <a:t>SystemFrequency</a:t>
             </a:r>
             <a:r>
-              <a:rPr lang="en-US" dirty="0" smtClean="0"/>
+              <a:rPr lang="en-US" dirty="0"/>
               <a:t>         = SYSCLK_FREQ_72MHz;    </a:t>
             </a:r>
           </a:p>
@@ -10366,15 +9986,15 @@
               </a:lnSpc>
             </a:pPr>
             <a:r>
-              <a:rPr lang="en-US" dirty="0" smtClean="0"/>
+              <a:rPr lang="en-US" dirty="0"/>
               <a:t>const uint32_t </a:t>
             </a:r>
             <a:r>
-              <a:rPr lang="en-US" dirty="0" err="1" smtClean="0"/>
+              <a:rPr lang="en-US" dirty="0" err="1"/>
               <a:t>SystemFrequency_SysClk</a:t>
             </a:r>
             <a:r>
-              <a:rPr lang="en-US" dirty="0" smtClean="0"/>
+              <a:rPr lang="en-US" dirty="0"/>
               <a:t>   = SYSCLK_FREQ_72MHz;    </a:t>
             </a:r>
           </a:p>
@@ -10385,15 +10005,15 @@
               </a:lnSpc>
             </a:pPr>
             <a:r>
-              <a:rPr lang="en-US" dirty="0" smtClean="0"/>
+              <a:rPr lang="en-US" dirty="0"/>
               <a:t>const uint32_t </a:t>
             </a:r>
             <a:r>
-              <a:rPr lang="en-US" dirty="0" err="1" smtClean="0"/>
+              <a:rPr lang="en-US" dirty="0" err="1"/>
               <a:t>SystemFrequency_AHBClk</a:t>
             </a:r>
             <a:r>
-              <a:rPr lang="en-US" dirty="0" smtClean="0"/>
+              <a:rPr lang="en-US" dirty="0"/>
               <a:t>   = SYSCLK_FREQ_72MHz;    </a:t>
             </a:r>
           </a:p>
@@ -10404,7 +10024,7 @@
               </a:lnSpc>
             </a:pPr>
             <a:r>
-              <a:rPr lang="en-US" dirty="0" smtClean="0"/>
+              <a:rPr lang="en-US" dirty="0"/>
               <a:t>const uint32_t SystemFrequency_APB1Clk  = (SYSCLK_FREQ_72MHz/2);</a:t>
             </a:r>
           </a:p>
@@ -10415,7 +10035,7 @@
               </a:lnSpc>
             </a:pPr>
             <a:r>
-              <a:rPr lang="en-US" dirty="0" smtClean="0"/>
+              <a:rPr lang="en-US" dirty="0"/>
               <a:t>const uint32_t SystemFrequency_APB2Clk  = SYSCLK_FREQ_72MHz;</a:t>
             </a:r>
           </a:p>
@@ -10440,7 +10060,7 @@
 </p:sld>
 </file>
 
-<file path=ppt/slides/slide19.xml><?xml version="1.0" encoding="utf-8"?>
+<file path=ppt/slides/slide18.xml><?xml version="1.0" encoding="utf-8"?>
 <p:sld xmlns:a="http://schemas.openxmlformats.org/drawingml/2006/main" xmlns:r="http://schemas.openxmlformats.org/officeDocument/2006/relationships" xmlns:p="http://schemas.openxmlformats.org/presentationml/2006/main">
   <p:cSld>
     <p:spTree>
@@ -10503,34 +10123,30 @@
               </a:spcAft>
             </a:pPr>
             <a:r>
-              <a:rPr lang="zh-CN" altLang="en-US" dirty="0" smtClean="0"/>
-              <a:t>      以下</a:t>
-            </a:r>
-            <a:r>
-              <a:rPr lang="zh-CN" altLang="en-US" dirty="0" smtClean="0"/>
-              <a:t>代码定义微处理器频率为</a:t>
-            </a:r>
-            <a:r>
-              <a:rPr lang="en-US" altLang="zh-CN" dirty="0" smtClean="0"/>
+              <a:rPr lang="zh-CN" altLang="en-US" dirty="0"/>
+              <a:t>      以下代码定义微处理器频率为</a:t>
+            </a:r>
+            <a:r>
+              <a:rPr lang="en-US" altLang="zh-CN" dirty="0"/>
               <a:t>72MHz</a:t>
             </a:r>
             <a:r>
-              <a:rPr lang="zh-CN" altLang="en-US" dirty="0" smtClean="0"/>
+              <a:rPr lang="zh-CN" altLang="en-US" dirty="0"/>
               <a:t>时，设置时钟的函数。此函数被</a:t>
             </a:r>
             <a:r>
-              <a:rPr lang="en-US" altLang="zh-CN" dirty="0" err="1" smtClean="0"/>
+              <a:rPr lang="en-US" altLang="zh-CN" dirty="0" err="1"/>
               <a:t>SetSysClock</a:t>
             </a:r>
             <a:r>
-              <a:rPr lang="en-US" altLang="zh-CN" dirty="0" smtClean="0"/>
+              <a:rPr lang="en-US" altLang="zh-CN" dirty="0"/>
               <a:t>()</a:t>
             </a:r>
             <a:r>
-              <a:rPr lang="zh-CN" altLang="en-US" dirty="0" smtClean="0"/>
+              <a:rPr lang="zh-CN" altLang="en-US" dirty="0"/>
               <a:t>函数调用，而</a:t>
             </a:r>
-            <a:endParaRPr lang="en-US" altLang="zh-CN" dirty="0" smtClean="0"/>
+            <a:endParaRPr lang="en-US" altLang="zh-CN" dirty="0"/>
           </a:p>
           <a:p>
             <a:pPr lvl="0" fontAlgn="base">
@@ -10545,42 +10161,42 @@
               </a:spcAft>
             </a:pPr>
             <a:r>
-              <a:rPr lang="en-US" altLang="zh-CN" dirty="0" err="1" smtClean="0"/>
+              <a:rPr lang="en-US" altLang="zh-CN" dirty="0" err="1"/>
               <a:t>SetSysClock</a:t>
             </a:r>
             <a:r>
-              <a:rPr lang="en-US" altLang="zh-CN" dirty="0" smtClean="0"/>
+              <a:rPr lang="en-US" altLang="zh-CN" dirty="0"/>
               <a:t>()</a:t>
             </a:r>
             <a:r>
-              <a:rPr lang="zh-CN" altLang="en-US" dirty="0" smtClean="0"/>
+              <a:rPr lang="zh-CN" altLang="en-US" dirty="0"/>
               <a:t>函数被</a:t>
             </a:r>
             <a:r>
-              <a:rPr lang="en-US" altLang="zh-CN" dirty="0" err="1" smtClean="0"/>
+              <a:rPr lang="en-US" altLang="zh-CN" dirty="0" err="1"/>
               <a:t>SystemInit</a:t>
             </a:r>
             <a:r>
-              <a:rPr lang="en-US" altLang="zh-CN" dirty="0" smtClean="0"/>
+              <a:rPr lang="en-US" altLang="zh-CN" dirty="0"/>
               <a:t>()</a:t>
             </a:r>
             <a:r>
-              <a:rPr lang="zh-CN" altLang="en-US" dirty="0" smtClean="0"/>
+              <a:rPr lang="zh-CN" altLang="en-US" dirty="0"/>
               <a:t>函数调用。最后在主函数中调用</a:t>
             </a:r>
             <a:r>
-              <a:rPr lang="en-US" altLang="zh-CN" dirty="0" err="1" smtClean="0"/>
+              <a:rPr lang="en-US" altLang="zh-CN" dirty="0" err="1"/>
               <a:t>SystemInit</a:t>
             </a:r>
             <a:r>
-              <a:rPr lang="en-US" altLang="zh-CN" dirty="0" smtClean="0"/>
+              <a:rPr lang="en-US" altLang="zh-CN" dirty="0"/>
               <a:t>()</a:t>
             </a:r>
             <a:r>
-              <a:rPr lang="zh-CN" altLang="en-US" dirty="0" smtClean="0"/>
+              <a:rPr lang="zh-CN" altLang="en-US" dirty="0"/>
               <a:t>函数实现时钟的设置。</a:t>
             </a:r>
-            <a:endParaRPr lang="en-US" altLang="zh-CN" dirty="0" smtClean="0"/>
+            <a:endParaRPr lang="en-US" altLang="zh-CN" dirty="0"/>
           </a:p>
           <a:p>
             <a:pPr>
@@ -10589,15 +10205,15 @@
               </a:lnSpc>
             </a:pPr>
             <a:r>
-              <a:rPr lang="en-US" altLang="en-US" dirty="0" smtClean="0"/>
+              <a:rPr lang="en-US" altLang="en-US" dirty="0"/>
               <a:t>#</a:t>
             </a:r>
             <a:r>
-              <a:rPr lang="en-US" altLang="en-US" dirty="0" err="1" smtClean="0"/>
+              <a:rPr lang="en-US" altLang="en-US" dirty="0" err="1"/>
               <a:t>elif</a:t>
             </a:r>
             <a:r>
-              <a:rPr lang="en-US" altLang="en-US" dirty="0" smtClean="0"/>
+              <a:rPr lang="en-US" altLang="en-US" dirty="0"/>
               <a:t> defined SYSCLK_FREQ_72MHz </a:t>
             </a:r>
           </a:p>
@@ -10608,12 +10224,8 @@
               </a:lnSpc>
             </a:pPr>
             <a:r>
-              <a:rPr lang="en-US" dirty="0" smtClean="0"/>
-              <a:t>static void SetSysClockTo72(void</a:t>
-            </a:r>
-            <a:r>
-              <a:rPr lang="en-US" dirty="0" smtClean="0"/>
-              <a:t>);</a:t>
+              <a:rPr lang="en-US" dirty="0"/>
+              <a:t>static void SetSysClockTo72(void);</a:t>
             </a:r>
           </a:p>
           <a:p>
@@ -10623,15 +10235,15 @@
               </a:lnSpc>
             </a:pPr>
             <a:r>
-              <a:rPr lang="zh-CN" altLang="en-US" dirty="0" smtClean="0"/>
+              <a:rPr lang="zh-CN" altLang="en-US" dirty="0"/>
               <a:t>下面是​</a:t>
             </a:r>
             <a:r>
-              <a:rPr lang="en-US" dirty="0" smtClean="0"/>
+              <a:rPr lang="en-US" dirty="0"/>
               <a:t>SetSysClockTo72(void)</a:t>
             </a:r>
             <a:r>
-              <a:rPr lang="zh-CN" altLang="en-US" dirty="0" smtClean="0"/>
+              <a:rPr lang="zh-CN" altLang="en-US" dirty="0"/>
               <a:t>函数中的一部分：</a:t>
             </a:r>
           </a:p>
@@ -10642,11 +10254,11 @@
               </a:lnSpc>
             </a:pPr>
             <a:r>
-              <a:rPr lang="zh-CN" altLang="en-US" dirty="0" smtClean="0"/>
+              <a:rPr lang="zh-CN" altLang="en-US" dirty="0"/>
               <a:t>    </a:t>
             </a:r>
             <a:r>
-              <a:rPr lang="en-US" dirty="0" smtClean="0"/>
+              <a:rPr lang="en-US" dirty="0"/>
               <a:t>RCC-&gt;CFGR |= (uint32_t)RCC_CFGR_HPRE_DIV1;</a:t>
             </a:r>
           </a:p>
@@ -10657,7 +10269,7 @@
               </a:lnSpc>
             </a:pPr>
             <a:r>
-              <a:rPr lang="en-US" dirty="0" smtClean="0"/>
+              <a:rPr lang="en-US" dirty="0"/>
               <a:t>    RCC-&gt;CFGR |= (uint32_t)RCC_CFGR_PPRE2_DIV1;</a:t>
             </a:r>
           </a:p>
@@ -10668,7 +10280,7 @@
               </a:lnSpc>
             </a:pPr>
             <a:r>
-              <a:rPr lang="en-US" dirty="0" smtClean="0"/>
+              <a:rPr lang="en-US" dirty="0"/>
               <a:t>    RCC-&gt;CFGR |= (uint32_t)RCC_CFGR_PPRE1_DIV2;</a:t>
             </a:r>
           </a:p>
@@ -10679,7 +10291,7 @@
               </a:lnSpc>
             </a:pPr>
             <a:r>
-              <a:rPr lang="zh-CN" altLang="en-US" b="1" dirty="0" smtClean="0">
+              <a:rPr lang="zh-CN" altLang="en-US" b="1" dirty="0">
                 <a:solidFill>
                   <a:srgbClr val="C00000"/>
                 </a:solidFill>
@@ -10687,7 +10299,7 @@
               <a:t>所以设置系统时钟的流程就是</a:t>
             </a:r>
             <a:r>
-              <a:rPr lang="en-US" altLang="zh-CN" b="1" dirty="0" smtClean="0">
+              <a:rPr lang="en-US" altLang="zh-CN" b="1" dirty="0">
                 <a:solidFill>
                   <a:srgbClr val="C00000"/>
                 </a:solidFill>
@@ -10702,74 +10314,62 @@
               </a:lnSpc>
             </a:pPr>
             <a:r>
-              <a:rPr lang="en-US" altLang="zh-CN" dirty="0" smtClean="0"/>
-              <a:t> </a:t>
-            </a:r>
-            <a:r>
-              <a:rPr lang="en-US" altLang="zh-CN" dirty="0" smtClean="0"/>
-              <a:t>    </a:t>
-            </a:r>
-            <a:r>
-              <a:rPr lang="zh-CN" altLang="en-US" dirty="0" smtClean="0"/>
-              <a:t>首先</a:t>
-            </a:r>
-            <a:r>
-              <a:rPr lang="zh-CN" altLang="en-US" dirty="0" smtClean="0"/>
-              <a:t>用户程序调用 </a:t>
-            </a:r>
-            <a:r>
-              <a:rPr lang="en-US" dirty="0" err="1" smtClean="0"/>
+              <a:rPr lang="en-US" altLang="zh-CN" dirty="0"/>
+              <a:t>     </a:t>
+            </a:r>
+            <a:r>
+              <a:rPr lang="zh-CN" altLang="en-US" dirty="0"/>
+              <a:t>首先用户程序调用 </a:t>
+            </a:r>
+            <a:r>
+              <a:rPr lang="en-US" dirty="0" err="1"/>
               <a:t>SystemInit</a:t>
             </a:r>
             <a:r>
-              <a:rPr lang="en-US" dirty="0" smtClean="0"/>
+              <a:rPr lang="en-US" dirty="0"/>
               <a:t>()</a:t>
             </a:r>
             <a:r>
-              <a:rPr lang="zh-CN" altLang="en-US" dirty="0" smtClean="0"/>
+              <a:rPr lang="zh-CN" altLang="en-US" dirty="0"/>
               <a:t>函数</a:t>
             </a:r>
             <a:r>
-              <a:rPr lang="en-US" altLang="zh-CN" dirty="0" smtClean="0"/>
+              <a:rPr lang="en-US" altLang="zh-CN" dirty="0"/>
               <a:t>,</a:t>
             </a:r>
             <a:r>
-              <a:rPr lang="zh-CN" altLang="en-US" dirty="0" smtClean="0"/>
+              <a:rPr lang="zh-CN" altLang="en-US" dirty="0"/>
               <a:t>这是一个库函数</a:t>
             </a:r>
             <a:r>
-              <a:rPr lang="en-US" altLang="zh-CN" dirty="0" smtClean="0"/>
+              <a:rPr lang="en-US" altLang="zh-CN" dirty="0"/>
               <a:t>,</a:t>
             </a:r>
             <a:r>
-              <a:rPr lang="zh-CN" altLang="en-US" dirty="0" smtClean="0"/>
+              <a:rPr lang="zh-CN" altLang="en-US" dirty="0"/>
               <a:t>然后 </a:t>
             </a:r>
             <a:r>
-              <a:rPr lang="en-US" dirty="0" err="1" smtClean="0"/>
+              <a:rPr lang="en-US" dirty="0" err="1"/>
               <a:t>SystemInit</a:t>
             </a:r>
             <a:r>
-              <a:rPr lang="en-US" dirty="0" smtClean="0"/>
+              <a:rPr lang="en-US" dirty="0"/>
               <a:t>()</a:t>
             </a:r>
             <a:r>
-              <a:rPr lang="zh-CN" altLang="en-US" dirty="0" smtClean="0"/>
+              <a:rPr lang="zh-CN" altLang="en-US" dirty="0"/>
               <a:t>函数里面</a:t>
             </a:r>
             <a:r>
-              <a:rPr lang="en-US" altLang="zh-CN" dirty="0" smtClean="0"/>
+              <a:rPr lang="en-US" altLang="zh-CN" dirty="0"/>
               <a:t>,</a:t>
             </a:r>
             <a:r>
-              <a:rPr lang="zh-CN" altLang="en-US" dirty="0" smtClean="0"/>
-              <a:t>进行了一些</a:t>
-            </a:r>
-            <a:r>
-              <a:rPr lang="zh-CN" altLang="en-US" dirty="0" smtClean="0"/>
-              <a:t>寄存器</a:t>
-            </a:r>
-            <a:endParaRPr lang="en-US" altLang="zh-CN" dirty="0" smtClean="0"/>
+              <a:rPr lang="zh-CN" altLang="en-US" dirty="0"/>
+              <a:t>进行了一些寄存器</a:t>
+            </a:r>
+            <a:endParaRPr lang="en-US" altLang="zh-CN" dirty="0"/>
           </a:p>
           <a:p>
             <a:pPr>
@@ -10778,54 +10378,46 @@
               </a:lnSpc>
             </a:pPr>
             <a:r>
-              <a:rPr lang="zh-CN" altLang="en-US" dirty="0" smtClean="0"/>
-              <a:t>必要</a:t>
-            </a:r>
-            <a:r>
-              <a:rPr lang="zh-CN" altLang="en-US" dirty="0" smtClean="0"/>
-              <a:t>的初始化后</a:t>
-            </a:r>
-            <a:r>
-              <a:rPr lang="en-US" altLang="zh-CN" dirty="0" smtClean="0"/>
+              <a:rPr lang="zh-CN" altLang="en-US" dirty="0"/>
+              <a:t>必要的初始化后</a:t>
+            </a:r>
+            <a:r>
+              <a:rPr lang="en-US" altLang="zh-CN" dirty="0"/>
               <a:t>,</a:t>
             </a:r>
             <a:r>
-              <a:rPr lang="zh-CN" altLang="en-US" dirty="0" smtClean="0"/>
+              <a:rPr lang="zh-CN" altLang="en-US" dirty="0"/>
               <a:t>就调用 </a:t>
             </a:r>
             <a:r>
-              <a:rPr lang="en-US" dirty="0" err="1" smtClean="0"/>
+              <a:rPr lang="en-US" dirty="0" err="1"/>
               <a:t>SetSysClock</a:t>
             </a:r>
             <a:r>
-              <a:rPr lang="en-US" dirty="0" smtClean="0"/>
+              <a:rPr lang="en-US" dirty="0"/>
               <a:t>()</a:t>
             </a:r>
             <a:r>
-              <a:rPr lang="zh-CN" altLang="en-US" dirty="0" smtClean="0"/>
+              <a:rPr lang="zh-CN" altLang="en-US" dirty="0"/>
               <a:t>函数</a:t>
             </a:r>
             <a:r>
-              <a:rPr lang="en-US" altLang="zh-CN" dirty="0" smtClean="0"/>
+              <a:rPr lang="en-US" altLang="zh-CN" dirty="0"/>
               <a:t>.</a:t>
             </a:r>
             <a:r>
-              <a:rPr lang="en-US" dirty="0" err="1" smtClean="0"/>
+              <a:rPr lang="en-US" dirty="0" err="1"/>
               <a:t>SetSysClock</a:t>
             </a:r>
             <a:r>
-              <a:rPr lang="en-US" dirty="0" smtClean="0"/>
+              <a:rPr lang="en-US" dirty="0"/>
               <a:t>()</a:t>
             </a:r>
             <a:r>
-              <a:rPr lang="zh-CN" altLang="en-US" dirty="0" smtClean="0"/>
-              <a:t>函数根据</a:t>
-            </a:r>
-            <a:r>
-              <a:rPr lang="zh-CN" altLang="en-US" dirty="0" smtClean="0"/>
-              <a:t>那个</a:t>
-            </a:r>
-            <a:endParaRPr lang="en-US" altLang="zh-CN" dirty="0" smtClean="0"/>
+              <a:rPr lang="zh-CN" altLang="en-US" dirty="0"/>
+              <a:t>函数根据那个</a:t>
+            </a:r>
+            <a:endParaRPr lang="en-US" altLang="zh-CN" dirty="0"/>
           </a:p>
           <a:p>
             <a:pPr>
@@ -10834,39 +10426,35 @@
               </a:lnSpc>
             </a:pPr>
             <a:r>
-              <a:rPr lang="en-US" altLang="zh-CN" dirty="0" smtClean="0"/>
+              <a:rPr lang="en-US" altLang="zh-CN" dirty="0"/>
               <a:t>#</a:t>
             </a:r>
             <a:r>
-              <a:rPr lang="en-US" dirty="0" smtClean="0"/>
+              <a:rPr lang="en-US" dirty="0"/>
               <a:t>define SYSCLK_FREQ_72MHz 72000000 </a:t>
             </a:r>
             <a:r>
-              <a:rPr lang="zh-CN" altLang="en-US" dirty="0" smtClean="0"/>
+              <a:rPr lang="zh-CN" altLang="en-US" dirty="0"/>
               <a:t>的宏定义</a:t>
             </a:r>
             <a:r>
-              <a:rPr lang="en-US" altLang="zh-CN" dirty="0" smtClean="0"/>
+              <a:rPr lang="en-US" altLang="zh-CN" dirty="0"/>
               <a:t>,</a:t>
             </a:r>
             <a:r>
-              <a:rPr lang="zh-CN" altLang="en-US" dirty="0" smtClean="0"/>
-              <a:t>知道了</a:t>
-            </a:r>
-            <a:r>
-              <a:rPr lang="zh-CN" altLang="en-US" dirty="0" smtClean="0"/>
-              <a:t>要调用</a:t>
-            </a:r>
-            <a:r>
-              <a:rPr lang="en-US" dirty="0" smtClean="0"/>
+              <a:rPr lang="zh-CN" altLang="en-US" dirty="0"/>
+              <a:t>知道了要调用</a:t>
+            </a:r>
+            <a:r>
+              <a:rPr lang="en-US" dirty="0"/>
               <a:t>SetSysClockTo72()</a:t>
             </a:r>
             <a:r>
-              <a:rPr lang="zh-CN" altLang="en-US" dirty="0" smtClean="0"/>
+              <a:rPr lang="zh-CN" altLang="en-US" dirty="0"/>
               <a:t>这个函数</a:t>
             </a:r>
             <a:r>
-              <a:rPr lang="en-US" altLang="zh-CN" dirty="0" smtClean="0"/>
+              <a:rPr lang="en-US" altLang="zh-CN" dirty="0"/>
               <a:t>,</a:t>
             </a:r>
           </a:p>
@@ -10876,7 +10464,7 @@
                 <a:spcPct val="150000"/>
               </a:lnSpc>
             </a:pPr>
-            <a:endParaRPr lang="en-US" dirty="0" smtClean="0"/>
+            <a:endParaRPr lang="en-US" dirty="0"/>
           </a:p>
           <a:p>
             <a:pPr lvl="0" eaLnBrk="0" fontAlgn="base" hangingPunct="0">
@@ -10890,7 +10478,7 @@
                 <a:spcPct val="0"/>
               </a:spcAft>
             </a:pPr>
-            <a:endParaRPr kumimoji="0" lang="en-US" altLang="zh-CN" sz="1800" b="0" i="0" u="none" strike="noStrike" cap="none" normalizeH="0" baseline="0" dirty="0" smtClean="0">
+            <a:endParaRPr kumimoji="0" lang="en-US" altLang="zh-CN" sz="1800" b="0" i="0" u="none" strike="noStrike" cap="none" normalizeH="0" baseline="0" dirty="0">
               <a:ln>
                 <a:noFill/>
               </a:ln>
@@ -10957,38 +10545,38 @@
               </a:lnSpc>
             </a:pPr>
             <a:r>
-              <a:rPr lang="en-US" sz="2400" b="1" dirty="0" smtClean="0"/>
+              <a:rPr lang="en-US" sz="2400" b="1" dirty="0"/>
               <a:t>ARM Cortex-M</a:t>
             </a:r>
             <a:r>
-              <a:rPr lang="zh-CN" altLang="en-US" sz="2400" b="1" dirty="0" smtClean="0"/>
+              <a:rPr lang="zh-CN" altLang="en-US" sz="2400" b="1" dirty="0"/>
               <a:t>系列内核主要用于对功耗和成本非常敏感且对性能要求不断增加的嵌入式应用，与</a:t>
             </a:r>
             <a:r>
-              <a:rPr lang="en-US" sz="2400" b="1" dirty="0" smtClean="0"/>
+              <a:rPr lang="en-US" sz="2400" b="1" dirty="0"/>
               <a:t>51</a:t>
             </a:r>
             <a:r>
-              <a:rPr lang="zh-CN" altLang="en-US" sz="2400" b="1" dirty="0" smtClean="0"/>
+              <a:rPr lang="zh-CN" altLang="en-US" sz="2400" b="1" dirty="0"/>
               <a:t>内核相比，若要达到相同的处理能力，其功耗约为</a:t>
             </a:r>
             <a:r>
-              <a:rPr lang="en-US" sz="2400" b="1" dirty="0" smtClean="0"/>
+              <a:rPr lang="en-US" sz="2400" b="1" dirty="0"/>
               <a:t>CM3</a:t>
             </a:r>
             <a:r>
-              <a:rPr lang="zh-CN" altLang="en-US" sz="2400" b="1" dirty="0" smtClean="0"/>
+              <a:rPr lang="zh-CN" altLang="en-US" sz="2400" b="1" dirty="0"/>
               <a:t>内核的</a:t>
             </a:r>
             <a:r>
-              <a:rPr lang="en-US" sz="2400" b="1" dirty="0" smtClean="0"/>
+              <a:rPr lang="en-US" sz="2400" b="1" dirty="0"/>
               <a:t>40</a:t>
             </a:r>
             <a:r>
-              <a:rPr lang="zh-CN" altLang="en-US" sz="2400" b="1" dirty="0" smtClean="0"/>
+              <a:rPr lang="zh-CN" altLang="en-US" sz="2400" b="1" dirty="0"/>
               <a:t>倍。</a:t>
             </a:r>
-            <a:endParaRPr lang="zh-CN" altLang="en-US" sz="2400" dirty="0" smtClean="0"/>
+            <a:endParaRPr lang="zh-CN" altLang="en-US" sz="2400" dirty="0"/>
           </a:p>
           <a:p>
             <a:pPr>
@@ -10997,7 +10585,7 @@
               </a:lnSpc>
             </a:pPr>
             <a:r>
-              <a:rPr lang="zh-CN" altLang="en-US" sz="2400" b="1" dirty="0" smtClean="0">
+              <a:rPr lang="zh-CN" altLang="en-US" sz="2400" b="1" dirty="0">
                 <a:solidFill>
                   <a:schemeClr val="accent2">
                     <a:lumMod val="50000"/>
@@ -11007,18 +10595,18 @@
               <a:t>最小系统包括：</a:t>
             </a:r>
             <a:r>
-              <a:rPr lang="zh-CN" altLang="en-US" sz="2400" b="1" dirty="0" smtClean="0"/>
+              <a:rPr lang="zh-CN" altLang="en-US" sz="2400" b="1" dirty="0"/>
               <a:t>电源、时钟源、复位电路、启动电路、调试接口、</a:t>
             </a:r>
             <a:r>
-              <a:rPr lang="en-US" sz="2400" b="1" dirty="0" smtClean="0"/>
+              <a:rPr lang="en-US" sz="2400" b="1" dirty="0"/>
               <a:t>ARM</a:t>
             </a:r>
             <a:r>
-              <a:rPr lang="zh-CN" altLang="en-US" sz="2400" b="1" dirty="0" smtClean="0"/>
+              <a:rPr lang="zh-CN" altLang="en-US" sz="2400" b="1" dirty="0"/>
               <a:t>处理器</a:t>
             </a:r>
-            <a:endParaRPr lang="zh-CN" altLang="en-US" sz="2400" dirty="0" smtClean="0"/>
+            <a:endParaRPr lang="zh-CN" altLang="en-US" sz="2400" dirty="0"/>
           </a:p>
           <a:p>
             <a:pPr>
@@ -11075,7 +10663,7 @@
           <a:p>
             <a:pPr algn="ctr"/>
             <a:r>
-              <a:rPr lang="en-US" altLang="zh-CN" sz="2400" b="1" dirty="0" smtClean="0">
+              <a:rPr lang="en-US" altLang="zh-CN" sz="2400" b="1" dirty="0">
                 <a:solidFill>
                   <a:srgbClr val="5494C3"/>
                 </a:solidFill>
@@ -11083,7 +10671,7 @@
               <a:t>ARM</a:t>
             </a:r>
             <a:r>
-              <a:rPr lang="zh-CN" altLang="en-US" sz="2400" b="1" dirty="0" smtClean="0">
+              <a:rPr lang="zh-CN" altLang="en-US" sz="2400" b="1" dirty="0">
                 <a:solidFill>
                   <a:srgbClr val="5494C3"/>
                 </a:solidFill>
@@ -11138,7 +10726,7 @@
           <a:p>
             <a:pPr algn="ctr"/>
             <a:r>
-              <a:rPr lang="zh-CN" altLang="en-US" sz="2400" b="1" dirty="0" smtClean="0">
+              <a:rPr lang="zh-CN" altLang="en-US" sz="2400" b="1" dirty="0">
                 <a:solidFill>
                   <a:srgbClr val="5494C3"/>
                 </a:solidFill>
@@ -11193,7 +10781,7 @@
           <a:p>
             <a:pPr algn="ctr"/>
             <a:r>
-              <a:rPr lang="zh-CN" altLang="en-US" sz="2400" b="1" dirty="0" smtClean="0">
+              <a:rPr lang="zh-CN" altLang="en-US" sz="2400" b="1" dirty="0">
                 <a:solidFill>
                   <a:srgbClr val="5494C3"/>
                 </a:solidFill>
@@ -11248,7 +10836,7 @@
           <a:p>
             <a:pPr algn="ctr"/>
             <a:r>
-              <a:rPr lang="zh-CN" altLang="en-US" sz="2400" b="1" dirty="0" smtClean="0">
+              <a:rPr lang="zh-CN" altLang="en-US" sz="2400" b="1" dirty="0">
                 <a:solidFill>
                   <a:srgbClr val="5494C3"/>
                 </a:solidFill>
@@ -11303,7 +10891,7 @@
           <a:p>
             <a:pPr algn="ctr"/>
             <a:r>
-              <a:rPr lang="zh-CN" altLang="en-US" sz="2400" b="1" dirty="0" smtClean="0">
+              <a:rPr lang="zh-CN" altLang="en-US" sz="2400" b="1" dirty="0">
                 <a:solidFill>
                   <a:srgbClr val="5494C3"/>
                 </a:solidFill>
@@ -11358,7 +10946,7 @@
           <a:p>
             <a:pPr algn="ctr"/>
             <a:r>
-              <a:rPr lang="zh-CN" altLang="en-US" sz="2400" b="1" dirty="0" smtClean="0">
+              <a:rPr lang="zh-CN" altLang="en-US" sz="2400" b="1" dirty="0">
                 <a:solidFill>
                   <a:srgbClr val="5494C3"/>
                 </a:solidFill>
@@ -11412,7 +11000,7 @@
           <a:lstStyle/>
           <a:p>
             <a:pPr algn="ctr"/>
-            <a:endParaRPr lang="zh-CN" altLang="en-US" sz="5400" dirty="0" smtClean="0">
+            <a:endParaRPr lang="zh-CN" altLang="en-US" sz="5400" dirty="0">
               <a:solidFill>
                 <a:srgbClr val="5494C3"/>
               </a:solidFill>
@@ -11464,7 +11052,7 @@
           <a:lstStyle/>
           <a:p>
             <a:pPr algn="ctr"/>
-            <a:endParaRPr lang="zh-CN" altLang="en-US" sz="5400" dirty="0" smtClean="0">
+            <a:endParaRPr lang="zh-CN" altLang="en-US" sz="5400" dirty="0">
               <a:solidFill>
                 <a:srgbClr val="5494C3"/>
               </a:solidFill>
@@ -11522,7 +11110,7 @@
           <a:lstStyle/>
           <a:p>
             <a:pPr algn="ctr"/>
-            <a:endParaRPr lang="zh-CN" altLang="en-US" sz="5400" dirty="0" smtClean="0">
+            <a:endParaRPr lang="zh-CN" altLang="en-US" sz="5400" dirty="0">
               <a:solidFill>
                 <a:srgbClr val="5494C3"/>
               </a:solidFill>
@@ -11580,7 +11168,7 @@
           <a:lstStyle/>
           <a:p>
             <a:pPr algn="ctr"/>
-            <a:endParaRPr lang="zh-CN" altLang="en-US" sz="5400" dirty="0" smtClean="0">
+            <a:endParaRPr lang="zh-CN" altLang="en-US" sz="5400" dirty="0">
               <a:solidFill>
                 <a:srgbClr val="5494C3"/>
               </a:solidFill>
@@ -11638,7 +11226,7 @@
           <a:lstStyle/>
           <a:p>
             <a:pPr algn="ctr"/>
-            <a:endParaRPr lang="zh-CN" altLang="en-US" sz="5400" dirty="0" smtClean="0">
+            <a:endParaRPr lang="zh-CN" altLang="en-US" sz="5400" dirty="0">
               <a:solidFill>
                 <a:srgbClr val="5494C3"/>
               </a:solidFill>
@@ -11750,7 +11338,7 @@
               <a:defRPr/>
             </a:pPr>
             <a:r>
-              <a:rPr lang="en-US" altLang="zh-CN" sz="2800" b="1" dirty="0" smtClean="0">
+              <a:rPr lang="en-US" altLang="zh-CN" sz="2800" b="1" dirty="0">
                 <a:solidFill>
                   <a:srgbClr val="14529E"/>
                 </a:solidFill>
@@ -11758,14 +11346,14 @@
               <a:t>3.1 </a:t>
             </a:r>
             <a:r>
-              <a:rPr lang="zh-CN" altLang="en-US" sz="2800" b="1" dirty="0" smtClean="0">
+              <a:rPr lang="zh-CN" altLang="en-US" sz="2800" b="1" dirty="0">
                 <a:solidFill>
                   <a:srgbClr val="14529E"/>
                 </a:solidFill>
               </a:rPr>
               <a:t>电源电路</a:t>
             </a:r>
-            <a:endParaRPr lang="en-US" altLang="zh-CN" sz="2800" b="1" dirty="0" smtClean="0">
+            <a:endParaRPr lang="en-US" altLang="zh-CN" sz="2800" b="1" dirty="0">
               <a:solidFill>
                 <a:srgbClr val="14529E"/>
               </a:solidFill>
@@ -11790,7 +11378,7 @@
               <a:defRPr/>
             </a:pPr>
             <a:r>
-              <a:rPr lang="en-US" altLang="zh-CN" sz="2800" b="1" dirty="0" smtClean="0">
+              <a:rPr lang="en-US" altLang="zh-CN" sz="2800" b="1" dirty="0">
                 <a:solidFill>
                   <a:srgbClr val="C00000"/>
                 </a:solidFill>
@@ -11798,7 +11386,7 @@
               <a:t>3.1.1 </a:t>
             </a:r>
             <a:r>
-              <a:rPr lang="zh-CN" altLang="en-US" sz="2800" b="1" dirty="0" smtClean="0">
+              <a:rPr lang="zh-CN" altLang="en-US" sz="2800" b="1" dirty="0">
                 <a:solidFill>
                   <a:srgbClr val="C00000"/>
                 </a:solidFill>
@@ -11892,7 +11480,7 @@
               <a:tabLst/>
             </a:pPr>
             <a:r>
-              <a:rPr kumimoji="0" lang="en-US" altLang="zh-CN" sz="1600" b="1" i="0" u="none" strike="noStrike" cap="none" normalizeH="0" baseline="0" dirty="0" smtClean="0">
+              <a:rPr kumimoji="0" lang="en-US" altLang="zh-CN" sz="1600" b="1" i="0" u="none" strike="noStrike" cap="none" normalizeH="0" baseline="0" dirty="0">
                 <a:ln>
                   <a:noFill/>
                 </a:ln>
@@ -11908,7 +11496,7 @@
               <a:t>1.</a:t>
             </a:r>
             <a:r>
-              <a:rPr kumimoji="0" lang="zh-CN" altLang="en-US" sz="1600" b="1" i="0" u="none" strike="noStrike" cap="none" normalizeH="0" baseline="0" dirty="0" smtClean="0">
+              <a:rPr kumimoji="0" lang="zh-CN" altLang="en-US" sz="1600" b="1" i="0" u="none" strike="noStrike" cap="none" normalizeH="0" baseline="0" dirty="0">
                 <a:ln>
                   <a:noFill/>
                 </a:ln>
@@ -11923,7 +11511,7 @@
               </a:rPr>
               <a:t>数字部分</a:t>
             </a:r>
-            <a:endParaRPr kumimoji="0" lang="zh-CN" altLang="en-US" sz="1600" b="1" i="0" u="none" strike="noStrike" cap="none" normalizeH="0" baseline="0" dirty="0" smtClean="0">
+            <a:endParaRPr kumimoji="0" lang="zh-CN" altLang="en-US" sz="1600" b="1" i="0" u="none" strike="noStrike" cap="none" normalizeH="0" baseline="0" dirty="0">
               <a:ln>
                 <a:noFill/>
               </a:ln>
@@ -11955,7 +11543,7 @@
               <a:tabLst/>
             </a:pPr>
             <a:r>
-              <a:rPr kumimoji="0" lang="en-US" altLang="zh-CN" sz="1600" b="1" i="0" u="none" strike="noStrike" cap="none" normalizeH="0" baseline="0" dirty="0" smtClean="0">
+              <a:rPr kumimoji="0" lang="en-US" altLang="zh-CN" sz="1600" b="1" i="0" u="none" strike="noStrike" cap="none" normalizeH="0" baseline="0" dirty="0">
                 <a:ln>
                   <a:noFill/>
                 </a:ln>
@@ -11970,7 +11558,7 @@
               <a:t>VDD</a:t>
             </a:r>
             <a:r>
-              <a:rPr kumimoji="0" lang="zh-CN" altLang="en-US" sz="1600" b="1" i="0" u="none" strike="noStrike" cap="none" normalizeH="0" baseline="0" dirty="0" smtClean="0">
+              <a:rPr kumimoji="0" lang="zh-CN" altLang="en-US" sz="1600" b="1" i="0" u="none" strike="noStrike" cap="none" normalizeH="0" baseline="0" dirty="0">
                 <a:ln>
                   <a:noFill/>
                 </a:ln>
@@ -11985,7 +11573,7 @@
               <a:t>接</a:t>
             </a:r>
             <a:r>
-              <a:rPr kumimoji="0" lang="en-US" altLang="zh-CN" sz="1600" b="1" i="0" u="none" strike="noStrike" cap="none" normalizeH="0" baseline="0" dirty="0" smtClean="0">
+              <a:rPr kumimoji="0" lang="en-US" altLang="zh-CN" sz="1600" b="1" i="0" u="none" strike="noStrike" cap="none" normalizeH="0" baseline="0" dirty="0">
                 <a:ln>
                   <a:noFill/>
                 </a:ln>
@@ -12000,7 +11588,7 @@
               <a:t>2.0~3.6V</a:t>
             </a:r>
             <a:r>
-              <a:rPr kumimoji="0" lang="zh-CN" altLang="en-US" sz="1600" b="1" i="0" u="none" strike="noStrike" cap="none" normalizeH="0" baseline="0" dirty="0" smtClean="0">
+              <a:rPr kumimoji="0" lang="zh-CN" altLang="en-US" sz="1600" b="1" i="0" u="none" strike="noStrike" cap="none" normalizeH="0" baseline="0" dirty="0">
                 <a:ln>
                   <a:noFill/>
                 </a:ln>
@@ -12015,7 +11603,7 @@
               <a:t>的直流电源。</a:t>
             </a:r>
             <a:r>
-              <a:rPr kumimoji="0" lang="zh-CN" altLang="en-US" sz="1600" b="1" i="0" u="none" strike="noStrike" cap="none" normalizeH="0" baseline="0" dirty="0" smtClean="0">
+              <a:rPr kumimoji="0" lang="zh-CN" altLang="en-US" sz="1600" b="1" i="0" u="none" strike="noStrike" cap="none" normalizeH="0" baseline="0" dirty="0">
                 <a:ln>
                   <a:noFill/>
                 </a:ln>
@@ -12030,7 +11618,7 @@
               <a:t>通常接</a:t>
             </a:r>
             <a:r>
-              <a:rPr kumimoji="0" lang="en-US" altLang="zh-CN" sz="1600" b="1" i="0" u="none" strike="noStrike" cap="none" normalizeH="0" baseline="0" dirty="0" smtClean="0">
+              <a:rPr kumimoji="0" lang="en-US" altLang="zh-CN" sz="1600" b="1" i="0" u="none" strike="noStrike" cap="none" normalizeH="0" baseline="0" dirty="0">
                 <a:ln>
                   <a:noFill/>
                 </a:ln>
@@ -12045,7 +11633,7 @@
               <a:t>3.3V</a:t>
             </a:r>
             <a:r>
-              <a:rPr kumimoji="0" lang="zh-CN" altLang="en-US" sz="1600" b="1" i="0" u="none" strike="noStrike" cap="none" normalizeH="0" baseline="0" dirty="0" smtClean="0">
+              <a:rPr kumimoji="0" lang="zh-CN" altLang="en-US" sz="1600" b="1" i="0" u="none" strike="noStrike" cap="none" normalizeH="0" baseline="0" dirty="0">
                 <a:ln>
                   <a:noFill/>
                 </a:ln>
@@ -12060,7 +11648,7 @@
               <a:t>，供</a:t>
             </a:r>
             <a:r>
-              <a:rPr kumimoji="0" lang="en-US" altLang="zh-CN" sz="1600" b="1" i="0" u="none" strike="noStrike" cap="none" normalizeH="0" baseline="0" dirty="0" smtClean="0">
+              <a:rPr kumimoji="0" lang="en-US" altLang="zh-CN" sz="1600" b="1" i="0" u="none" strike="noStrike" cap="none" normalizeH="0" baseline="0" dirty="0">
                 <a:ln>
                   <a:noFill/>
                 </a:ln>
@@ -12075,7 +11663,7 @@
               <a:t>I/O</a:t>
             </a:r>
             <a:r>
-              <a:rPr kumimoji="0" lang="zh-CN" altLang="en-US" sz="1600" b="1" i="0" u="none" strike="noStrike" cap="none" normalizeH="0" baseline="0" dirty="0" smtClean="0">
+              <a:rPr kumimoji="0" lang="zh-CN" altLang="en-US" sz="1600" b="1" i="0" u="none" strike="noStrike" cap="none" normalizeH="0" baseline="0" dirty="0">
                 <a:ln>
                   <a:noFill/>
                 </a:ln>
@@ -12090,7 +11678,7 @@
               <a:t>等接口使用</a:t>
             </a:r>
             <a:r>
-              <a:rPr kumimoji="0" lang="zh-CN" altLang="en-US" sz="1600" b="1" i="0" u="none" strike="noStrike" cap="none" normalizeH="0" baseline="0" dirty="0" smtClean="0">
+              <a:rPr kumimoji="0" lang="zh-CN" altLang="en-US" sz="1600" b="1" i="0" u="none" strike="noStrike" cap="none" normalizeH="0" baseline="0" dirty="0">
                 <a:ln>
                   <a:noFill/>
                 </a:ln>
@@ -12105,7 +11693,7 @@
               <a:t>。内置电压调节器提高</a:t>
             </a:r>
             <a:r>
-              <a:rPr kumimoji="0" lang="en-US" altLang="zh-CN" sz="1600" b="1" i="0" u="none" strike="noStrike" cap="none" normalizeH="0" baseline="0" dirty="0" smtClean="0">
+              <a:rPr kumimoji="0" lang="en-US" altLang="zh-CN" sz="1600" b="1" i="0" u="none" strike="noStrike" cap="none" normalizeH="0" baseline="0" dirty="0">
                 <a:ln>
                   <a:noFill/>
                 </a:ln>
@@ -12120,7 +11708,7 @@
               <a:t>CM3</a:t>
             </a:r>
             <a:r>
-              <a:rPr kumimoji="0" lang="zh-CN" altLang="en-US" sz="1600" b="1" i="0" u="none" strike="noStrike" cap="none" normalizeH="0" baseline="0" dirty="0" smtClean="0">
+              <a:rPr kumimoji="0" lang="zh-CN" altLang="en-US" sz="1600" b="1" i="0" u="none" strike="noStrike" cap="none" normalizeH="0" baseline="0" dirty="0">
                 <a:ln>
                   <a:noFill/>
                 </a:ln>
@@ -12135,7 +11723,7 @@
               <a:t>处理器所需的</a:t>
             </a:r>
             <a:r>
-              <a:rPr kumimoji="0" lang="en-US" altLang="zh-CN" sz="1600" b="1" i="0" u="none" strike="noStrike" cap="none" normalizeH="0" baseline="0" dirty="0" smtClean="0">
+              <a:rPr kumimoji="0" lang="en-US" altLang="zh-CN" sz="1600" b="1" i="0" u="none" strike="noStrike" cap="none" normalizeH="0" baseline="0" dirty="0">
                 <a:ln>
                   <a:noFill/>
                 </a:ln>
@@ -12150,7 +11738,7 @@
               <a:t>1.8V</a:t>
             </a:r>
             <a:r>
-              <a:rPr kumimoji="0" lang="zh-CN" altLang="en-US" sz="1600" b="1" i="0" u="none" strike="noStrike" cap="none" normalizeH="0" baseline="0" dirty="0" smtClean="0">
+              <a:rPr kumimoji="0" lang="zh-CN" altLang="en-US" sz="1600" b="1" i="0" u="none" strike="noStrike" cap="none" normalizeH="0" baseline="0" dirty="0">
                 <a:ln>
                   <a:noFill/>
                 </a:ln>
@@ -12164,7 +11752,7 @@
               </a:rPr>
               <a:t>电源。电压调节器有三种工作模式：</a:t>
             </a:r>
-            <a:endParaRPr kumimoji="0" lang="zh-CN" altLang="en-US" sz="1600" b="0" i="0" u="none" strike="noStrike" cap="none" normalizeH="0" baseline="0" dirty="0" smtClean="0">
+            <a:endParaRPr kumimoji="0" lang="zh-CN" altLang="en-US" sz="1600" b="0" i="0" u="none" strike="noStrike" cap="none" normalizeH="0" baseline="0" dirty="0">
               <a:ln>
                 <a:noFill/>
               </a:ln>
@@ -12199,7 +11787,7 @@
               <a:tabLst/>
             </a:pPr>
             <a:r>
-              <a:rPr kumimoji="0" lang="zh-CN" altLang="en-US" sz="1600" b="1" i="0" u="none" strike="noStrike" cap="none" normalizeH="0" baseline="0" dirty="0" smtClean="0">
+              <a:rPr kumimoji="0" lang="zh-CN" altLang="en-US" sz="1600" b="1" i="0" u="none" strike="noStrike" cap="none" normalizeH="0" baseline="0" dirty="0">
                 <a:ln>
                   <a:noFill/>
                 </a:ln>
@@ -12214,7 +11802,7 @@
               <a:t>运行模式：提供</a:t>
             </a:r>
             <a:r>
-              <a:rPr kumimoji="0" lang="en-US" altLang="zh-CN" sz="1600" b="1" i="0" u="none" strike="noStrike" cap="none" normalizeH="0" baseline="0" dirty="0" smtClean="0">
+              <a:rPr kumimoji="0" lang="en-US" altLang="zh-CN" sz="1600" b="1" i="0" u="none" strike="noStrike" cap="none" normalizeH="0" baseline="0" dirty="0">
                 <a:ln>
                   <a:noFill/>
                 </a:ln>
@@ -12229,7 +11817,7 @@
               <a:t>1.8V</a:t>
             </a:r>
             <a:r>
-              <a:rPr kumimoji="0" lang="zh-CN" altLang="en-US" sz="1600" b="1" i="0" u="none" strike="noStrike" cap="none" normalizeH="0" baseline="0" dirty="0" smtClean="0">
+              <a:rPr kumimoji="0" lang="zh-CN" altLang="en-US" sz="1600" b="1" i="0" u="none" strike="noStrike" cap="none" normalizeH="0" baseline="0" dirty="0">
                 <a:ln>
                   <a:noFill/>
                 </a:ln>
@@ -12244,7 +11832,7 @@
               <a:t>电源</a:t>
             </a:r>
             <a:r>
-              <a:rPr kumimoji="0" lang="en-US" altLang="zh-CN" sz="1600" b="1" i="0" u="none" strike="noStrike" cap="none" normalizeH="0" baseline="0" dirty="0" smtClean="0">
+              <a:rPr kumimoji="0" lang="en-US" altLang="zh-CN" sz="1600" b="1" i="0" u="none" strike="noStrike" cap="none" normalizeH="0" baseline="0" dirty="0">
                 <a:ln>
                   <a:noFill/>
                 </a:ln>
@@ -12259,7 +11847,7 @@
               <a:t>(</a:t>
             </a:r>
             <a:r>
-              <a:rPr kumimoji="0" lang="zh-CN" altLang="en-US" sz="1600" b="1" i="0" u="none" strike="noStrike" cap="none" normalizeH="0" baseline="0" dirty="0" smtClean="0">
+              <a:rPr kumimoji="0" lang="zh-CN" altLang="en-US" sz="1600" b="1" i="0" u="none" strike="noStrike" cap="none" normalizeH="0" baseline="0" dirty="0">
                 <a:ln>
                   <a:noFill/>
                 </a:ln>
@@ -12274,7 +11862,7 @@
               <a:t>处理器、内存、外设</a:t>
             </a:r>
             <a:r>
-              <a:rPr kumimoji="0" lang="en-US" altLang="zh-CN" sz="1600" b="1" i="0" u="none" strike="noStrike" cap="none" normalizeH="0" baseline="0" dirty="0" smtClean="0">
+              <a:rPr kumimoji="0" lang="en-US" altLang="zh-CN" sz="1600" b="1" i="0" u="none" strike="noStrike" cap="none" normalizeH="0" baseline="0" dirty="0">
                 <a:ln>
                   <a:noFill/>
                 </a:ln>
@@ -12289,7 +11877,7 @@
               <a:t>)</a:t>
             </a:r>
             <a:r>
-              <a:rPr kumimoji="0" lang="zh-CN" altLang="en-US" sz="1600" b="1" i="0" u="none" strike="noStrike" cap="none" normalizeH="0" baseline="0" dirty="0" smtClean="0">
+              <a:rPr kumimoji="0" lang="zh-CN" altLang="en-US" sz="1600" b="1" i="0" u="none" strike="noStrike" cap="none" normalizeH="0" baseline="0" dirty="0">
                 <a:ln>
                   <a:noFill/>
                 </a:ln>
@@ -12304,7 +11892,7 @@
               <a:t>。在此模式下，可以通过降低系统时钟或关闭总线上未被使用的</a:t>
             </a:r>
             <a:r>
-              <a:rPr kumimoji="0" lang="en-US" altLang="zh-CN" sz="1600" b="1" i="0" u="none" strike="noStrike" cap="none" normalizeH="0" baseline="0" dirty="0" smtClean="0">
+              <a:rPr kumimoji="0" lang="en-US" altLang="zh-CN" sz="1600" b="1" i="0" u="none" strike="noStrike" cap="none" normalizeH="0" baseline="0" dirty="0">
                 <a:ln>
                   <a:noFill/>
                 </a:ln>
@@ -12319,7 +11907,7 @@
               <a:t>CM3</a:t>
             </a:r>
             <a:r>
-              <a:rPr kumimoji="0" lang="zh-CN" altLang="en-US" sz="1600" b="1" i="0" u="none" strike="noStrike" cap="none" normalizeH="0" baseline="0" dirty="0" smtClean="0">
+              <a:rPr kumimoji="0" lang="zh-CN" altLang="en-US" sz="1600" b="1" i="0" u="none" strike="noStrike" cap="none" normalizeH="0" baseline="0" dirty="0">
                 <a:ln>
                   <a:noFill/>
                 </a:ln>
@@ -12333,7 +11921,7 @@
               </a:rPr>
               <a:t>处理器外的外设时钟来降低功耗。</a:t>
             </a:r>
-            <a:endParaRPr kumimoji="0" lang="zh-CN" altLang="en-US" sz="1600" b="0" i="0" u="none" strike="noStrike" cap="none" normalizeH="0" baseline="0" dirty="0" smtClean="0">
+            <a:endParaRPr kumimoji="0" lang="zh-CN" altLang="en-US" sz="1600" b="0" i="0" u="none" strike="noStrike" cap="none" normalizeH="0" baseline="0" dirty="0">
               <a:ln>
                 <a:noFill/>
               </a:ln>
@@ -12368,7 +11956,7 @@
               <a:tabLst/>
             </a:pPr>
             <a:r>
-              <a:rPr kumimoji="0" lang="zh-CN" altLang="en-US" sz="1600" b="1" i="0" u="none" strike="noStrike" cap="none" normalizeH="0" baseline="0" dirty="0" smtClean="0">
+              <a:rPr kumimoji="0" lang="zh-CN" altLang="en-US" sz="1600" b="1" i="0" u="none" strike="noStrike" cap="none" normalizeH="0" baseline="0" dirty="0">
                 <a:ln>
                   <a:noFill/>
                 </a:ln>
@@ -12383,7 +11971,7 @@
               <a:t>停止模式：调节器以低功耗模式提供</a:t>
             </a:r>
             <a:r>
-              <a:rPr kumimoji="0" lang="en-US" altLang="zh-CN" sz="1600" b="1" i="0" u="none" strike="noStrike" cap="none" normalizeH="0" baseline="0" dirty="0" smtClean="0">
+              <a:rPr kumimoji="0" lang="en-US" altLang="zh-CN" sz="1600" b="1" i="0" u="none" strike="noStrike" cap="none" normalizeH="0" baseline="0" dirty="0">
                 <a:ln>
                   <a:noFill/>
                 </a:ln>
@@ -12398,7 +11986,7 @@
               <a:t>1.8V</a:t>
             </a:r>
             <a:r>
-              <a:rPr kumimoji="0" lang="zh-CN" altLang="en-US" sz="1600" b="1" i="0" u="none" strike="noStrike" cap="none" normalizeH="0" baseline="0" dirty="0" smtClean="0">
+              <a:rPr kumimoji="0" lang="zh-CN" altLang="en-US" sz="1600" b="1" i="0" u="none" strike="noStrike" cap="none" normalizeH="0" baseline="0" dirty="0">
                 <a:ln>
                   <a:noFill/>
                 </a:ln>
@@ -12413,7 +12001,7 @@
               <a:t>电源，以保存寄存器和</a:t>
             </a:r>
             <a:r>
-              <a:rPr kumimoji="0" lang="en-US" altLang="zh-CN" sz="1600" b="1" i="0" u="none" strike="noStrike" cap="none" normalizeH="0" baseline="0" dirty="0" smtClean="0">
+              <a:rPr kumimoji="0" lang="en-US" altLang="zh-CN" sz="1600" b="1" i="0" u="none" strike="noStrike" cap="none" normalizeH="0" baseline="0" dirty="0">
                 <a:ln>
                   <a:noFill/>
                 </a:ln>
@@ -12428,7 +12016,7 @@
               <a:t>SRAM</a:t>
             </a:r>
             <a:r>
-              <a:rPr kumimoji="0" lang="zh-CN" altLang="en-US" sz="1600" b="1" i="0" u="none" strike="noStrike" cap="none" normalizeH="0" baseline="0" dirty="0" smtClean="0">
+              <a:rPr kumimoji="0" lang="zh-CN" altLang="en-US" sz="1600" b="1" i="0" u="none" strike="noStrike" cap="none" normalizeH="0" baseline="0" dirty="0">
                 <a:ln>
                   <a:noFill/>
                 </a:ln>
@@ -12442,7 +12030,7 @@
               </a:rPr>
               <a:t>的内容。</a:t>
             </a:r>
-            <a:endParaRPr kumimoji="0" lang="zh-CN" altLang="en-US" sz="1600" b="0" i="0" u="none" strike="noStrike" cap="none" normalizeH="0" baseline="0" dirty="0" smtClean="0">
+            <a:endParaRPr kumimoji="0" lang="zh-CN" altLang="en-US" sz="1600" b="0" i="0" u="none" strike="noStrike" cap="none" normalizeH="0" baseline="0" dirty="0">
               <a:ln>
                 <a:noFill/>
               </a:ln>
@@ -12477,7 +12065,7 @@
               <a:tabLst/>
             </a:pPr>
             <a:r>
-              <a:rPr kumimoji="0" lang="zh-CN" altLang="en-US" sz="1600" b="1" i="0" u="none" strike="noStrike" cap="none" normalizeH="0" baseline="0" dirty="0" smtClean="0">
+              <a:rPr kumimoji="0" lang="zh-CN" altLang="en-US" sz="1600" b="1" i="0" u="none" strike="noStrike" cap="none" normalizeH="0" baseline="0" dirty="0">
                 <a:ln>
                   <a:noFill/>
                 </a:ln>
@@ -12492,7 +12080,7 @@
               <a:t>待机模式：调节器停止供电，除了备用电路和备份域外，寄存器和</a:t>
             </a:r>
             <a:r>
-              <a:rPr kumimoji="0" lang="en-US" altLang="zh-CN" sz="1600" b="1" i="0" u="none" strike="noStrike" cap="none" normalizeH="0" baseline="0" dirty="0" smtClean="0">
+              <a:rPr kumimoji="0" lang="en-US" altLang="zh-CN" sz="1600" b="1" i="0" u="none" strike="noStrike" cap="none" normalizeH="0" baseline="0" dirty="0">
                 <a:ln>
                   <a:noFill/>
                 </a:ln>
@@ -12507,7 +12095,7 @@
               <a:t>SRAM</a:t>
             </a:r>
             <a:r>
-              <a:rPr kumimoji="0" lang="zh-CN" altLang="en-US" sz="1600" b="1" i="0" u="none" strike="noStrike" cap="none" normalizeH="0" baseline="0" dirty="0" smtClean="0">
+              <a:rPr kumimoji="0" lang="zh-CN" altLang="en-US" sz="1600" b="1" i="0" u="none" strike="noStrike" cap="none" normalizeH="0" baseline="0" dirty="0">
                 <a:ln>
                   <a:noFill/>
                 </a:ln>
@@ -12521,7 +12109,7 @@
               </a:rPr>
               <a:t>的内容全部丢失。</a:t>
             </a:r>
-            <a:endParaRPr kumimoji="0" lang="zh-CN" altLang="en-US" sz="1600" b="0" i="0" u="none" strike="noStrike" cap="none" normalizeH="0" baseline="0" dirty="0" smtClean="0">
+            <a:endParaRPr kumimoji="0" lang="zh-CN" altLang="en-US" sz="1600" b="0" i="0" u="none" strike="noStrike" cap="none" normalizeH="0" baseline="0" dirty="0">
               <a:ln>
                 <a:noFill/>
               </a:ln>
@@ -12587,7 +12175,7 @@
               <a:tabLst/>
             </a:pPr>
             <a:r>
-              <a:rPr kumimoji="0" lang="en-US" altLang="zh-CN" sz="1600" b="1" i="0" u="none" strike="noStrike" cap="none" normalizeH="0" baseline="0" dirty="0" smtClean="0">
+              <a:rPr kumimoji="0" lang="en-US" altLang="zh-CN" sz="1600" b="1" i="0" u="none" strike="noStrike" cap="none" normalizeH="0" baseline="0" dirty="0">
                 <a:ln>
                   <a:noFill/>
                 </a:ln>
@@ -12603,7 +12191,7 @@
               <a:t>2.</a:t>
             </a:r>
             <a:r>
-              <a:rPr kumimoji="0" lang="zh-CN" altLang="en-US" sz="1600" b="1" i="0" u="none" strike="noStrike" cap="none" normalizeH="0" baseline="0" dirty="0" smtClean="0">
+              <a:rPr kumimoji="0" lang="zh-CN" altLang="en-US" sz="1600" b="1" i="0" u="none" strike="noStrike" cap="none" normalizeH="0" baseline="0" dirty="0">
                 <a:ln>
                   <a:noFill/>
                 </a:ln>
@@ -12618,7 +12206,7 @@
               </a:rPr>
               <a:t>模拟部分</a:t>
             </a:r>
-            <a:endParaRPr kumimoji="0" lang="zh-CN" altLang="en-US" sz="1600" b="0" i="0" u="none" strike="noStrike" cap="none" normalizeH="0" baseline="0" dirty="0" smtClean="0">
+            <a:endParaRPr kumimoji="0" lang="zh-CN" altLang="en-US" sz="1600" b="0" i="0" u="none" strike="noStrike" cap="none" normalizeH="0" baseline="0" dirty="0">
               <a:ln>
                 <a:noFill/>
               </a:ln>
@@ -12650,7 +12238,7 @@
               <a:tabLst/>
             </a:pPr>
             <a:r>
-              <a:rPr kumimoji="0" lang="en-US" altLang="zh-CN" sz="1600" b="1" i="0" u="none" strike="noStrike" cap="none" normalizeH="0" baseline="0" dirty="0" smtClean="0">
+              <a:rPr kumimoji="0" lang="en-US" altLang="zh-CN" sz="1600" b="1" i="0" u="none" strike="noStrike" cap="none" normalizeH="0" baseline="0" dirty="0">
                 <a:ln>
                   <a:noFill/>
                 </a:ln>
@@ -12665,7 +12253,7 @@
               <a:t>VSSA</a:t>
             </a:r>
             <a:r>
-              <a:rPr kumimoji="0" lang="zh-CN" altLang="en-US" sz="1600" b="1" i="0" u="none" strike="noStrike" cap="none" normalizeH="0" baseline="0" dirty="0" smtClean="0">
+              <a:rPr kumimoji="0" lang="zh-CN" altLang="en-US" sz="1600" b="1" i="0" u="none" strike="noStrike" cap="none" normalizeH="0" baseline="0" dirty="0">
                 <a:ln>
                   <a:noFill/>
                 </a:ln>
@@ -12680,7 +12268,7 @@
               <a:t>为独立电源地，</a:t>
             </a:r>
             <a:r>
-              <a:rPr kumimoji="0" lang="en-US" altLang="zh-CN" sz="1600" b="1" i="0" u="none" strike="noStrike" cap="none" normalizeH="0" baseline="0" dirty="0" smtClean="0">
+              <a:rPr kumimoji="0" lang="en-US" altLang="zh-CN" sz="1600" b="1" i="0" u="none" strike="noStrike" cap="none" normalizeH="0" baseline="0" dirty="0">
                 <a:ln>
                   <a:noFill/>
                 </a:ln>
@@ -12695,7 +12283,7 @@
               <a:t>VDDA</a:t>
             </a:r>
             <a:r>
-              <a:rPr kumimoji="0" lang="zh-CN" altLang="en-US" sz="1600" b="1" i="0" u="none" strike="noStrike" cap="none" normalizeH="0" baseline="0" dirty="0" smtClean="0">
+              <a:rPr kumimoji="0" lang="zh-CN" altLang="en-US" sz="1600" b="1" i="0" u="none" strike="noStrike" cap="none" normalizeH="0" baseline="0" dirty="0">
                 <a:ln>
                   <a:noFill/>
                 </a:ln>
@@ -12710,7 +12298,7 @@
               <a:t>接</a:t>
             </a:r>
             <a:r>
-              <a:rPr kumimoji="0" lang="en-US" altLang="zh-CN" sz="1600" b="1" i="0" u="none" strike="noStrike" cap="none" normalizeH="0" baseline="0" dirty="0" smtClean="0">
+              <a:rPr kumimoji="0" lang="en-US" altLang="zh-CN" sz="1600" b="1" i="0" u="none" strike="noStrike" cap="none" normalizeH="0" baseline="0" dirty="0">
                 <a:ln>
                   <a:noFill/>
                 </a:ln>
@@ -12725,7 +12313,7 @@
               <a:t>2.0~36V</a:t>
             </a:r>
             <a:r>
-              <a:rPr kumimoji="0" lang="zh-CN" altLang="en-US" sz="1600" b="1" i="0" u="none" strike="noStrike" cap="none" normalizeH="0" baseline="0" dirty="0" smtClean="0">
+              <a:rPr kumimoji="0" lang="zh-CN" altLang="en-US" sz="1600" b="1" i="0" u="none" strike="noStrike" cap="none" normalizeH="0" baseline="0" dirty="0">
                 <a:ln>
                   <a:noFill/>
                 </a:ln>
@@ -12740,7 +12328,7 @@
               <a:t>，为</a:t>
             </a:r>
             <a:r>
-              <a:rPr kumimoji="0" lang="en-US" altLang="zh-CN" sz="1600" b="1" i="0" u="none" strike="noStrike" cap="none" normalizeH="0" baseline="0" dirty="0" smtClean="0">
+              <a:rPr kumimoji="0" lang="en-US" altLang="zh-CN" sz="1600" b="1" i="0" u="none" strike="noStrike" cap="none" normalizeH="0" baseline="0" dirty="0">
                 <a:ln>
                   <a:noFill/>
                 </a:ln>
@@ -12755,7 +12343,7 @@
               <a:t>ADC</a:t>
             </a:r>
             <a:r>
-              <a:rPr kumimoji="0" lang="zh-CN" altLang="en-US" sz="1600" b="1" i="0" u="none" strike="noStrike" cap="none" normalizeH="0" baseline="0" dirty="0" smtClean="0">
+              <a:rPr kumimoji="0" lang="zh-CN" altLang="en-US" sz="1600" b="1" i="0" u="none" strike="noStrike" cap="none" normalizeH="0" baseline="0" dirty="0">
                 <a:ln>
                   <a:noFill/>
                 </a:ln>
@@ -12770,7 +12358,7 @@
               <a:t>、复位模块、</a:t>
             </a:r>
             <a:r>
-              <a:rPr kumimoji="0" lang="en-US" altLang="zh-CN" sz="1600" b="1" i="0" u="none" strike="noStrike" cap="none" normalizeH="0" baseline="0" dirty="0" smtClean="0">
+              <a:rPr kumimoji="0" lang="en-US" altLang="zh-CN" sz="1600" b="1" i="0" u="none" strike="noStrike" cap="none" normalizeH="0" baseline="0" dirty="0">
                 <a:ln>
                   <a:noFill/>
                 </a:ln>
@@ -12785,7 +12373,7 @@
               <a:t>RC</a:t>
             </a:r>
             <a:r>
-              <a:rPr kumimoji="0" lang="zh-CN" altLang="en-US" sz="1600" b="1" i="0" u="none" strike="noStrike" cap="none" normalizeH="0" baseline="0" dirty="0" smtClean="0">
+              <a:rPr kumimoji="0" lang="zh-CN" altLang="en-US" sz="1600" b="1" i="0" u="none" strike="noStrike" cap="none" normalizeH="0" baseline="0" dirty="0">
                 <a:ln>
                   <a:noFill/>
                 </a:ln>
@@ -12800,7 +12388,7 @@
               <a:t>振荡器和</a:t>
             </a:r>
             <a:r>
-              <a:rPr kumimoji="0" lang="en-US" altLang="zh-CN" sz="1600" b="1" i="0" u="none" strike="noStrike" cap="none" normalizeH="0" baseline="0" dirty="0" smtClean="0">
+              <a:rPr kumimoji="0" lang="en-US" altLang="zh-CN" sz="1600" b="1" i="0" u="none" strike="noStrike" cap="none" normalizeH="0" baseline="0" dirty="0">
                 <a:ln>
                   <a:noFill/>
                 </a:ln>
@@ -12815,7 +12403,7 @@
               <a:t>PLL</a:t>
             </a:r>
             <a:r>
-              <a:rPr kumimoji="0" lang="zh-CN" altLang="en-US" sz="1600" b="1" i="0" u="none" strike="noStrike" cap="none" normalizeH="0" baseline="0" dirty="0" smtClean="0">
+              <a:rPr kumimoji="0" lang="zh-CN" altLang="en-US" sz="1600" b="1" i="0" u="none" strike="noStrike" cap="none" normalizeH="0" baseline="0" dirty="0">
                 <a:ln>
                   <a:noFill/>
                 </a:ln>
@@ -12830,7 +12418,7 @@
               <a:t>的模拟部分供电。当</a:t>
             </a:r>
             <a:r>
-              <a:rPr kumimoji="0" lang="en-US" altLang="zh-CN" sz="1600" b="1" i="0" u="none" strike="noStrike" cap="none" normalizeH="0" baseline="0" dirty="0" smtClean="0">
+              <a:rPr kumimoji="0" lang="en-US" altLang="zh-CN" sz="1600" b="1" i="0" u="none" strike="noStrike" cap="none" normalizeH="0" baseline="0" dirty="0">
                 <a:ln>
                   <a:noFill/>
                 </a:ln>
@@ -12845,7 +12433,7 @@
               <a:t>VDD≥2.4V</a:t>
             </a:r>
             <a:r>
-              <a:rPr kumimoji="0" lang="zh-CN" altLang="en-US" sz="1600" b="1" i="0" u="none" strike="noStrike" cap="none" normalizeH="0" baseline="0" dirty="0" smtClean="0">
+              <a:rPr kumimoji="0" lang="zh-CN" altLang="en-US" sz="1600" b="1" i="0" u="none" strike="noStrike" cap="none" normalizeH="0" baseline="0" dirty="0">
                 <a:ln>
                   <a:noFill/>
                 </a:ln>
@@ -12860,7 +12448,7 @@
               <a:t>时，</a:t>
             </a:r>
             <a:r>
-              <a:rPr kumimoji="0" lang="en-US" altLang="zh-CN" sz="1600" b="1" i="0" u="none" strike="noStrike" cap="none" normalizeH="0" baseline="0" dirty="0" smtClean="0">
+              <a:rPr kumimoji="0" lang="en-US" altLang="zh-CN" sz="1600" b="1" i="0" u="none" strike="noStrike" cap="none" normalizeH="0" baseline="0" dirty="0">
                 <a:ln>
                   <a:noFill/>
                 </a:ln>
@@ -12875,7 +12463,7 @@
               <a:t>ADC</a:t>
             </a:r>
             <a:r>
-              <a:rPr kumimoji="0" lang="zh-CN" altLang="en-US" sz="1600" b="1" i="0" u="none" strike="noStrike" cap="none" normalizeH="0" baseline="0" dirty="0" smtClean="0">
+              <a:rPr kumimoji="0" lang="zh-CN" altLang="en-US" sz="1600" b="1" i="0" u="none" strike="noStrike" cap="none" normalizeH="0" baseline="0" dirty="0">
                 <a:ln>
                   <a:noFill/>
                 </a:ln>
@@ -12890,7 +12478,7 @@
               <a:t>工作，当</a:t>
             </a:r>
             <a:r>
-              <a:rPr kumimoji="0" lang="en-US" altLang="zh-CN" sz="1600" b="1" i="0" u="none" strike="noStrike" cap="none" normalizeH="0" baseline="0" dirty="0" smtClean="0">
+              <a:rPr kumimoji="0" lang="en-US" altLang="zh-CN" sz="1600" b="1" i="0" u="none" strike="noStrike" cap="none" normalizeH="0" baseline="0" dirty="0">
                 <a:ln>
                   <a:noFill/>
                 </a:ln>
@@ -12905,7 +12493,7 @@
               <a:t>VDD≥2.7V</a:t>
             </a:r>
             <a:r>
-              <a:rPr kumimoji="0" lang="zh-CN" altLang="en-US" sz="1600" b="1" i="0" u="none" strike="noStrike" cap="none" normalizeH="0" baseline="0" dirty="0" smtClean="0">
+              <a:rPr kumimoji="0" lang="zh-CN" altLang="en-US" sz="1600" b="1" i="0" u="none" strike="noStrike" cap="none" normalizeH="0" baseline="0" dirty="0">
                 <a:ln>
                   <a:noFill/>
                 </a:ln>
@@ -12920,7 +12508,7 @@
               <a:t>时，</a:t>
             </a:r>
             <a:r>
-              <a:rPr kumimoji="0" lang="en-US" altLang="zh-CN" sz="1600" b="1" i="0" u="none" strike="noStrike" cap="none" normalizeH="0" baseline="0" dirty="0" smtClean="0">
+              <a:rPr kumimoji="0" lang="en-US" altLang="zh-CN" sz="1600" b="1" i="0" u="none" strike="noStrike" cap="none" normalizeH="0" baseline="0" dirty="0">
                 <a:ln>
                   <a:noFill/>
                 </a:ln>
@@ -12935,7 +12523,7 @@
               <a:t>USB</a:t>
             </a:r>
             <a:r>
-              <a:rPr kumimoji="0" lang="zh-CN" altLang="en-US" sz="1600" b="1" i="0" u="none" strike="noStrike" cap="none" normalizeH="0" baseline="0" dirty="0" smtClean="0">
+              <a:rPr kumimoji="0" lang="zh-CN" altLang="en-US" sz="1600" b="1" i="0" u="none" strike="noStrike" cap="none" normalizeH="0" baseline="0" dirty="0">
                 <a:ln>
                   <a:noFill/>
                 </a:ln>
@@ -12950,7 +12538,7 @@
               <a:t>开始工作。</a:t>
             </a:r>
             <a:r>
-              <a:rPr kumimoji="0" lang="en-US" altLang="zh-CN" sz="1600" b="1" i="0" u="none" strike="noStrike" cap="none" normalizeH="0" baseline="0" dirty="0" smtClean="0">
+              <a:rPr kumimoji="0" lang="en-US" altLang="zh-CN" sz="1600" b="1" i="0" u="none" strike="noStrike" cap="none" normalizeH="0" baseline="0" dirty="0">
                 <a:ln>
                   <a:noFill/>
                 </a:ln>
@@ -12965,7 +12553,7 @@
               <a:t>VREF+</a:t>
             </a:r>
             <a:r>
-              <a:rPr kumimoji="0" lang="zh-CN" altLang="en-US" sz="1600" b="1" i="0" u="none" strike="noStrike" cap="none" normalizeH="0" baseline="0" dirty="0" smtClean="0">
+              <a:rPr kumimoji="0" lang="zh-CN" altLang="en-US" sz="1600" b="1" i="0" u="none" strike="noStrike" cap="none" normalizeH="0" baseline="0" dirty="0">
                 <a:ln>
                   <a:noFill/>
                 </a:ln>
@@ -12980,7 +12568,7 @@
               <a:t>的电压范围为</a:t>
             </a:r>
             <a:r>
-              <a:rPr kumimoji="0" lang="en-US" altLang="zh-CN" sz="1600" b="1" i="0" u="none" strike="noStrike" cap="none" normalizeH="0" baseline="0" dirty="0" smtClean="0">
+              <a:rPr kumimoji="0" lang="en-US" altLang="zh-CN" sz="1600" b="1" i="0" u="none" strike="noStrike" cap="none" normalizeH="0" baseline="0" dirty="0">
                 <a:ln>
                   <a:noFill/>
                 </a:ln>
@@ -12995,7 +12583,7 @@
               <a:t>2.4V</a:t>
             </a:r>
             <a:r>
-              <a:rPr kumimoji="0" lang="zh-CN" altLang="en-US" sz="1600" b="1" i="0" u="none" strike="noStrike" cap="none" normalizeH="0" baseline="0" dirty="0" smtClean="0">
+              <a:rPr kumimoji="0" lang="zh-CN" altLang="en-US" sz="1600" b="1" i="0" u="none" strike="noStrike" cap="none" normalizeH="0" baseline="0" dirty="0">
                 <a:ln>
                   <a:noFill/>
                 </a:ln>
@@ -13010,7 +12598,7 @@
               <a:t>至</a:t>
             </a:r>
             <a:r>
-              <a:rPr kumimoji="0" lang="en-US" altLang="zh-CN" sz="1600" b="1" i="0" u="none" strike="noStrike" cap="none" normalizeH="0" baseline="0" dirty="0" smtClean="0">
+              <a:rPr kumimoji="0" lang="en-US" altLang="zh-CN" sz="1600" b="1" i="0" u="none" strike="noStrike" cap="none" normalizeH="0" baseline="0" dirty="0">
                 <a:ln>
                   <a:noFill/>
                 </a:ln>
@@ -13025,7 +12613,7 @@
               <a:t>VDDA</a:t>
             </a:r>
             <a:r>
-              <a:rPr kumimoji="0" lang="zh-CN" altLang="en-US" sz="1600" b="1" i="0" u="none" strike="noStrike" cap="none" normalizeH="0" baseline="0" dirty="0" smtClean="0">
+              <a:rPr kumimoji="0" lang="zh-CN" altLang="en-US" sz="1600" b="1" i="0" u="none" strike="noStrike" cap="none" normalizeH="0" baseline="0" dirty="0">
                 <a:ln>
                   <a:noFill/>
                 </a:ln>
@@ -13039,7 +12627,7 @@
               </a:rPr>
               <a:t>之间。</a:t>
             </a:r>
-            <a:endParaRPr kumimoji="0" lang="zh-CN" altLang="en-US" sz="1600" b="0" i="0" u="none" strike="noStrike" cap="none" normalizeH="0" baseline="0" dirty="0" smtClean="0">
+            <a:endParaRPr kumimoji="0" lang="zh-CN" altLang="en-US" sz="1600" b="0" i="0" u="none" strike="noStrike" cap="none" normalizeH="0" baseline="0" dirty="0">
               <a:ln>
                 <a:noFill/>
               </a:ln>
@@ -13070,7 +12658,7 @@
               <a:tabLst/>
             </a:pPr>
             <a:r>
-              <a:rPr kumimoji="0" lang="en-US" altLang="zh-CN" sz="1600" b="1" i="0" u="none" strike="noStrike" cap="none" normalizeH="0" baseline="0" dirty="0" smtClean="0">
+              <a:rPr kumimoji="0" lang="en-US" altLang="zh-CN" sz="1600" b="1" i="0" u="none" strike="noStrike" cap="none" normalizeH="0" baseline="0" dirty="0">
                 <a:ln>
                   <a:noFill/>
                 </a:ln>
@@ -13086,7 +12674,7 @@
               <a:t>3.</a:t>
             </a:r>
             <a:r>
-              <a:rPr kumimoji="0" lang="zh-CN" altLang="en-US" sz="1600" b="1" i="0" u="none" strike="noStrike" cap="none" normalizeH="0" baseline="0" dirty="0" smtClean="0">
+              <a:rPr kumimoji="0" lang="zh-CN" altLang="en-US" sz="1600" b="1" i="0" u="none" strike="noStrike" cap="none" normalizeH="0" baseline="0" dirty="0">
                 <a:ln>
                   <a:noFill/>
                 </a:ln>
@@ -13102,7 +12690,7 @@
               <a:t>备份部分</a:t>
             </a:r>
             <a:r>
-              <a:rPr kumimoji="0" lang="en-US" altLang="zh-CN" sz="1600" b="1" i="0" u="none" strike="noStrike" cap="none" normalizeH="0" baseline="0" dirty="0" smtClean="0">
+              <a:rPr kumimoji="0" lang="en-US" altLang="zh-CN" sz="1600" b="1" i="0" u="none" strike="noStrike" cap="none" normalizeH="0" baseline="0" dirty="0">
                 <a:ln>
                   <a:noFill/>
                 </a:ln>
@@ -13117,7 +12705,7 @@
               </a:rPr>
               <a:t>VBAT</a:t>
             </a:r>
-            <a:endParaRPr kumimoji="0" lang="zh-CN" altLang="en-US" sz="1600" b="0" i="0" u="none" strike="noStrike" cap="none" normalizeH="0" baseline="0" dirty="0" smtClean="0">
+            <a:endParaRPr kumimoji="0" lang="zh-CN" altLang="en-US" sz="1600" b="0" i="0" u="none" strike="noStrike" cap="none" normalizeH="0" baseline="0" dirty="0">
               <a:ln>
                 <a:noFill/>
               </a:ln>
@@ -13150,7 +12738,7 @@
               <a:tabLst/>
             </a:pPr>
             <a:r>
-              <a:rPr kumimoji="0" lang="zh-CN" altLang="en-US" sz="1600" b="1" i="0" u="none" strike="noStrike" cap="none" normalizeH="0" baseline="0" dirty="0" smtClean="0">
+              <a:rPr kumimoji="0" lang="zh-CN" altLang="en-US" sz="1600" b="1" i="0" u="none" strike="noStrike" cap="none" normalizeH="0" baseline="0" dirty="0">
                 <a:ln>
                   <a:noFill/>
                 </a:ln>
@@ -13165,7 +12753,7 @@
               <a:t>备份电压指的是备份域使用的供电电源。</a:t>
             </a:r>
             <a:r>
-              <a:rPr kumimoji="0" lang="en-US" altLang="zh-CN" sz="1600" b="1" i="0" u="none" strike="noStrike" cap="none" normalizeH="0" baseline="0" dirty="0" smtClean="0">
+              <a:rPr kumimoji="0" lang="en-US" altLang="zh-CN" sz="1600" b="1" i="0" u="none" strike="noStrike" cap="none" normalizeH="0" baseline="0" dirty="0">
                 <a:ln>
                   <a:noFill/>
                 </a:ln>
@@ -13180,7 +12768,7 @@
               <a:t>VBAT</a:t>
             </a:r>
             <a:r>
-              <a:rPr kumimoji="0" lang="zh-CN" altLang="en-US" sz="1600" b="1" i="0" u="none" strike="noStrike" cap="none" normalizeH="0" baseline="0" dirty="0" smtClean="0">
+              <a:rPr kumimoji="0" lang="zh-CN" altLang="en-US" sz="1600" b="1" i="0" u="none" strike="noStrike" cap="none" normalizeH="0" baseline="0" dirty="0">
                 <a:ln>
                   <a:noFill/>
                 </a:ln>
@@ -13195,7 +12783,7 @@
               <a:t>为</a:t>
             </a:r>
             <a:r>
-              <a:rPr kumimoji="0" lang="en-US" altLang="zh-CN" sz="1600" b="1" i="0" u="none" strike="noStrike" cap="none" normalizeH="0" baseline="0" dirty="0" smtClean="0">
+              <a:rPr kumimoji="0" lang="en-US" altLang="zh-CN" sz="1600" b="1" i="0" u="none" strike="noStrike" cap="none" normalizeH="0" baseline="0" dirty="0">
                 <a:ln>
                   <a:noFill/>
                 </a:ln>
@@ -13210,7 +12798,7 @@
               <a:t>1.8~3.6V</a:t>
             </a:r>
             <a:r>
-              <a:rPr kumimoji="0" lang="zh-CN" altLang="en-US" sz="1600" b="1" i="0" u="none" strike="noStrike" cap="none" normalizeH="0" baseline="0" dirty="0" smtClean="0">
+              <a:rPr kumimoji="0" lang="zh-CN" altLang="en-US" sz="1600" b="1" i="0" u="none" strike="noStrike" cap="none" normalizeH="0" baseline="0" dirty="0">
                 <a:ln>
                   <a:noFill/>
                 </a:ln>
@@ -13225,7 +12813,7 @@
               <a:t>，当</a:t>
             </a:r>
             <a:r>
-              <a:rPr kumimoji="0" lang="en-US" altLang="zh-CN" sz="1600" b="1" i="0" u="none" strike="noStrike" cap="none" normalizeH="0" baseline="0" dirty="0" smtClean="0">
+              <a:rPr kumimoji="0" lang="en-US" altLang="zh-CN" sz="1600" b="1" i="0" u="none" strike="noStrike" cap="none" normalizeH="0" baseline="0" dirty="0">
                 <a:ln>
                   <a:noFill/>
                 </a:ln>
@@ -13240,7 +12828,7 @@
               <a:t>VDD</a:t>
             </a:r>
             <a:r>
-              <a:rPr kumimoji="0" lang="zh-CN" altLang="en-US" sz="1600" b="1" i="0" u="none" strike="noStrike" cap="none" normalizeH="0" baseline="0" dirty="0" smtClean="0">
+              <a:rPr kumimoji="0" lang="zh-CN" altLang="en-US" sz="1600" b="1" i="0" u="none" strike="noStrike" cap="none" normalizeH="0" baseline="0" dirty="0">
                 <a:ln>
                   <a:noFill/>
                 </a:ln>
@@ -13255,7 +12843,7 @@
               <a:t>断电时，为</a:t>
             </a:r>
             <a:r>
-              <a:rPr kumimoji="0" lang="en-US" altLang="zh-CN" sz="1600" b="1" i="0" u="none" strike="noStrike" cap="none" normalizeH="0" baseline="0" dirty="0" smtClean="0">
+              <a:rPr kumimoji="0" lang="en-US" altLang="zh-CN" sz="1600" b="1" i="0" u="none" strike="noStrike" cap="none" normalizeH="0" baseline="0" dirty="0">
                 <a:ln>
                   <a:noFill/>
                 </a:ln>
@@ -13270,7 +12858,7 @@
               <a:t>RTC</a:t>
             </a:r>
             <a:r>
-              <a:rPr kumimoji="0" lang="zh-CN" altLang="en-US" sz="1600" b="1" i="0" u="none" strike="noStrike" cap="none" normalizeH="0" baseline="0" dirty="0" smtClean="0">
+              <a:rPr kumimoji="0" lang="zh-CN" altLang="en-US" sz="1600" b="1" i="0" u="none" strike="noStrike" cap="none" normalizeH="0" baseline="0" dirty="0">
                 <a:ln>
                   <a:noFill/>
                 </a:ln>
@@ -13285,7 +12873,7 @@
               <a:t>、外部</a:t>
             </a:r>
             <a:r>
-              <a:rPr kumimoji="0" lang="en-US" altLang="zh-CN" sz="1600" b="1" i="0" u="none" strike="noStrike" cap="none" normalizeH="0" baseline="0" dirty="0" smtClean="0">
+              <a:rPr kumimoji="0" lang="en-US" altLang="zh-CN" sz="1600" b="1" i="0" u="none" strike="noStrike" cap="none" normalizeH="0" baseline="0" dirty="0">
                 <a:ln>
                   <a:noFill/>
                 </a:ln>
@@ -13300,7 +12888,7 @@
               <a:t>32kHz</a:t>
             </a:r>
             <a:r>
-              <a:rPr kumimoji="0" lang="zh-CN" altLang="en-US" sz="1600" b="1" i="0" u="none" strike="noStrike" cap="none" normalizeH="0" baseline="0" dirty="0" smtClean="0">
+              <a:rPr kumimoji="0" lang="zh-CN" altLang="en-US" sz="1600" b="1" i="0" u="none" strike="noStrike" cap="none" normalizeH="0" baseline="0" dirty="0">
                 <a:ln>
                   <a:noFill/>
                 </a:ln>
@@ -13314,7 +12902,7 @@
               </a:rPr>
               <a:t>振荡器和后备寄存器供电。</a:t>
             </a:r>
-            <a:endParaRPr kumimoji="0" lang="zh-CN" altLang="en-US" sz="1600" b="0" i="0" u="none" strike="noStrike" cap="none" normalizeH="0" baseline="0" dirty="0" smtClean="0">
+            <a:endParaRPr kumimoji="0" lang="zh-CN" altLang="en-US" sz="1600" b="0" i="0" u="none" strike="noStrike" cap="none" normalizeH="0" baseline="0" dirty="0">
               <a:ln>
                 <a:noFill/>
               </a:ln>
@@ -13334,13 +12922,6 @@
   <p:clrMapOvr>
     <a:masterClrMapping/>
   </p:clrMapOvr>
-  <p:timing>
-    <p:tnLst>
-      <p:par>
-        <p:cTn id="1" dur="indefinite" restart="never" nodeType="tmRoot"/>
-      </p:par>
-    </p:tnLst>
-  </p:timing>
 </p:sld>
 </file>
 
@@ -13469,7 +13050,7 @@
         </p:nvSpPr>
         <p:spPr>
           <a:xfrm>
-            <a:off x="733386" y="454566"/>
+            <a:off x="602757" y="659840"/>
             <a:ext cx="10058400" cy="683771"/>
           </a:xfrm>
           <a:prstGeom prst="rect">
@@ -13498,100 +13079,27 @@
               <a:defRPr/>
             </a:pPr>
             <a:r>
-              <a:rPr lang="en-US" altLang="zh-CN" sz="2800" b="1" dirty="0" smtClean="0">
-                <a:solidFill>
-                  <a:srgbClr val="14529E"/>
-                </a:solidFill>
-              </a:rPr>
-              <a:t>3.1 </a:t>
-            </a:r>
-            <a:r>
-              <a:rPr lang="zh-CN" altLang="en-US" sz="2800" b="1" dirty="0" smtClean="0">
-                <a:solidFill>
-                  <a:srgbClr val="14529E"/>
-                </a:solidFill>
-              </a:rPr>
-              <a:t>电源电路</a:t>
-            </a:r>
-            <a:endParaRPr lang="en-US" altLang="zh-CN" sz="2800" b="1" dirty="0" smtClean="0">
-              <a:solidFill>
-                <a:srgbClr val="14529E"/>
-              </a:solidFill>
-            </a:endParaRPr>
-          </a:p>
-          <a:p>
-            <a:pPr marR="0" lvl="0" indent="0" fontAlgn="auto">
-              <a:lnSpc>
-                <a:spcPct val="90000"/>
-              </a:lnSpc>
-              <a:spcBef>
-                <a:spcPct val="0"/>
-              </a:spcBef>
-              <a:spcAft>
-                <a:spcPts val="0"/>
-              </a:spcAft>
-              <a:buClrTx/>
-              <a:buSzTx/>
-              <a:buFontTx/>
-              <a:buNone/>
-              <a:tabLst/>
-              <a:defRPr/>
-            </a:pPr>
-            <a:r>
-              <a:rPr lang="en-US" altLang="zh-CN" sz="2800" b="1" dirty="0" smtClean="0">
+              <a:rPr lang="en-US" sz="2800" b="1" dirty="0">
                 <a:solidFill>
                   <a:srgbClr val="C00000"/>
                 </a:solidFill>
               </a:rPr>
-              <a:t>3.1.1 </a:t>
-            </a:r>
-            <a:r>
-              <a:rPr lang="zh-CN" altLang="en-US" sz="2800" b="1" dirty="0" smtClean="0">
+              <a:t>3.1.2 </a:t>
+            </a:r>
+            <a:r>
+              <a:rPr lang="zh-CN" altLang="en-US" sz="2800" b="1" dirty="0">
                 <a:solidFill>
                   <a:srgbClr val="C00000"/>
                 </a:solidFill>
               </a:rPr>
-              <a:t>供电方案</a:t>
+              <a:t>电源管理器</a:t>
             </a:r>
           </a:p>
         </p:txBody>
       </p:sp>
-      <p:pic>
-        <p:nvPicPr>
-          <p:cNvPr id="146434" name="Picture 2"/>
-          <p:cNvPicPr>
-            <a:picLocks noChangeAspect="1" noChangeArrowheads="1"/>
-          </p:cNvPicPr>
-          <p:nvPr/>
-        </p:nvPicPr>
-        <p:blipFill>
-          <a:blip r:embed="rId3"/>
-          <a:srcRect/>
-          <a:stretch>
-            <a:fillRect/>
-          </a:stretch>
-        </p:blipFill>
-        <p:spPr bwMode="auto">
-          <a:xfrm>
-            <a:off x="409285" y="1421734"/>
-            <a:ext cx="3248315" cy="3253984"/>
-          </a:xfrm>
-          <a:prstGeom prst="rect">
-            <a:avLst/>
-          </a:prstGeom>
-          <a:noFill/>
-          <a:ln w="9525">
-            <a:noFill/>
-            <a:miter lim="800000"/>
-            <a:headEnd/>
-            <a:tailEnd/>
-          </a:ln>
-          <a:effectLst/>
-        </p:spPr>
-      </p:pic>
       <p:sp>
         <p:nvSpPr>
-          <p:cNvPr id="146435" name="Rectangle 3"/>
+          <p:cNvPr id="147457" name="Rectangle 1"/>
           <p:cNvSpPr>
             <a:spLocks noChangeArrowheads="1"/>
           </p:cNvSpPr>
@@ -13599,8 +13107,8 @@
         </p:nvSpPr>
         <p:spPr bwMode="auto">
           <a:xfrm>
-            <a:off x="3676261" y="1390261"/>
-            <a:ext cx="7744408" cy="3046988"/>
+            <a:off x="839754" y="1408922"/>
+            <a:ext cx="5449078" cy="4651979"/>
           </a:xfrm>
           <a:prstGeom prst="rect">
             <a:avLst/>
@@ -13640,48 +13148,90 @@
               <a:tabLst/>
             </a:pPr>
             <a:r>
-              <a:rPr kumimoji="0" lang="en-US" altLang="zh-CN" sz="1600" b="1" i="0" u="none" strike="noStrike" cap="none" normalizeH="0" baseline="0" dirty="0" smtClean="0">
+              <a:rPr kumimoji="0" lang="en-US" altLang="zh-CN" sz="2000" b="1" i="0" u="none" strike="noStrike" cap="none" normalizeH="0" baseline="0" dirty="0">
                 <a:ln>
                   <a:noFill/>
                 </a:ln>
                 <a:solidFill>
-                  <a:schemeClr val="accent4">
-                    <a:lumMod val="75000"/>
-                  </a:schemeClr>
+                  <a:srgbClr val="4D4D4D"/>
                 </a:solidFill>
                 <a:effectLst/>
-                <a:latin typeface="+mn-ea"/>
+                <a:latin typeface="Arial" pitchFamily="34" charset="0"/>
+                <a:ea typeface="宋体" pitchFamily="2" charset="-122"/>
                 <a:cs typeface="Arial" pitchFamily="34" charset="0"/>
               </a:rPr>
               <a:t>1.</a:t>
             </a:r>
             <a:r>
-              <a:rPr kumimoji="0" lang="zh-CN" altLang="en-US" sz="1600" b="1" i="0" u="none" strike="noStrike" cap="none" normalizeH="0" baseline="0" dirty="0" smtClean="0">
+              <a:rPr kumimoji="0" lang="zh-CN" altLang="en-US" sz="2000" b="1" i="0" u="none" strike="noStrike" cap="none" normalizeH="0" baseline="0" dirty="0">
                 <a:ln>
                   <a:noFill/>
                 </a:ln>
                 <a:solidFill>
-                  <a:schemeClr val="accent4">
-                    <a:lumMod val="75000"/>
-                  </a:schemeClr>
+                  <a:srgbClr val="4D4D4D"/>
                 </a:solidFill>
                 <a:effectLst/>
-                <a:latin typeface="+mn-ea"/>
+                <a:latin typeface="Arial" pitchFamily="34" charset="0"/>
+                <a:ea typeface="宋体" pitchFamily="2" charset="-122"/>
                 <a:cs typeface="Arial" pitchFamily="34" charset="0"/>
               </a:rPr>
-              <a:t>数字部分</a:t>
-            </a:r>
-            <a:endParaRPr kumimoji="0" lang="zh-CN" altLang="en-US" sz="1600" b="1" i="0" u="none" strike="noStrike" cap="none" normalizeH="0" baseline="0" dirty="0" smtClean="0">
+              <a:t>上电复位</a:t>
+            </a:r>
+            <a:r>
+              <a:rPr kumimoji="0" lang="en-US" altLang="zh-CN" sz="2000" b="1" i="0" u="none" strike="noStrike" cap="none" normalizeH="0" baseline="0" dirty="0">
+                <a:ln>
+                  <a:noFill/>
+                </a:ln>
+                <a:solidFill>
+                  <a:srgbClr val="4D4D4D"/>
+                </a:solidFill>
+                <a:effectLst/>
+                <a:latin typeface="Arial" pitchFamily="34" charset="0"/>
+                <a:ea typeface="宋体" pitchFamily="2" charset="-122"/>
+                <a:cs typeface="Arial" pitchFamily="34" charset="0"/>
+              </a:rPr>
+              <a:t>(POR)</a:t>
+            </a:r>
+            <a:r>
+              <a:rPr kumimoji="0" lang="zh-CN" altLang="en-US" sz="2000" b="1" i="0" u="none" strike="noStrike" cap="none" normalizeH="0" baseline="0" dirty="0">
+                <a:ln>
+                  <a:noFill/>
+                </a:ln>
+                <a:solidFill>
+                  <a:srgbClr val="4D4D4D"/>
+                </a:solidFill>
+                <a:effectLst/>
+                <a:latin typeface="Arial" pitchFamily="34" charset="0"/>
+                <a:ea typeface="宋体" pitchFamily="2" charset="-122"/>
+                <a:cs typeface="Arial" pitchFamily="34" charset="0"/>
+              </a:rPr>
+              <a:t>和掉电复位</a:t>
+            </a:r>
+            <a:r>
+              <a:rPr kumimoji="0" lang="en-US" altLang="zh-CN" sz="2000" b="1" i="0" u="none" strike="noStrike" cap="none" normalizeH="0" baseline="0" dirty="0">
+                <a:ln>
+                  <a:noFill/>
+                </a:ln>
+                <a:solidFill>
+                  <a:srgbClr val="4D4D4D"/>
+                </a:solidFill>
+                <a:effectLst/>
+                <a:latin typeface="Arial" pitchFamily="34" charset="0"/>
+                <a:ea typeface="宋体" pitchFamily="2" charset="-122"/>
+                <a:cs typeface="Arial" pitchFamily="34" charset="0"/>
+              </a:rPr>
+              <a:t>(PDR)</a:t>
+            </a:r>
+            <a:endParaRPr kumimoji="0" lang="en-US" altLang="zh-CN" sz="2000" b="0" i="0" u="none" strike="noStrike" cap="none" normalizeH="0" baseline="0" dirty="0">
               <a:ln>
                 <a:noFill/>
               </a:ln>
               <a:solidFill>
-                <a:schemeClr val="accent4">
-                  <a:lumMod val="75000"/>
-                </a:schemeClr>
+                <a:schemeClr val="tx1"/>
               </a:solidFill>
               <a:effectLst/>
-              <a:latin typeface="+mn-ea"/>
+              <a:latin typeface="Arial" pitchFamily="34" charset="0"/>
+              <a:ea typeface="宋体" pitchFamily="2" charset="-122"/>
               <a:cs typeface="宋体" pitchFamily="2" charset="-122"/>
             </a:endParaRPr>
           </a:p>
@@ -13703,7 +13253,7 @@
               <a:tabLst/>
             </a:pPr>
             <a:r>
-              <a:rPr kumimoji="0" lang="en-US" altLang="zh-CN" sz="1600" b="1" i="0" u="none" strike="noStrike" cap="none" normalizeH="0" baseline="0" dirty="0" smtClean="0">
+              <a:rPr kumimoji="0" lang="en-US" altLang="zh-CN" sz="2000" b="1" i="0" u="none" strike="noStrike" cap="none" normalizeH="0" baseline="0" dirty="0">
                 <a:ln>
                   <a:noFill/>
                 </a:ln>
@@ -13715,10 +13265,10 @@
                 <a:ea typeface="宋体" pitchFamily="2" charset="-122"/>
                 <a:cs typeface="Arial" pitchFamily="34" charset="0"/>
               </a:rPr>
-              <a:t>VDD</a:t>
-            </a:r>
-            <a:r>
-              <a:rPr kumimoji="0" lang="zh-CN" altLang="en-US" sz="1600" b="1" i="0" u="none" strike="noStrike" cap="none" normalizeH="0" baseline="0" dirty="0" smtClean="0">
+              <a:t>STM32</a:t>
+            </a:r>
+            <a:r>
+              <a:rPr kumimoji="0" lang="zh-CN" altLang="en-US" sz="2000" b="1" i="0" u="none" strike="noStrike" cap="none" normalizeH="0" baseline="0" dirty="0">
                 <a:ln>
                   <a:noFill/>
                 </a:ln>
@@ -13730,10 +13280,10 @@
                 <a:ea typeface="宋体" pitchFamily="2" charset="-122"/>
                 <a:cs typeface="Arial" pitchFamily="34" charset="0"/>
               </a:rPr>
-              <a:t>接</a:t>
-            </a:r>
-            <a:r>
-              <a:rPr kumimoji="0" lang="en-US" altLang="zh-CN" sz="1600" b="1" i="0" u="none" strike="noStrike" cap="none" normalizeH="0" baseline="0" dirty="0" smtClean="0">
+              <a:t>内部有一个完整的上电复位</a:t>
+            </a:r>
+            <a:r>
+              <a:rPr kumimoji="0" lang="en-US" altLang="zh-CN" sz="2000" b="1" i="0" u="none" strike="noStrike" cap="none" normalizeH="0" baseline="0" dirty="0">
                 <a:ln>
                   <a:noFill/>
                 </a:ln>
@@ -13745,10 +13295,10 @@
                 <a:ea typeface="宋体" pitchFamily="2" charset="-122"/>
                 <a:cs typeface="Arial" pitchFamily="34" charset="0"/>
               </a:rPr>
-              <a:t>2.0~3.6V</a:t>
-            </a:r>
-            <a:r>
-              <a:rPr kumimoji="0" lang="zh-CN" altLang="en-US" sz="1600" b="1" i="0" u="none" strike="noStrike" cap="none" normalizeH="0" baseline="0" dirty="0" smtClean="0">
+              <a:t>(POR)</a:t>
+            </a:r>
+            <a:r>
+              <a:rPr kumimoji="0" lang="zh-CN" altLang="en-US" sz="2000" b="1" i="0" u="none" strike="noStrike" cap="none" normalizeH="0" baseline="0" dirty="0">
                 <a:ln>
                   <a:noFill/>
                 </a:ln>
@@ -13760,85 +13310,10 @@
                 <a:ea typeface="宋体" pitchFamily="2" charset="-122"/>
                 <a:cs typeface="Arial" pitchFamily="34" charset="0"/>
               </a:rPr>
-              <a:t>的直流电源。</a:t>
-            </a:r>
-            <a:r>
-              <a:rPr kumimoji="0" lang="zh-CN" altLang="en-US" sz="1600" b="1" i="0" u="none" strike="noStrike" cap="none" normalizeH="0" baseline="0" dirty="0" smtClean="0">
-                <a:ln>
-                  <a:noFill/>
-                </a:ln>
-                <a:solidFill>
-                  <a:srgbClr val="7030A0"/>
-                </a:solidFill>
-                <a:effectLst/>
-                <a:latin typeface="+mj-ea"/>
-                <a:ea typeface="+mj-ea"/>
-                <a:cs typeface="Arial" pitchFamily="34" charset="0"/>
-              </a:rPr>
-              <a:t>通常接</a:t>
-            </a:r>
-            <a:r>
-              <a:rPr kumimoji="0" lang="en-US" altLang="zh-CN" sz="1600" b="1" i="0" u="none" strike="noStrike" cap="none" normalizeH="0" baseline="0" dirty="0" smtClean="0">
-                <a:ln>
-                  <a:noFill/>
-                </a:ln>
-                <a:solidFill>
-                  <a:srgbClr val="7030A0"/>
-                </a:solidFill>
-                <a:effectLst/>
-                <a:latin typeface="+mj-ea"/>
-                <a:ea typeface="+mj-ea"/>
-                <a:cs typeface="Arial" pitchFamily="34" charset="0"/>
-              </a:rPr>
-              <a:t>3.3V</a:t>
-            </a:r>
-            <a:r>
-              <a:rPr kumimoji="0" lang="zh-CN" altLang="en-US" sz="1600" b="1" i="0" u="none" strike="noStrike" cap="none" normalizeH="0" baseline="0" dirty="0" smtClean="0">
-                <a:ln>
-                  <a:noFill/>
-                </a:ln>
-                <a:solidFill>
-                  <a:srgbClr val="7030A0"/>
-                </a:solidFill>
-                <a:effectLst/>
-                <a:latin typeface="+mj-ea"/>
-                <a:ea typeface="+mj-ea"/>
-                <a:cs typeface="Arial" pitchFamily="34" charset="0"/>
-              </a:rPr>
-              <a:t>，供</a:t>
-            </a:r>
-            <a:r>
-              <a:rPr kumimoji="0" lang="en-US" altLang="zh-CN" sz="1600" b="1" i="0" u="none" strike="noStrike" cap="none" normalizeH="0" baseline="0" dirty="0" smtClean="0">
-                <a:ln>
-                  <a:noFill/>
-                </a:ln>
-                <a:solidFill>
-                  <a:srgbClr val="7030A0"/>
-                </a:solidFill>
-                <a:effectLst/>
-                <a:latin typeface="+mj-ea"/>
-                <a:ea typeface="+mj-ea"/>
-                <a:cs typeface="Arial" pitchFamily="34" charset="0"/>
-              </a:rPr>
-              <a:t>I/O</a:t>
-            </a:r>
-            <a:r>
-              <a:rPr kumimoji="0" lang="zh-CN" altLang="en-US" sz="1600" b="1" i="0" u="none" strike="noStrike" cap="none" normalizeH="0" baseline="0" dirty="0" smtClean="0">
-                <a:ln>
-                  <a:noFill/>
-                </a:ln>
-                <a:solidFill>
-                  <a:srgbClr val="7030A0"/>
-                </a:solidFill>
-                <a:effectLst/>
-                <a:latin typeface="+mj-ea"/>
-                <a:ea typeface="+mj-ea"/>
-                <a:cs typeface="Arial" pitchFamily="34" charset="0"/>
-              </a:rPr>
-              <a:t>等接口使用</a:t>
-            </a:r>
-            <a:r>
-              <a:rPr kumimoji="0" lang="zh-CN" altLang="en-US" sz="1600" b="1" i="0" u="none" strike="noStrike" cap="none" normalizeH="0" baseline="0" dirty="0" smtClean="0">
+              <a:t>和掉电复位</a:t>
+            </a:r>
+            <a:r>
+              <a:rPr kumimoji="0" lang="en-US" altLang="zh-CN" sz="2000" b="1" i="0" u="none" strike="noStrike" cap="none" normalizeH="0" baseline="0" dirty="0">
                 <a:ln>
                   <a:noFill/>
                 </a:ln>
@@ -13850,10 +13325,10 @@
                 <a:ea typeface="宋体" pitchFamily="2" charset="-122"/>
                 <a:cs typeface="Arial" pitchFamily="34" charset="0"/>
               </a:rPr>
-              <a:t>。内置电压调节器提高</a:t>
-            </a:r>
-            <a:r>
-              <a:rPr kumimoji="0" lang="en-US" altLang="zh-CN" sz="1600" b="1" i="0" u="none" strike="noStrike" cap="none" normalizeH="0" baseline="0" dirty="0" smtClean="0">
+              <a:t>(PDR)</a:t>
+            </a:r>
+            <a:r>
+              <a:rPr kumimoji="0" lang="zh-CN" altLang="en-US" sz="2000" b="1" i="0" u="none" strike="noStrike" cap="none" normalizeH="0" baseline="0" dirty="0">
                 <a:ln>
                   <a:noFill/>
                 </a:ln>
@@ -13865,10 +13340,10 @@
                 <a:ea typeface="宋体" pitchFamily="2" charset="-122"/>
                 <a:cs typeface="Arial" pitchFamily="34" charset="0"/>
               </a:rPr>
-              <a:t>CM3</a:t>
-            </a:r>
-            <a:r>
-              <a:rPr kumimoji="0" lang="zh-CN" altLang="en-US" sz="1600" b="1" i="0" u="none" strike="noStrike" cap="none" normalizeH="0" baseline="0" dirty="0" smtClean="0">
+              <a:t>电路，当供电电压达到</a:t>
+            </a:r>
+            <a:r>
+              <a:rPr kumimoji="0" lang="en-US" altLang="zh-CN" sz="2000" b="1" i="0" u="none" strike="noStrike" cap="none" normalizeH="0" baseline="0" dirty="0">
                 <a:ln>
                   <a:noFill/>
                 </a:ln>
@@ -13880,10 +13355,10 @@
                 <a:ea typeface="宋体" pitchFamily="2" charset="-122"/>
                 <a:cs typeface="Arial" pitchFamily="34" charset="0"/>
               </a:rPr>
-              <a:t>处理器所需的</a:t>
-            </a:r>
-            <a:r>
-              <a:rPr kumimoji="0" lang="en-US" altLang="zh-CN" sz="1600" b="1" i="0" u="none" strike="noStrike" cap="none" normalizeH="0" baseline="0" dirty="0" smtClean="0">
+              <a:t>2V</a:t>
+            </a:r>
+            <a:r>
+              <a:rPr kumimoji="0" lang="zh-CN" altLang="en-US" sz="2000" b="1" i="0" u="none" strike="noStrike" cap="none" normalizeH="0" baseline="0" dirty="0">
                 <a:ln>
                   <a:noFill/>
                 </a:ln>
@@ -13895,10 +13370,10 @@
                 <a:ea typeface="宋体" pitchFamily="2" charset="-122"/>
                 <a:cs typeface="Arial" pitchFamily="34" charset="0"/>
               </a:rPr>
-              <a:t>1.8V</a:t>
-            </a:r>
-            <a:r>
-              <a:rPr kumimoji="0" lang="zh-CN" altLang="en-US" sz="1600" b="1" i="0" u="none" strike="noStrike" cap="none" normalizeH="0" baseline="0" dirty="0" smtClean="0">
+              <a:t>时，系统就能正常工作。当</a:t>
+            </a:r>
+            <a:r>
+              <a:rPr kumimoji="0" lang="en-US" altLang="zh-CN" sz="2000" b="1" i="0" u="none" strike="noStrike" cap="none" normalizeH="0" baseline="0" dirty="0">
                 <a:ln>
                   <a:noFill/>
                 </a:ln>
@@ -13910,9 +13385,54 @@
                 <a:ea typeface="宋体" pitchFamily="2" charset="-122"/>
                 <a:cs typeface="Arial" pitchFamily="34" charset="0"/>
               </a:rPr>
-              <a:t>电源。电压调节器有三种工作模式：</a:t>
-            </a:r>
-            <a:endParaRPr kumimoji="0" lang="zh-CN" altLang="en-US" sz="1600" b="0" i="0" u="none" strike="noStrike" cap="none" normalizeH="0" baseline="0" dirty="0" smtClean="0">
+              <a:t>VDD/VDDA</a:t>
+            </a:r>
+            <a:r>
+              <a:rPr kumimoji="0" lang="zh-CN" altLang="en-US" sz="2000" b="1" i="0" u="none" strike="noStrike" cap="none" normalizeH="0" baseline="0" dirty="0">
+                <a:ln>
+                  <a:noFill/>
+                </a:ln>
+                <a:solidFill>
+                  <a:srgbClr val="4D4D4D"/>
+                </a:solidFill>
+                <a:effectLst/>
+                <a:latin typeface="Arial" pitchFamily="34" charset="0"/>
+                <a:ea typeface="宋体" pitchFamily="2" charset="-122"/>
+                <a:cs typeface="Arial" pitchFamily="34" charset="0"/>
+              </a:rPr>
+              <a:t>低于指定的限位电压</a:t>
+            </a:r>
+            <a:r>
+              <a:rPr kumimoji="0" lang="en-US" altLang="zh-CN" sz="2000" b="1" i="0" u="none" strike="noStrike" cap="none" normalizeH="0" baseline="0" dirty="0">
+                <a:ln>
+                  <a:noFill/>
+                </a:ln>
+                <a:solidFill>
+                  <a:srgbClr val="4D4D4D"/>
+                </a:solidFill>
+                <a:effectLst/>
+                <a:latin typeface="Arial" pitchFamily="34" charset="0"/>
+                <a:ea typeface="宋体" pitchFamily="2" charset="-122"/>
+                <a:cs typeface="Arial" pitchFamily="34" charset="0"/>
+              </a:rPr>
+              <a:t>VPOR/PDR</a:t>
+            </a:r>
+            <a:r>
+              <a:rPr kumimoji="0" lang="zh-CN" altLang="en-US" sz="2000" b="1" i="0" u="none" strike="noStrike" cap="none" normalizeH="0" baseline="0" dirty="0">
+                <a:ln>
+                  <a:noFill/>
+                </a:ln>
+                <a:solidFill>
+                  <a:srgbClr val="4D4D4D"/>
+                </a:solidFill>
+                <a:effectLst/>
+                <a:latin typeface="Arial" pitchFamily="34" charset="0"/>
+                <a:ea typeface="宋体" pitchFamily="2" charset="-122"/>
+                <a:cs typeface="Arial" pitchFamily="34" charset="0"/>
+              </a:rPr>
+              <a:t>时，系统保持为复位状态，无需外部复位电路。</a:t>
+            </a:r>
+            <a:endParaRPr kumimoji="0" lang="zh-CN" altLang="en-US" sz="2000" b="0" i="0" u="none" strike="noStrike" cap="none" normalizeH="0" baseline="0" dirty="0">
               <a:ln>
                 <a:noFill/>
               </a:ln>
@@ -13936,18 +13456,14 @@
               <a:spcAft>
                 <a:spcPct val="0"/>
               </a:spcAft>
-              <a:buClr>
-                <a:schemeClr val="accent2">
-                  <a:lumMod val="50000"/>
-                </a:schemeClr>
-              </a:buClr>
+              <a:buClrTx/>
               <a:buSzTx/>
-              <a:buFont typeface="Wingdings" pitchFamily="2" charset="2"/>
-              <a:buChar char="u"/>
+              <a:buFontTx/>
+              <a:buNone/>
               <a:tabLst/>
             </a:pPr>
             <a:r>
-              <a:rPr kumimoji="0" lang="zh-CN" altLang="en-US" sz="1600" b="1" i="0" u="none" strike="noStrike" cap="none" normalizeH="0" baseline="0" dirty="0" smtClean="0">
+              <a:rPr kumimoji="0" lang="en-US" altLang="zh-CN" sz="2000" b="1" i="0" u="none" strike="noStrike" cap="none" normalizeH="0" baseline="0" dirty="0">
                 <a:ln>
                   <a:noFill/>
                 </a:ln>
@@ -13959,10 +13475,10 @@
                 <a:ea typeface="宋体" pitchFamily="2" charset="-122"/>
                 <a:cs typeface="Arial" pitchFamily="34" charset="0"/>
               </a:rPr>
-              <a:t>运行模式：提供</a:t>
-            </a:r>
-            <a:r>
-              <a:rPr kumimoji="0" lang="en-US" altLang="zh-CN" sz="1600" b="1" i="0" u="none" strike="noStrike" cap="none" normalizeH="0" baseline="0" dirty="0" smtClean="0">
+              <a:t>2.</a:t>
+            </a:r>
+            <a:r>
+              <a:rPr kumimoji="0" lang="zh-CN" altLang="en-US" sz="2000" b="1" i="0" u="none" strike="noStrike" cap="none" normalizeH="0" baseline="0" dirty="0">
                 <a:ln>
                   <a:noFill/>
                 </a:ln>
@@ -13974,10 +13490,10 @@
                 <a:ea typeface="宋体" pitchFamily="2" charset="-122"/>
                 <a:cs typeface="Arial" pitchFamily="34" charset="0"/>
               </a:rPr>
-              <a:t>1.8V</a:t>
-            </a:r>
-            <a:r>
-              <a:rPr kumimoji="0" lang="zh-CN" altLang="en-US" sz="1600" b="1" i="0" u="none" strike="noStrike" cap="none" normalizeH="0" baseline="0" dirty="0" smtClean="0">
+              <a:t>可编程电压检测器</a:t>
+            </a:r>
+            <a:r>
+              <a:rPr kumimoji="0" lang="en-US" altLang="zh-CN" sz="2000" b="1" i="0" u="none" strike="noStrike" cap="none" normalizeH="0" baseline="0" dirty="0">
                 <a:ln>
                   <a:noFill/>
                 </a:ln>
@@ -13989,99 +13505,9 @@
                 <a:ea typeface="宋体" pitchFamily="2" charset="-122"/>
                 <a:cs typeface="Arial" pitchFamily="34" charset="0"/>
               </a:rPr>
-              <a:t>电源</a:t>
-            </a:r>
-            <a:r>
-              <a:rPr kumimoji="0" lang="en-US" altLang="zh-CN" sz="1600" b="1" i="0" u="none" strike="noStrike" cap="none" normalizeH="0" baseline="0" dirty="0" smtClean="0">
-                <a:ln>
-                  <a:noFill/>
-                </a:ln>
-                <a:solidFill>
-                  <a:srgbClr val="4D4D4D"/>
-                </a:solidFill>
-                <a:effectLst/>
-                <a:latin typeface="Arial" pitchFamily="34" charset="0"/>
-                <a:ea typeface="宋体" pitchFamily="2" charset="-122"/>
-                <a:cs typeface="Arial" pitchFamily="34" charset="0"/>
-              </a:rPr>
-              <a:t>(</a:t>
-            </a:r>
-            <a:r>
-              <a:rPr kumimoji="0" lang="zh-CN" altLang="en-US" sz="1600" b="1" i="0" u="none" strike="noStrike" cap="none" normalizeH="0" baseline="0" dirty="0" smtClean="0">
-                <a:ln>
-                  <a:noFill/>
-                </a:ln>
-                <a:solidFill>
-                  <a:srgbClr val="4D4D4D"/>
-                </a:solidFill>
-                <a:effectLst/>
-                <a:latin typeface="Arial" pitchFamily="34" charset="0"/>
-                <a:ea typeface="宋体" pitchFamily="2" charset="-122"/>
-                <a:cs typeface="Arial" pitchFamily="34" charset="0"/>
-              </a:rPr>
-              <a:t>处理器、内存、外设</a:t>
-            </a:r>
-            <a:r>
-              <a:rPr kumimoji="0" lang="en-US" altLang="zh-CN" sz="1600" b="1" i="0" u="none" strike="noStrike" cap="none" normalizeH="0" baseline="0" dirty="0" smtClean="0">
-                <a:ln>
-                  <a:noFill/>
-                </a:ln>
-                <a:solidFill>
-                  <a:srgbClr val="4D4D4D"/>
-                </a:solidFill>
-                <a:effectLst/>
-                <a:latin typeface="Arial" pitchFamily="34" charset="0"/>
-                <a:ea typeface="宋体" pitchFamily="2" charset="-122"/>
-                <a:cs typeface="Arial" pitchFamily="34" charset="0"/>
-              </a:rPr>
-              <a:t>)</a:t>
-            </a:r>
-            <a:r>
-              <a:rPr kumimoji="0" lang="zh-CN" altLang="en-US" sz="1600" b="1" i="0" u="none" strike="noStrike" cap="none" normalizeH="0" baseline="0" dirty="0" smtClean="0">
-                <a:ln>
-                  <a:noFill/>
-                </a:ln>
-                <a:solidFill>
-                  <a:srgbClr val="4D4D4D"/>
-                </a:solidFill>
-                <a:effectLst/>
-                <a:latin typeface="Arial" pitchFamily="34" charset="0"/>
-                <a:ea typeface="宋体" pitchFamily="2" charset="-122"/>
-                <a:cs typeface="Arial" pitchFamily="34" charset="0"/>
-              </a:rPr>
-              <a:t>。在此模式下，可以通过降低系统时钟或关闭总线上未被使用的</a:t>
-            </a:r>
-            <a:r>
-              <a:rPr kumimoji="0" lang="en-US" altLang="zh-CN" sz="1600" b="1" i="0" u="none" strike="noStrike" cap="none" normalizeH="0" baseline="0" dirty="0" smtClean="0">
-                <a:ln>
-                  <a:noFill/>
-                </a:ln>
-                <a:solidFill>
-                  <a:srgbClr val="4D4D4D"/>
-                </a:solidFill>
-                <a:effectLst/>
-                <a:latin typeface="Arial" pitchFamily="34" charset="0"/>
-                <a:ea typeface="宋体" pitchFamily="2" charset="-122"/>
-                <a:cs typeface="Arial" pitchFamily="34" charset="0"/>
-              </a:rPr>
-              <a:t>CM3</a:t>
-            </a:r>
-            <a:r>
-              <a:rPr kumimoji="0" lang="zh-CN" altLang="en-US" sz="1600" b="1" i="0" u="none" strike="noStrike" cap="none" normalizeH="0" baseline="0" dirty="0" smtClean="0">
-                <a:ln>
-                  <a:noFill/>
-                </a:ln>
-                <a:solidFill>
-                  <a:srgbClr val="4D4D4D"/>
-                </a:solidFill>
-                <a:effectLst/>
-                <a:latin typeface="Arial" pitchFamily="34" charset="0"/>
-                <a:ea typeface="宋体" pitchFamily="2" charset="-122"/>
-                <a:cs typeface="Arial" pitchFamily="34" charset="0"/>
-              </a:rPr>
-              <a:t>处理器外的外设时钟来降低功耗。</a:t>
-            </a:r>
-            <a:endParaRPr kumimoji="0" lang="zh-CN" altLang="en-US" sz="1600" b="0" i="0" u="none" strike="noStrike" cap="none" normalizeH="0" baseline="0" dirty="0" smtClean="0">
+              <a:t>(PVD)</a:t>
+            </a:r>
+            <a:endParaRPr kumimoji="0" lang="en-US" altLang="zh-CN" sz="2000" b="0" i="0" u="none" strike="noStrike" cap="none" normalizeH="0" baseline="0" dirty="0">
               <a:ln>
                 <a:noFill/>
               </a:ln>
@@ -14105,18 +13531,14 @@
               <a:spcAft>
                 <a:spcPct val="0"/>
               </a:spcAft>
-              <a:buClr>
-                <a:schemeClr val="accent2">
-                  <a:lumMod val="50000"/>
-                </a:schemeClr>
-              </a:buClr>
+              <a:buClrTx/>
               <a:buSzTx/>
-              <a:buFont typeface="Wingdings" pitchFamily="2" charset="2"/>
-              <a:buChar char="u"/>
+              <a:buFontTx/>
+              <a:buNone/>
               <a:tabLst/>
             </a:pPr>
             <a:r>
-              <a:rPr kumimoji="0" lang="zh-CN" altLang="en-US" sz="1600" b="1" i="0" u="none" strike="noStrike" cap="none" normalizeH="0" baseline="0" dirty="0" smtClean="0">
+              <a:rPr kumimoji="0" lang="zh-CN" altLang="en-US" sz="2000" b="1" i="0" u="none" strike="noStrike" cap="none" normalizeH="0" baseline="0" dirty="0">
                 <a:ln>
                   <a:noFill/>
                 </a:ln>
@@ -14128,10 +13550,10 @@
                 <a:ea typeface="宋体" pitchFamily="2" charset="-122"/>
                 <a:cs typeface="Arial" pitchFamily="34" charset="0"/>
               </a:rPr>
-              <a:t>停止模式：调节器以低功耗模式提供</a:t>
-            </a:r>
-            <a:r>
-              <a:rPr kumimoji="0" lang="en-US" altLang="zh-CN" sz="1600" b="1" i="0" u="none" strike="noStrike" cap="none" normalizeH="0" baseline="0" dirty="0" smtClean="0">
+              <a:t>当</a:t>
+            </a:r>
+            <a:r>
+              <a:rPr kumimoji="0" lang="en-US" altLang="zh-CN" sz="2000" b="1" i="0" u="none" strike="noStrike" cap="none" normalizeH="0" baseline="0" dirty="0">
                 <a:ln>
                   <a:noFill/>
                 </a:ln>
@@ -14143,10 +13565,10 @@
                 <a:ea typeface="宋体" pitchFamily="2" charset="-122"/>
                 <a:cs typeface="Arial" pitchFamily="34" charset="0"/>
               </a:rPr>
-              <a:t>1.8V</a:t>
-            </a:r>
-            <a:r>
-              <a:rPr kumimoji="0" lang="zh-CN" altLang="en-US" sz="1600" b="1" i="0" u="none" strike="noStrike" cap="none" normalizeH="0" baseline="0" dirty="0" smtClean="0">
+              <a:t>VDD</a:t>
+            </a:r>
+            <a:r>
+              <a:rPr kumimoji="0" lang="zh-CN" altLang="en-US" sz="2000" b="1" i="0" u="none" strike="noStrike" cap="none" normalizeH="0" baseline="0" dirty="0">
                 <a:ln>
                   <a:noFill/>
                 </a:ln>
@@ -14158,10 +13580,10 @@
                 <a:ea typeface="宋体" pitchFamily="2" charset="-122"/>
                 <a:cs typeface="Arial" pitchFamily="34" charset="0"/>
               </a:rPr>
-              <a:t>电源，以保存寄存器和</a:t>
-            </a:r>
-            <a:r>
-              <a:rPr kumimoji="0" lang="en-US" altLang="zh-CN" sz="1600" b="1" i="0" u="none" strike="noStrike" cap="none" normalizeH="0" baseline="0" dirty="0" smtClean="0">
+              <a:t>下降到</a:t>
+            </a:r>
+            <a:r>
+              <a:rPr kumimoji="0" lang="en-US" altLang="zh-CN" sz="2000" b="1" i="0" u="none" strike="noStrike" cap="none" normalizeH="0" baseline="0" dirty="0">
                 <a:ln>
                   <a:noFill/>
                 </a:ln>
@@ -14173,10 +13595,10 @@
                 <a:ea typeface="宋体" pitchFamily="2" charset="-122"/>
                 <a:cs typeface="Arial" pitchFamily="34" charset="0"/>
               </a:rPr>
-              <a:t>SRAM</a:t>
-            </a:r>
-            <a:r>
-              <a:rPr kumimoji="0" lang="zh-CN" altLang="en-US" sz="1600" b="1" i="0" u="none" strike="noStrike" cap="none" normalizeH="0" baseline="0" dirty="0" smtClean="0">
+              <a:t>PVD</a:t>
+            </a:r>
+            <a:r>
+              <a:rPr kumimoji="0" lang="zh-CN" altLang="en-US" sz="2000" b="1" i="0" u="none" strike="noStrike" cap="none" normalizeH="0" baseline="0" dirty="0">
                 <a:ln>
                   <a:noFill/>
                 </a:ln>
@@ -14188,9 +13610,159 @@
                 <a:ea typeface="宋体" pitchFamily="2" charset="-122"/>
                 <a:cs typeface="Arial" pitchFamily="34" charset="0"/>
               </a:rPr>
-              <a:t>的内容。</a:t>
-            </a:r>
-            <a:endParaRPr kumimoji="0" lang="zh-CN" altLang="en-US" sz="1600" b="0" i="0" u="none" strike="noStrike" cap="none" normalizeH="0" baseline="0" dirty="0" smtClean="0">
+              <a:t>阈值以下和</a:t>
+            </a:r>
+            <a:r>
+              <a:rPr kumimoji="0" lang="en-US" altLang="zh-CN" sz="2000" b="1" i="0" u="none" strike="noStrike" cap="none" normalizeH="0" baseline="0" dirty="0">
+                <a:ln>
+                  <a:noFill/>
+                </a:ln>
+                <a:solidFill>
+                  <a:srgbClr val="4D4D4D"/>
+                </a:solidFill>
+                <a:effectLst/>
+                <a:latin typeface="Arial" pitchFamily="34" charset="0"/>
+                <a:ea typeface="宋体" pitchFamily="2" charset="-122"/>
+                <a:cs typeface="Arial" pitchFamily="34" charset="0"/>
+              </a:rPr>
+              <a:t>(</a:t>
+            </a:r>
+            <a:r>
+              <a:rPr kumimoji="0" lang="zh-CN" altLang="en-US" sz="2000" b="1" i="0" u="none" strike="noStrike" cap="none" normalizeH="0" baseline="0" dirty="0">
+                <a:ln>
+                  <a:noFill/>
+                </a:ln>
+                <a:solidFill>
+                  <a:srgbClr val="4D4D4D"/>
+                </a:solidFill>
+                <a:effectLst/>
+                <a:latin typeface="Arial" pitchFamily="34" charset="0"/>
+                <a:ea typeface="宋体" pitchFamily="2" charset="-122"/>
+                <a:cs typeface="Arial" pitchFamily="34" charset="0"/>
+              </a:rPr>
+              <a:t>或</a:t>
+            </a:r>
+            <a:r>
+              <a:rPr kumimoji="0" lang="en-US" altLang="zh-CN" sz="2000" b="1" i="0" u="none" strike="noStrike" cap="none" normalizeH="0" baseline="0" dirty="0">
+                <a:ln>
+                  <a:noFill/>
+                </a:ln>
+                <a:solidFill>
+                  <a:srgbClr val="4D4D4D"/>
+                </a:solidFill>
+                <a:effectLst/>
+                <a:latin typeface="Arial" pitchFamily="34" charset="0"/>
+                <a:ea typeface="宋体" pitchFamily="2" charset="-122"/>
+                <a:cs typeface="Arial" pitchFamily="34" charset="0"/>
+              </a:rPr>
+              <a:t>)</a:t>
+            </a:r>
+            <a:r>
+              <a:rPr kumimoji="0" lang="zh-CN" altLang="en-US" sz="2000" b="1" i="0" u="none" strike="noStrike" cap="none" normalizeH="0" baseline="0" dirty="0">
+                <a:ln>
+                  <a:noFill/>
+                </a:ln>
+                <a:solidFill>
+                  <a:srgbClr val="4D4D4D"/>
+                </a:solidFill>
+                <a:effectLst/>
+                <a:latin typeface="Arial" pitchFamily="34" charset="0"/>
+                <a:ea typeface="宋体" pitchFamily="2" charset="-122"/>
+                <a:cs typeface="Arial" pitchFamily="34" charset="0"/>
+              </a:rPr>
+              <a:t>当</a:t>
+            </a:r>
+            <a:r>
+              <a:rPr kumimoji="0" lang="en-US" altLang="zh-CN" sz="2000" b="1" i="0" u="none" strike="noStrike" cap="none" normalizeH="0" baseline="0" dirty="0">
+                <a:ln>
+                  <a:noFill/>
+                </a:ln>
+                <a:solidFill>
+                  <a:srgbClr val="4D4D4D"/>
+                </a:solidFill>
+                <a:effectLst/>
+                <a:latin typeface="Arial" pitchFamily="34" charset="0"/>
+                <a:ea typeface="宋体" pitchFamily="2" charset="-122"/>
+                <a:cs typeface="Arial" pitchFamily="34" charset="0"/>
+              </a:rPr>
+              <a:t>VDD</a:t>
+            </a:r>
+            <a:r>
+              <a:rPr kumimoji="0" lang="zh-CN" altLang="en-US" sz="2000" b="1" i="0" u="none" strike="noStrike" cap="none" normalizeH="0" baseline="0" dirty="0">
+                <a:ln>
+                  <a:noFill/>
+                </a:ln>
+                <a:solidFill>
+                  <a:srgbClr val="4D4D4D"/>
+                </a:solidFill>
+                <a:effectLst/>
+                <a:latin typeface="Arial" pitchFamily="34" charset="0"/>
+                <a:ea typeface="宋体" pitchFamily="2" charset="-122"/>
+                <a:cs typeface="Arial" pitchFamily="34" charset="0"/>
+              </a:rPr>
+              <a:t>上升到</a:t>
+            </a:r>
+            <a:r>
+              <a:rPr kumimoji="0" lang="en-US" altLang="zh-CN" sz="2000" b="1" i="0" u="none" strike="noStrike" cap="none" normalizeH="0" baseline="0" dirty="0">
+                <a:ln>
+                  <a:noFill/>
+                </a:ln>
+                <a:solidFill>
+                  <a:srgbClr val="4D4D4D"/>
+                </a:solidFill>
+                <a:effectLst/>
+                <a:latin typeface="Arial" pitchFamily="34" charset="0"/>
+                <a:ea typeface="宋体" pitchFamily="2" charset="-122"/>
+                <a:cs typeface="Arial" pitchFamily="34" charset="0"/>
+              </a:rPr>
+              <a:t>PVD</a:t>
+            </a:r>
+            <a:r>
+              <a:rPr kumimoji="0" lang="zh-CN" altLang="en-US" sz="2000" b="1" i="0" u="none" strike="noStrike" cap="none" normalizeH="0" baseline="0" dirty="0">
+                <a:ln>
+                  <a:noFill/>
+                </a:ln>
+                <a:solidFill>
+                  <a:srgbClr val="4D4D4D"/>
+                </a:solidFill>
+                <a:effectLst/>
+                <a:latin typeface="Arial" pitchFamily="34" charset="0"/>
+                <a:ea typeface="宋体" pitchFamily="2" charset="-122"/>
+                <a:cs typeface="Arial" pitchFamily="34" charset="0"/>
+              </a:rPr>
+              <a:t>阈值之上时，会产生</a:t>
+            </a:r>
+            <a:r>
+              <a:rPr kumimoji="0" lang="en-US" altLang="zh-CN" sz="2000" b="1" i="0" u="none" strike="noStrike" cap="none" normalizeH="0" baseline="0" dirty="0">
+                <a:ln>
+                  <a:noFill/>
+                </a:ln>
+                <a:solidFill>
+                  <a:srgbClr val="4D4D4D"/>
+                </a:solidFill>
+                <a:effectLst/>
+                <a:latin typeface="Arial" pitchFamily="34" charset="0"/>
+                <a:ea typeface="宋体" pitchFamily="2" charset="-122"/>
+                <a:cs typeface="Arial" pitchFamily="34" charset="0"/>
+              </a:rPr>
+              <a:t>PVD</a:t>
+            </a:r>
+            <a:r>
+              <a:rPr kumimoji="0" lang="zh-CN" altLang="en-US" sz="2000" b="1" i="0" u="none" strike="noStrike" cap="none" normalizeH="0" baseline="0" dirty="0">
+                <a:ln>
+                  <a:noFill/>
+                </a:ln>
+                <a:solidFill>
+                  <a:srgbClr val="4D4D4D"/>
+                </a:solidFill>
+                <a:effectLst/>
+                <a:latin typeface="Arial" pitchFamily="34" charset="0"/>
+                <a:ea typeface="宋体" pitchFamily="2" charset="-122"/>
+                <a:cs typeface="Arial" pitchFamily="34" charset="0"/>
+              </a:rPr>
+              <a:t>中断。</a:t>
+            </a:r>
+            <a:endParaRPr kumimoji="0" lang="zh-CN" altLang="en-US" sz="2000" b="0" i="0" u="none" strike="noStrike" cap="none" normalizeH="0" baseline="0" dirty="0">
               <a:ln>
                 <a:noFill/>
               </a:ln>
@@ -14214,62 +13786,13 @@
               <a:spcAft>
                 <a:spcPct val="0"/>
               </a:spcAft>
-              <a:buClr>
-                <a:schemeClr val="accent2">
-                  <a:lumMod val="50000"/>
-                </a:schemeClr>
-              </a:buClr>
+              <a:buClrTx/>
               <a:buSzTx/>
-              <a:buFont typeface="Wingdings" pitchFamily="2" charset="2"/>
-              <a:buChar char="u"/>
+              <a:buFontTx/>
+              <a:buNone/>
               <a:tabLst/>
             </a:pPr>
-            <a:r>
-              <a:rPr kumimoji="0" lang="zh-CN" altLang="en-US" sz="1600" b="1" i="0" u="none" strike="noStrike" cap="none" normalizeH="0" baseline="0" dirty="0" smtClean="0">
-                <a:ln>
-                  <a:noFill/>
-                </a:ln>
-                <a:solidFill>
-                  <a:srgbClr val="4D4D4D"/>
-                </a:solidFill>
-                <a:effectLst/>
-                <a:latin typeface="Arial" pitchFamily="34" charset="0"/>
-                <a:ea typeface="宋体" pitchFamily="2" charset="-122"/>
-                <a:cs typeface="Arial" pitchFamily="34" charset="0"/>
-              </a:rPr>
-              <a:t>待机模式：调节器停止供电，除了备用电路和备份域外，寄存器和</a:t>
-            </a:r>
-            <a:r>
-              <a:rPr kumimoji="0" lang="en-US" altLang="zh-CN" sz="1600" b="1" i="0" u="none" strike="noStrike" cap="none" normalizeH="0" baseline="0" dirty="0" smtClean="0">
-                <a:ln>
-                  <a:noFill/>
-                </a:ln>
-                <a:solidFill>
-                  <a:srgbClr val="4D4D4D"/>
-                </a:solidFill>
-                <a:effectLst/>
-                <a:latin typeface="Arial" pitchFamily="34" charset="0"/>
-                <a:ea typeface="宋体" pitchFamily="2" charset="-122"/>
-                <a:cs typeface="Arial" pitchFamily="34" charset="0"/>
-              </a:rPr>
-              <a:t>SRAM</a:t>
-            </a:r>
-            <a:r>
-              <a:rPr kumimoji="0" lang="zh-CN" altLang="en-US" sz="1600" b="1" i="0" u="none" strike="noStrike" cap="none" normalizeH="0" baseline="0" dirty="0" smtClean="0">
-                <a:ln>
-                  <a:noFill/>
-                </a:ln>
-                <a:solidFill>
-                  <a:srgbClr val="4D4D4D"/>
-                </a:solidFill>
-                <a:effectLst/>
-                <a:latin typeface="Arial" pitchFamily="34" charset="0"/>
-                <a:ea typeface="宋体" pitchFamily="2" charset="-122"/>
-                <a:cs typeface="Arial" pitchFamily="34" charset="0"/>
-              </a:rPr>
-              <a:t>的内容全部丢失。</a:t>
-            </a:r>
-            <a:endParaRPr kumimoji="0" lang="zh-CN" altLang="en-US" sz="1600" b="0" i="0" u="none" strike="noStrike" cap="none" normalizeH="0" baseline="0" dirty="0" smtClean="0">
+            <a:endParaRPr kumimoji="0" lang="zh-CN" altLang="en-US" sz="2000" b="0" i="0" u="none" strike="noStrike" cap="none" normalizeH="0" baseline="0" dirty="0">
               <a:ln>
                 <a:noFill/>
               </a:ln>
@@ -14284,18 +13807,25 @@
           </a:p>
         </p:txBody>
       </p:sp>
-      <p:sp>
-        <p:nvSpPr>
-          <p:cNvPr id="8" name="Rectangle 1"/>
-          <p:cNvSpPr>
-            <a:spLocks noChangeArrowheads="1"/>
-          </p:cNvSpPr>
+      <p:pic>
+        <p:nvPicPr>
+          <p:cNvPr id="147458" name="Picture 2"/>
+          <p:cNvPicPr>
+            <a:picLocks noChangeAspect="1" noChangeArrowheads="1"/>
+          </p:cNvPicPr>
           <p:nvPr/>
-        </p:nvSpPr>
+        </p:nvPicPr>
+        <p:blipFill>
+          <a:blip r:embed="rId3"/>
+          <a:srcRect/>
+          <a:stretch>
+            <a:fillRect/>
+          </a:stretch>
+        </p:blipFill>
         <p:spPr bwMode="auto">
           <a:xfrm>
-            <a:off x="494524" y="4702629"/>
-            <a:ext cx="10767525" cy="1569660"/>
+            <a:off x="6397012" y="1418352"/>
+            <a:ext cx="4517762" cy="2164604"/>
           </a:xfrm>
           <a:prstGeom prst="rect">
             <a:avLst/>
@@ -14309,786 +13839,45 @@
           </a:ln>
           <a:effectLst/>
         </p:spPr>
-        <p:txBody>
-          <a:bodyPr vert="horz" wrap="square" lIns="91440" tIns="45720" rIns="91440" bIns="45720" numCol="1" anchor="ctr" anchorCtr="0" compatLnSpc="1">
-            <a:prstTxWarp prst="textNoShape">
-              <a:avLst/>
-            </a:prstTxWarp>
-            <a:spAutoFit/>
-          </a:bodyPr>
-          <a:lstStyle/>
-          <a:p>
-            <a:pPr marL="0" marR="0" lvl="0" indent="0" algn="l" defTabSz="914400" rtl="0" eaLnBrk="1" fontAlgn="base" latinLnBrk="0" hangingPunct="1">
-              <a:lnSpc>
-                <a:spcPct val="100000"/>
-              </a:lnSpc>
-              <a:spcBef>
-                <a:spcPct val="0"/>
-              </a:spcBef>
-              <a:spcAft>
-                <a:spcPct val="0"/>
-              </a:spcAft>
-              <a:buClrTx/>
-              <a:buSzTx/>
-              <a:buFontTx/>
-              <a:buNone/>
-              <a:tabLst/>
-            </a:pPr>
-            <a:r>
-              <a:rPr kumimoji="0" lang="en-US" altLang="zh-CN" sz="1600" b="1" i="0" u="none" strike="noStrike" cap="none" normalizeH="0" baseline="0" dirty="0" smtClean="0">
-                <a:ln>
-                  <a:noFill/>
-                </a:ln>
-                <a:solidFill>
-                  <a:schemeClr val="accent4">
-                    <a:lumMod val="75000"/>
-                  </a:schemeClr>
-                </a:solidFill>
-                <a:effectLst/>
-                <a:latin typeface="+mn-ea"/>
-                <a:cs typeface="Arial" pitchFamily="34" charset="0"/>
-              </a:rPr>
-              <a:t>2.</a:t>
-            </a:r>
-            <a:r>
-              <a:rPr kumimoji="0" lang="zh-CN" altLang="en-US" sz="1600" b="1" i="0" u="none" strike="noStrike" cap="none" normalizeH="0" baseline="0" dirty="0" smtClean="0">
-                <a:ln>
-                  <a:noFill/>
-                </a:ln>
-                <a:solidFill>
-                  <a:schemeClr val="accent4">
-                    <a:lumMod val="75000"/>
-                  </a:schemeClr>
-                </a:solidFill>
-                <a:effectLst/>
-                <a:latin typeface="+mn-ea"/>
-                <a:cs typeface="Arial" pitchFamily="34" charset="0"/>
-              </a:rPr>
-              <a:t>模拟部分</a:t>
-            </a:r>
-            <a:endParaRPr kumimoji="0" lang="zh-CN" altLang="en-US" sz="1600" b="0" i="0" u="none" strike="noStrike" cap="none" normalizeH="0" baseline="0" dirty="0" smtClean="0">
-              <a:ln>
-                <a:noFill/>
-              </a:ln>
-              <a:solidFill>
-                <a:schemeClr val="accent4">
-                  <a:lumMod val="75000"/>
-                </a:schemeClr>
-              </a:solidFill>
-              <a:effectLst/>
-              <a:latin typeface="+mn-ea"/>
-              <a:cs typeface="宋体" pitchFamily="2" charset="-122"/>
-            </a:endParaRPr>
-          </a:p>
-          <a:p>
-            <a:pPr marL="0" marR="0" lvl="0" indent="0" algn="l" defTabSz="914400" rtl="0" eaLnBrk="0" fontAlgn="base" latinLnBrk="0" hangingPunct="0">
-              <a:lnSpc>
-                <a:spcPct val="100000"/>
-              </a:lnSpc>
-              <a:spcBef>
-                <a:spcPct val="0"/>
-              </a:spcBef>
-              <a:spcAft>
-                <a:spcPct val="0"/>
-              </a:spcAft>
-              <a:buClrTx/>
-              <a:buSzTx/>
-              <a:buFontTx/>
-              <a:buNone/>
-              <a:tabLst/>
-            </a:pPr>
-            <a:r>
-              <a:rPr kumimoji="0" lang="en-US" altLang="zh-CN" sz="1600" b="1" i="0" u="none" strike="noStrike" cap="none" normalizeH="0" baseline="0" dirty="0" smtClean="0">
-                <a:ln>
-                  <a:noFill/>
-                </a:ln>
-                <a:solidFill>
-                  <a:srgbClr val="4D4D4D"/>
-                </a:solidFill>
-                <a:effectLst/>
-                <a:latin typeface="Arial" pitchFamily="34" charset="0"/>
-                <a:ea typeface="宋体" pitchFamily="2" charset="-122"/>
-                <a:cs typeface="Arial" pitchFamily="34" charset="0"/>
-              </a:rPr>
-              <a:t>VSSA</a:t>
-            </a:r>
-            <a:r>
-              <a:rPr kumimoji="0" lang="zh-CN" altLang="en-US" sz="1600" b="1" i="0" u="none" strike="noStrike" cap="none" normalizeH="0" baseline="0" dirty="0" smtClean="0">
-                <a:ln>
-                  <a:noFill/>
-                </a:ln>
-                <a:solidFill>
-                  <a:srgbClr val="4D4D4D"/>
-                </a:solidFill>
-                <a:effectLst/>
-                <a:latin typeface="Arial" pitchFamily="34" charset="0"/>
-                <a:ea typeface="宋体" pitchFamily="2" charset="-122"/>
-                <a:cs typeface="Arial" pitchFamily="34" charset="0"/>
-              </a:rPr>
-              <a:t>为独立电源地，</a:t>
-            </a:r>
-            <a:r>
-              <a:rPr kumimoji="0" lang="en-US" altLang="zh-CN" sz="1600" b="1" i="0" u="none" strike="noStrike" cap="none" normalizeH="0" baseline="0" dirty="0" smtClean="0">
-                <a:ln>
-                  <a:noFill/>
-                </a:ln>
-                <a:solidFill>
-                  <a:srgbClr val="4D4D4D"/>
-                </a:solidFill>
-                <a:effectLst/>
-                <a:latin typeface="Arial" pitchFamily="34" charset="0"/>
-                <a:ea typeface="宋体" pitchFamily="2" charset="-122"/>
-                <a:cs typeface="Arial" pitchFamily="34" charset="0"/>
-              </a:rPr>
-              <a:t>VDDA</a:t>
-            </a:r>
-            <a:r>
-              <a:rPr kumimoji="0" lang="zh-CN" altLang="en-US" sz="1600" b="1" i="0" u="none" strike="noStrike" cap="none" normalizeH="0" baseline="0" dirty="0" smtClean="0">
-                <a:ln>
-                  <a:noFill/>
-                </a:ln>
-                <a:solidFill>
-                  <a:srgbClr val="4D4D4D"/>
-                </a:solidFill>
-                <a:effectLst/>
-                <a:latin typeface="Arial" pitchFamily="34" charset="0"/>
-                <a:ea typeface="宋体" pitchFamily="2" charset="-122"/>
-                <a:cs typeface="Arial" pitchFamily="34" charset="0"/>
-              </a:rPr>
-              <a:t>接</a:t>
-            </a:r>
-            <a:r>
-              <a:rPr kumimoji="0" lang="en-US" altLang="zh-CN" sz="1600" b="1" i="0" u="none" strike="noStrike" cap="none" normalizeH="0" baseline="0" dirty="0" smtClean="0">
-                <a:ln>
-                  <a:noFill/>
-                </a:ln>
-                <a:solidFill>
-                  <a:srgbClr val="4D4D4D"/>
-                </a:solidFill>
-                <a:effectLst/>
-                <a:latin typeface="Arial" pitchFamily="34" charset="0"/>
-                <a:ea typeface="宋体" pitchFamily="2" charset="-122"/>
-                <a:cs typeface="Arial" pitchFamily="34" charset="0"/>
-              </a:rPr>
-              <a:t>2.0~36V</a:t>
-            </a:r>
-            <a:r>
-              <a:rPr kumimoji="0" lang="zh-CN" altLang="en-US" sz="1600" b="1" i="0" u="none" strike="noStrike" cap="none" normalizeH="0" baseline="0" dirty="0" smtClean="0">
-                <a:ln>
-                  <a:noFill/>
-                </a:ln>
-                <a:solidFill>
-                  <a:srgbClr val="4D4D4D"/>
-                </a:solidFill>
-                <a:effectLst/>
-                <a:latin typeface="Arial" pitchFamily="34" charset="0"/>
-                <a:ea typeface="宋体" pitchFamily="2" charset="-122"/>
-                <a:cs typeface="Arial" pitchFamily="34" charset="0"/>
-              </a:rPr>
-              <a:t>，为</a:t>
-            </a:r>
-            <a:r>
-              <a:rPr kumimoji="0" lang="en-US" altLang="zh-CN" sz="1600" b="1" i="0" u="none" strike="noStrike" cap="none" normalizeH="0" baseline="0" dirty="0" smtClean="0">
-                <a:ln>
-                  <a:noFill/>
-                </a:ln>
-                <a:solidFill>
-                  <a:srgbClr val="4D4D4D"/>
-                </a:solidFill>
-                <a:effectLst/>
-                <a:latin typeface="Arial" pitchFamily="34" charset="0"/>
-                <a:ea typeface="宋体" pitchFamily="2" charset="-122"/>
-                <a:cs typeface="Arial" pitchFamily="34" charset="0"/>
-              </a:rPr>
-              <a:t>ADC</a:t>
-            </a:r>
-            <a:r>
-              <a:rPr kumimoji="0" lang="zh-CN" altLang="en-US" sz="1600" b="1" i="0" u="none" strike="noStrike" cap="none" normalizeH="0" baseline="0" dirty="0" smtClean="0">
-                <a:ln>
-                  <a:noFill/>
-                </a:ln>
-                <a:solidFill>
-                  <a:srgbClr val="4D4D4D"/>
-                </a:solidFill>
-                <a:effectLst/>
-                <a:latin typeface="Arial" pitchFamily="34" charset="0"/>
-                <a:ea typeface="宋体" pitchFamily="2" charset="-122"/>
-                <a:cs typeface="Arial" pitchFamily="34" charset="0"/>
-              </a:rPr>
-              <a:t>、复位模块、</a:t>
-            </a:r>
-            <a:r>
-              <a:rPr kumimoji="0" lang="en-US" altLang="zh-CN" sz="1600" b="1" i="0" u="none" strike="noStrike" cap="none" normalizeH="0" baseline="0" dirty="0" smtClean="0">
-                <a:ln>
-                  <a:noFill/>
-                </a:ln>
-                <a:solidFill>
-                  <a:srgbClr val="4D4D4D"/>
-                </a:solidFill>
-                <a:effectLst/>
-                <a:latin typeface="Arial" pitchFamily="34" charset="0"/>
-                <a:ea typeface="宋体" pitchFamily="2" charset="-122"/>
-                <a:cs typeface="Arial" pitchFamily="34" charset="0"/>
-              </a:rPr>
-              <a:t>RC</a:t>
-            </a:r>
-            <a:r>
-              <a:rPr kumimoji="0" lang="zh-CN" altLang="en-US" sz="1600" b="1" i="0" u="none" strike="noStrike" cap="none" normalizeH="0" baseline="0" dirty="0" smtClean="0">
-                <a:ln>
-                  <a:noFill/>
-                </a:ln>
-                <a:solidFill>
-                  <a:srgbClr val="4D4D4D"/>
-                </a:solidFill>
-                <a:effectLst/>
-                <a:latin typeface="Arial" pitchFamily="34" charset="0"/>
-                <a:ea typeface="宋体" pitchFamily="2" charset="-122"/>
-                <a:cs typeface="Arial" pitchFamily="34" charset="0"/>
-              </a:rPr>
-              <a:t>振荡器和</a:t>
-            </a:r>
-            <a:r>
-              <a:rPr kumimoji="0" lang="en-US" altLang="zh-CN" sz="1600" b="1" i="0" u="none" strike="noStrike" cap="none" normalizeH="0" baseline="0" dirty="0" smtClean="0">
-                <a:ln>
-                  <a:noFill/>
-                </a:ln>
-                <a:solidFill>
-                  <a:srgbClr val="4D4D4D"/>
-                </a:solidFill>
-                <a:effectLst/>
-                <a:latin typeface="Arial" pitchFamily="34" charset="0"/>
-                <a:ea typeface="宋体" pitchFamily="2" charset="-122"/>
-                <a:cs typeface="Arial" pitchFamily="34" charset="0"/>
-              </a:rPr>
-              <a:t>PLL</a:t>
-            </a:r>
-            <a:r>
-              <a:rPr kumimoji="0" lang="zh-CN" altLang="en-US" sz="1600" b="1" i="0" u="none" strike="noStrike" cap="none" normalizeH="0" baseline="0" dirty="0" smtClean="0">
-                <a:ln>
-                  <a:noFill/>
-                </a:ln>
-                <a:solidFill>
-                  <a:srgbClr val="4D4D4D"/>
-                </a:solidFill>
-                <a:effectLst/>
-                <a:latin typeface="Arial" pitchFamily="34" charset="0"/>
-                <a:ea typeface="宋体" pitchFamily="2" charset="-122"/>
-                <a:cs typeface="Arial" pitchFamily="34" charset="0"/>
-              </a:rPr>
-              <a:t>的模拟部分供电。当</a:t>
-            </a:r>
-            <a:r>
-              <a:rPr kumimoji="0" lang="en-US" altLang="zh-CN" sz="1600" b="1" i="0" u="none" strike="noStrike" cap="none" normalizeH="0" baseline="0" dirty="0" smtClean="0">
-                <a:ln>
-                  <a:noFill/>
-                </a:ln>
-                <a:solidFill>
-                  <a:srgbClr val="4D4D4D"/>
-                </a:solidFill>
-                <a:effectLst/>
-                <a:latin typeface="Arial" pitchFamily="34" charset="0"/>
-                <a:ea typeface="宋体" pitchFamily="2" charset="-122"/>
-                <a:cs typeface="Arial" pitchFamily="34" charset="0"/>
-              </a:rPr>
-              <a:t>VDD≥2.4V</a:t>
-            </a:r>
-            <a:r>
-              <a:rPr kumimoji="0" lang="zh-CN" altLang="en-US" sz="1600" b="1" i="0" u="none" strike="noStrike" cap="none" normalizeH="0" baseline="0" dirty="0" smtClean="0">
-                <a:ln>
-                  <a:noFill/>
-                </a:ln>
-                <a:solidFill>
-                  <a:srgbClr val="4D4D4D"/>
-                </a:solidFill>
-                <a:effectLst/>
-                <a:latin typeface="Arial" pitchFamily="34" charset="0"/>
-                <a:ea typeface="宋体" pitchFamily="2" charset="-122"/>
-                <a:cs typeface="Arial" pitchFamily="34" charset="0"/>
-              </a:rPr>
-              <a:t>时，</a:t>
-            </a:r>
-            <a:r>
-              <a:rPr kumimoji="0" lang="en-US" altLang="zh-CN" sz="1600" b="1" i="0" u="none" strike="noStrike" cap="none" normalizeH="0" baseline="0" dirty="0" smtClean="0">
-                <a:ln>
-                  <a:noFill/>
-                </a:ln>
-                <a:solidFill>
-                  <a:srgbClr val="4D4D4D"/>
-                </a:solidFill>
-                <a:effectLst/>
-                <a:latin typeface="Arial" pitchFamily="34" charset="0"/>
-                <a:ea typeface="宋体" pitchFamily="2" charset="-122"/>
-                <a:cs typeface="Arial" pitchFamily="34" charset="0"/>
-              </a:rPr>
-              <a:t>ADC</a:t>
-            </a:r>
-            <a:r>
-              <a:rPr kumimoji="0" lang="zh-CN" altLang="en-US" sz="1600" b="1" i="0" u="none" strike="noStrike" cap="none" normalizeH="0" baseline="0" dirty="0" smtClean="0">
-                <a:ln>
-                  <a:noFill/>
-                </a:ln>
-                <a:solidFill>
-                  <a:srgbClr val="4D4D4D"/>
-                </a:solidFill>
-                <a:effectLst/>
-                <a:latin typeface="Arial" pitchFamily="34" charset="0"/>
-                <a:ea typeface="宋体" pitchFamily="2" charset="-122"/>
-                <a:cs typeface="Arial" pitchFamily="34" charset="0"/>
-              </a:rPr>
-              <a:t>工作，当</a:t>
-            </a:r>
-            <a:r>
-              <a:rPr kumimoji="0" lang="en-US" altLang="zh-CN" sz="1600" b="1" i="0" u="none" strike="noStrike" cap="none" normalizeH="0" baseline="0" dirty="0" smtClean="0">
-                <a:ln>
-                  <a:noFill/>
-                </a:ln>
-                <a:solidFill>
-                  <a:srgbClr val="4D4D4D"/>
-                </a:solidFill>
-                <a:effectLst/>
-                <a:latin typeface="Arial" pitchFamily="34" charset="0"/>
-                <a:ea typeface="宋体" pitchFamily="2" charset="-122"/>
-                <a:cs typeface="Arial" pitchFamily="34" charset="0"/>
-              </a:rPr>
-              <a:t>VDD≥2.7V</a:t>
-            </a:r>
-            <a:r>
-              <a:rPr kumimoji="0" lang="zh-CN" altLang="en-US" sz="1600" b="1" i="0" u="none" strike="noStrike" cap="none" normalizeH="0" baseline="0" dirty="0" smtClean="0">
-                <a:ln>
-                  <a:noFill/>
-                </a:ln>
-                <a:solidFill>
-                  <a:srgbClr val="4D4D4D"/>
-                </a:solidFill>
-                <a:effectLst/>
-                <a:latin typeface="Arial" pitchFamily="34" charset="0"/>
-                <a:ea typeface="宋体" pitchFamily="2" charset="-122"/>
-                <a:cs typeface="Arial" pitchFamily="34" charset="0"/>
-              </a:rPr>
-              <a:t>时，</a:t>
-            </a:r>
-            <a:r>
-              <a:rPr kumimoji="0" lang="en-US" altLang="zh-CN" sz="1600" b="1" i="0" u="none" strike="noStrike" cap="none" normalizeH="0" baseline="0" dirty="0" smtClean="0">
-                <a:ln>
-                  <a:noFill/>
-                </a:ln>
-                <a:solidFill>
-                  <a:srgbClr val="4D4D4D"/>
-                </a:solidFill>
-                <a:effectLst/>
-                <a:latin typeface="Arial" pitchFamily="34" charset="0"/>
-                <a:ea typeface="宋体" pitchFamily="2" charset="-122"/>
-                <a:cs typeface="Arial" pitchFamily="34" charset="0"/>
-              </a:rPr>
-              <a:t>USB</a:t>
-            </a:r>
-            <a:r>
-              <a:rPr kumimoji="0" lang="zh-CN" altLang="en-US" sz="1600" b="1" i="0" u="none" strike="noStrike" cap="none" normalizeH="0" baseline="0" dirty="0" smtClean="0">
-                <a:ln>
-                  <a:noFill/>
-                </a:ln>
-                <a:solidFill>
-                  <a:srgbClr val="4D4D4D"/>
-                </a:solidFill>
-                <a:effectLst/>
-                <a:latin typeface="Arial" pitchFamily="34" charset="0"/>
-                <a:ea typeface="宋体" pitchFamily="2" charset="-122"/>
-                <a:cs typeface="Arial" pitchFamily="34" charset="0"/>
-              </a:rPr>
-              <a:t>开始工作。</a:t>
-            </a:r>
-            <a:r>
-              <a:rPr kumimoji="0" lang="en-US" altLang="zh-CN" sz="1600" b="1" i="0" u="none" strike="noStrike" cap="none" normalizeH="0" baseline="0" dirty="0" smtClean="0">
-                <a:ln>
-                  <a:noFill/>
-                </a:ln>
-                <a:solidFill>
-                  <a:srgbClr val="4D4D4D"/>
-                </a:solidFill>
-                <a:effectLst/>
-                <a:latin typeface="Arial" pitchFamily="34" charset="0"/>
-                <a:ea typeface="宋体" pitchFamily="2" charset="-122"/>
-                <a:cs typeface="Arial" pitchFamily="34" charset="0"/>
-              </a:rPr>
-              <a:t>VREF+</a:t>
-            </a:r>
-            <a:r>
-              <a:rPr kumimoji="0" lang="zh-CN" altLang="en-US" sz="1600" b="1" i="0" u="none" strike="noStrike" cap="none" normalizeH="0" baseline="0" dirty="0" smtClean="0">
-                <a:ln>
-                  <a:noFill/>
-                </a:ln>
-                <a:solidFill>
-                  <a:srgbClr val="4D4D4D"/>
-                </a:solidFill>
-                <a:effectLst/>
-                <a:latin typeface="Arial" pitchFamily="34" charset="0"/>
-                <a:ea typeface="宋体" pitchFamily="2" charset="-122"/>
-                <a:cs typeface="Arial" pitchFamily="34" charset="0"/>
-              </a:rPr>
-              <a:t>的电压范围为</a:t>
-            </a:r>
-            <a:r>
-              <a:rPr kumimoji="0" lang="en-US" altLang="zh-CN" sz="1600" b="1" i="0" u="none" strike="noStrike" cap="none" normalizeH="0" baseline="0" dirty="0" smtClean="0">
-                <a:ln>
-                  <a:noFill/>
-                </a:ln>
-                <a:solidFill>
-                  <a:srgbClr val="4D4D4D"/>
-                </a:solidFill>
-                <a:effectLst/>
-                <a:latin typeface="Arial" pitchFamily="34" charset="0"/>
-                <a:ea typeface="宋体" pitchFamily="2" charset="-122"/>
-                <a:cs typeface="Arial" pitchFamily="34" charset="0"/>
-              </a:rPr>
-              <a:t>2.4V</a:t>
-            </a:r>
-            <a:r>
-              <a:rPr kumimoji="0" lang="zh-CN" altLang="en-US" sz="1600" b="1" i="0" u="none" strike="noStrike" cap="none" normalizeH="0" baseline="0" dirty="0" smtClean="0">
-                <a:ln>
-                  <a:noFill/>
-                </a:ln>
-                <a:solidFill>
-                  <a:srgbClr val="4D4D4D"/>
-                </a:solidFill>
-                <a:effectLst/>
-                <a:latin typeface="Arial" pitchFamily="34" charset="0"/>
-                <a:ea typeface="宋体" pitchFamily="2" charset="-122"/>
-                <a:cs typeface="Arial" pitchFamily="34" charset="0"/>
-              </a:rPr>
-              <a:t>至</a:t>
-            </a:r>
-            <a:r>
-              <a:rPr kumimoji="0" lang="en-US" altLang="zh-CN" sz="1600" b="1" i="0" u="none" strike="noStrike" cap="none" normalizeH="0" baseline="0" dirty="0" smtClean="0">
-                <a:ln>
-                  <a:noFill/>
-                </a:ln>
-                <a:solidFill>
-                  <a:srgbClr val="4D4D4D"/>
-                </a:solidFill>
-                <a:effectLst/>
-                <a:latin typeface="Arial" pitchFamily="34" charset="0"/>
-                <a:ea typeface="宋体" pitchFamily="2" charset="-122"/>
-                <a:cs typeface="Arial" pitchFamily="34" charset="0"/>
-              </a:rPr>
-              <a:t>VDDA</a:t>
-            </a:r>
-            <a:r>
-              <a:rPr kumimoji="0" lang="zh-CN" altLang="en-US" sz="1600" b="1" i="0" u="none" strike="noStrike" cap="none" normalizeH="0" baseline="0" dirty="0" smtClean="0">
-                <a:ln>
-                  <a:noFill/>
-                </a:ln>
-                <a:solidFill>
-                  <a:srgbClr val="4D4D4D"/>
-                </a:solidFill>
-                <a:effectLst/>
-                <a:latin typeface="Arial" pitchFamily="34" charset="0"/>
-                <a:ea typeface="宋体" pitchFamily="2" charset="-122"/>
-                <a:cs typeface="Arial" pitchFamily="34" charset="0"/>
-              </a:rPr>
-              <a:t>之间。</a:t>
-            </a:r>
-            <a:endParaRPr kumimoji="0" lang="zh-CN" altLang="en-US" sz="1600" b="0" i="0" u="none" strike="noStrike" cap="none" normalizeH="0" baseline="0" dirty="0" smtClean="0">
-              <a:ln>
-                <a:noFill/>
-              </a:ln>
-              <a:solidFill>
-                <a:schemeClr val="tx1"/>
-              </a:solidFill>
-              <a:effectLst/>
-              <a:latin typeface="Arial" pitchFamily="34" charset="0"/>
-              <a:ea typeface="宋体" pitchFamily="2" charset="-122"/>
-              <a:cs typeface="宋体" pitchFamily="2" charset="-122"/>
-            </a:endParaRPr>
-          </a:p>
-          <a:p>
-            <a:pPr marL="0" marR="0" lvl="0" indent="0" algn="l" defTabSz="914400" rtl="0" eaLnBrk="0" fontAlgn="base" latinLnBrk="0" hangingPunct="0">
-              <a:lnSpc>
-                <a:spcPct val="100000"/>
-              </a:lnSpc>
-              <a:spcBef>
-                <a:spcPct val="0"/>
-              </a:spcBef>
-              <a:spcAft>
-                <a:spcPct val="0"/>
-              </a:spcAft>
-              <a:buClrTx/>
-              <a:buSzTx/>
-              <a:buFontTx/>
-              <a:buNone/>
-              <a:tabLst/>
-            </a:pPr>
-            <a:r>
-              <a:rPr kumimoji="0" lang="en-US" altLang="zh-CN" sz="1600" b="1" i="0" u="none" strike="noStrike" cap="none" normalizeH="0" baseline="0" dirty="0" smtClean="0">
-                <a:ln>
-                  <a:noFill/>
-                </a:ln>
-                <a:solidFill>
-                  <a:schemeClr val="accent4">
-                    <a:lumMod val="75000"/>
-                  </a:schemeClr>
-                </a:solidFill>
-                <a:effectLst/>
-                <a:latin typeface="+mn-ea"/>
-                <a:cs typeface="Arial" pitchFamily="34" charset="0"/>
-              </a:rPr>
-              <a:t>3.</a:t>
-            </a:r>
-            <a:r>
-              <a:rPr kumimoji="0" lang="zh-CN" altLang="en-US" sz="1600" b="1" i="0" u="none" strike="noStrike" cap="none" normalizeH="0" baseline="0" dirty="0" smtClean="0">
-                <a:ln>
-                  <a:noFill/>
-                </a:ln>
-                <a:solidFill>
-                  <a:schemeClr val="accent4">
-                    <a:lumMod val="75000"/>
-                  </a:schemeClr>
-                </a:solidFill>
-                <a:effectLst/>
-                <a:latin typeface="+mn-ea"/>
-                <a:cs typeface="Arial" pitchFamily="34" charset="0"/>
-              </a:rPr>
-              <a:t>备份部分</a:t>
-            </a:r>
-            <a:r>
-              <a:rPr kumimoji="0" lang="en-US" altLang="zh-CN" sz="1600" b="1" i="0" u="none" strike="noStrike" cap="none" normalizeH="0" baseline="0" dirty="0" smtClean="0">
-                <a:ln>
-                  <a:noFill/>
-                </a:ln>
-                <a:solidFill>
-                  <a:schemeClr val="accent4">
-                    <a:lumMod val="75000"/>
-                  </a:schemeClr>
-                </a:solidFill>
-                <a:effectLst/>
-                <a:latin typeface="+mn-ea"/>
-                <a:cs typeface="Arial" pitchFamily="34" charset="0"/>
-              </a:rPr>
-              <a:t>VBAT</a:t>
-            </a:r>
-            <a:endParaRPr kumimoji="0" lang="zh-CN" altLang="en-US" sz="1600" b="0" i="0" u="none" strike="noStrike" cap="none" normalizeH="0" baseline="0" dirty="0" smtClean="0">
-              <a:ln>
-                <a:noFill/>
-              </a:ln>
-              <a:solidFill>
-                <a:schemeClr val="accent4">
-                  <a:lumMod val="75000"/>
-                </a:schemeClr>
-              </a:solidFill>
-              <a:effectLst/>
-              <a:latin typeface="Arial" pitchFamily="34" charset="0"/>
-              <a:ea typeface="宋体" pitchFamily="2" charset="-122"/>
-              <a:cs typeface="宋体" pitchFamily="2" charset="-122"/>
-            </a:endParaRPr>
-          </a:p>
-          <a:p>
-            <a:pPr marL="0" marR="0" lvl="0" indent="0" algn="l" defTabSz="914400" rtl="0" eaLnBrk="0" fontAlgn="base" latinLnBrk="0" hangingPunct="0">
-              <a:lnSpc>
-                <a:spcPct val="100000"/>
-              </a:lnSpc>
-              <a:spcBef>
-                <a:spcPct val="0"/>
-              </a:spcBef>
-              <a:spcAft>
-                <a:spcPct val="0"/>
-              </a:spcAft>
-              <a:buClrTx/>
-              <a:buSzTx/>
-              <a:buFontTx/>
-              <a:buNone/>
-              <a:tabLst/>
-            </a:pPr>
-            <a:r>
-              <a:rPr kumimoji="0" lang="zh-CN" altLang="en-US" sz="1600" b="1" i="0" u="none" strike="noStrike" cap="none" normalizeH="0" baseline="0" dirty="0" smtClean="0">
-                <a:ln>
-                  <a:noFill/>
-                </a:ln>
-                <a:solidFill>
-                  <a:srgbClr val="4D4D4D"/>
-                </a:solidFill>
-                <a:effectLst/>
-                <a:latin typeface="Arial" pitchFamily="34" charset="0"/>
-                <a:ea typeface="宋体" pitchFamily="2" charset="-122"/>
-                <a:cs typeface="Arial" pitchFamily="34" charset="0"/>
-              </a:rPr>
-              <a:t>备份电压指的是备份域使用的供电电源。</a:t>
-            </a:r>
-            <a:r>
-              <a:rPr kumimoji="0" lang="en-US" altLang="zh-CN" sz="1600" b="1" i="0" u="none" strike="noStrike" cap="none" normalizeH="0" baseline="0" dirty="0" smtClean="0">
-                <a:ln>
-                  <a:noFill/>
-                </a:ln>
-                <a:solidFill>
-                  <a:srgbClr val="4D4D4D"/>
-                </a:solidFill>
-                <a:effectLst/>
-                <a:latin typeface="Arial" pitchFamily="34" charset="0"/>
-                <a:ea typeface="宋体" pitchFamily="2" charset="-122"/>
-                <a:cs typeface="Arial" pitchFamily="34" charset="0"/>
-              </a:rPr>
-              <a:t>VBAT</a:t>
-            </a:r>
-            <a:r>
-              <a:rPr kumimoji="0" lang="zh-CN" altLang="en-US" sz="1600" b="1" i="0" u="none" strike="noStrike" cap="none" normalizeH="0" baseline="0" dirty="0" smtClean="0">
-                <a:ln>
-                  <a:noFill/>
-                </a:ln>
-                <a:solidFill>
-                  <a:srgbClr val="4D4D4D"/>
-                </a:solidFill>
-                <a:effectLst/>
-                <a:latin typeface="Arial" pitchFamily="34" charset="0"/>
-                <a:ea typeface="宋体" pitchFamily="2" charset="-122"/>
-                <a:cs typeface="Arial" pitchFamily="34" charset="0"/>
-              </a:rPr>
-              <a:t>为</a:t>
-            </a:r>
-            <a:r>
-              <a:rPr kumimoji="0" lang="en-US" altLang="zh-CN" sz="1600" b="1" i="0" u="none" strike="noStrike" cap="none" normalizeH="0" baseline="0" dirty="0" smtClean="0">
-                <a:ln>
-                  <a:noFill/>
-                </a:ln>
-                <a:solidFill>
-                  <a:srgbClr val="4D4D4D"/>
-                </a:solidFill>
-                <a:effectLst/>
-                <a:latin typeface="Arial" pitchFamily="34" charset="0"/>
-                <a:ea typeface="宋体" pitchFamily="2" charset="-122"/>
-                <a:cs typeface="Arial" pitchFamily="34" charset="0"/>
-              </a:rPr>
-              <a:t>1.8~3.6V</a:t>
-            </a:r>
-            <a:r>
-              <a:rPr kumimoji="0" lang="zh-CN" altLang="en-US" sz="1600" b="1" i="0" u="none" strike="noStrike" cap="none" normalizeH="0" baseline="0" dirty="0" smtClean="0">
-                <a:ln>
-                  <a:noFill/>
-                </a:ln>
-                <a:solidFill>
-                  <a:srgbClr val="4D4D4D"/>
-                </a:solidFill>
-                <a:effectLst/>
-                <a:latin typeface="Arial" pitchFamily="34" charset="0"/>
-                <a:ea typeface="宋体" pitchFamily="2" charset="-122"/>
-                <a:cs typeface="Arial" pitchFamily="34" charset="0"/>
-              </a:rPr>
-              <a:t>，当</a:t>
-            </a:r>
-            <a:r>
-              <a:rPr kumimoji="0" lang="en-US" altLang="zh-CN" sz="1600" b="1" i="0" u="none" strike="noStrike" cap="none" normalizeH="0" baseline="0" dirty="0" smtClean="0">
-                <a:ln>
-                  <a:noFill/>
-                </a:ln>
-                <a:solidFill>
-                  <a:srgbClr val="4D4D4D"/>
-                </a:solidFill>
-                <a:effectLst/>
-                <a:latin typeface="Arial" pitchFamily="34" charset="0"/>
-                <a:ea typeface="宋体" pitchFamily="2" charset="-122"/>
-                <a:cs typeface="Arial" pitchFamily="34" charset="0"/>
-              </a:rPr>
-              <a:t>VDD</a:t>
-            </a:r>
-            <a:r>
-              <a:rPr kumimoji="0" lang="zh-CN" altLang="en-US" sz="1600" b="1" i="0" u="none" strike="noStrike" cap="none" normalizeH="0" baseline="0" dirty="0" smtClean="0">
-                <a:ln>
-                  <a:noFill/>
-                </a:ln>
-                <a:solidFill>
-                  <a:srgbClr val="4D4D4D"/>
-                </a:solidFill>
-                <a:effectLst/>
-                <a:latin typeface="Arial" pitchFamily="34" charset="0"/>
-                <a:ea typeface="宋体" pitchFamily="2" charset="-122"/>
-                <a:cs typeface="Arial" pitchFamily="34" charset="0"/>
-              </a:rPr>
-              <a:t>断电时，为</a:t>
-            </a:r>
-            <a:r>
-              <a:rPr kumimoji="0" lang="en-US" altLang="zh-CN" sz="1600" b="1" i="0" u="none" strike="noStrike" cap="none" normalizeH="0" baseline="0" dirty="0" smtClean="0">
-                <a:ln>
-                  <a:noFill/>
-                </a:ln>
-                <a:solidFill>
-                  <a:srgbClr val="4D4D4D"/>
-                </a:solidFill>
-                <a:effectLst/>
-                <a:latin typeface="Arial" pitchFamily="34" charset="0"/>
-                <a:ea typeface="宋体" pitchFamily="2" charset="-122"/>
-                <a:cs typeface="Arial" pitchFamily="34" charset="0"/>
-              </a:rPr>
-              <a:t>RTC</a:t>
-            </a:r>
-            <a:r>
-              <a:rPr kumimoji="0" lang="zh-CN" altLang="en-US" sz="1600" b="1" i="0" u="none" strike="noStrike" cap="none" normalizeH="0" baseline="0" dirty="0" smtClean="0">
-                <a:ln>
-                  <a:noFill/>
-                </a:ln>
-                <a:solidFill>
-                  <a:srgbClr val="4D4D4D"/>
-                </a:solidFill>
-                <a:effectLst/>
-                <a:latin typeface="Arial" pitchFamily="34" charset="0"/>
-                <a:ea typeface="宋体" pitchFamily="2" charset="-122"/>
-                <a:cs typeface="Arial" pitchFamily="34" charset="0"/>
-              </a:rPr>
-              <a:t>、外部</a:t>
-            </a:r>
-            <a:r>
-              <a:rPr kumimoji="0" lang="en-US" altLang="zh-CN" sz="1600" b="1" i="0" u="none" strike="noStrike" cap="none" normalizeH="0" baseline="0" dirty="0" smtClean="0">
-                <a:ln>
-                  <a:noFill/>
-                </a:ln>
-                <a:solidFill>
-                  <a:srgbClr val="4D4D4D"/>
-                </a:solidFill>
-                <a:effectLst/>
-                <a:latin typeface="Arial" pitchFamily="34" charset="0"/>
-                <a:ea typeface="宋体" pitchFamily="2" charset="-122"/>
-                <a:cs typeface="Arial" pitchFamily="34" charset="0"/>
-              </a:rPr>
-              <a:t>32kHz</a:t>
-            </a:r>
-            <a:r>
-              <a:rPr kumimoji="0" lang="zh-CN" altLang="en-US" sz="1600" b="1" i="0" u="none" strike="noStrike" cap="none" normalizeH="0" baseline="0" dirty="0" smtClean="0">
-                <a:ln>
-                  <a:noFill/>
-                </a:ln>
-                <a:solidFill>
-                  <a:srgbClr val="4D4D4D"/>
-                </a:solidFill>
-                <a:effectLst/>
-                <a:latin typeface="Arial" pitchFamily="34" charset="0"/>
-                <a:ea typeface="宋体" pitchFamily="2" charset="-122"/>
-                <a:cs typeface="Arial" pitchFamily="34" charset="0"/>
-              </a:rPr>
-              <a:t>振荡器和后备寄存器供电。</a:t>
-            </a:r>
-            <a:endParaRPr kumimoji="0" lang="zh-CN" altLang="en-US" sz="1600" b="0" i="0" u="none" strike="noStrike" cap="none" normalizeH="0" baseline="0" dirty="0" smtClean="0">
-              <a:ln>
-                <a:noFill/>
-              </a:ln>
-              <a:solidFill>
-                <a:schemeClr val="tx1"/>
-              </a:solidFill>
-              <a:effectLst/>
-              <a:latin typeface="Arial" pitchFamily="34" charset="0"/>
-              <a:ea typeface="宋体" pitchFamily="2" charset="-122"/>
-              <a:cs typeface="宋体" pitchFamily="2" charset="-122"/>
-            </a:endParaRPr>
-          </a:p>
-        </p:txBody>
-      </p:sp>
+      </p:pic>
+      <p:pic>
+        <p:nvPicPr>
+          <p:cNvPr id="147459" name="Picture 3"/>
+          <p:cNvPicPr>
+            <a:picLocks noChangeAspect="1" noChangeArrowheads="1"/>
+          </p:cNvPicPr>
+          <p:nvPr/>
+        </p:nvPicPr>
+        <p:blipFill>
+          <a:blip r:embed="rId4"/>
+          <a:srcRect/>
+          <a:stretch>
+            <a:fillRect/>
+          </a:stretch>
+        </p:blipFill>
+        <p:spPr bwMode="auto">
+          <a:xfrm>
+            <a:off x="6440650" y="3928382"/>
+            <a:ext cx="4677930" cy="2304467"/>
+          </a:xfrm>
+          <a:prstGeom prst="rect">
+            <a:avLst/>
+          </a:prstGeom>
+          <a:noFill/>
+          <a:ln w="9525">
+            <a:noFill/>
+            <a:miter lim="800000"/>
+            <a:headEnd/>
+            <a:tailEnd/>
+          </a:ln>
+          <a:effectLst/>
+        </p:spPr>
+      </p:pic>
     </p:spTree>
   </p:cSld>
   <p:clrMapOvr>
     <a:masterClrMapping/>
   </p:clrMapOvr>
-  <p:timing>
-    <p:tnLst>
-      <p:par>
-        <p:cTn id="1" dur="indefinite" restart="never" nodeType="tmRoot"/>
-      </p:par>
-    </p:tnLst>
-  </p:timing>
 </p:sld>
 </file>
 
@@ -15188,20 +13977,20 @@
               <a:defRPr/>
             </a:pPr>
             <a:r>
-              <a:rPr lang="en-US" sz="2800" b="1" dirty="0" smtClean="0">
+              <a:rPr lang="en-US" sz="2800" b="1" dirty="0">
                 <a:solidFill>
                   <a:srgbClr val="C00000"/>
                 </a:solidFill>
               </a:rPr>
-              <a:t>3.1.2 </a:t>
-            </a:r>
-            <a:r>
-              <a:rPr lang="zh-CN" altLang="en-US" sz="2800" b="1" dirty="0" smtClean="0">
+              <a:t>3.1.3 </a:t>
+            </a:r>
+            <a:r>
+              <a:rPr lang="zh-CN" altLang="en-US" sz="2800" b="1" dirty="0">
                 <a:solidFill>
                   <a:srgbClr val="C00000"/>
                 </a:solidFill>
               </a:rPr>
-              <a:t>电源管理器</a:t>
+              <a:t>低功耗模式</a:t>
             </a:r>
           </a:p>
         </p:txBody>
@@ -15216,8 +14005,8 @@
         </p:nvSpPr>
         <p:spPr bwMode="auto">
           <a:xfrm>
-            <a:off x="839754" y="1408922"/>
-            <a:ext cx="5449078" cy="4651979"/>
+            <a:off x="849084" y="1318022"/>
+            <a:ext cx="10245013" cy="5539978"/>
           </a:xfrm>
           <a:prstGeom prst="rect">
             <a:avLst/>
@@ -15240,760 +14029,196 @@
           </a:bodyPr>
           <a:lstStyle/>
           <a:p>
-            <a:pPr marL="0" marR="0" lvl="0" indent="0" algn="l" defTabSz="914400" rtl="0" eaLnBrk="1" fontAlgn="base" latinLnBrk="0" hangingPunct="1">
+            <a:pPr>
               <a:lnSpc>
                 <a:spcPct val="150000"/>
               </a:lnSpc>
-              <a:spcBef>
-                <a:spcPct val="0"/>
-              </a:spcBef>
-              <a:spcAft>
-                <a:spcPct val="0"/>
-              </a:spcAft>
-              <a:buClrTx/>
-              <a:buSzTx/>
-              <a:buFontTx/>
-              <a:buNone/>
-              <a:tabLst/>
             </a:pPr>
             <a:r>
-              <a:rPr kumimoji="0" lang="en-US" altLang="zh-CN" sz="2000" b="1" i="0" u="none" strike="noStrike" cap="none" normalizeH="0" baseline="0" dirty="0" smtClean="0">
-                <a:ln>
-                  <a:noFill/>
-                </a:ln>
-                <a:solidFill>
-                  <a:srgbClr val="4D4D4D"/>
-                </a:solidFill>
-                <a:effectLst/>
-                <a:latin typeface="Arial" pitchFamily="34" charset="0"/>
-                <a:ea typeface="宋体" pitchFamily="2" charset="-122"/>
-                <a:cs typeface="Arial" pitchFamily="34" charset="0"/>
-              </a:rPr>
-              <a:t>1.</a:t>
-            </a:r>
-            <a:r>
-              <a:rPr kumimoji="0" lang="zh-CN" altLang="en-US" sz="2000" b="1" i="0" u="none" strike="noStrike" cap="none" normalizeH="0" baseline="0" dirty="0" smtClean="0">
-                <a:ln>
-                  <a:noFill/>
-                </a:ln>
-                <a:solidFill>
-                  <a:srgbClr val="4D4D4D"/>
-                </a:solidFill>
-                <a:effectLst/>
-                <a:latin typeface="Arial" pitchFamily="34" charset="0"/>
-                <a:ea typeface="宋体" pitchFamily="2" charset="-122"/>
-                <a:cs typeface="Arial" pitchFamily="34" charset="0"/>
-              </a:rPr>
-              <a:t>上电复位</a:t>
-            </a:r>
-            <a:r>
-              <a:rPr kumimoji="0" lang="en-US" altLang="zh-CN" sz="2000" b="1" i="0" u="none" strike="noStrike" cap="none" normalizeH="0" baseline="0" dirty="0" smtClean="0">
-                <a:ln>
-                  <a:noFill/>
-                </a:ln>
-                <a:solidFill>
-                  <a:srgbClr val="4D4D4D"/>
-                </a:solidFill>
-                <a:effectLst/>
-                <a:latin typeface="Arial" pitchFamily="34" charset="0"/>
-                <a:ea typeface="宋体" pitchFamily="2" charset="-122"/>
-                <a:cs typeface="Arial" pitchFamily="34" charset="0"/>
-              </a:rPr>
-              <a:t>(POR)</a:t>
-            </a:r>
-            <a:r>
-              <a:rPr kumimoji="0" lang="zh-CN" altLang="en-US" sz="2000" b="1" i="0" u="none" strike="noStrike" cap="none" normalizeH="0" baseline="0" dirty="0" smtClean="0">
-                <a:ln>
-                  <a:noFill/>
-                </a:ln>
-                <a:solidFill>
-                  <a:srgbClr val="4D4D4D"/>
-                </a:solidFill>
-                <a:effectLst/>
-                <a:latin typeface="Arial" pitchFamily="34" charset="0"/>
-                <a:ea typeface="宋体" pitchFamily="2" charset="-122"/>
-                <a:cs typeface="Arial" pitchFamily="34" charset="0"/>
-              </a:rPr>
-              <a:t>和掉电复位</a:t>
-            </a:r>
-            <a:r>
-              <a:rPr kumimoji="0" lang="en-US" altLang="zh-CN" sz="2000" b="1" i="0" u="none" strike="noStrike" cap="none" normalizeH="0" baseline="0" dirty="0" smtClean="0">
-                <a:ln>
-                  <a:noFill/>
-                </a:ln>
-                <a:solidFill>
-                  <a:srgbClr val="4D4D4D"/>
-                </a:solidFill>
-                <a:effectLst/>
-                <a:latin typeface="Arial" pitchFamily="34" charset="0"/>
-                <a:ea typeface="宋体" pitchFamily="2" charset="-122"/>
-                <a:cs typeface="Arial" pitchFamily="34" charset="0"/>
-              </a:rPr>
-              <a:t>(PDR)</a:t>
-            </a:r>
-            <a:endParaRPr kumimoji="0" lang="en-US" altLang="zh-CN" sz="2000" b="0" i="0" u="none" strike="noStrike" cap="none" normalizeH="0" baseline="0" dirty="0" smtClean="0">
-              <a:ln>
-                <a:noFill/>
-              </a:ln>
-              <a:solidFill>
-                <a:schemeClr val="tx1"/>
-              </a:solidFill>
-              <a:effectLst/>
-              <a:latin typeface="Arial" pitchFamily="34" charset="0"/>
-              <a:ea typeface="宋体" pitchFamily="2" charset="-122"/>
-              <a:cs typeface="宋体" pitchFamily="2" charset="-122"/>
-            </a:endParaRPr>
-          </a:p>
-          <a:p>
-            <a:pPr marL="0" marR="0" lvl="0" indent="0" algn="l" defTabSz="914400" rtl="0" eaLnBrk="0" fontAlgn="base" latinLnBrk="0" hangingPunct="0">
+              <a:rPr lang="zh-CN" altLang="en-US" sz="2000" b="1" dirty="0"/>
+              <a:t>      </a:t>
+            </a:r>
+            <a:r>
+              <a:rPr lang="zh-CN" altLang="en-US" sz="2400" dirty="0">
+                <a:latin typeface="Times New Roman" pitchFamily="18" charset="0"/>
+                <a:cs typeface="Times New Roman" pitchFamily="18" charset="0"/>
+              </a:rPr>
+              <a:t>在系统或电源复位后，微控制处于运行模式。当处理器不需继续运行时</a:t>
+            </a:r>
+            <a:r>
+              <a:rPr lang="en-US" sz="2400" dirty="0">
+                <a:latin typeface="Times New Roman" pitchFamily="18" charset="0"/>
+                <a:cs typeface="Times New Roman" pitchFamily="18" charset="0"/>
+              </a:rPr>
+              <a:t>(</a:t>
+            </a:r>
+            <a:r>
+              <a:rPr lang="zh-CN" altLang="en-US" sz="2400" dirty="0">
+                <a:latin typeface="Times New Roman" pitchFamily="18" charset="0"/>
+                <a:cs typeface="Times New Roman" pitchFamily="18" charset="0"/>
+              </a:rPr>
+              <a:t>如等待某个外部事件</a:t>
+            </a:r>
+            <a:r>
+              <a:rPr lang="en-US" sz="2400" dirty="0">
+                <a:latin typeface="Times New Roman" pitchFamily="18" charset="0"/>
+                <a:cs typeface="Times New Roman" pitchFamily="18" charset="0"/>
+              </a:rPr>
+              <a:t>)</a:t>
+            </a:r>
+            <a:r>
+              <a:rPr lang="zh-CN" altLang="en-US" sz="2400" dirty="0">
+                <a:latin typeface="Times New Roman" pitchFamily="18" charset="0"/>
+                <a:cs typeface="Times New Roman" pitchFamily="18" charset="0"/>
+              </a:rPr>
+              <a:t>，可以利用多种低功耗模式来节省功耗。用户需要根据最低电源消耗，最快速启动事件和可用的唤醒源等条件，选定一个最佳低功耗卯时。低功耗模式主要是对处理器、处理器外部外设、</a:t>
+            </a:r>
+            <a:r>
+              <a:rPr lang="en-US" sz="2400" dirty="0">
+                <a:latin typeface="Times New Roman" pitchFamily="18" charset="0"/>
+                <a:cs typeface="Times New Roman" pitchFamily="18" charset="0"/>
+              </a:rPr>
+              <a:t>SRAM</a:t>
+            </a:r>
+            <a:r>
+              <a:rPr lang="zh-CN" altLang="en-US" sz="2400" dirty="0">
+                <a:latin typeface="Times New Roman" pitchFamily="18" charset="0"/>
+                <a:cs typeface="Times New Roman" pitchFamily="18" charset="0"/>
+              </a:rPr>
+              <a:t>和寄存器等的供电电源和时钟进行控制操作。</a:t>
+            </a:r>
+          </a:p>
+          <a:p>
+            <a:pPr>
               <a:lnSpc>
                 <a:spcPct val="150000"/>
               </a:lnSpc>
-              <a:spcBef>
-                <a:spcPct val="0"/>
-              </a:spcBef>
-              <a:spcAft>
-                <a:spcPct val="0"/>
-              </a:spcAft>
-              <a:buClrTx/>
-              <a:buSzTx/>
-              <a:buFontTx/>
-              <a:buNone/>
-              <a:tabLst/>
             </a:pPr>
             <a:r>
-              <a:rPr kumimoji="0" lang="en-US" altLang="zh-CN" sz="2000" b="1" i="0" u="none" strike="noStrike" cap="none" normalizeH="0" baseline="0" dirty="0" smtClean="0">
-                <a:ln>
-                  <a:noFill/>
-                </a:ln>
-                <a:solidFill>
-                  <a:srgbClr val="4D4D4D"/>
-                </a:solidFill>
-                <a:effectLst/>
-                <a:latin typeface="Arial" pitchFamily="34" charset="0"/>
-                <a:ea typeface="宋体" pitchFamily="2" charset="-122"/>
-                <a:cs typeface="Arial" pitchFamily="34" charset="0"/>
-              </a:rPr>
-              <a:t>STM32</a:t>
-            </a:r>
-            <a:r>
-              <a:rPr kumimoji="0" lang="zh-CN" altLang="en-US" sz="2000" b="1" i="0" u="none" strike="noStrike" cap="none" normalizeH="0" baseline="0" dirty="0" smtClean="0">
-                <a:ln>
-                  <a:noFill/>
-                </a:ln>
-                <a:solidFill>
-                  <a:srgbClr val="4D4D4D"/>
-                </a:solidFill>
-                <a:effectLst/>
-                <a:latin typeface="Arial" pitchFamily="34" charset="0"/>
-                <a:ea typeface="宋体" pitchFamily="2" charset="-122"/>
-                <a:cs typeface="Arial" pitchFamily="34" charset="0"/>
-              </a:rPr>
-              <a:t>内部又一个完整的上电复位</a:t>
-            </a:r>
-            <a:r>
-              <a:rPr kumimoji="0" lang="en-US" altLang="zh-CN" sz="2000" b="1" i="0" u="none" strike="noStrike" cap="none" normalizeH="0" baseline="0" dirty="0" smtClean="0">
-                <a:ln>
-                  <a:noFill/>
-                </a:ln>
-                <a:solidFill>
-                  <a:srgbClr val="4D4D4D"/>
-                </a:solidFill>
-                <a:effectLst/>
-                <a:latin typeface="Arial" pitchFamily="34" charset="0"/>
-                <a:ea typeface="宋体" pitchFamily="2" charset="-122"/>
-                <a:cs typeface="Arial" pitchFamily="34" charset="0"/>
-              </a:rPr>
-              <a:t>(POR)</a:t>
-            </a:r>
-            <a:r>
-              <a:rPr kumimoji="0" lang="zh-CN" altLang="en-US" sz="2000" b="1" i="0" u="none" strike="noStrike" cap="none" normalizeH="0" baseline="0" dirty="0" smtClean="0">
-                <a:ln>
-                  <a:noFill/>
-                </a:ln>
-                <a:solidFill>
-                  <a:srgbClr val="4D4D4D"/>
-                </a:solidFill>
-                <a:effectLst/>
-                <a:latin typeface="Arial" pitchFamily="34" charset="0"/>
-                <a:ea typeface="宋体" pitchFamily="2" charset="-122"/>
-                <a:cs typeface="Arial" pitchFamily="34" charset="0"/>
-              </a:rPr>
-              <a:t>和掉电复位</a:t>
-            </a:r>
-            <a:r>
-              <a:rPr kumimoji="0" lang="en-US" altLang="zh-CN" sz="2000" b="1" i="0" u="none" strike="noStrike" cap="none" normalizeH="0" baseline="0" dirty="0" smtClean="0">
-                <a:ln>
-                  <a:noFill/>
-                </a:ln>
-                <a:solidFill>
-                  <a:srgbClr val="4D4D4D"/>
-                </a:solidFill>
-                <a:effectLst/>
-                <a:latin typeface="Arial" pitchFamily="34" charset="0"/>
-                <a:ea typeface="宋体" pitchFamily="2" charset="-122"/>
-                <a:cs typeface="Arial" pitchFamily="34" charset="0"/>
-              </a:rPr>
-              <a:t>(PDR)</a:t>
-            </a:r>
-            <a:r>
-              <a:rPr kumimoji="0" lang="zh-CN" altLang="en-US" sz="2000" b="1" i="0" u="none" strike="noStrike" cap="none" normalizeH="0" baseline="0" dirty="0" smtClean="0">
-                <a:ln>
-                  <a:noFill/>
-                </a:ln>
-                <a:solidFill>
-                  <a:srgbClr val="4D4D4D"/>
-                </a:solidFill>
-                <a:effectLst/>
-                <a:latin typeface="Arial" pitchFamily="34" charset="0"/>
-                <a:ea typeface="宋体" pitchFamily="2" charset="-122"/>
-                <a:cs typeface="Arial" pitchFamily="34" charset="0"/>
-              </a:rPr>
-              <a:t>电路，当供电电压达到</a:t>
-            </a:r>
-            <a:r>
-              <a:rPr kumimoji="0" lang="en-US" altLang="zh-CN" sz="2000" b="1" i="0" u="none" strike="noStrike" cap="none" normalizeH="0" baseline="0" dirty="0" smtClean="0">
-                <a:ln>
-                  <a:noFill/>
-                </a:ln>
-                <a:solidFill>
-                  <a:srgbClr val="4D4D4D"/>
-                </a:solidFill>
-                <a:effectLst/>
-                <a:latin typeface="Arial" pitchFamily="34" charset="0"/>
-                <a:ea typeface="宋体" pitchFamily="2" charset="-122"/>
-                <a:cs typeface="Arial" pitchFamily="34" charset="0"/>
-              </a:rPr>
-              <a:t>2V</a:t>
-            </a:r>
-            <a:r>
-              <a:rPr kumimoji="0" lang="zh-CN" altLang="en-US" sz="2000" b="1" i="0" u="none" strike="noStrike" cap="none" normalizeH="0" baseline="0" dirty="0" smtClean="0">
-                <a:ln>
-                  <a:noFill/>
-                </a:ln>
-                <a:solidFill>
-                  <a:srgbClr val="4D4D4D"/>
-                </a:solidFill>
-                <a:effectLst/>
-                <a:latin typeface="Arial" pitchFamily="34" charset="0"/>
-                <a:ea typeface="宋体" pitchFamily="2" charset="-122"/>
-                <a:cs typeface="Arial" pitchFamily="34" charset="0"/>
-              </a:rPr>
-              <a:t>时，系统就能正常工作。当</a:t>
-            </a:r>
-            <a:r>
-              <a:rPr kumimoji="0" lang="en-US" altLang="zh-CN" sz="2000" b="1" i="0" u="none" strike="noStrike" cap="none" normalizeH="0" baseline="0" dirty="0" smtClean="0">
-                <a:ln>
-                  <a:noFill/>
-                </a:ln>
-                <a:solidFill>
-                  <a:srgbClr val="4D4D4D"/>
-                </a:solidFill>
-                <a:effectLst/>
-                <a:latin typeface="Arial" pitchFamily="34" charset="0"/>
-                <a:ea typeface="宋体" pitchFamily="2" charset="-122"/>
-                <a:cs typeface="Arial" pitchFamily="34" charset="0"/>
-              </a:rPr>
-              <a:t>VDD/VDDA</a:t>
-            </a:r>
-            <a:r>
-              <a:rPr kumimoji="0" lang="zh-CN" altLang="en-US" sz="2000" b="1" i="0" u="none" strike="noStrike" cap="none" normalizeH="0" baseline="0" dirty="0" smtClean="0">
-                <a:ln>
-                  <a:noFill/>
-                </a:ln>
-                <a:solidFill>
-                  <a:srgbClr val="4D4D4D"/>
-                </a:solidFill>
-                <a:effectLst/>
-                <a:latin typeface="Arial" pitchFamily="34" charset="0"/>
-                <a:ea typeface="宋体" pitchFamily="2" charset="-122"/>
-                <a:cs typeface="Arial" pitchFamily="34" charset="0"/>
-              </a:rPr>
-              <a:t>低于指定的限位电压</a:t>
-            </a:r>
-            <a:r>
-              <a:rPr kumimoji="0" lang="en-US" altLang="zh-CN" sz="2000" b="1" i="0" u="none" strike="noStrike" cap="none" normalizeH="0" baseline="0" dirty="0" smtClean="0">
-                <a:ln>
-                  <a:noFill/>
-                </a:ln>
-                <a:solidFill>
-                  <a:srgbClr val="4D4D4D"/>
-                </a:solidFill>
-                <a:effectLst/>
-                <a:latin typeface="Arial" pitchFamily="34" charset="0"/>
-                <a:ea typeface="宋体" pitchFamily="2" charset="-122"/>
-                <a:cs typeface="Arial" pitchFamily="34" charset="0"/>
-              </a:rPr>
-              <a:t>VPOR/PDR</a:t>
-            </a:r>
-            <a:r>
-              <a:rPr kumimoji="0" lang="zh-CN" altLang="en-US" sz="2000" b="1" i="0" u="none" strike="noStrike" cap="none" normalizeH="0" baseline="0" dirty="0" smtClean="0">
-                <a:ln>
-                  <a:noFill/>
-                </a:ln>
-                <a:solidFill>
-                  <a:srgbClr val="4D4D4D"/>
-                </a:solidFill>
-                <a:effectLst/>
-                <a:latin typeface="Arial" pitchFamily="34" charset="0"/>
-                <a:ea typeface="宋体" pitchFamily="2" charset="-122"/>
-                <a:cs typeface="Arial" pitchFamily="34" charset="0"/>
-              </a:rPr>
-              <a:t>时，系统保持为复位状态，无需外部复位电路。</a:t>
-            </a:r>
-            <a:endParaRPr kumimoji="0" lang="zh-CN" altLang="en-US" sz="2000" b="0" i="0" u="none" strike="noStrike" cap="none" normalizeH="0" baseline="0" dirty="0" smtClean="0">
-              <a:ln>
-                <a:noFill/>
-              </a:ln>
-              <a:solidFill>
-                <a:schemeClr val="tx1"/>
-              </a:solidFill>
-              <a:effectLst/>
-              <a:latin typeface="Arial" pitchFamily="34" charset="0"/>
-              <a:ea typeface="宋体" pitchFamily="2" charset="-122"/>
-              <a:cs typeface="宋体" pitchFamily="2" charset="-122"/>
-            </a:endParaRPr>
-          </a:p>
-          <a:p>
-            <a:pPr marL="0" marR="0" lvl="0" indent="0" algn="l" defTabSz="914400" rtl="0" eaLnBrk="0" fontAlgn="base" latinLnBrk="0" hangingPunct="0">
+              <a:rPr lang="en-US" sz="2400" dirty="0">
+                <a:latin typeface="Times New Roman" pitchFamily="18" charset="0"/>
+                <a:cs typeface="Times New Roman" pitchFamily="18" charset="0"/>
+              </a:rPr>
+              <a:t>STM32F10x</a:t>
+            </a:r>
+            <a:r>
+              <a:rPr lang="zh-CN" altLang="en-US" sz="2400" dirty="0">
+                <a:latin typeface="Times New Roman" pitchFamily="18" charset="0"/>
+                <a:cs typeface="Times New Roman" pitchFamily="18" charset="0"/>
+              </a:rPr>
+              <a:t>系列处理器有三种低功耗模式：</a:t>
+            </a:r>
+          </a:p>
+          <a:p>
+            <a:pPr>
               <a:lnSpc>
                 <a:spcPct val="150000"/>
               </a:lnSpc>
-              <a:spcBef>
-                <a:spcPct val="0"/>
-              </a:spcBef>
-              <a:spcAft>
-                <a:spcPct val="0"/>
-              </a:spcAft>
-              <a:buClrTx/>
-              <a:buSzTx/>
-              <a:buFontTx/>
-              <a:buNone/>
-              <a:tabLst/>
+              <a:buClr>
+                <a:schemeClr val="accent2">
+                  <a:lumMod val="50000"/>
+                </a:schemeClr>
+              </a:buClr>
+              <a:buFont typeface="Wingdings" pitchFamily="2" charset="2"/>
+              <a:buChar char="u"/>
             </a:pPr>
             <a:r>
-              <a:rPr kumimoji="0" lang="en-US" altLang="zh-CN" sz="2000" b="1" i="0" u="none" strike="noStrike" cap="none" normalizeH="0" baseline="0" dirty="0" smtClean="0">
-                <a:ln>
-                  <a:noFill/>
-                </a:ln>
-                <a:solidFill>
-                  <a:srgbClr val="4D4D4D"/>
-                </a:solidFill>
-                <a:effectLst/>
-                <a:latin typeface="Arial" pitchFamily="34" charset="0"/>
-                <a:ea typeface="宋体" pitchFamily="2" charset="-122"/>
-                <a:cs typeface="Arial" pitchFamily="34" charset="0"/>
-              </a:rPr>
-              <a:t>2.</a:t>
-            </a:r>
-            <a:r>
-              <a:rPr kumimoji="0" lang="zh-CN" altLang="en-US" sz="2000" b="1" i="0" u="none" strike="noStrike" cap="none" normalizeH="0" baseline="0" dirty="0" smtClean="0">
-                <a:ln>
-                  <a:noFill/>
-                </a:ln>
-                <a:solidFill>
-                  <a:srgbClr val="4D4D4D"/>
-                </a:solidFill>
-                <a:effectLst/>
-                <a:latin typeface="Arial" pitchFamily="34" charset="0"/>
-                <a:ea typeface="宋体" pitchFamily="2" charset="-122"/>
-                <a:cs typeface="Arial" pitchFamily="34" charset="0"/>
-              </a:rPr>
-              <a:t>可编程电压检测器</a:t>
-            </a:r>
-            <a:r>
-              <a:rPr kumimoji="0" lang="en-US" altLang="zh-CN" sz="2000" b="1" i="0" u="none" strike="noStrike" cap="none" normalizeH="0" baseline="0" dirty="0" smtClean="0">
-                <a:ln>
-                  <a:noFill/>
-                </a:ln>
-                <a:solidFill>
-                  <a:srgbClr val="4D4D4D"/>
-                </a:solidFill>
-                <a:effectLst/>
-                <a:latin typeface="Arial" pitchFamily="34" charset="0"/>
-                <a:ea typeface="宋体" pitchFamily="2" charset="-122"/>
-                <a:cs typeface="Arial" pitchFamily="34" charset="0"/>
-              </a:rPr>
-              <a:t>(PVD)</a:t>
-            </a:r>
-            <a:endParaRPr kumimoji="0" lang="en-US" altLang="zh-CN" sz="2000" b="0" i="0" u="none" strike="noStrike" cap="none" normalizeH="0" baseline="0" dirty="0" smtClean="0">
-              <a:ln>
-                <a:noFill/>
-              </a:ln>
-              <a:solidFill>
-                <a:schemeClr val="tx1"/>
-              </a:solidFill>
-              <a:effectLst/>
-              <a:latin typeface="Arial" pitchFamily="34" charset="0"/>
-              <a:ea typeface="宋体" pitchFamily="2" charset="-122"/>
-              <a:cs typeface="宋体" pitchFamily="2" charset="-122"/>
-            </a:endParaRPr>
-          </a:p>
-          <a:p>
-            <a:pPr marL="0" marR="0" lvl="0" indent="0" algn="l" defTabSz="914400" rtl="0" eaLnBrk="0" fontAlgn="base" latinLnBrk="0" hangingPunct="0">
+              <a:rPr lang="zh-CN" altLang="en-US" sz="2400" dirty="0">
+                <a:latin typeface="Times New Roman" pitchFamily="18" charset="0"/>
+                <a:cs typeface="Times New Roman" pitchFamily="18" charset="0"/>
+              </a:rPr>
+              <a:t>睡眠模式：</a:t>
+            </a:r>
+            <a:r>
+              <a:rPr lang="en-US" sz="2400" dirty="0">
+                <a:latin typeface="Times New Roman" pitchFamily="18" charset="0"/>
+                <a:cs typeface="Times New Roman" pitchFamily="18" charset="0"/>
+              </a:rPr>
+              <a:t>CM3</a:t>
+            </a:r>
+            <a:r>
+              <a:rPr lang="zh-CN" altLang="en-US" sz="2400" dirty="0">
+                <a:latin typeface="Times New Roman" pitchFamily="18" charset="0"/>
+                <a:cs typeface="Times New Roman" pitchFamily="18" charset="0"/>
+              </a:rPr>
+              <a:t>内核停止，外设仍在运行</a:t>
+            </a:r>
+          </a:p>
+          <a:p>
+            <a:pPr>
               <a:lnSpc>
                 <a:spcPct val="150000"/>
               </a:lnSpc>
-              <a:spcBef>
-                <a:spcPct val="0"/>
-              </a:spcBef>
-              <a:spcAft>
-                <a:spcPct val="0"/>
-              </a:spcAft>
-              <a:buClrTx/>
-              <a:buSzTx/>
-              <a:buFontTx/>
-              <a:buNone/>
-              <a:tabLst/>
+              <a:buClr>
+                <a:schemeClr val="accent2">
+                  <a:lumMod val="50000"/>
+                </a:schemeClr>
+              </a:buClr>
+              <a:buFont typeface="Wingdings" pitchFamily="2" charset="2"/>
+              <a:buChar char="u"/>
             </a:pPr>
             <a:r>
-              <a:rPr kumimoji="0" lang="zh-CN" altLang="en-US" sz="2000" b="1" i="0" u="none" strike="noStrike" cap="none" normalizeH="0" baseline="0" dirty="0" smtClean="0">
-                <a:ln>
-                  <a:noFill/>
-                </a:ln>
-                <a:solidFill>
-                  <a:srgbClr val="4D4D4D"/>
-                </a:solidFill>
-                <a:effectLst/>
-                <a:latin typeface="Arial" pitchFamily="34" charset="0"/>
-                <a:ea typeface="宋体" pitchFamily="2" charset="-122"/>
-                <a:cs typeface="Arial" pitchFamily="34" charset="0"/>
-              </a:rPr>
-              <a:t>当</a:t>
-            </a:r>
-            <a:r>
-              <a:rPr kumimoji="0" lang="en-US" altLang="zh-CN" sz="2000" b="1" i="0" u="none" strike="noStrike" cap="none" normalizeH="0" baseline="0" dirty="0" smtClean="0">
-                <a:ln>
-                  <a:noFill/>
-                </a:ln>
-                <a:solidFill>
-                  <a:srgbClr val="4D4D4D"/>
-                </a:solidFill>
-                <a:effectLst/>
-                <a:latin typeface="Arial" pitchFamily="34" charset="0"/>
-                <a:ea typeface="宋体" pitchFamily="2" charset="-122"/>
-                <a:cs typeface="Arial" pitchFamily="34" charset="0"/>
-              </a:rPr>
-              <a:t>VDD</a:t>
-            </a:r>
-            <a:r>
-              <a:rPr kumimoji="0" lang="zh-CN" altLang="en-US" sz="2000" b="1" i="0" u="none" strike="noStrike" cap="none" normalizeH="0" baseline="0" dirty="0" smtClean="0">
-                <a:ln>
-                  <a:noFill/>
-                </a:ln>
-                <a:solidFill>
-                  <a:srgbClr val="4D4D4D"/>
-                </a:solidFill>
-                <a:effectLst/>
-                <a:latin typeface="Arial" pitchFamily="34" charset="0"/>
-                <a:ea typeface="宋体" pitchFamily="2" charset="-122"/>
-                <a:cs typeface="Arial" pitchFamily="34" charset="0"/>
-              </a:rPr>
-              <a:t>下降到</a:t>
-            </a:r>
-            <a:r>
-              <a:rPr kumimoji="0" lang="en-US" altLang="zh-CN" sz="2000" b="1" i="0" u="none" strike="noStrike" cap="none" normalizeH="0" baseline="0" dirty="0" smtClean="0">
-                <a:ln>
-                  <a:noFill/>
-                </a:ln>
-                <a:solidFill>
-                  <a:srgbClr val="4D4D4D"/>
-                </a:solidFill>
-                <a:effectLst/>
-                <a:latin typeface="Arial" pitchFamily="34" charset="0"/>
-                <a:ea typeface="宋体" pitchFamily="2" charset="-122"/>
-                <a:cs typeface="Arial" pitchFamily="34" charset="0"/>
-              </a:rPr>
-              <a:t>PVD</a:t>
-            </a:r>
-            <a:r>
-              <a:rPr kumimoji="0" lang="zh-CN" altLang="en-US" sz="2000" b="1" i="0" u="none" strike="noStrike" cap="none" normalizeH="0" baseline="0" dirty="0" smtClean="0">
-                <a:ln>
-                  <a:noFill/>
-                </a:ln>
-                <a:solidFill>
-                  <a:srgbClr val="4D4D4D"/>
-                </a:solidFill>
-                <a:effectLst/>
-                <a:latin typeface="Arial" pitchFamily="34" charset="0"/>
-                <a:ea typeface="宋体" pitchFamily="2" charset="-122"/>
-                <a:cs typeface="Arial" pitchFamily="34" charset="0"/>
-              </a:rPr>
-              <a:t>阈值以下和</a:t>
-            </a:r>
-            <a:r>
-              <a:rPr kumimoji="0" lang="en-US" altLang="zh-CN" sz="2000" b="1" i="0" u="none" strike="noStrike" cap="none" normalizeH="0" baseline="0" dirty="0" smtClean="0">
-                <a:ln>
-                  <a:noFill/>
-                </a:ln>
-                <a:solidFill>
-                  <a:srgbClr val="4D4D4D"/>
-                </a:solidFill>
-                <a:effectLst/>
-                <a:latin typeface="Arial" pitchFamily="34" charset="0"/>
-                <a:ea typeface="宋体" pitchFamily="2" charset="-122"/>
-                <a:cs typeface="Arial" pitchFamily="34" charset="0"/>
-              </a:rPr>
-              <a:t>(</a:t>
-            </a:r>
-            <a:r>
-              <a:rPr kumimoji="0" lang="zh-CN" altLang="en-US" sz="2000" b="1" i="0" u="none" strike="noStrike" cap="none" normalizeH="0" baseline="0" dirty="0" smtClean="0">
-                <a:ln>
-                  <a:noFill/>
-                </a:ln>
-                <a:solidFill>
-                  <a:srgbClr val="4D4D4D"/>
-                </a:solidFill>
-                <a:effectLst/>
-                <a:latin typeface="Arial" pitchFamily="34" charset="0"/>
-                <a:ea typeface="宋体" pitchFamily="2" charset="-122"/>
-                <a:cs typeface="Arial" pitchFamily="34" charset="0"/>
-              </a:rPr>
-              <a:t>或</a:t>
-            </a:r>
-            <a:r>
-              <a:rPr kumimoji="0" lang="en-US" altLang="zh-CN" sz="2000" b="1" i="0" u="none" strike="noStrike" cap="none" normalizeH="0" baseline="0" dirty="0" smtClean="0">
-                <a:ln>
-                  <a:noFill/>
-                </a:ln>
-                <a:solidFill>
-                  <a:srgbClr val="4D4D4D"/>
-                </a:solidFill>
-                <a:effectLst/>
-                <a:latin typeface="Arial" pitchFamily="34" charset="0"/>
-                <a:ea typeface="宋体" pitchFamily="2" charset="-122"/>
-                <a:cs typeface="Arial" pitchFamily="34" charset="0"/>
-              </a:rPr>
-              <a:t>)</a:t>
-            </a:r>
-            <a:r>
-              <a:rPr kumimoji="0" lang="zh-CN" altLang="en-US" sz="2000" b="1" i="0" u="none" strike="noStrike" cap="none" normalizeH="0" baseline="0" dirty="0" smtClean="0">
-                <a:ln>
-                  <a:noFill/>
-                </a:ln>
-                <a:solidFill>
-                  <a:srgbClr val="4D4D4D"/>
-                </a:solidFill>
-                <a:effectLst/>
-                <a:latin typeface="Arial" pitchFamily="34" charset="0"/>
-                <a:ea typeface="宋体" pitchFamily="2" charset="-122"/>
-                <a:cs typeface="Arial" pitchFamily="34" charset="0"/>
-              </a:rPr>
-              <a:t>当</a:t>
-            </a:r>
-            <a:r>
-              <a:rPr kumimoji="0" lang="en-US" altLang="zh-CN" sz="2000" b="1" i="0" u="none" strike="noStrike" cap="none" normalizeH="0" baseline="0" dirty="0" smtClean="0">
-                <a:ln>
-                  <a:noFill/>
-                </a:ln>
-                <a:solidFill>
-                  <a:srgbClr val="4D4D4D"/>
-                </a:solidFill>
-                <a:effectLst/>
-                <a:latin typeface="Arial" pitchFamily="34" charset="0"/>
-                <a:ea typeface="宋体" pitchFamily="2" charset="-122"/>
-                <a:cs typeface="Arial" pitchFamily="34" charset="0"/>
-              </a:rPr>
-              <a:t>VDD</a:t>
-            </a:r>
-            <a:r>
-              <a:rPr kumimoji="0" lang="zh-CN" altLang="en-US" sz="2000" b="1" i="0" u="none" strike="noStrike" cap="none" normalizeH="0" baseline="0" dirty="0" smtClean="0">
-                <a:ln>
-                  <a:noFill/>
-                </a:ln>
-                <a:solidFill>
-                  <a:srgbClr val="4D4D4D"/>
-                </a:solidFill>
-                <a:effectLst/>
-                <a:latin typeface="Arial" pitchFamily="34" charset="0"/>
-                <a:ea typeface="宋体" pitchFamily="2" charset="-122"/>
-                <a:cs typeface="Arial" pitchFamily="34" charset="0"/>
-              </a:rPr>
-              <a:t>上升到</a:t>
-            </a:r>
-            <a:r>
-              <a:rPr kumimoji="0" lang="en-US" altLang="zh-CN" sz="2000" b="1" i="0" u="none" strike="noStrike" cap="none" normalizeH="0" baseline="0" dirty="0" smtClean="0">
-                <a:ln>
-                  <a:noFill/>
-                </a:ln>
-                <a:solidFill>
-                  <a:srgbClr val="4D4D4D"/>
-                </a:solidFill>
-                <a:effectLst/>
-                <a:latin typeface="Arial" pitchFamily="34" charset="0"/>
-                <a:ea typeface="宋体" pitchFamily="2" charset="-122"/>
-                <a:cs typeface="Arial" pitchFamily="34" charset="0"/>
-              </a:rPr>
-              <a:t>PVD</a:t>
-            </a:r>
-            <a:r>
-              <a:rPr kumimoji="0" lang="zh-CN" altLang="en-US" sz="2000" b="1" i="0" u="none" strike="noStrike" cap="none" normalizeH="0" baseline="0" dirty="0" smtClean="0">
-                <a:ln>
-                  <a:noFill/>
-                </a:ln>
-                <a:solidFill>
-                  <a:srgbClr val="4D4D4D"/>
-                </a:solidFill>
-                <a:effectLst/>
-                <a:latin typeface="Arial" pitchFamily="34" charset="0"/>
-                <a:ea typeface="宋体" pitchFamily="2" charset="-122"/>
-                <a:cs typeface="Arial" pitchFamily="34" charset="0"/>
-              </a:rPr>
-              <a:t>阈值之上时，会产生</a:t>
-            </a:r>
-            <a:r>
-              <a:rPr kumimoji="0" lang="en-US" altLang="zh-CN" sz="2000" b="1" i="0" u="none" strike="noStrike" cap="none" normalizeH="0" baseline="0" dirty="0" smtClean="0">
-                <a:ln>
-                  <a:noFill/>
-                </a:ln>
-                <a:solidFill>
-                  <a:srgbClr val="4D4D4D"/>
-                </a:solidFill>
-                <a:effectLst/>
-                <a:latin typeface="Arial" pitchFamily="34" charset="0"/>
-                <a:ea typeface="宋体" pitchFamily="2" charset="-122"/>
-                <a:cs typeface="Arial" pitchFamily="34" charset="0"/>
-              </a:rPr>
-              <a:t>PVD</a:t>
-            </a:r>
-            <a:r>
-              <a:rPr kumimoji="0" lang="zh-CN" altLang="en-US" sz="2000" b="1" i="0" u="none" strike="noStrike" cap="none" normalizeH="0" baseline="0" dirty="0" smtClean="0">
-                <a:ln>
-                  <a:noFill/>
-                </a:ln>
-                <a:solidFill>
-                  <a:srgbClr val="4D4D4D"/>
-                </a:solidFill>
-                <a:effectLst/>
-                <a:latin typeface="Arial" pitchFamily="34" charset="0"/>
-                <a:ea typeface="宋体" pitchFamily="2" charset="-122"/>
-                <a:cs typeface="Arial" pitchFamily="34" charset="0"/>
-              </a:rPr>
-              <a:t>中断。</a:t>
-            </a:r>
-            <a:endParaRPr kumimoji="0" lang="zh-CN" altLang="en-US" sz="2000" b="0" i="0" u="none" strike="noStrike" cap="none" normalizeH="0" baseline="0" dirty="0" smtClean="0">
-              <a:ln>
-                <a:noFill/>
-              </a:ln>
-              <a:solidFill>
-                <a:schemeClr val="tx1"/>
-              </a:solidFill>
-              <a:effectLst/>
-              <a:latin typeface="Arial" pitchFamily="34" charset="0"/>
-              <a:ea typeface="宋体" pitchFamily="2" charset="-122"/>
-              <a:cs typeface="宋体" pitchFamily="2" charset="-122"/>
-            </a:endParaRPr>
-          </a:p>
-          <a:p>
-            <a:pPr marL="0" marR="0" lvl="0" indent="0" algn="l" defTabSz="914400" rtl="0" eaLnBrk="0" fontAlgn="base" latinLnBrk="0" hangingPunct="0">
+              <a:rPr lang="zh-CN" altLang="en-US" sz="2400" dirty="0">
+                <a:latin typeface="Times New Roman" pitchFamily="18" charset="0"/>
+                <a:cs typeface="Times New Roman" pitchFamily="18" charset="0"/>
+              </a:rPr>
+              <a:t>停止模式：所有时钟都已停止</a:t>
+            </a:r>
+          </a:p>
+          <a:p>
+            <a:pPr>
               <a:lnSpc>
                 <a:spcPct val="150000"/>
               </a:lnSpc>
-              <a:spcBef>
-                <a:spcPct val="0"/>
-              </a:spcBef>
-              <a:spcAft>
-                <a:spcPct val="0"/>
-              </a:spcAft>
-              <a:buClrTx/>
-              <a:buSzTx/>
-              <a:buFontTx/>
-              <a:buNone/>
-              <a:tabLst/>
+              <a:buClr>
+                <a:schemeClr val="accent2">
+                  <a:lumMod val="50000"/>
+                </a:schemeClr>
+              </a:buClr>
+              <a:buFont typeface="Wingdings" pitchFamily="2" charset="2"/>
+              <a:buChar char="u"/>
             </a:pPr>
-            <a:endParaRPr kumimoji="0" lang="zh-CN" altLang="en-US" sz="2000" b="0" i="0" u="none" strike="noStrike" cap="none" normalizeH="0" baseline="0" dirty="0" smtClean="0">
-              <a:ln>
-                <a:noFill/>
-              </a:ln>
-              <a:solidFill>
-                <a:schemeClr val="tx1"/>
-              </a:solidFill>
-              <a:effectLst/>
-              <a:latin typeface="Arial" pitchFamily="34" charset="0"/>
-              <a:ea typeface="宋体" pitchFamily="2" charset="-122"/>
-              <a:cs typeface="宋体" pitchFamily="2" charset="-122"/>
-            </a:endParaRPr>
+            <a:r>
+              <a:rPr lang="zh-CN" altLang="en-US" sz="2400" dirty="0">
+                <a:latin typeface="Times New Roman" pitchFamily="18" charset="0"/>
+                <a:cs typeface="Times New Roman" pitchFamily="18" charset="0"/>
+              </a:rPr>
+              <a:t>待机模式：</a:t>
+            </a:r>
+            <a:r>
+              <a:rPr lang="en-US" sz="2400" dirty="0">
+                <a:latin typeface="Times New Roman" pitchFamily="18" charset="0"/>
+                <a:cs typeface="Times New Roman" pitchFamily="18" charset="0"/>
+              </a:rPr>
+              <a:t>1.8V</a:t>
+            </a:r>
+            <a:r>
+              <a:rPr lang="zh-CN" altLang="en-US" sz="2400" dirty="0">
+                <a:latin typeface="Times New Roman" pitchFamily="18" charset="0"/>
+                <a:cs typeface="Times New Roman" pitchFamily="18" charset="0"/>
+              </a:rPr>
+              <a:t>电源关闭</a:t>
+            </a:r>
+          </a:p>
+          <a:p>
+            <a:pPr>
+              <a:lnSpc>
+                <a:spcPct val="150000"/>
+              </a:lnSpc>
+            </a:pPr>
+            <a:r>
+              <a:rPr lang="en-US" sz="2000" dirty="0"/>
+              <a:t> </a:t>
+            </a:r>
+            <a:endParaRPr lang="zh-CN" altLang="en-US" sz="2000" dirty="0"/>
           </a:p>
         </p:txBody>
       </p:sp>
-      <p:pic>
-        <p:nvPicPr>
-          <p:cNvPr id="147458" name="Picture 2"/>
-          <p:cNvPicPr>
-            <a:picLocks noChangeAspect="1" noChangeArrowheads="1"/>
-          </p:cNvPicPr>
-          <p:nvPr/>
-        </p:nvPicPr>
-        <p:blipFill>
-          <a:blip r:embed="rId3"/>
-          <a:srcRect/>
-          <a:stretch>
-            <a:fillRect/>
-          </a:stretch>
-        </p:blipFill>
-        <p:spPr bwMode="auto">
-          <a:xfrm>
-            <a:off x="6397012" y="1418352"/>
-            <a:ext cx="4517762" cy="2164604"/>
-          </a:xfrm>
-          <a:prstGeom prst="rect">
-            <a:avLst/>
-          </a:prstGeom>
-          <a:noFill/>
-          <a:ln w="9525">
-            <a:noFill/>
-            <a:miter lim="800000"/>
-            <a:headEnd/>
-            <a:tailEnd/>
-          </a:ln>
-          <a:effectLst/>
-        </p:spPr>
-      </p:pic>
-      <p:pic>
-        <p:nvPicPr>
-          <p:cNvPr id="147459" name="Picture 3"/>
-          <p:cNvPicPr>
-            <a:picLocks noChangeAspect="1" noChangeArrowheads="1"/>
-          </p:cNvPicPr>
-          <p:nvPr/>
-        </p:nvPicPr>
-        <p:blipFill>
-          <a:blip r:embed="rId4"/>
-          <a:srcRect/>
-          <a:stretch>
-            <a:fillRect/>
-          </a:stretch>
-        </p:blipFill>
-        <p:spPr bwMode="auto">
-          <a:xfrm>
-            <a:off x="6440650" y="3928382"/>
-            <a:ext cx="4677930" cy="2304467"/>
-          </a:xfrm>
-          <a:prstGeom prst="rect">
-            <a:avLst/>
-          </a:prstGeom>
-          <a:noFill/>
-          <a:ln w="9525">
-            <a:noFill/>
-            <a:miter lim="800000"/>
-            <a:headEnd/>
-            <a:tailEnd/>
-          </a:ln>
-          <a:effectLst/>
-        </p:spPr>
-      </p:pic>
     </p:spTree>
   </p:cSld>
   <p:clrMapOvr>
     <a:masterClrMapping/>
   </p:clrMapOvr>
-  <p:timing>
-    <p:tnLst>
-      <p:par>
-        <p:cTn id="1" dur="indefinite" restart="never" nodeType="tmRoot"/>
-      </p:par>
-    </p:tnLst>
-  </p:timing>
 </p:sld>
 </file>
 
@@ -16093,363 +14318,15 @@
               <a:defRPr/>
             </a:pPr>
             <a:r>
-              <a:rPr lang="en-US" sz="2800" b="1" dirty="0" smtClean="0">
+              <a:rPr lang="en-US" sz="2800" b="1" dirty="0">
                 <a:solidFill>
                   <a:srgbClr val="C00000"/>
                 </a:solidFill>
               </a:rPr>
-              <a:t>3.1.3 </a:t>
-            </a:r>
-            <a:r>
-              <a:rPr lang="zh-CN" altLang="en-US" sz="2800" b="1" dirty="0" smtClean="0">
-                <a:solidFill>
-                  <a:srgbClr val="C00000"/>
-                </a:solidFill>
-              </a:rPr>
-              <a:t>低功耗模式</a:t>
-            </a:r>
-          </a:p>
-        </p:txBody>
-      </p:sp>
-      <p:sp>
-        <p:nvSpPr>
-          <p:cNvPr id="147457" name="Rectangle 1"/>
-          <p:cNvSpPr>
-            <a:spLocks noChangeArrowheads="1"/>
-          </p:cNvSpPr>
-          <p:nvPr/>
-        </p:nvSpPr>
-        <p:spPr bwMode="auto">
-          <a:xfrm>
-            <a:off x="849084" y="1318022"/>
-            <a:ext cx="10245013" cy="5539978"/>
-          </a:xfrm>
-          <a:prstGeom prst="rect">
-            <a:avLst/>
-          </a:prstGeom>
-          <a:noFill/>
-          <a:ln w="9525">
-            <a:noFill/>
-            <a:miter lim="800000"/>
-            <a:headEnd/>
-            <a:tailEnd/>
-          </a:ln>
-          <a:effectLst/>
-        </p:spPr>
-        <p:txBody>
-          <a:bodyPr vert="horz" wrap="square" lIns="91440" tIns="45720" rIns="91440" bIns="45720" numCol="1" anchor="ctr" anchorCtr="0" compatLnSpc="1">
-            <a:prstTxWarp prst="textNoShape">
-              <a:avLst/>
-            </a:prstTxWarp>
-            <a:spAutoFit/>
-          </a:bodyPr>
-          <a:lstStyle/>
-          <a:p>
-            <a:pPr>
-              <a:lnSpc>
-                <a:spcPct val="150000"/>
-              </a:lnSpc>
-            </a:pPr>
-            <a:r>
-              <a:rPr lang="zh-CN" altLang="en-US" sz="2000" b="1" dirty="0" smtClean="0"/>
-              <a:t>      </a:t>
-            </a:r>
-            <a:r>
-              <a:rPr lang="zh-CN" altLang="en-US" sz="2400" dirty="0" smtClean="0">
-                <a:latin typeface="Times New Roman" pitchFamily="18" charset="0"/>
-                <a:cs typeface="Times New Roman" pitchFamily="18" charset="0"/>
-              </a:rPr>
-              <a:t>在系统或电源复位后，微控制处于运行模式。当处理器不需继续运行时</a:t>
-            </a:r>
-            <a:r>
-              <a:rPr lang="en-US" sz="2400" dirty="0" smtClean="0">
-                <a:latin typeface="Times New Roman" pitchFamily="18" charset="0"/>
-                <a:cs typeface="Times New Roman" pitchFamily="18" charset="0"/>
-              </a:rPr>
-              <a:t>(</a:t>
-            </a:r>
-            <a:r>
-              <a:rPr lang="zh-CN" altLang="en-US" sz="2400" dirty="0" smtClean="0">
-                <a:latin typeface="Times New Roman" pitchFamily="18" charset="0"/>
-                <a:cs typeface="Times New Roman" pitchFamily="18" charset="0"/>
-              </a:rPr>
-              <a:t>如等待某个外部事件</a:t>
-            </a:r>
-            <a:r>
-              <a:rPr lang="en-US" sz="2400" dirty="0" smtClean="0">
-                <a:latin typeface="Times New Roman" pitchFamily="18" charset="0"/>
-                <a:cs typeface="Times New Roman" pitchFamily="18" charset="0"/>
-              </a:rPr>
-              <a:t>)</a:t>
-            </a:r>
-            <a:r>
-              <a:rPr lang="zh-CN" altLang="en-US" sz="2400" dirty="0" smtClean="0">
-                <a:latin typeface="Times New Roman" pitchFamily="18" charset="0"/>
-                <a:cs typeface="Times New Roman" pitchFamily="18" charset="0"/>
-              </a:rPr>
-              <a:t>，可以利用多种低功耗模式来节省功耗。用户需要根据最低电源消耗，最快速启动事件和可用的唤醒源等条件，选定一个最佳低功耗卯时。低功耗模式主要是对处理器、处理器外部外设、</a:t>
-            </a:r>
-            <a:r>
-              <a:rPr lang="en-US" sz="2400" dirty="0" smtClean="0">
-                <a:latin typeface="Times New Roman" pitchFamily="18" charset="0"/>
-                <a:cs typeface="Times New Roman" pitchFamily="18" charset="0"/>
-              </a:rPr>
-              <a:t>SRAM</a:t>
-            </a:r>
-            <a:r>
-              <a:rPr lang="zh-CN" altLang="en-US" sz="2400" dirty="0" smtClean="0">
-                <a:latin typeface="Times New Roman" pitchFamily="18" charset="0"/>
-                <a:cs typeface="Times New Roman" pitchFamily="18" charset="0"/>
-              </a:rPr>
-              <a:t>和寄存器等的供电电源和时钟进行控制操作。</a:t>
-            </a:r>
-          </a:p>
-          <a:p>
-            <a:pPr>
-              <a:lnSpc>
-                <a:spcPct val="150000"/>
-              </a:lnSpc>
-            </a:pPr>
-            <a:r>
-              <a:rPr lang="en-US" sz="2400" dirty="0" smtClean="0">
-                <a:latin typeface="Times New Roman" pitchFamily="18" charset="0"/>
-                <a:cs typeface="Times New Roman" pitchFamily="18" charset="0"/>
-              </a:rPr>
-              <a:t>STM32F10x</a:t>
-            </a:r>
-            <a:r>
-              <a:rPr lang="zh-CN" altLang="en-US" sz="2400" dirty="0" smtClean="0">
-                <a:latin typeface="Times New Roman" pitchFamily="18" charset="0"/>
-                <a:cs typeface="Times New Roman" pitchFamily="18" charset="0"/>
-              </a:rPr>
-              <a:t>系列处理器有三种低功耗模式：</a:t>
-            </a:r>
-          </a:p>
-          <a:p>
-            <a:pPr>
-              <a:lnSpc>
-                <a:spcPct val="150000"/>
-              </a:lnSpc>
-              <a:buClr>
-                <a:schemeClr val="accent2">
-                  <a:lumMod val="50000"/>
-                </a:schemeClr>
-              </a:buClr>
-              <a:buFont typeface="Wingdings" pitchFamily="2" charset="2"/>
-              <a:buChar char="u"/>
-            </a:pPr>
-            <a:r>
-              <a:rPr lang="zh-CN" altLang="en-US" sz="2400" dirty="0" smtClean="0">
-                <a:latin typeface="Times New Roman" pitchFamily="18" charset="0"/>
-                <a:cs typeface="Times New Roman" pitchFamily="18" charset="0"/>
-              </a:rPr>
-              <a:t>睡眠模式：</a:t>
-            </a:r>
-            <a:r>
-              <a:rPr lang="en-US" sz="2400" dirty="0" smtClean="0">
-                <a:latin typeface="Times New Roman" pitchFamily="18" charset="0"/>
-                <a:cs typeface="Times New Roman" pitchFamily="18" charset="0"/>
-              </a:rPr>
-              <a:t>CM3</a:t>
-            </a:r>
-            <a:r>
-              <a:rPr lang="zh-CN" altLang="en-US" sz="2400" dirty="0" smtClean="0">
-                <a:latin typeface="Times New Roman" pitchFamily="18" charset="0"/>
-                <a:cs typeface="Times New Roman" pitchFamily="18" charset="0"/>
-              </a:rPr>
-              <a:t>内核停止，外设仍在运行</a:t>
-            </a:r>
-          </a:p>
-          <a:p>
-            <a:pPr>
-              <a:lnSpc>
-                <a:spcPct val="150000"/>
-              </a:lnSpc>
-              <a:buClr>
-                <a:schemeClr val="accent2">
-                  <a:lumMod val="50000"/>
-                </a:schemeClr>
-              </a:buClr>
-              <a:buFont typeface="Wingdings" pitchFamily="2" charset="2"/>
-              <a:buChar char="u"/>
-            </a:pPr>
-            <a:r>
-              <a:rPr lang="zh-CN" altLang="en-US" sz="2400" dirty="0" smtClean="0">
-                <a:latin typeface="Times New Roman" pitchFamily="18" charset="0"/>
-                <a:cs typeface="Times New Roman" pitchFamily="18" charset="0"/>
-              </a:rPr>
-              <a:t>停止模式：所有时钟都已停止</a:t>
-            </a:r>
-          </a:p>
-          <a:p>
-            <a:pPr>
-              <a:lnSpc>
-                <a:spcPct val="150000"/>
-              </a:lnSpc>
-              <a:buClr>
-                <a:schemeClr val="accent2">
-                  <a:lumMod val="50000"/>
-                </a:schemeClr>
-              </a:buClr>
-              <a:buFont typeface="Wingdings" pitchFamily="2" charset="2"/>
-              <a:buChar char="u"/>
-            </a:pPr>
-            <a:r>
-              <a:rPr lang="zh-CN" altLang="en-US" sz="2400" dirty="0" smtClean="0">
-                <a:latin typeface="Times New Roman" pitchFamily="18" charset="0"/>
-                <a:cs typeface="Times New Roman" pitchFamily="18" charset="0"/>
-              </a:rPr>
-              <a:t>待机模式：</a:t>
-            </a:r>
-            <a:r>
-              <a:rPr lang="en-US" sz="2400" dirty="0" smtClean="0">
-                <a:latin typeface="Times New Roman" pitchFamily="18" charset="0"/>
-                <a:cs typeface="Times New Roman" pitchFamily="18" charset="0"/>
-              </a:rPr>
-              <a:t>1.8V</a:t>
-            </a:r>
-            <a:r>
-              <a:rPr lang="zh-CN" altLang="en-US" sz="2400" dirty="0" smtClean="0">
-                <a:latin typeface="Times New Roman" pitchFamily="18" charset="0"/>
-                <a:cs typeface="Times New Roman" pitchFamily="18" charset="0"/>
-              </a:rPr>
-              <a:t>电源关闭</a:t>
-            </a:r>
-          </a:p>
-          <a:p>
-            <a:pPr>
-              <a:lnSpc>
-                <a:spcPct val="150000"/>
-              </a:lnSpc>
-            </a:pPr>
-            <a:r>
-              <a:rPr lang="en-US" sz="2000" dirty="0" smtClean="0"/>
-              <a:t> </a:t>
-            </a:r>
-            <a:endParaRPr lang="zh-CN" altLang="en-US" sz="2000" dirty="0"/>
-          </a:p>
-        </p:txBody>
-      </p:sp>
-    </p:spTree>
-  </p:cSld>
-  <p:clrMapOvr>
-    <a:masterClrMapping/>
-  </p:clrMapOvr>
-  <p:timing>
-    <p:tnLst>
-      <p:par>
-        <p:cTn id="1" dur="indefinite" restart="never" nodeType="tmRoot"/>
-      </p:par>
-    </p:tnLst>
-  </p:timing>
-</p:sld>
-</file>
-
-<file path=ppt/slides/slide8.xml><?xml version="1.0" encoding="utf-8"?>
-<p:sld xmlns:a="http://schemas.openxmlformats.org/drawingml/2006/main" xmlns:r="http://schemas.openxmlformats.org/officeDocument/2006/relationships" xmlns:p="http://schemas.openxmlformats.org/presentationml/2006/main">
-  <p:cSld>
-    <p:spTree>
-      <p:nvGrpSpPr>
-        <p:cNvPr id="1" name=""/>
-        <p:cNvGrpSpPr/>
-        <p:nvPr/>
-      </p:nvGrpSpPr>
-      <p:grpSpPr>
-        <a:xfrm>
-          <a:off x="0" y="0"/>
-          <a:ext cx="0" cy="0"/>
-          <a:chOff x="0" y="0"/>
-          <a:chExt cx="0" cy="0"/>
-        </a:xfrm>
-      </p:grpSpPr>
-      <p:cxnSp>
-        <p:nvCxnSpPr>
-          <p:cNvPr id="7" name="直接连接符 6"/>
-          <p:cNvCxnSpPr/>
-          <p:nvPr>
-            <p:custDataLst>
-              <p:tags r:id="rId1"/>
-            </p:custDataLst>
-          </p:nvPr>
-        </p:nvCxnSpPr>
-        <p:spPr>
-          <a:xfrm>
-            <a:off x="681031" y="1248357"/>
-            <a:ext cx="10767630" cy="11276"/>
-          </a:xfrm>
-          <a:prstGeom prst="line">
-            <a:avLst/>
-          </a:prstGeom>
-          <a:ln w="19050" cap="flat">
-            <a:solidFill>
-              <a:schemeClr val="accent6"/>
-            </a:solidFill>
-            <a:prstDash val="solid"/>
-          </a:ln>
-        </p:spPr>
-        <p:style>
-          <a:lnRef idx="1">
-            <a:schemeClr val="accent1"/>
-          </a:lnRef>
-          <a:fillRef idx="0">
-            <a:schemeClr val="accent1"/>
-          </a:fillRef>
-          <a:effectRef idx="0">
-            <a:schemeClr val="accent1"/>
-          </a:effectRef>
-          <a:fontRef idx="minor">
-            <a:schemeClr val="tx1"/>
-          </a:fontRef>
-        </p:style>
-      </p:cxnSp>
-      <p:sp>
-        <p:nvSpPr>
-          <p:cNvPr id="5" name="标题 1"/>
-          <p:cNvSpPr txBox="1">
-            <a:spLocks/>
-          </p:cNvSpPr>
-          <p:nvPr/>
-        </p:nvSpPr>
-        <p:spPr>
-          <a:xfrm>
-            <a:off x="602757" y="659840"/>
-            <a:ext cx="10058400" cy="683771"/>
-          </a:xfrm>
-          <a:prstGeom prst="rect">
-            <a:avLst/>
-          </a:prstGeom>
-        </p:spPr>
-        <p:txBody>
-          <a:bodyPr/>
-          <a:lstStyle/>
-          <a:p>
-            <a:pPr marR="0" lvl="0" indent="0" fontAlgn="auto">
-              <a:lnSpc>
-                <a:spcPct val="90000"/>
-              </a:lnSpc>
-              <a:spcBef>
-                <a:spcPct val="0"/>
-              </a:spcBef>
-              <a:spcAft>
-                <a:spcPts val="0"/>
-              </a:spcAft>
-              <a:buClrTx/>
-              <a:buSzTx/>
-              <a:buFontTx/>
-              <a:buNone/>
-              <a:tabLst/>
-              <a:defRPr/>
-            </a:pPr>
-            <a:r>
-              <a:rPr lang="en-US" sz="2800" b="1" dirty="0" smtClean="0">
-                <a:solidFill>
-                  <a:srgbClr val="C00000"/>
-                </a:solidFill>
-              </a:rPr>
               <a:t>3.2 </a:t>
             </a:r>
             <a:r>
-              <a:rPr lang="zh-CN" altLang="en-US" sz="2800" b="1" dirty="0" smtClean="0">
+              <a:rPr lang="zh-CN" altLang="en-US" sz="2800" b="1" dirty="0">
                 <a:solidFill>
                   <a:srgbClr val="C00000"/>
                 </a:solidFill>
@@ -16499,24 +14376,24 @@
               </a:lnSpc>
             </a:pPr>
             <a:r>
-              <a:rPr lang="zh-CN" altLang="en-US" sz="2000" b="1" dirty="0" smtClean="0"/>
+              <a:rPr lang="zh-CN" altLang="en-US" sz="2000" b="1" dirty="0"/>
               <a:t>       </a:t>
             </a:r>
             <a:r>
-              <a:rPr lang="en-US" altLang="zh-CN" sz="2400" dirty="0" smtClean="0">
+              <a:rPr lang="en-US" altLang="zh-CN" sz="2400" dirty="0">
                 <a:latin typeface="Times New Roman" pitchFamily="18" charset="0"/>
                 <a:cs typeface="Times New Roman" pitchFamily="18" charset="0"/>
               </a:rPr>
               <a:t>STM32</a:t>
             </a:r>
             <a:r>
-              <a:rPr lang="zh-CN" altLang="en-US" sz="2400" dirty="0" smtClean="0">
+              <a:rPr lang="zh-CN" altLang="en-US" sz="2400" dirty="0">
                 <a:latin typeface="Times New Roman" pitchFamily="18" charset="0"/>
                 <a:cs typeface="Times New Roman" pitchFamily="18" charset="0"/>
               </a:rPr>
               <a:t>时钟系统中的时钟源在不是用时可以单独打开或关闭，以优化系统功耗。</a:t>
             </a:r>
-            <a:endParaRPr lang="en-US" altLang="zh-CN" sz="2400" dirty="0" smtClean="0">
+            <a:endParaRPr lang="en-US" altLang="zh-CN" sz="2400" dirty="0">
               <a:latin typeface="Times New Roman" pitchFamily="18" charset="0"/>
               <a:cs typeface="Times New Roman" pitchFamily="18" charset="0"/>
             </a:endParaRPr>
@@ -16528,25 +14405,25 @@
               </a:lnSpc>
             </a:pPr>
             <a:r>
-              <a:rPr lang="en-US" altLang="zh-CN" sz="2400" dirty="0" smtClean="0">
+              <a:rPr lang="en-US" altLang="zh-CN" sz="2400" dirty="0">
                 <a:latin typeface="Times New Roman" pitchFamily="18" charset="0"/>
                 <a:cs typeface="Times New Roman" pitchFamily="18" charset="0"/>
               </a:rPr>
               <a:t>        STM32</a:t>
             </a:r>
             <a:r>
-              <a:rPr lang="zh-CN" altLang="en-US" sz="2400" dirty="0" smtClean="0"/>
+              <a:rPr lang="zh-CN" altLang="en-US" sz="2400" dirty="0"/>
               <a:t>本身十分复杂，外设非常多  但我们实际使用的时候只会用到有限的几个外设，使用任何外设都需要时钟才能启动，但并不是所有的外设都需要系统时钟那么高的频率，为了兼容不同速度的设备，有些高速，有些低速，如果都用高速时钟，势必造成浪费   并且，同一个电路，时钟越快功耗越快，同时抗电磁干扰能力也就越弱，所以较为复杂的</a:t>
             </a:r>
             <a:r>
-              <a:rPr lang="en-US" altLang="zh-CN" sz="2400" dirty="0" smtClean="0"/>
+              <a:rPr lang="en-US" altLang="zh-CN" sz="2400" dirty="0"/>
               <a:t>MCU</a:t>
             </a:r>
             <a:r>
-              <a:rPr lang="zh-CN" altLang="en-US" sz="2400" dirty="0" smtClean="0"/>
+              <a:rPr lang="zh-CN" altLang="en-US" sz="2400" dirty="0"/>
               <a:t>都是采用多时钟源的方法来解决这些问题。</a:t>
             </a:r>
-            <a:endParaRPr lang="zh-CN" altLang="en-US" sz="2400" dirty="0" smtClean="0">
+            <a:endParaRPr lang="zh-CN" altLang="en-US" sz="2400" dirty="0">
               <a:latin typeface="Times New Roman" pitchFamily="18" charset="0"/>
               <a:cs typeface="Times New Roman" pitchFamily="18" charset="0"/>
             </a:endParaRPr>
@@ -16558,7 +14435,7 @@
               </a:lnSpc>
             </a:pPr>
             <a:r>
-              <a:rPr lang="en-US" sz="2000" dirty="0" smtClean="0"/>
+              <a:rPr lang="en-US" sz="2000" dirty="0"/>
               <a:t> </a:t>
             </a:r>
             <a:endParaRPr lang="zh-CN" altLang="en-US" sz="2000" dirty="0"/>
@@ -16570,17 +14447,10 @@
   <p:clrMapOvr>
     <a:masterClrMapping/>
   </p:clrMapOvr>
-  <p:timing>
-    <p:tnLst>
-      <p:par>
-        <p:cTn id="1" dur="indefinite" restart="never" nodeType="tmRoot"/>
-      </p:par>
-    </p:tnLst>
-  </p:timing>
 </p:sld>
 </file>
 
-<file path=ppt/slides/slide9.xml><?xml version="1.0" encoding="utf-8"?>
+<file path=ppt/slides/slide8.xml><?xml version="1.0" encoding="utf-8"?>
 <p:sld xmlns:a="http://schemas.openxmlformats.org/drawingml/2006/main" xmlns:r="http://schemas.openxmlformats.org/officeDocument/2006/relationships" xmlns:p="http://schemas.openxmlformats.org/presentationml/2006/main">
   <p:cSld>
     <p:spTree>
@@ -16635,13 +14505,238 @@
   <p:clrMapOvr>
     <a:masterClrMapping/>
   </p:clrMapOvr>
-  <p:timing>
-    <p:tnLst>
-      <p:par>
-        <p:cTn id="1" dur="indefinite" restart="never" nodeType="tmRoot"/>
-      </p:par>
-    </p:tnLst>
-  </p:timing>
+</p:sld>
+</file>
+
+<file path=ppt/slides/slide9.xml><?xml version="1.0" encoding="utf-8"?>
+<p:sld xmlns:a="http://schemas.openxmlformats.org/drawingml/2006/main" xmlns:r="http://schemas.openxmlformats.org/officeDocument/2006/relationships" xmlns:p="http://schemas.openxmlformats.org/presentationml/2006/main">
+  <p:cSld>
+    <p:spTree>
+      <p:nvGrpSpPr>
+        <p:cNvPr id="1" name=""/>
+        <p:cNvGrpSpPr/>
+        <p:nvPr/>
+      </p:nvGrpSpPr>
+      <p:grpSpPr>
+        <a:xfrm>
+          <a:off x="0" y="0"/>
+          <a:ext cx="0" cy="0"/>
+          <a:chOff x="0" y="0"/>
+          <a:chExt cx="0" cy="0"/>
+        </a:xfrm>
+      </p:grpSpPr>
+      <p:sp>
+        <p:nvSpPr>
+          <p:cNvPr id="147457" name="Rectangle 1"/>
+          <p:cNvSpPr>
+            <a:spLocks noChangeArrowheads="1"/>
+          </p:cNvSpPr>
+          <p:nvPr/>
+        </p:nvSpPr>
+        <p:spPr bwMode="auto">
+          <a:xfrm>
+            <a:off x="485190" y="599565"/>
+            <a:ext cx="10636900" cy="5670606"/>
+          </a:xfrm>
+          <a:prstGeom prst="rect">
+            <a:avLst/>
+          </a:prstGeom>
+          <a:noFill/>
+          <a:ln w="9525">
+            <a:noFill/>
+            <a:miter lim="800000"/>
+            <a:headEnd/>
+            <a:tailEnd/>
+          </a:ln>
+          <a:effectLst/>
+        </p:spPr>
+        <p:txBody>
+          <a:bodyPr vert="horz" wrap="square" lIns="91440" tIns="45720" rIns="91440" bIns="45720" numCol="1" anchor="ctr" anchorCtr="0" compatLnSpc="1">
+            <a:prstTxWarp prst="textNoShape">
+              <a:avLst/>
+            </a:prstTxWarp>
+            <a:spAutoFit/>
+          </a:bodyPr>
+          <a:lstStyle/>
+          <a:p>
+            <a:pPr>
+              <a:lnSpc>
+                <a:spcPct val="150000"/>
+              </a:lnSpc>
+            </a:pPr>
+            <a:r>
+              <a:rPr lang="en-US" altLang="zh-CN" sz="2000" dirty="0"/>
+              <a:t>STM32</a:t>
+            </a:r>
+            <a:r>
+              <a:rPr lang="zh-CN" altLang="en-US" sz="2000" dirty="0"/>
+              <a:t>时钟系统主要的目的就是</a:t>
+            </a:r>
+            <a:r>
+              <a:rPr lang="zh-CN" altLang="en-US" sz="2000" b="1" dirty="0">
+                <a:solidFill>
+                  <a:srgbClr val="FF0000"/>
+                </a:solidFill>
+              </a:rPr>
+              <a:t>给相对独立的外设模块提供时钟</a:t>
+            </a:r>
+            <a:r>
+              <a:rPr lang="zh-CN" altLang="en-US" sz="2000" dirty="0"/>
+              <a:t>，也是为了</a:t>
+            </a:r>
+            <a:r>
+              <a:rPr lang="zh-CN" altLang="en-US" sz="2000" b="1" dirty="0"/>
+              <a:t>降低整个芯片的耗能</a:t>
+            </a:r>
+            <a:r>
+              <a:rPr lang="zh-CN" altLang="en-US" sz="2000" dirty="0"/>
+              <a:t>。</a:t>
+            </a:r>
+          </a:p>
+          <a:p>
+            <a:pPr>
+              <a:lnSpc>
+                <a:spcPct val="150000"/>
+              </a:lnSpc>
+            </a:pPr>
+            <a:r>
+              <a:rPr lang="zh-CN" altLang="en-US" sz="2000" dirty="0"/>
+              <a:t>系统时钟，是处理器运行时间基准（每一条机器指令一个时钟周期）</a:t>
+            </a:r>
+          </a:p>
+          <a:p>
+            <a:pPr>
+              <a:lnSpc>
+                <a:spcPct val="150000"/>
+              </a:lnSpc>
+            </a:pPr>
+            <a:r>
+              <a:rPr lang="zh-CN" altLang="en-US" sz="2000" b="1" dirty="0"/>
+              <a:t>时钟是单片机运行的基础，时钟信号推动单片机内各个部分执行相应的指令。</a:t>
+            </a:r>
+            <a:endParaRPr lang="zh-CN" altLang="en-US" sz="2000" dirty="0"/>
+          </a:p>
+          <a:p>
+            <a:pPr>
+              <a:lnSpc>
+                <a:spcPct val="150000"/>
+              </a:lnSpc>
+            </a:pPr>
+            <a:r>
+              <a:rPr lang="zh-CN" altLang="en-US" sz="2000" b="1" dirty="0"/>
+              <a:t>一个单片机内提供多个不同的系统时钟，可以适应更多的应用场合。</a:t>
+            </a:r>
+            <a:endParaRPr lang="zh-CN" altLang="en-US" sz="2000" dirty="0"/>
+          </a:p>
+          <a:p>
+            <a:pPr>
+              <a:lnSpc>
+                <a:spcPct val="150000"/>
+              </a:lnSpc>
+            </a:pPr>
+            <a:r>
+              <a:rPr lang="zh-CN" altLang="en-US" sz="2000" b="1" dirty="0"/>
+              <a:t>不同的功能模块会有不同的时钟上限，因此提供不同的时钟，也能在一个单片机内放置更多的功能模块。</a:t>
+            </a:r>
+            <a:br>
+              <a:rPr lang="zh-CN" altLang="en-US" sz="2000" b="1" dirty="0"/>
+            </a:br>
+            <a:r>
+              <a:rPr lang="zh-CN" altLang="en-US" sz="2000" b="1" dirty="0"/>
+              <a:t>对不同模块的时钟增加开启和关闭功能，可以降低单片机的功耗</a:t>
+            </a:r>
+            <a:endParaRPr lang="zh-CN" altLang="en-US" sz="2000" dirty="0"/>
+          </a:p>
+          <a:p>
+            <a:pPr>
+              <a:lnSpc>
+                <a:spcPct val="150000"/>
+              </a:lnSpc>
+            </a:pPr>
+            <a:r>
+              <a:rPr lang="en-US" altLang="zh-CN" sz="2000" dirty="0"/>
+              <a:t>STM32</a:t>
+            </a:r>
+            <a:r>
+              <a:rPr lang="zh-CN" altLang="en-US" sz="2000" dirty="0"/>
+              <a:t>为了低功耗，</a:t>
+            </a:r>
+            <a:r>
+              <a:rPr lang="zh-CN" altLang="en-US" sz="2000" b="1" dirty="0">
+                <a:solidFill>
+                  <a:srgbClr val="FF0000"/>
+                </a:solidFill>
+              </a:rPr>
+              <a:t>他将所有的外设时钟都设置为</a:t>
+            </a:r>
+            <a:r>
+              <a:rPr lang="en-US" altLang="zh-CN" sz="2000" b="1" dirty="0">
+                <a:solidFill>
+                  <a:srgbClr val="FF0000"/>
+                </a:solidFill>
+              </a:rPr>
+              <a:t>disable(</a:t>
+            </a:r>
+            <a:r>
+              <a:rPr lang="zh-CN" altLang="en-US" sz="2000" b="1" dirty="0">
+                <a:solidFill>
+                  <a:srgbClr val="FF0000"/>
+                </a:solidFill>
+              </a:rPr>
+              <a:t>不使能</a:t>
+            </a:r>
+            <a:r>
+              <a:rPr lang="en-US" altLang="zh-CN" sz="2000" b="1" dirty="0">
+                <a:solidFill>
+                  <a:srgbClr val="FF0000"/>
+                </a:solidFill>
+              </a:rPr>
+              <a:t>)</a:t>
+            </a:r>
+            <a:r>
+              <a:rPr lang="zh-CN" altLang="en-US" sz="2000" dirty="0"/>
+              <a:t>，用到什么外设，只要打开对应外设的时钟就可以， 其他的没用到的可以还是</a:t>
+            </a:r>
+            <a:r>
+              <a:rPr lang="en-US" altLang="zh-CN" sz="2000" dirty="0"/>
+              <a:t>disable(</a:t>
+            </a:r>
+            <a:r>
+              <a:rPr lang="zh-CN" altLang="en-US" sz="2000" dirty="0"/>
+              <a:t>不使能</a:t>
+            </a:r>
+            <a:r>
+              <a:rPr lang="en-US" altLang="zh-CN" sz="2000" dirty="0"/>
+              <a:t>)</a:t>
+            </a:r>
+            <a:r>
+              <a:rPr lang="zh-CN" altLang="en-US" sz="2000" dirty="0"/>
+              <a:t>，这样耗能就会减少。  这就是为什么</a:t>
+            </a:r>
+            <a:r>
+              <a:rPr lang="zh-CN" altLang="en-US" sz="2000" b="1" dirty="0"/>
+              <a:t>不管你配置什么功能都需要先打开对应的时钟</a:t>
+            </a:r>
+            <a:r>
+              <a:rPr lang="zh-CN" altLang="en-US" sz="2000" dirty="0"/>
+              <a:t>的原因</a:t>
+            </a:r>
+          </a:p>
+          <a:p>
+            <a:pPr>
+              <a:lnSpc>
+                <a:spcPct val="150000"/>
+              </a:lnSpc>
+            </a:pPr>
+            <a:endParaRPr lang="zh-CN" altLang="en-US" sz="2000" dirty="0"/>
+          </a:p>
+        </p:txBody>
+      </p:sp>
+    </p:spTree>
+  </p:cSld>
+  <p:clrMapOvr>
+    <a:masterClrMapping/>
+  </p:clrMapOvr>
 </p:sld>
 </file>
 
@@ -16664,12 +14759,6 @@
 </file>
 
 <file path=ppt/tags/tag4.xml><?xml version="1.0" encoding="utf-8"?>
-<p:tagLst xmlns:a="http://schemas.openxmlformats.org/drawingml/2006/main" xmlns:r="http://schemas.openxmlformats.org/officeDocument/2006/relationships" xmlns:p="http://schemas.openxmlformats.org/presentationml/2006/main">
-  <p:tag name="WM_BEAUTIFY_ZORDER_FLAG_TAG" val="2"/>
-</p:tagLst>
-</file>
-
-<file path=ppt/tags/tag5.xml><?xml version="1.0" encoding="utf-8"?>
 <p:tagLst xmlns:a="http://schemas.openxmlformats.org/drawingml/2006/main" xmlns:r="http://schemas.openxmlformats.org/officeDocument/2006/relationships" xmlns:p="http://schemas.openxmlformats.org/presentationml/2006/main">
   <p:tag name="WM_BEAUTIFY_ZORDER_FLAG_TAG" val="2"/>
 </p:tagLst>
@@ -16969,7 +15058,7 @@
   <a:extraClrSchemeLst/>
   <a:extLst>
     <a:ext uri="{05A4C25C-085E-4340-85A3-A5531E510DB2}">
-      <thm15:themeFamily xmlns="" xmlns:thm15="http://schemas.microsoft.com/office/thememl/2012/main" name="Office Theme" id="{62F939B6-93AF-4DB8-9C6B-D6C7DFDC589F}" vid="{4A3C46E8-61CC-4603-A589-7422A47A8E4A}"/>
+      <thm15:themeFamily xmlns:thm15="http://schemas.microsoft.com/office/thememl/2012/main" name="Office Theme" id="{62F939B6-93AF-4DB8-9C6B-D6C7DFDC589F}" vid="{4A3C46E8-61CC-4603-A589-7422A47A8E4A}"/>
     </a:ext>
   </a:extLst>
 </a:theme>
@@ -17170,7 +15259,7 @@
   <a:extraClrSchemeLst/>
   <a:extLst>
     <a:ext uri="{05A4C25C-085E-4340-85A3-A5531E510DB2}">
-      <thm15:themeFamily xmlns="" xmlns:thm15="http://schemas.microsoft.com/office/thememl/2012/main" name="Office Theme" id="{62F939B6-93AF-4DB8-9C6B-D6C7DFDC589F}" vid="{4A3C46E8-61CC-4603-A589-7422A47A8E4A}"/>
+      <thm15:themeFamily xmlns:thm15="http://schemas.microsoft.com/office/thememl/2012/main" name="Office Theme" id="{62F939B6-93AF-4DB8-9C6B-D6C7DFDC589F}" vid="{4A3C46E8-61CC-4603-A589-7422A47A8E4A}"/>
     </a:ext>
   </a:extLst>
 </a:theme>
@@ -17431,7 +15520,7 @@
   <a:extraClrSchemeLst/>
   <a:extLst>
     <a:ext uri="{05A4C25C-085E-4340-85A3-A5531E510DB2}">
-      <thm15:themeFamily xmlns="" xmlns:thm15="http://schemas.microsoft.com/office/thememl/2012/main" name="Office Theme" id="{62F939B6-93AF-4DB8-9C6B-D6C7DFDC589F}" vid="{4A3C46E8-61CC-4603-A589-7422A47A8E4A}"/>
+      <thm15:themeFamily xmlns:thm15="http://schemas.microsoft.com/office/thememl/2012/main" name="Office Theme" id="{62F939B6-93AF-4DB8-9C6B-D6C7DFDC589F}" vid="{4A3C46E8-61CC-4603-A589-7422A47A8E4A}"/>
     </a:ext>
   </a:extLst>
 </a:theme>

--- a/嵌入式学习资料/STM32/大三下课堂课件/第三章 STM32最小系统.pptx
+++ b/嵌入式学习资料/STM32/大三下课堂课件/第三章 STM32最小系统.pptx
@@ -233,7 +233,7 @@
             <a:fld id="{6887AC20-8C1D-44D7-B35A-E6F76E68648C}" type="datetimeFigureOut">
               <a:rPr lang="zh-CN" altLang="en-US" smtClean="0"/>
               <a:pPr/>
-              <a:t>2026/5/27</a:t>
+              <a:t>2026/6/21</a:t>
             </a:fld>
             <a:endParaRPr lang="zh-CN" altLang="en-US"/>
           </a:p>
@@ -539,7 +539,7 @@
             <a:fld id="{82F288E0-7875-42C4-84C8-98DBBD3BF4D2}" type="datetimeFigureOut">
               <a:rPr lang="zh-CN" altLang="en-US" smtClean="0"/>
               <a:pPr/>
-              <a:t>2026/5/27</a:t>
+              <a:t>2026/6/21</a:t>
             </a:fld>
             <a:endParaRPr lang="zh-CN" altLang="en-US"/>
           </a:p>
@@ -675,7 +675,7 @@
             <a:fld id="{82F288E0-7875-42C4-84C8-98DBBD3BF4D2}" type="datetimeFigureOut">
               <a:rPr lang="zh-CN" altLang="en-US" smtClean="0"/>
               <a:pPr/>
-              <a:t>2026/5/27</a:t>
+              <a:t>2026/6/21</a:t>
             </a:fld>
             <a:endParaRPr lang="zh-CN" altLang="en-US"/>
           </a:p>
@@ -924,7 +924,7 @@
             <a:fld id="{82F288E0-7875-42C4-84C8-98DBBD3BF4D2}" type="datetimeFigureOut">
               <a:rPr lang="zh-CN" altLang="en-US" smtClean="0"/>
               <a:pPr/>
-              <a:t>2026/5/27</a:t>
+              <a:t>2026/6/21</a:t>
             </a:fld>
             <a:endParaRPr lang="zh-CN" altLang="en-US"/>
           </a:p>
@@ -1099,7 +1099,7 @@
             <a:fld id="{82F288E0-7875-42C4-84C8-98DBBD3BF4D2}" type="datetimeFigureOut">
               <a:rPr lang="zh-CN" altLang="en-US" smtClean="0"/>
               <a:pPr/>
-              <a:t>2026/5/27</a:t>
+              <a:t>2026/6/21</a:t>
             </a:fld>
             <a:endParaRPr lang="zh-CN" altLang="en-US"/>
           </a:p>
@@ -1247,7 +1247,7 @@
             <a:fld id="{82F288E0-7875-42C4-84C8-98DBBD3BF4D2}" type="datetimeFigureOut">
               <a:rPr lang="zh-CN" altLang="en-US" smtClean="0"/>
               <a:pPr/>
-              <a:t>2026/5/27</a:t>
+              <a:t>2026/6/21</a:t>
             </a:fld>
             <a:endParaRPr lang="zh-CN" altLang="en-US"/>
           </a:p>
@@ -1347,7 +1347,7 @@
             <a:fld id="{0E6A473D-8055-43E1-A01D-B0413067B7D8}" type="datetimeFigureOut">
               <a:rPr lang="zh-CN" altLang="en-US" smtClean="0"/>
               <a:pPr/>
-              <a:t>2026/5/27</a:t>
+              <a:t>2026/6/21</a:t>
             </a:fld>
             <a:endParaRPr lang="zh-CN" altLang="en-US"/>
           </a:p>
@@ -3173,7 +3173,7 @@
             <a:fld id="{DB75B134-9E54-4233-9AD4-A661A84126CB}" type="datetimeFigureOut">
               <a:rPr lang="zh-CN" altLang="en-US" smtClean="0"/>
               <a:pPr/>
-              <a:t>2026/5/27</a:t>
+              <a:t>2026/6/21</a:t>
             </a:fld>
             <a:endParaRPr lang="zh-CN" altLang="en-US"/>
           </a:p>
@@ -3273,7 +3273,7 @@
             <a:fld id="{82F288E0-7875-42C4-84C8-98DBBD3BF4D2}" type="datetimeFigureOut">
               <a:rPr lang="zh-CN" altLang="en-US" smtClean="0"/>
               <a:pPr/>
-              <a:t>2026/5/27</a:t>
+              <a:t>2026/6/21</a:t>
             </a:fld>
             <a:endParaRPr lang="zh-CN" altLang="en-US"/>
           </a:p>
@@ -3613,7 +3613,7 @@
             <a:fld id="{82F288E0-7875-42C4-84C8-98DBBD3BF4D2}" type="datetimeFigureOut">
               <a:rPr lang="zh-CN" altLang="en-US" smtClean="0"/>
               <a:pPr/>
-              <a:t>2026/5/27</a:t>
+              <a:t>2026/6/21</a:t>
             </a:fld>
             <a:endParaRPr lang="zh-CN" altLang="en-US"/>
           </a:p>
@@ -3800,7 +3800,7 @@
             <a:fld id="{82F288E0-7875-42C4-84C8-98DBBD3BF4D2}" type="datetimeFigureOut">
               <a:rPr lang="zh-CN" altLang="en-US" smtClean="0"/>
               <a:pPr/>
-              <a:t>2026/5/27</a:t>
+              <a:t>2026/6/21</a:t>
             </a:fld>
             <a:endParaRPr lang="zh-CN" altLang="en-US"/>
           </a:p>
@@ -3965,7 +3965,7 @@
             <a:fld id="{82F288E0-7875-42C4-84C8-98DBBD3BF4D2}" type="datetimeFigureOut">
               <a:rPr lang="zh-CN" altLang="en-US" smtClean="0"/>
               <a:pPr/>
-              <a:t>2026/5/27</a:t>
+              <a:t>2026/6/21</a:t>
             </a:fld>
             <a:endParaRPr lang="zh-CN" altLang="en-US"/>
           </a:p>
@@ -4207,7 +4207,7 @@
             <a:fld id="{82F288E0-7875-42C4-84C8-98DBBD3BF4D2}" type="datetimeFigureOut">
               <a:rPr lang="zh-CN" altLang="en-US" smtClean="0"/>
               <a:pPr/>
-              <a:t>2026/5/27</a:t>
+              <a:t>2026/6/21</a:t>
             </a:fld>
             <a:endParaRPr lang="zh-CN" altLang="en-US"/>
           </a:p>
@@ -4433,7 +4433,7 @@
             <a:fld id="{82F288E0-7875-42C4-84C8-98DBBD3BF4D2}" type="datetimeFigureOut">
               <a:rPr lang="zh-CN" altLang="en-US" smtClean="0"/>
               <a:pPr/>
-              <a:t>2026/5/27</a:t>
+              <a:t>2026/6/21</a:t>
             </a:fld>
             <a:endParaRPr lang="zh-CN" altLang="en-US"/>
           </a:p>
@@ -4794,7 +4794,7 @@
             <a:fld id="{82F288E0-7875-42C4-84C8-98DBBD3BF4D2}" type="datetimeFigureOut">
               <a:rPr lang="zh-CN" altLang="en-US" smtClean="0"/>
               <a:pPr/>
-              <a:t>2026/5/27</a:t>
+              <a:t>2026/6/21</a:t>
             </a:fld>
             <a:endParaRPr lang="zh-CN" altLang="en-US"/>
           </a:p>
@@ -4908,7 +4908,7 @@
             <a:fld id="{82F288E0-7875-42C4-84C8-98DBBD3BF4D2}" type="datetimeFigureOut">
               <a:rPr lang="zh-CN" altLang="en-US" smtClean="0"/>
               <a:pPr/>
-              <a:t>2026/5/27</a:t>
+              <a:t>2026/6/21</a:t>
             </a:fld>
             <a:endParaRPr lang="zh-CN" altLang="en-US"/>
           </a:p>
@@ -5116,7 +5116,7 @@
             <a:fld id="{82F288E0-7875-42C4-84C8-98DBBD3BF4D2}" type="datetimeFigureOut">
               <a:rPr lang="zh-CN" altLang="en-US" smtClean="0"/>
               <a:pPr/>
-              <a:t>2026/5/27</a:t>
+              <a:t>2026/6/21</a:t>
             </a:fld>
             <a:endParaRPr lang="zh-CN" altLang="en-US"/>
           </a:p>
@@ -5655,7 +5655,7 @@
             <a:fld id="{0E6A473D-8055-43E1-A01D-B0413067B7D8}" type="datetimeFigureOut">
               <a:rPr lang="zh-CN" altLang="en-US" smtClean="0"/>
               <a:pPr/>
-              <a:t>2026/5/27</a:t>
+              <a:t>2026/6/21</a:t>
             </a:fld>
             <a:endParaRPr lang="zh-CN" altLang="en-US"/>
           </a:p>
@@ -10689,7 +10689,7 @@
         </p:nvSpPr>
         <p:spPr>
           <a:xfrm>
-            <a:off x="4537789" y="5685462"/>
+            <a:off x="4595327" y="5682352"/>
             <a:ext cx="957942" cy="622041"/>
           </a:xfrm>
           <a:prstGeom prst="rect">
